--- a/resultados.pptx
+++ b/resultados.pptx
@@ -5,12 +5,13 @@
     <p:sldMasterId id="2147483648" r:id="rId1"/>
   </p:sldMasterIdLst>
   <p:notesMasterIdLst>
-    <p:notesMasterId r:id="rId7"/>
+    <p:notesMasterId r:id="rId8"/>
   </p:notesMasterIdLst>
   <p:sldIdLst>
     <p:sldId id="256" r:id="rId4"/>
     <p:sldId id="257" r:id="rId5"/>
     <p:sldId id="258" r:id="rId6"/>
+    <p:sldId id="259" r:id="rId7"/>
   </p:sldIdLst>
   <p:sldSz cx="12192000" cy="6858000"/>
   <p:notesSz cx="6858000" cy="9144000"/>
@@ -136,7 +137,7 @@
       </p:grpSpPr>
       <p:sp>
         <p:nvSpPr>
-          <p:cNvPr id="280675643" name="Espaço reservado para cabeçalho 1"/>
+          <p:cNvPr id="514290864" name="Espaço reservado para cabeçalho 1"/>
           <p:cNvSpPr>
             <a:spLocks noGrp="1"/>
           </p:cNvSpPr>
@@ -170,7 +171,7 @@
       </p:sp>
       <p:sp>
         <p:nvSpPr>
-          <p:cNvPr id="2005428049" name="Marcador de Posição da Data 2"/>
+          <p:cNvPr id="1648638768" name="Marcador de Posição da Data 2"/>
           <p:cNvSpPr>
             <a:spLocks noGrp="1"/>
           </p:cNvSpPr>
@@ -208,7 +209,7 @@
       </p:sp>
       <p:sp>
         <p:nvSpPr>
-          <p:cNvPr id="1992694835" name="Espaço reservado para imagem de slide 3"/>
+          <p:cNvPr id="1640060339" name="Espaço reservado para imagem de slide 3"/>
           <p:cNvSpPr>
             <a:spLocks noChangeAspect="1" noGrp="1" noRot="1"/>
           </p:cNvSpPr>
@@ -244,7 +245,7 @@
       </p:sp>
       <p:sp>
         <p:nvSpPr>
-          <p:cNvPr id="624057980" name="Espaço reservado para notas 4"/>
+          <p:cNvPr id="226455326" name="Espaço reservado para notas 4"/>
           <p:cNvSpPr>
             <a:spLocks noGrp="1"/>
           </p:cNvSpPr>
@@ -318,7 +319,7 @@
       </p:sp>
       <p:sp>
         <p:nvSpPr>
-          <p:cNvPr id="652319234" name="Marcador de Posição do Rodapé 5"/>
+          <p:cNvPr id="1935524436" name="Marcador de Posição do Rodapé 5"/>
           <p:cNvSpPr>
             <a:spLocks noGrp="1"/>
           </p:cNvSpPr>
@@ -352,7 +353,7 @@
       </p:sp>
       <p:sp>
         <p:nvSpPr>
-          <p:cNvPr id="1100997295" name="Marcador de Posição do Número do Diapositivo 6"/>
+          <p:cNvPr id="370984726" name="Marcador de Posição do Número do Diapositivo 6"/>
           <p:cNvSpPr>
             <a:spLocks noGrp="1"/>
           </p:cNvSpPr>
@@ -505,7 +506,7 @@
       </p:grpSpPr>
       <p:sp>
         <p:nvSpPr>
-          <p:cNvPr id="1538470252" name="Espaço reservado para imagem de slide 1"/>
+          <p:cNvPr id="1851391186" name="Espaço reservado para imagem de slide 1"/>
           <p:cNvSpPr>
             <a:spLocks noChangeAspect="1" noGrp="1" noRot="1"/>
           </p:cNvSpPr>
@@ -522,7 +523,7 @@
       </p:sp>
       <p:sp>
         <p:nvSpPr>
-          <p:cNvPr id="1908139016" name="Espaço reservado para notas 2"/>
+          <p:cNvPr id="2105780949" name="Espaço reservado para notas 2"/>
           <p:cNvSpPr>
             <a:spLocks noGrp="1"/>
           </p:cNvSpPr>
@@ -547,7 +548,7 @@
       </p:sp>
       <p:sp>
         <p:nvSpPr>
-          <p:cNvPr id="492055112" name="Marcador de Posição do Número do Diapositivo 3"/>
+          <p:cNvPr id="1271405031" name="Marcador de Posição do Número do Diapositivo 3"/>
           <p:cNvSpPr>
             <a:spLocks noGrp="1"/>
           </p:cNvSpPr>
@@ -598,7 +599,7 @@
       </p:grpSpPr>
       <p:sp>
         <p:nvSpPr>
-          <p:cNvPr id="2" name="Slide Image Placeholder 1"/>
+          <p:cNvPr id="1440361500" name="Slide Image Placeholder 1"/>
           <p:cNvSpPr>
             <a:spLocks noChangeAspect="1" noGrp="1" noRot="1"/>
           </p:cNvSpPr>
@@ -610,7 +611,7 @@
       </p:sp>
       <p:sp>
         <p:nvSpPr>
-          <p:cNvPr id="3" name="Notes Placeholder 2"/>
+          <p:cNvPr id="297770188" name="Notes Placeholder 2"/>
           <p:cNvSpPr>
             <a:spLocks noGrp="1"/>
           </p:cNvSpPr>
@@ -632,7 +633,7 @@
       </p:sp>
       <p:sp>
         <p:nvSpPr>
-          <p:cNvPr id="4" name="Slide Number Placeholder 3"/>
+          <p:cNvPr id="116244103" name="Slide Number Placeholder 3"/>
           <p:cNvSpPr>
             <a:spLocks noGrp="1"/>
           </p:cNvSpPr>
@@ -683,7 +684,7 @@
       </p:grpSpPr>
       <p:sp>
         <p:nvSpPr>
-          <p:cNvPr id="2140777208" name="Slide Image Placeholder 1"/>
+          <p:cNvPr id="867535544" name="Slide Image Placeholder 1"/>
           <p:cNvSpPr>
             <a:spLocks noChangeAspect="1" noGrp="1" noRot="1"/>
           </p:cNvSpPr>
@@ -695,7 +696,7 @@
       </p:sp>
       <p:sp>
         <p:nvSpPr>
-          <p:cNvPr id="1070497644" name="Notes Placeholder 2"/>
+          <p:cNvPr id="60243320" name="Notes Placeholder 2"/>
           <p:cNvSpPr>
             <a:spLocks noGrp="1"/>
           </p:cNvSpPr>
@@ -717,7 +718,7 @@
       </p:sp>
       <p:sp>
         <p:nvSpPr>
-          <p:cNvPr id="1435030208" name="Slide Number Placeholder 3"/>
+          <p:cNvPr id="1758333296" name="Slide Number Placeholder 3"/>
           <p:cNvSpPr>
             <a:spLocks noGrp="1"/>
           </p:cNvSpPr>
@@ -734,6 +735,91 @@
               <a:defRPr/>
             </a:pPr>
             <a:fld id="{79D55D69-35B1-4974-5DCE-FBD99DE2DF41}" type="slidenum">
+              <a:rPr/>
+              <a:t/>
+            </a:fld>
+            <a:endParaRPr/>
+          </a:p>
+        </p:txBody>
+      </p:sp>
+    </p:spTree>
+  </p:cSld>
+  <p:clrMapOvr>
+    <a:masterClrMapping/>
+  </p:clrMapOvr>
+</p:notes>
+</file>
+
+<file path=ppt/notesSlides/notesSlide4.xml><?xml version="1.0" encoding="utf-8"?>
+<p:notes xmlns:a="http://schemas.openxmlformats.org/drawingml/2006/main" xmlns:r="http://schemas.openxmlformats.org/officeDocument/2006/relationships" xmlns:p="http://schemas.openxmlformats.org/presentationml/2006/main" xmlns:m="http://schemas.openxmlformats.org/officeDocument/2006/math" xmlns:w="http://schemas.openxmlformats.org/wordprocessingml/2006/main">
+  <p:cSld name="">
+    <p:spTree>
+      <p:nvGrpSpPr>
+        <p:cNvPr id="1" name=""/>
+        <p:cNvGrpSpPr/>
+        <p:nvPr/>
+      </p:nvGrpSpPr>
+      <p:grpSpPr bwMode="auto">
+        <a:xfrm>
+          <a:off x="0" y="0"/>
+          <a:ext cx="0" cy="0"/>
+          <a:chOff x="0" y="0"/>
+          <a:chExt cx="0" cy="0"/>
+        </a:xfrm>
+      </p:grpSpPr>
+      <p:sp>
+        <p:nvSpPr>
+          <p:cNvPr id="2" name="Slide Image Placeholder 1"/>
+          <p:cNvSpPr>
+            <a:spLocks noChangeAspect="1" noGrp="1" noRot="1"/>
+          </p:cNvSpPr>
+          <p:nvPr>
+            <p:ph type="sldImg"/>
+          </p:nvPr>
+        </p:nvSpPr>
+        <p:spPr bwMode="auto"/>
+      </p:sp>
+      <p:sp>
+        <p:nvSpPr>
+          <p:cNvPr id="3" name="Notes Placeholder 2"/>
+          <p:cNvSpPr>
+            <a:spLocks noGrp="1"/>
+          </p:cNvSpPr>
+          <p:nvPr>
+            <p:ph type="body" idx="1"/>
+          </p:nvPr>
+        </p:nvSpPr>
+        <p:spPr bwMode="auto"/>
+        <p:txBody>
+          <a:bodyPr/>
+          <a:lstStyle/>
+          <a:p>
+            <a:pPr>
+              <a:defRPr/>
+            </a:pPr>
+            <a:endParaRPr/>
+          </a:p>
+        </p:txBody>
+      </p:sp>
+      <p:sp>
+        <p:nvSpPr>
+          <p:cNvPr id="4" name="Slide Number Placeholder 3"/>
+          <p:cNvSpPr>
+            <a:spLocks noGrp="1"/>
+          </p:cNvSpPr>
+          <p:nvPr>
+            <p:ph type="sldNum" sz="quarter" idx="10"/>
+          </p:nvPr>
+        </p:nvSpPr>
+        <p:spPr bwMode="auto"/>
+        <p:txBody>
+          <a:bodyPr/>
+          <a:lstStyle/>
+          <a:p>
+            <a:pPr>
+              <a:defRPr/>
+            </a:pPr>
+            <a:fld id="{D211B703-7630-BD34-1BE8-E63A81C967C9}" type="slidenum">
               <a:rPr/>
               <a:t/>
             </a:fld>
@@ -768,7 +854,7 @@
       </p:grpSpPr>
       <p:sp>
         <p:nvSpPr>
-          <p:cNvPr id="1595146421" name="Título 1"/>
+          <p:cNvPr id="984660990" name="Título 1"/>
           <p:cNvSpPr>
             <a:spLocks noGrp="1"/>
           </p:cNvSpPr>
@@ -803,7 +889,7 @@
       </p:sp>
       <p:sp>
         <p:nvSpPr>
-          <p:cNvPr id="1413203920" name="Subtítulo 2"/>
+          <p:cNvPr id="248454102" name="Subtítulo 2"/>
           <p:cNvSpPr>
             <a:spLocks noGrp="1"/>
           </p:cNvSpPr>
@@ -871,7 +957,7 @@
       </p:sp>
       <p:sp>
         <p:nvSpPr>
-          <p:cNvPr id="467418650" name="Marcador de Posição da Data 3"/>
+          <p:cNvPr id="1258109757" name="Marcador de Posição da Data 3"/>
           <p:cNvSpPr>
             <a:spLocks noGrp="1"/>
           </p:cNvSpPr>
@@ -897,7 +983,7 @@
       </p:sp>
       <p:sp>
         <p:nvSpPr>
-          <p:cNvPr id="1071870922" name="Marcador de Posição do Rodapé 4"/>
+          <p:cNvPr id="994019316" name="Marcador de Posição do Rodapé 4"/>
           <p:cNvSpPr>
             <a:spLocks noGrp="1"/>
           </p:cNvSpPr>
@@ -919,7 +1005,7 @@
       </p:sp>
       <p:sp>
         <p:nvSpPr>
-          <p:cNvPr id="855666224" name="Marcador de Posição do Número do Diapositivo 5"/>
+          <p:cNvPr id="110844284" name="Marcador de Posição do Número do Diapositivo 5"/>
           <p:cNvSpPr>
             <a:spLocks noGrp="1"/>
           </p:cNvSpPr>
@@ -970,7 +1056,7 @@
       </p:grpSpPr>
       <p:sp>
         <p:nvSpPr>
-          <p:cNvPr id="858332707" name="Título 1"/>
+          <p:cNvPr id="1895024724" name="Título 1"/>
           <p:cNvSpPr>
             <a:spLocks noGrp="1"/>
           </p:cNvSpPr>
@@ -996,7 +1082,7 @@
       </p:sp>
       <p:sp>
         <p:nvSpPr>
-          <p:cNvPr id="1397572195" name="Marcador de Posição de Texto Vertical 2"/>
+          <p:cNvPr id="315549563" name="Marcador de Posição de Texto Vertical 2"/>
           <p:cNvSpPr>
             <a:spLocks noGrp="1"/>
           </p:cNvSpPr>
@@ -1062,7 +1148,7 @@
       </p:sp>
       <p:sp>
         <p:nvSpPr>
-          <p:cNvPr id="658850015" name="Marcador de Posição da Data 3"/>
+          <p:cNvPr id="1405806757" name="Marcador de Posição da Data 3"/>
           <p:cNvSpPr>
             <a:spLocks noGrp="1"/>
           </p:cNvSpPr>
@@ -1088,7 +1174,7 @@
       </p:sp>
       <p:sp>
         <p:nvSpPr>
-          <p:cNvPr id="1732334895" name="Marcador de Posição do Rodapé 4"/>
+          <p:cNvPr id="804106398" name="Marcador de Posição do Rodapé 4"/>
           <p:cNvSpPr>
             <a:spLocks noGrp="1"/>
           </p:cNvSpPr>
@@ -1110,7 +1196,7 @@
       </p:sp>
       <p:sp>
         <p:nvSpPr>
-          <p:cNvPr id="1095231826" name="Marcador de Posição do Número do Diapositivo 5"/>
+          <p:cNvPr id="1957850939" name="Marcador de Posição do Número do Diapositivo 5"/>
           <p:cNvSpPr>
             <a:spLocks noGrp="1"/>
           </p:cNvSpPr>
@@ -1161,7 +1247,7 @@
       </p:grpSpPr>
       <p:sp>
         <p:nvSpPr>
-          <p:cNvPr id="1872602042" name="Título Vertical 1"/>
+          <p:cNvPr id="977374587" name="Título Vertical 1"/>
           <p:cNvSpPr>
             <a:spLocks noGrp="1"/>
           </p:cNvSpPr>
@@ -1192,7 +1278,7 @@
       </p:sp>
       <p:sp>
         <p:nvSpPr>
-          <p:cNvPr id="1914402565" name="Marcador de Posição de Texto Vertical 2"/>
+          <p:cNvPr id="609002146" name="Marcador de Posição de Texto Vertical 2"/>
           <p:cNvSpPr>
             <a:spLocks noGrp="1"/>
           </p:cNvSpPr>
@@ -1263,7 +1349,7 @@
       </p:sp>
       <p:sp>
         <p:nvSpPr>
-          <p:cNvPr id="125069282" name="Marcador de Posição da Data 3"/>
+          <p:cNvPr id="572194030" name="Marcador de Posição da Data 3"/>
           <p:cNvSpPr>
             <a:spLocks noGrp="1"/>
           </p:cNvSpPr>
@@ -1289,7 +1375,7 @@
       </p:sp>
       <p:sp>
         <p:nvSpPr>
-          <p:cNvPr id="1865599105" name="Marcador de Posição do Rodapé 4"/>
+          <p:cNvPr id="1785214469" name="Marcador de Posição do Rodapé 4"/>
           <p:cNvSpPr>
             <a:spLocks noGrp="1"/>
           </p:cNvSpPr>
@@ -1311,7 +1397,7 @@
       </p:sp>
       <p:sp>
         <p:nvSpPr>
-          <p:cNvPr id="554757459" name="Marcador de Posição do Número do Diapositivo 5"/>
+          <p:cNvPr id="1786978719" name="Marcador de Posição do Número do Diapositivo 5"/>
           <p:cNvSpPr>
             <a:spLocks noGrp="1"/>
           </p:cNvSpPr>
@@ -1362,7 +1448,7 @@
       </p:grpSpPr>
       <p:sp>
         <p:nvSpPr>
-          <p:cNvPr id="1062378825" name="Título 1"/>
+          <p:cNvPr id="1273560894" name="Título 1"/>
           <p:cNvSpPr>
             <a:spLocks noGrp="1"/>
           </p:cNvSpPr>
@@ -1388,7 +1474,7 @@
       </p:sp>
       <p:sp>
         <p:nvSpPr>
-          <p:cNvPr id="1917780579" name="Marcador de Posição de Conteúdo 2"/>
+          <p:cNvPr id="466394953" name="Marcador de Posição de Conteúdo 2"/>
           <p:cNvSpPr>
             <a:spLocks noGrp="1"/>
           </p:cNvSpPr>
@@ -1454,7 +1540,7 @@
       </p:sp>
       <p:sp>
         <p:nvSpPr>
-          <p:cNvPr id="80184502" name="Marcador de Posição da Data 3"/>
+          <p:cNvPr id="1842939580" name="Marcador de Posição da Data 3"/>
           <p:cNvSpPr>
             <a:spLocks noGrp="1"/>
           </p:cNvSpPr>
@@ -1480,7 +1566,7 @@
       </p:sp>
       <p:sp>
         <p:nvSpPr>
-          <p:cNvPr id="339652859" name="Marcador de Posição do Rodapé 4"/>
+          <p:cNvPr id="291404353" name="Marcador de Posição do Rodapé 4"/>
           <p:cNvSpPr>
             <a:spLocks noGrp="1"/>
           </p:cNvSpPr>
@@ -1502,7 +1588,7 @@
       </p:sp>
       <p:sp>
         <p:nvSpPr>
-          <p:cNvPr id="388734311" name="Marcador de Posição do Número do Diapositivo 5"/>
+          <p:cNvPr id="133866178" name="Marcador de Posição do Número do Diapositivo 5"/>
           <p:cNvSpPr>
             <a:spLocks noGrp="1"/>
           </p:cNvSpPr>
@@ -1553,7 +1639,7 @@
       </p:grpSpPr>
       <p:sp>
         <p:nvSpPr>
-          <p:cNvPr id="1689511751" name="Título 1"/>
+          <p:cNvPr id="1625338817" name="Título 1"/>
           <p:cNvSpPr>
             <a:spLocks noGrp="1"/>
           </p:cNvSpPr>
@@ -1588,7 +1674,7 @@
       </p:sp>
       <p:sp>
         <p:nvSpPr>
-          <p:cNvPr id="427476347" name="Marcador de Posição do Texto 2"/>
+          <p:cNvPr id="1042167063" name="Marcador de Posição do Texto 2"/>
           <p:cNvSpPr>
             <a:spLocks noGrp="1"/>
           </p:cNvSpPr>
@@ -1710,7 +1796,7 @@
       </p:sp>
       <p:sp>
         <p:nvSpPr>
-          <p:cNvPr id="21802092" name="Marcador de Posição da Data 3"/>
+          <p:cNvPr id="535519589" name="Marcador de Posição da Data 3"/>
           <p:cNvSpPr>
             <a:spLocks noGrp="1"/>
           </p:cNvSpPr>
@@ -1736,7 +1822,7 @@
       </p:sp>
       <p:sp>
         <p:nvSpPr>
-          <p:cNvPr id="1561434950" name="Marcador de Posição do Rodapé 4"/>
+          <p:cNvPr id="1917511106" name="Marcador de Posição do Rodapé 4"/>
           <p:cNvSpPr>
             <a:spLocks noGrp="1"/>
           </p:cNvSpPr>
@@ -1758,7 +1844,7 @@
       </p:sp>
       <p:sp>
         <p:nvSpPr>
-          <p:cNvPr id="982448604" name="Marcador de Posição do Número do Diapositivo 5"/>
+          <p:cNvPr id="34649224" name="Marcador de Posição do Número do Diapositivo 5"/>
           <p:cNvSpPr>
             <a:spLocks noGrp="1"/>
           </p:cNvSpPr>
@@ -1809,7 +1895,7 @@
       </p:grpSpPr>
       <p:sp>
         <p:nvSpPr>
-          <p:cNvPr id="808831595" name="Título 1"/>
+          <p:cNvPr id="425351943" name="Título 1"/>
           <p:cNvSpPr>
             <a:spLocks noGrp="1"/>
           </p:cNvSpPr>
@@ -1835,7 +1921,7 @@
       </p:sp>
       <p:sp>
         <p:nvSpPr>
-          <p:cNvPr id="1643427797" name="Marcador de Posição de Conteúdo 2"/>
+          <p:cNvPr id="986911054" name="Marcador de Posição de Conteúdo 2"/>
           <p:cNvSpPr>
             <a:spLocks noGrp="1"/>
           </p:cNvSpPr>
@@ -1906,7 +1992,7 @@
       </p:sp>
       <p:sp>
         <p:nvSpPr>
-          <p:cNvPr id="15396518" name="Marcador de Posição de Conteúdo 3"/>
+          <p:cNvPr id="1137537435" name="Marcador de Posição de Conteúdo 3"/>
           <p:cNvSpPr>
             <a:spLocks noGrp="1"/>
           </p:cNvSpPr>
@@ -1977,7 +2063,7 @@
       </p:sp>
       <p:sp>
         <p:nvSpPr>
-          <p:cNvPr id="159445822" name="Marcador de Posição da Data 4"/>
+          <p:cNvPr id="685758596" name="Marcador de Posição da Data 4"/>
           <p:cNvSpPr>
             <a:spLocks noGrp="1"/>
           </p:cNvSpPr>
@@ -2003,7 +2089,7 @@
       </p:sp>
       <p:sp>
         <p:nvSpPr>
-          <p:cNvPr id="1427727405" name="Marcador de Posição do Rodapé 5"/>
+          <p:cNvPr id="2012002370" name="Marcador de Posição do Rodapé 5"/>
           <p:cNvSpPr>
             <a:spLocks noGrp="1"/>
           </p:cNvSpPr>
@@ -2025,7 +2111,7 @@
       </p:sp>
       <p:sp>
         <p:nvSpPr>
-          <p:cNvPr id="1533437437" name="Marcador de Posição do Número do Diapositivo 6"/>
+          <p:cNvPr id="1355512113" name="Marcador de Posição do Número do Diapositivo 6"/>
           <p:cNvSpPr>
             <a:spLocks noGrp="1"/>
           </p:cNvSpPr>
@@ -2076,7 +2162,7 @@
       </p:grpSpPr>
       <p:sp>
         <p:nvSpPr>
-          <p:cNvPr id="226054714" name="Título 1"/>
+          <p:cNvPr id="1200350108" name="Título 1"/>
           <p:cNvSpPr>
             <a:spLocks noGrp="1"/>
           </p:cNvSpPr>
@@ -2107,7 +2193,7 @@
       </p:sp>
       <p:sp>
         <p:nvSpPr>
-          <p:cNvPr id="99440425" name="Marcador de Posição do Texto 2"/>
+          <p:cNvPr id="1746287474" name="Marcador de Posição do Texto 2"/>
           <p:cNvSpPr>
             <a:spLocks noGrp="1"/>
           </p:cNvSpPr>
@@ -2175,7 +2261,7 @@
       </p:sp>
       <p:sp>
         <p:nvSpPr>
-          <p:cNvPr id="46316022" name="Marcador de Posição de Conteúdo 3"/>
+          <p:cNvPr id="258380941" name="Marcador de Posição de Conteúdo 3"/>
           <p:cNvSpPr>
             <a:spLocks noGrp="1"/>
           </p:cNvSpPr>
@@ -2246,7 +2332,7 @@
       </p:sp>
       <p:sp>
         <p:nvSpPr>
-          <p:cNvPr id="1654385916" name="Marcador de Posição do Texto 4"/>
+          <p:cNvPr id="1692074870" name="Marcador de Posição do Texto 4"/>
           <p:cNvSpPr>
             <a:spLocks noGrp="1"/>
           </p:cNvSpPr>
@@ -2314,7 +2400,7 @@
       </p:sp>
       <p:sp>
         <p:nvSpPr>
-          <p:cNvPr id="247665896" name="Marcador de Posição de Conteúdo 5"/>
+          <p:cNvPr id="765046793" name="Marcador de Posição de Conteúdo 5"/>
           <p:cNvSpPr>
             <a:spLocks noGrp="1"/>
           </p:cNvSpPr>
@@ -2385,7 +2471,7 @@
       </p:sp>
       <p:sp>
         <p:nvSpPr>
-          <p:cNvPr id="1306887986" name="Marcador de Posição da Data 6"/>
+          <p:cNvPr id="527782660" name="Marcador de Posição da Data 6"/>
           <p:cNvSpPr>
             <a:spLocks noGrp="1"/>
           </p:cNvSpPr>
@@ -2411,7 +2497,7 @@
       </p:sp>
       <p:sp>
         <p:nvSpPr>
-          <p:cNvPr id="1875121650" name="Marcador de Posição do Rodapé 7"/>
+          <p:cNvPr id="154718519" name="Marcador de Posição do Rodapé 7"/>
           <p:cNvSpPr>
             <a:spLocks noGrp="1"/>
           </p:cNvSpPr>
@@ -2433,7 +2519,7 @@
       </p:sp>
       <p:sp>
         <p:nvSpPr>
-          <p:cNvPr id="961468882" name="Marcador de Posição do Número do Diapositivo 8"/>
+          <p:cNvPr id="219350956" name="Marcador de Posição do Número do Diapositivo 8"/>
           <p:cNvSpPr>
             <a:spLocks noGrp="1"/>
           </p:cNvSpPr>
@@ -2484,7 +2570,7 @@
       </p:grpSpPr>
       <p:sp>
         <p:nvSpPr>
-          <p:cNvPr id="370285613" name="Título 1"/>
+          <p:cNvPr id="388100430" name="Título 1"/>
           <p:cNvSpPr>
             <a:spLocks noGrp="1"/>
           </p:cNvSpPr>
@@ -2510,7 +2596,7 @@
       </p:sp>
       <p:sp>
         <p:nvSpPr>
-          <p:cNvPr id="1704403078" name="Marcador de Posição da Data 2"/>
+          <p:cNvPr id="300565367" name="Marcador de Posição da Data 2"/>
           <p:cNvSpPr>
             <a:spLocks noGrp="1"/>
           </p:cNvSpPr>
@@ -2536,7 +2622,7 @@
       </p:sp>
       <p:sp>
         <p:nvSpPr>
-          <p:cNvPr id="1077229221" name="Marcador de Posição do Rodapé 3"/>
+          <p:cNvPr id="187274282" name="Marcador de Posição do Rodapé 3"/>
           <p:cNvSpPr>
             <a:spLocks noGrp="1"/>
           </p:cNvSpPr>
@@ -2558,7 +2644,7 @@
       </p:sp>
       <p:sp>
         <p:nvSpPr>
-          <p:cNvPr id="991035092" name="Marcador de Posição do Número do Diapositivo 4"/>
+          <p:cNvPr id="1552784364" name="Marcador de Posição do Número do Diapositivo 4"/>
           <p:cNvSpPr>
             <a:spLocks noGrp="1"/>
           </p:cNvSpPr>
@@ -2609,7 +2695,7 @@
       </p:grpSpPr>
       <p:sp>
         <p:nvSpPr>
-          <p:cNvPr id="957827409" name="Marcador de Posição da Data 1"/>
+          <p:cNvPr id="1408635331" name="Marcador de Posição da Data 1"/>
           <p:cNvSpPr>
             <a:spLocks noGrp="1"/>
           </p:cNvSpPr>
@@ -2635,7 +2721,7 @@
       </p:sp>
       <p:sp>
         <p:nvSpPr>
-          <p:cNvPr id="1935983732" name="Marcador de Posição do Rodapé 2"/>
+          <p:cNvPr id="275866488" name="Marcador de Posição do Rodapé 2"/>
           <p:cNvSpPr>
             <a:spLocks noGrp="1"/>
           </p:cNvSpPr>
@@ -2657,7 +2743,7 @@
       </p:sp>
       <p:sp>
         <p:nvSpPr>
-          <p:cNvPr id="1818015181" name="Marcador de Posição do Número do Diapositivo 3"/>
+          <p:cNvPr id="694374663" name="Marcador de Posição do Número do Diapositivo 3"/>
           <p:cNvSpPr>
             <a:spLocks noGrp="1"/>
           </p:cNvSpPr>
@@ -2708,7 +2794,7 @@
       </p:grpSpPr>
       <p:sp>
         <p:nvSpPr>
-          <p:cNvPr id="2053024078" name="Título 1"/>
+          <p:cNvPr id="1593379491" name="Título 1"/>
           <p:cNvSpPr>
             <a:spLocks noGrp="1"/>
           </p:cNvSpPr>
@@ -2743,7 +2829,7 @@
       </p:sp>
       <p:sp>
         <p:nvSpPr>
-          <p:cNvPr id="1290376451" name="Marcador de Posição de Conteúdo 2"/>
+          <p:cNvPr id="593484372" name="Marcador de Posição de Conteúdo 2"/>
           <p:cNvSpPr>
             <a:spLocks noGrp="1"/>
           </p:cNvSpPr>
@@ -2842,7 +2928,7 @@
       </p:sp>
       <p:sp>
         <p:nvSpPr>
-          <p:cNvPr id="574404814" name="Marcador de Posição do Texto 3"/>
+          <p:cNvPr id="672146659" name="Marcador de Posição do Texto 3"/>
           <p:cNvSpPr>
             <a:spLocks noGrp="1"/>
           </p:cNvSpPr>
@@ -2910,7 +2996,7 @@
       </p:sp>
       <p:sp>
         <p:nvSpPr>
-          <p:cNvPr id="560680733" name="Marcador de Posição da Data 4"/>
+          <p:cNvPr id="334329371" name="Marcador de Posição da Data 4"/>
           <p:cNvSpPr>
             <a:spLocks noGrp="1"/>
           </p:cNvSpPr>
@@ -2936,7 +3022,7 @@
       </p:sp>
       <p:sp>
         <p:nvSpPr>
-          <p:cNvPr id="1343637115" name="Marcador de Posição do Rodapé 5"/>
+          <p:cNvPr id="1123903399" name="Marcador de Posição do Rodapé 5"/>
           <p:cNvSpPr>
             <a:spLocks noGrp="1"/>
           </p:cNvSpPr>
@@ -2958,7 +3044,7 @@
       </p:sp>
       <p:sp>
         <p:nvSpPr>
-          <p:cNvPr id="416041065" name="Marcador de Posição do Número do Diapositivo 6"/>
+          <p:cNvPr id="876847357" name="Marcador de Posição do Número do Diapositivo 6"/>
           <p:cNvSpPr>
             <a:spLocks noGrp="1"/>
           </p:cNvSpPr>
@@ -3009,7 +3095,7 @@
       </p:grpSpPr>
       <p:sp>
         <p:nvSpPr>
-          <p:cNvPr id="401507743" name="Título 1"/>
+          <p:cNvPr id="19981275" name="Título 1"/>
           <p:cNvSpPr>
             <a:spLocks noGrp="1"/>
           </p:cNvSpPr>
@@ -3044,7 +3130,7 @@
       </p:sp>
       <p:sp>
         <p:nvSpPr>
-          <p:cNvPr id="143582198" name="Marcador de Posição da Imagem 2"/>
+          <p:cNvPr id="1894471793" name="Marcador de Posição da Imagem 2"/>
           <p:cNvSpPr>
             <a:spLocks noChangeAspect="1" noGrp="1"/>
           </p:cNvSpPr>
@@ -3112,7 +3198,7 @@
       </p:sp>
       <p:sp>
         <p:nvSpPr>
-          <p:cNvPr id="1343627653" name="Marcador de Posição do Texto 3"/>
+          <p:cNvPr id="1661119752" name="Marcador de Posição do Texto 3"/>
           <p:cNvSpPr>
             <a:spLocks noGrp="1"/>
           </p:cNvSpPr>
@@ -3180,7 +3266,7 @@
       </p:sp>
       <p:sp>
         <p:nvSpPr>
-          <p:cNvPr id="1506988497" name="Marcador de Posição da Data 4"/>
+          <p:cNvPr id="1040777079" name="Marcador de Posição da Data 4"/>
           <p:cNvSpPr>
             <a:spLocks noGrp="1"/>
           </p:cNvSpPr>
@@ -3206,7 +3292,7 @@
       </p:sp>
       <p:sp>
         <p:nvSpPr>
-          <p:cNvPr id="261088286" name="Marcador de Posição do Rodapé 5"/>
+          <p:cNvPr id="2128675339" name="Marcador de Posição do Rodapé 5"/>
           <p:cNvSpPr>
             <a:spLocks noGrp="1"/>
           </p:cNvSpPr>
@@ -3228,7 +3314,7 @@
       </p:sp>
       <p:sp>
         <p:nvSpPr>
-          <p:cNvPr id="1049176274" name="Marcador de Posição do Número do Diapositivo 6"/>
+          <p:cNvPr id="1576336344" name="Marcador de Posição do Número do Diapositivo 6"/>
           <p:cNvSpPr>
             <a:spLocks noGrp="1"/>
           </p:cNvSpPr>
@@ -3284,7 +3370,7 @@
       </p:grpSpPr>
       <p:sp>
         <p:nvSpPr>
-          <p:cNvPr id="2099736571" name="Marcador de Posição do Título 1"/>
+          <p:cNvPr id="452492594" name="Marcador de Posição do Título 1"/>
           <p:cNvSpPr>
             <a:spLocks noGrp="1"/>
           </p:cNvSpPr>
@@ -3320,7 +3406,7 @@
       </p:sp>
       <p:sp>
         <p:nvSpPr>
-          <p:cNvPr id="1298686848" name="Marcador de Posição do Texto 2"/>
+          <p:cNvPr id="1402443235" name="Marcador de Posição do Texto 2"/>
           <p:cNvSpPr>
             <a:spLocks noGrp="1"/>
           </p:cNvSpPr>
@@ -3396,7 +3482,7 @@
       </p:sp>
       <p:sp>
         <p:nvSpPr>
-          <p:cNvPr id="864510230" name="Marcador de Posição da Data 3"/>
+          <p:cNvPr id="1611248637" name="Marcador de Posição da Data 3"/>
           <p:cNvSpPr>
             <a:spLocks noGrp="1"/>
           </p:cNvSpPr>
@@ -3440,7 +3526,7 @@
       </p:sp>
       <p:sp>
         <p:nvSpPr>
-          <p:cNvPr id="972686106" name="Marcador de Posição do Rodapé 4"/>
+          <p:cNvPr id="160752996" name="Marcador de Posição do Rodapé 4"/>
           <p:cNvSpPr>
             <a:spLocks noGrp="1"/>
           </p:cNvSpPr>
@@ -3480,7 +3566,7 @@
       </p:sp>
       <p:sp>
         <p:nvSpPr>
-          <p:cNvPr id="984723822" name="Marcador de Posição do Número do Diapositivo 5"/>
+          <p:cNvPr id="1067074777" name="Marcador de Posição do Número do Diapositivo 5"/>
           <p:cNvSpPr>
             <a:spLocks noGrp="1"/>
           </p:cNvSpPr>
@@ -3840,7 +3926,7 @@
       </p:grpSpPr>
       <p:pic>
         <p:nvPicPr>
-          <p:cNvPr id="1889198162" name=""/>
+          <p:cNvPr id="1748127917" name=""/>
           <p:cNvPicPr>
             <a:picLocks noChangeAspect="1"/>
           </p:cNvPicPr>
@@ -3852,7 +3938,7 @@
         </p:blipFill>
         <p:spPr bwMode="auto">
           <a:xfrm>
-            <a:off x="14670" y="0"/>
+            <a:off x="14669" y="0"/>
             <a:ext cx="4674947" cy="6858000"/>
           </a:xfrm>
           <a:prstGeom prst="rect">
@@ -3862,7 +3948,7 @@
       </p:pic>
       <p:sp>
         <p:nvSpPr>
-          <p:cNvPr id="120916375" name=""/>
+          <p:cNvPr id="314591605" name=""/>
           <p:cNvSpPr/>
           <p:nvPr/>
         </p:nvSpPr>
@@ -3902,7 +3988,7 @@
       </p:sp>
       <p:sp>
         <p:nvSpPr>
-          <p:cNvPr id="1703092481" name=""/>
+          <p:cNvPr id="417934977" name=""/>
           <p:cNvSpPr/>
           <p:nvPr/>
         </p:nvSpPr>
@@ -3942,13 +4028,13 @@
       </p:sp>
       <p:sp>
         <p:nvSpPr>
-          <p:cNvPr id="492035633" name=""/>
+          <p:cNvPr id="1991657131" name=""/>
           <p:cNvSpPr/>
           <p:nvPr/>
         </p:nvSpPr>
         <p:spPr bwMode="auto">
           <a:xfrm rot="0" flipH="0" flipV="0">
-            <a:off x="2447063" y="754480"/>
+            <a:off x="2447062" y="754480"/>
             <a:ext cx="1112118" cy="701841"/>
           </a:xfrm>
           <a:prstGeom prst="rect">
@@ -3982,7 +4068,7 @@
       </p:sp>
       <p:sp>
         <p:nvSpPr>
-          <p:cNvPr id="1970953321" name=""/>
+          <p:cNvPr id="1585316616" name=""/>
           <p:cNvSpPr/>
           <p:nvPr/>
         </p:nvSpPr>
@@ -4022,7 +4108,7 @@
       </p:sp>
       <p:sp>
         <p:nvSpPr>
-          <p:cNvPr id="613066122" name=""/>
+          <p:cNvPr id="1851902610" name=""/>
           <p:cNvSpPr/>
           <p:nvPr/>
         </p:nvSpPr>
@@ -4062,7 +4148,7 @@
       </p:sp>
       <p:sp>
         <p:nvSpPr>
-          <p:cNvPr id="1162449621" name=""/>
+          <p:cNvPr id="1752793479" name=""/>
           <p:cNvSpPr/>
           <p:nvPr/>
         </p:nvSpPr>
@@ -4102,7 +4188,7 @@
       </p:sp>
       <p:sp>
         <p:nvSpPr>
-          <p:cNvPr id="24645368" name=""/>
+          <p:cNvPr id="847904018" name=""/>
           <p:cNvSpPr txBox="1"/>
           <p:nvPr/>
         </p:nvSpPr>
@@ -4269,7 +4355,7 @@
       </p:sp>
       <p:sp>
         <p:nvSpPr>
-          <p:cNvPr id="1187984876" name=""/>
+          <p:cNvPr id="1300293296" name=""/>
           <p:cNvSpPr txBox="1"/>
           <p:nvPr/>
         </p:nvSpPr>
@@ -4385,7 +4471,7 @@
       </p:grpSpPr>
       <p:pic>
         <p:nvPicPr>
-          <p:cNvPr id="877134356" name=""/>
+          <p:cNvPr id="375902773" name=""/>
           <p:cNvPicPr>
             <a:picLocks noChangeAspect="1"/>
           </p:cNvPicPr>
@@ -4440,7 +4526,7 @@
       </p:grpSpPr>
       <p:pic>
         <p:nvPicPr>
-          <p:cNvPr id="688553953" name=""/>
+          <p:cNvPr id="787806660" name=""/>
           <p:cNvPicPr>
             <a:picLocks noChangeAspect="1"/>
           </p:cNvPicPr>
@@ -4462,7 +4548,7 @@
       </p:pic>
       <p:sp>
         <p:nvSpPr>
-          <p:cNvPr id="10776332" name=""/>
+          <p:cNvPr id="1894358513" name=""/>
           <p:cNvSpPr txBox="1"/>
           <p:nvPr/>
         </p:nvSpPr>
@@ -4501,7 +4587,7 @@
       </p:sp>
       <p:pic>
         <p:nvPicPr>
-          <p:cNvPr id="1884058298" name=""/>
+          <p:cNvPr id="65687736" name=""/>
           <p:cNvPicPr>
             <a:picLocks noChangeAspect="1"/>
           </p:cNvPicPr>
@@ -4523,7 +4609,7 @@
       </p:pic>
       <p:sp>
         <p:nvSpPr>
-          <p:cNvPr id="85219471" name=""/>
+          <p:cNvPr id="666447412" name=""/>
           <p:cNvSpPr txBox="1"/>
           <p:nvPr/>
         </p:nvSpPr>
@@ -4562,7 +4648,7 @@
       </p:sp>
       <p:sp>
         <p:nvSpPr>
-          <p:cNvPr id="1844077676" name=""/>
+          <p:cNvPr id="1298305341" name=""/>
           <p:cNvSpPr txBox="1"/>
           <p:nvPr/>
         </p:nvSpPr>
@@ -4599,6 +4685,83 @@
           </a:p>
         </p:txBody>
       </p:sp>
+    </p:spTree>
+  </p:cSld>
+  <p:clrMapOvr>
+    <a:masterClrMapping/>
+  </p:clrMapOvr>
+  <mc:AlternateContent xmlns:mc="http://schemas.openxmlformats.org/markup-compatibility/2006">
+    <mc:Choice xmlns:p159="http://schemas.microsoft.com/office/powerpoint/2015/09/main" xmlns:p14="http://schemas.microsoft.com/office/powerpoint/2010/main" Requires="p159">
+      <p:transition p14:dur="500" advClick="1"/>
+    </mc:Choice>
+    <mc:Fallback>
+      <p:transition advClick="1"/>
+    </mc:Fallback>
+  </mc:AlternateContent>
+</p:sld>
+</file>
+
+<file path=ppt/slides/slide4.xml><?xml version="1.0" encoding="utf-8"?>
+<p:sld xmlns:a="http://schemas.openxmlformats.org/drawingml/2006/main" xmlns:r="http://schemas.openxmlformats.org/officeDocument/2006/relationships" xmlns:p="http://schemas.openxmlformats.org/presentationml/2006/main" xmlns:m="http://schemas.openxmlformats.org/officeDocument/2006/math" xmlns:w="http://schemas.openxmlformats.org/wordprocessingml/2006/main" xmlns:mc="http://schemas.openxmlformats.org/markup-compatibility/2006" showMasterPhAnim="0" showMasterSp="1" show="1">
+  <p:cSld name="">
+    <p:spTree>
+      <p:nvGrpSpPr>
+        <p:cNvPr id="1" name=""/>
+        <p:cNvGrpSpPr/>
+        <p:nvPr/>
+      </p:nvGrpSpPr>
+      <p:grpSpPr bwMode="auto">
+        <a:xfrm>
+          <a:off x="0" y="0"/>
+          <a:ext cx="0" cy="0"/>
+          <a:chOff x="0" y="0"/>
+          <a:chExt cx="0" cy="0"/>
+        </a:xfrm>
+      </p:grpSpPr>
+      <p:pic>
+        <p:nvPicPr>
+          <p:cNvPr id="952425383" name=""/>
+          <p:cNvPicPr>
+            <a:picLocks noChangeAspect="1"/>
+          </p:cNvPicPr>
+          <p:nvPr/>
+        </p:nvPicPr>
+        <p:blipFill rotWithShape="1">
+          <a:blip r:embed="rId3"/>
+          <a:stretch/>
+        </p:blipFill>
+        <p:spPr bwMode="auto">
+          <a:xfrm flipH="0" flipV="0">
+            <a:off x="6226734" y="1830294"/>
+            <a:ext cx="5270887" cy="3564124"/>
+          </a:xfrm>
+          <a:prstGeom prst="rect">
+            <a:avLst/>
+          </a:prstGeom>
+        </p:spPr>
+      </p:pic>
+      <p:pic>
+        <p:nvPicPr>
+          <p:cNvPr id="1878065136" name=""/>
+          <p:cNvPicPr>
+            <a:picLocks noChangeAspect="1"/>
+          </p:cNvPicPr>
+          <p:nvPr/>
+        </p:nvPicPr>
+        <p:blipFill rotWithShape="1">
+          <a:blip r:embed="rId4"/>
+          <a:stretch/>
+        </p:blipFill>
+        <p:spPr bwMode="auto">
+          <a:xfrm flipH="0" flipV="0">
+            <a:off x="336877" y="1830294"/>
+            <a:ext cx="5270887" cy="3564124"/>
+          </a:xfrm>
+          <a:prstGeom prst="rect">
+            <a:avLst/>
+          </a:prstGeom>
+        </p:spPr>
+      </p:pic>
     </p:spTree>
   </p:cSld>
   <p:clrMapOvr>

--- a/resultados.pptx
+++ b/resultados.pptx
@@ -1,11 +1,11 @@
 
 <file path=ppt/presentation.xml><?xml version="1.0" encoding="utf-8"?>
-<p:presentation xmlns:a="http://schemas.openxmlformats.org/drawingml/2006/main" xmlns:p="http://schemas.openxmlformats.org/presentationml/2006/main" xmlns:r="http://schemas.openxmlformats.org/officeDocument/2006/relationships" xmlns:p14="http://schemas.microsoft.com/office/powerpoint/2010/main" xmlns:p15="http://schemas.microsoft.com/office/powerpoint/2012/main" xmlns:mc="http://schemas.openxmlformats.org/markup-compatibility/2006">
+<p:presentation xmlns:a="http://schemas.openxmlformats.org/drawingml/2006/main" xmlns:r="http://schemas.openxmlformats.org/officeDocument/2006/relationships" xmlns:p="http://schemas.openxmlformats.org/presentationml/2006/main" xmlns:m="http://schemas.openxmlformats.org/officeDocument/2006/math" xmlns:w="http://schemas.openxmlformats.org/wordprocessingml/2006/main">
   <p:sldMasterIdLst>
-    <p:sldMasterId id="2147483648" r:id="rId2"/>
+    <p:sldMasterId id="2147483648" r:id="rId1"/>
   </p:sldMasterIdLst>
   <p:notesMasterIdLst>
-    <p:notesMasterId r:id="rId3"/>
+    <p:notesMasterId r:id="rId10"/>
   </p:notesMasterIdLst>
   <p:sldIdLst>
     <p:sldId id="256" r:id="rId4"/>
@@ -21,15 +21,15 @@
 </file>
 
 <file path=ppt/notesMasters/notesMaster1.xml><?xml version="1.0" encoding="utf-8"?>
-<p:notesMaster xmlns:a="http://schemas.openxmlformats.org/drawingml/2006/main" xmlns:p="http://schemas.openxmlformats.org/presentationml/2006/main" xmlns:r="http://schemas.openxmlformats.org/officeDocument/2006/relationships" xmlns:p14="http://schemas.microsoft.com/office/powerpoint/2010/main" xmlns:p15="http://schemas.microsoft.com/office/powerpoint/2012/main" xmlns:mc="http://schemas.openxmlformats.org/markup-compatibility/2006">
-  <p:cSld>
+<p:notesMaster xmlns:a="http://schemas.openxmlformats.org/drawingml/2006/main" xmlns:r="http://schemas.openxmlformats.org/officeDocument/2006/relationships" xmlns:p="http://schemas.openxmlformats.org/presentationml/2006/main">
+  <p:cSld name="">
     <p:spTree>
       <p:nvGrpSpPr>
         <p:cNvPr id="1" name=""/>
         <p:cNvGrpSpPr/>
         <p:nvPr/>
       </p:nvGrpSpPr>
-      <p:grpSpPr>
+      <p:grpSpPr bwMode="auto">
         <a:xfrm>
           <a:off x="0" y="0"/>
           <a:ext cx="0" cy="0"/>
@@ -39,7 +39,7 @@
       </p:grpSpPr>
       <p:sp>
         <p:nvSpPr>
-          <p:cNvPr id="60" name="PlaceHolder 1"/>
+          <p:cNvPr id="122481442" name="PlaceHolder 1"/>
           <p:cNvSpPr>
             <a:spLocks noGrp="1"/>
           </p:cNvSpPr>
@@ -47,7 +47,7 @@
             <p:ph type="sldImg"/>
           </p:nvPr>
         </p:nvSpPr>
-        <p:spPr>
+        <p:spPr bwMode="auto">
           <a:xfrm>
             <a:off x="216000" y="812520"/>
             <a:ext cx="7127280" cy="4008960"/>
@@ -69,14 +69,13 @@
               <a:lnSpc>
                 <a:spcPct val="90000"/>
               </a:lnSpc>
+              <a:defRPr/>
             </a:pPr>
             <a:r>
               <a:rPr lang="pt-BR" sz="6000" b="0" u="none" strike="noStrike">
                 <a:solidFill>
                   <a:schemeClr val="dk1"/>
                 </a:solidFill>
-                <a:effectLst/>
-                <a:uFillTx/>
                 <a:latin typeface="Arial"/>
               </a:rPr>
               <a:t>Clique para mover o slide</a:t>
@@ -85,8 +84,6 @@
               <a:solidFill>
                 <a:schemeClr val="dk1"/>
               </a:solidFill>
-              <a:effectLst/>
-              <a:uFillTx/>
               <a:latin typeface="Arial"/>
             </a:endParaRPr>
           </a:p>
@@ -94,7 +91,7 @@
       </p:sp>
       <p:sp>
         <p:nvSpPr>
-          <p:cNvPr id="61" name="PlaceHolder 2"/>
+          <p:cNvPr id="473440889" name="PlaceHolder 2"/>
           <p:cNvSpPr>
             <a:spLocks noGrp="1"/>
           </p:cNvSpPr>
@@ -102,10 +99,10 @@
             <p:ph type="body"/>
           </p:nvPr>
         </p:nvSpPr>
-        <p:spPr>
+        <p:spPr bwMode="auto">
           <a:xfrm>
             <a:off x="756000" y="5078520"/>
-            <a:ext cx="6047640" cy="4811040"/>
+            <a:ext cx="6047640" cy="4811039"/>
           </a:xfrm>
           <a:prstGeom prst="rect">
             <a:avLst/>
@@ -122,14 +119,13 @@
           <a:p>
             <a:pPr indent="0" algn="l">
               <a:buNone/>
+              <a:defRPr/>
             </a:pPr>
             <a:r>
               <a:rPr lang="pt-BR" sz="2000" b="0" u="none" strike="noStrike">
                 <a:solidFill>
                   <a:srgbClr val="000000"/>
                 </a:solidFill>
-                <a:effectLst/>
-                <a:uFillTx/>
                 <a:latin typeface="Arial"/>
               </a:rPr>
               <a:t>Clique para editar o formato de notas</a:t>
@@ -138,8 +134,6 @@
               <a:solidFill>
                 <a:srgbClr val="000000"/>
               </a:solidFill>
-              <a:effectLst/>
-              <a:uFillTx/>
               <a:latin typeface="Arial"/>
             </a:endParaRPr>
           </a:p>
@@ -147,7 +141,7 @@
       </p:sp>
       <p:sp>
         <p:nvSpPr>
-          <p:cNvPr id="62" name="PlaceHolder 3"/>
+          <p:cNvPr id="113264666" name="PlaceHolder 3"/>
           <p:cNvSpPr>
             <a:spLocks noGrp="1"/>
           </p:cNvSpPr>
@@ -155,7 +149,7 @@
             <p:ph type="hdr"/>
           </p:nvPr>
         </p:nvSpPr>
-        <p:spPr>
+        <p:spPr bwMode="auto">
           <a:xfrm>
             <a:off x="0" y="0"/>
             <a:ext cx="3280680" cy="534240"/>
@@ -175,14 +169,13 @@
           <a:p>
             <a:pPr indent="0" algn="l">
               <a:buNone/>
+              <a:defRPr/>
             </a:pPr>
             <a:r>
               <a:rPr lang="pt-BR" sz="1400" b="0" u="none" strike="noStrike">
                 <a:solidFill>
                   <a:srgbClr val="000000"/>
                 </a:solidFill>
-                <a:effectLst/>
-                <a:uFillTx/>
                 <a:latin typeface="Times New Roman"/>
               </a:rPr>
               <a:t>&lt;cabeçalho&gt;</a:t>
@@ -191,8 +184,6 @@
               <a:solidFill>
                 <a:srgbClr val="000000"/>
               </a:solidFill>
-              <a:effectLst/>
-              <a:uFillTx/>
               <a:latin typeface="Times New Roman"/>
             </a:endParaRPr>
           </a:p>
@@ -200,7 +191,7 @@
       </p:sp>
       <p:sp>
         <p:nvSpPr>
-          <p:cNvPr id="63" name="PlaceHolder 4"/>
+          <p:cNvPr id="769139441" name="PlaceHolder 4"/>
           <p:cNvSpPr>
             <a:spLocks noGrp="1"/>
           </p:cNvSpPr>
@@ -208,7 +199,7 @@
             <p:ph type="dt" idx="34"/>
           </p:nvPr>
         </p:nvSpPr>
-        <p:spPr>
+        <p:spPr bwMode="auto">
           <a:xfrm>
             <a:off x="4278960" y="0"/>
             <a:ext cx="3280680" cy="534240"/>
@@ -232,8 +223,6 @@
                 <a:solidFill>
                   <a:srgbClr val="000000"/>
                 </a:solidFill>
-                <a:effectLst/>
-                <a:uFillTx/>
                 <a:latin typeface="Times New Roman"/>
               </a:defRPr>
             </a:lvl1pPr>
@@ -241,14 +230,13 @@
           <a:p>
             <a:pPr indent="0" algn="r">
               <a:buNone/>
+              <a:defRPr/>
             </a:pPr>
             <a:r>
               <a:rPr lang="pt-BR" sz="1400" b="0" u="none" strike="noStrike">
                 <a:solidFill>
                   <a:srgbClr val="000000"/>
                 </a:solidFill>
-                <a:effectLst/>
-                <a:uFillTx/>
                 <a:latin typeface="Times New Roman"/>
               </a:rPr>
               <a:t>&lt;data/hora&gt;</a:t>
@@ -257,8 +245,6 @@
               <a:solidFill>
                 <a:srgbClr val="000000"/>
               </a:solidFill>
-              <a:effectLst/>
-              <a:uFillTx/>
               <a:latin typeface="Times New Roman"/>
             </a:endParaRPr>
           </a:p>
@@ -266,7 +252,7 @@
       </p:sp>
       <p:sp>
         <p:nvSpPr>
-          <p:cNvPr id="64" name="PlaceHolder 5"/>
+          <p:cNvPr id="1389237422" name="PlaceHolder 5"/>
           <p:cNvSpPr>
             <a:spLocks noGrp="1"/>
           </p:cNvSpPr>
@@ -274,7 +260,7 @@
             <p:ph type="ftr" idx="35"/>
           </p:nvPr>
         </p:nvSpPr>
-        <p:spPr>
+        <p:spPr bwMode="auto">
           <a:xfrm>
             <a:off x="0" y="10157400"/>
             <a:ext cx="3280680" cy="534240"/>
@@ -298,8 +284,6 @@
                 <a:solidFill>
                   <a:srgbClr val="000000"/>
                 </a:solidFill>
-                <a:effectLst/>
-                <a:uFillTx/>
                 <a:latin typeface="Times New Roman"/>
               </a:defRPr>
             </a:lvl1pPr>
@@ -307,14 +291,13 @@
           <a:p>
             <a:pPr indent="0" algn="l">
               <a:buNone/>
+              <a:defRPr/>
             </a:pPr>
             <a:r>
               <a:rPr lang="pt-BR" sz="1400" b="0" u="none" strike="noStrike">
                 <a:solidFill>
                   <a:srgbClr val="000000"/>
                 </a:solidFill>
-                <a:effectLst/>
-                <a:uFillTx/>
                 <a:latin typeface="Times New Roman"/>
               </a:rPr>
               <a:t>&lt;rodapé&gt;</a:t>
@@ -323,8 +306,6 @@
               <a:solidFill>
                 <a:srgbClr val="000000"/>
               </a:solidFill>
-              <a:effectLst/>
-              <a:uFillTx/>
               <a:latin typeface="Times New Roman"/>
             </a:endParaRPr>
           </a:p>
@@ -332,7 +313,7 @@
       </p:sp>
       <p:sp>
         <p:nvSpPr>
-          <p:cNvPr id="65" name="PlaceHolder 6"/>
+          <p:cNvPr id="432064687" name="PlaceHolder 6"/>
           <p:cNvSpPr>
             <a:spLocks noGrp="1"/>
           </p:cNvSpPr>
@@ -340,7 +321,7 @@
             <p:ph type="sldNum" idx="36"/>
           </p:nvPr>
         </p:nvSpPr>
-        <p:spPr>
+        <p:spPr bwMode="auto">
           <a:xfrm>
             <a:off x="4278960" y="10157400"/>
             <a:ext cx="3280680" cy="534240"/>
@@ -364,8 +345,6 @@
                 <a:solidFill>
                   <a:srgbClr val="000000"/>
                 </a:solidFill>
-                <a:effectLst/>
-                <a:uFillTx/>
                 <a:latin typeface="Times New Roman"/>
               </a:defRPr>
             </a:lvl1pPr>
@@ -373,14 +352,13 @@
           <a:p>
             <a:pPr indent="0" algn="r">
               <a:buNone/>
+              <a:defRPr/>
             </a:pPr>
             <a:fld id="{004777B0-DAC2-411D-ADFD-808D198D1209}" type="slidenum">
               <a:rPr lang="pt-BR" sz="1400" b="0" u="none" strike="noStrike">
                 <a:solidFill>
                   <a:srgbClr val="000000"/>
                 </a:solidFill>
-                <a:effectLst/>
-                <a:uFillTx/>
                 <a:latin typeface="Times New Roman"/>
               </a:rPr>
               <a:t>&lt;número&gt;</a:t>
@@ -389,8 +367,6 @@
               <a:solidFill>
                 <a:srgbClr val="000000"/>
               </a:solidFill>
-              <a:effectLst/>
-              <a:uFillTx/>
               <a:latin typeface="Times New Roman"/>
             </a:endParaRPr>
           </a:p>
@@ -398,20 +374,20 @@
       </p:sp>
     </p:spTree>
   </p:cSld>
-  <p:clrMap bg1="lt1" bg2="lt2" tx1="dk1" tx2="dk2" accent1="accent1" accent2="accent2" accent3="accent3" accent4="accent4" accent5="accent5" accent6="accent6" hlink="hlink" folHlink="folHlink"/>
+  <p:clrMap bg1="lt1" tx1="dk1" bg2="lt2" tx2="dk2" accent1="accent1" accent2="accent2" accent3="accent3" accent4="accent4" accent5="accent5" accent6="accent6" hlink="hlink" folHlink="folHlink"/>
 </p:notesMaster>
 </file>
 
 <file path=ppt/notesSlides/notesSlide1.xml><?xml version="1.0" encoding="utf-8"?>
-<p:notes xmlns:a="http://schemas.openxmlformats.org/drawingml/2006/main" xmlns:p="http://schemas.openxmlformats.org/presentationml/2006/main" xmlns:r="http://schemas.openxmlformats.org/officeDocument/2006/relationships" xmlns:p14="http://schemas.microsoft.com/office/powerpoint/2010/main" xmlns:p15="http://schemas.microsoft.com/office/powerpoint/2012/main" xmlns:mc="http://schemas.openxmlformats.org/markup-compatibility/2006">
-  <p:cSld>
+<p:notes xmlns:a="http://schemas.openxmlformats.org/drawingml/2006/main" xmlns:r="http://schemas.openxmlformats.org/officeDocument/2006/relationships" xmlns:p="http://schemas.openxmlformats.org/presentationml/2006/main" xmlns:m="http://schemas.openxmlformats.org/officeDocument/2006/math" xmlns:w="http://schemas.openxmlformats.org/wordprocessingml/2006/main">
+  <p:cSld name="">
     <p:spTree>
       <p:nvGrpSpPr>
         <p:cNvPr id="1" name=""/>
         <p:cNvGrpSpPr/>
         <p:nvPr/>
       </p:nvGrpSpPr>
-      <p:grpSpPr>
+      <p:grpSpPr bwMode="auto">
         <a:xfrm>
           <a:off x="0" y="0"/>
           <a:ext cx="0" cy="0"/>
@@ -421,7 +397,7 @@
       </p:grpSpPr>
       <p:sp>
         <p:nvSpPr>
-          <p:cNvPr id="91" name="PlaceHolder 1"/>
+          <p:cNvPr id="144580020" name="PlaceHolder 1"/>
           <p:cNvSpPr>
             <a:spLocks noGrp="1"/>
           </p:cNvSpPr>
@@ -429,10 +405,10 @@
             <p:ph type="sldImg"/>
           </p:nvPr>
         </p:nvSpPr>
-        <p:spPr>
+        <p:spPr bwMode="auto">
           <a:xfrm>
             <a:off x="685800" y="1143000"/>
-            <a:ext cx="5486040" cy="3085920"/>
+            <a:ext cx="5486039" cy="3085920"/>
           </a:xfrm>
           <a:prstGeom prst="rect">
             <a:avLst/>
@@ -444,7 +420,7 @@
       </p:sp>
       <p:sp>
         <p:nvSpPr>
-          <p:cNvPr id="92" name="PlaceHolder 2"/>
+          <p:cNvPr id="1946191098" name="PlaceHolder 2"/>
           <p:cNvSpPr>
             <a:spLocks noGrp="1"/>
           </p:cNvSpPr>
@@ -452,10 +428,10 @@
             <p:ph type="body"/>
           </p:nvPr>
         </p:nvSpPr>
-        <p:spPr>
+        <p:spPr bwMode="auto">
           <a:xfrm>
             <a:off x="685800" y="4400640"/>
-            <a:ext cx="5486040" cy="3600000"/>
+            <a:ext cx="5486039" cy="3600000"/>
           </a:xfrm>
           <a:prstGeom prst="rect">
             <a:avLst/>
@@ -472,13 +448,12 @@
           <a:p>
             <a:pPr indent="0" algn="l">
               <a:buNone/>
+              <a:defRPr/>
             </a:pPr>
             <a:endParaRPr lang="pt-BR" sz="1800" b="0" u="none" strike="noStrike">
               <a:solidFill>
                 <a:srgbClr val="000000"/>
               </a:solidFill>
-              <a:effectLst/>
-              <a:uFillTx/>
               <a:latin typeface="Arial"/>
             </a:endParaRPr>
           </a:p>
@@ -486,7 +461,7 @@
       </p:sp>
       <p:sp>
         <p:nvSpPr>
-          <p:cNvPr id="93" name="PlaceHolder 3"/>
+          <p:cNvPr id="1542018822" name="PlaceHolder 3"/>
           <p:cNvSpPr>
             <a:spLocks noGrp="1"/>
           </p:cNvSpPr>
@@ -494,7 +469,7 @@
             <p:ph type="sldNum" idx="37"/>
           </p:nvPr>
         </p:nvSpPr>
-        <p:spPr>
+        <p:spPr bwMode="auto">
           <a:xfrm>
             <a:off x="3884760" y="8685360"/>
             <a:ext cx="2971440" cy="458280"/>
@@ -521,8 +496,6 @@
                 <a:solidFill>
                   <a:schemeClr val="dk1"/>
                 </a:solidFill>
-                <a:effectLst/>
-                <a:uFillTx/>
                 <a:latin typeface="+mn-lt"/>
                 <a:ea typeface="+mn-ea"/>
               </a:defRPr>
@@ -534,14 +507,13 @@
                 <a:spcPct val="100000"/>
               </a:lnSpc>
               <a:buNone/>
+              <a:defRPr/>
             </a:pPr>
             <a:fld id="{BCAC8895-A497-4113-AA15-4A3EE2E537AD}" type="slidenum">
               <a:rPr lang="pt-BR" sz="1200" b="0" u="none" strike="noStrike">
                 <a:solidFill>
                   <a:schemeClr val="dk1"/>
                 </a:solidFill>
-                <a:effectLst/>
-                <a:uFillTx/>
                 <a:latin typeface="+mn-lt"/>
                 <a:ea typeface="+mn-ea"/>
               </a:rPr>
@@ -551,8 +523,6 @@
               <a:solidFill>
                 <a:srgbClr val="000000"/>
               </a:solidFill>
-              <a:effectLst/>
-              <a:uFillTx/>
               <a:latin typeface="Times New Roman"/>
             </a:endParaRPr>
           </a:p>
@@ -560,19 +530,22 @@
       </p:sp>
     </p:spTree>
   </p:cSld>
+  <p:clrMapOvr>
+    <a:masterClrMapping/>
+  </p:clrMapOvr>
 </p:notes>
 </file>
 
 <file path=ppt/notesSlides/notesSlide2.xml><?xml version="1.0" encoding="utf-8"?>
-<p:notes xmlns:a="http://schemas.openxmlformats.org/drawingml/2006/main" xmlns:p="http://schemas.openxmlformats.org/presentationml/2006/main" xmlns:r="http://schemas.openxmlformats.org/officeDocument/2006/relationships" xmlns:p14="http://schemas.microsoft.com/office/powerpoint/2010/main" xmlns:p15="http://schemas.microsoft.com/office/powerpoint/2012/main" xmlns:mc="http://schemas.openxmlformats.org/markup-compatibility/2006">
-  <p:cSld>
+<p:notes xmlns:a="http://schemas.openxmlformats.org/drawingml/2006/main" xmlns:r="http://schemas.openxmlformats.org/officeDocument/2006/relationships" xmlns:p="http://schemas.openxmlformats.org/presentationml/2006/main" xmlns:m="http://schemas.openxmlformats.org/officeDocument/2006/math" xmlns:w="http://schemas.openxmlformats.org/wordprocessingml/2006/main">
+  <p:cSld name="">
     <p:spTree>
       <p:nvGrpSpPr>
         <p:cNvPr id="1" name=""/>
         <p:cNvGrpSpPr/>
         <p:nvPr/>
       </p:nvGrpSpPr>
-      <p:grpSpPr>
+      <p:grpSpPr bwMode="auto">
         <a:xfrm>
           <a:off x="0" y="0"/>
           <a:ext cx="0" cy="0"/>
@@ -582,7 +555,7 @@
       </p:grpSpPr>
       <p:sp>
         <p:nvSpPr>
-          <p:cNvPr id="94" name="PlaceHolder 1"/>
+          <p:cNvPr id="664456361" name="PlaceHolder 1"/>
           <p:cNvSpPr>
             <a:spLocks noGrp="1"/>
           </p:cNvSpPr>
@@ -590,10 +563,10 @@
             <p:ph type="sldImg"/>
           </p:nvPr>
         </p:nvSpPr>
-        <p:spPr>
+        <p:spPr bwMode="auto">
           <a:xfrm>
             <a:off x="685800" y="1143000"/>
-            <a:ext cx="5486040" cy="3085920"/>
+            <a:ext cx="5486039" cy="3085920"/>
           </a:xfrm>
           <a:prstGeom prst="rect">
             <a:avLst/>
@@ -605,7 +578,7 @@
       </p:sp>
       <p:sp>
         <p:nvSpPr>
-          <p:cNvPr id="95" name="PlaceHolder 2"/>
+          <p:cNvPr id="1425494050" name="PlaceHolder 2"/>
           <p:cNvSpPr>
             <a:spLocks noGrp="1"/>
           </p:cNvSpPr>
@@ -613,10 +586,10 @@
             <p:ph type="body"/>
           </p:nvPr>
         </p:nvSpPr>
-        <p:spPr>
+        <p:spPr bwMode="auto">
           <a:xfrm>
             <a:off x="685800" y="4400640"/>
-            <a:ext cx="5486040" cy="3600000"/>
+            <a:ext cx="5486039" cy="3600000"/>
           </a:xfrm>
           <a:prstGeom prst="rect">
             <a:avLst/>
@@ -633,13 +606,12 @@
           <a:p>
             <a:pPr indent="0" algn="l">
               <a:buNone/>
+              <a:defRPr/>
             </a:pPr>
             <a:endParaRPr lang="pt-BR" sz="1800" b="0" u="none" strike="noStrike">
               <a:solidFill>
                 <a:srgbClr val="000000"/>
               </a:solidFill>
-              <a:effectLst/>
-              <a:uFillTx/>
               <a:latin typeface="Arial"/>
             </a:endParaRPr>
           </a:p>
@@ -647,7 +619,7 @@
       </p:sp>
       <p:sp>
         <p:nvSpPr>
-          <p:cNvPr id="96" name="PlaceHolder 3"/>
+          <p:cNvPr id="2064353035" name="PlaceHolder 3"/>
           <p:cNvSpPr>
             <a:spLocks noGrp="1"/>
           </p:cNvSpPr>
@@ -655,7 +627,7 @@
             <p:ph type="sldNum" idx="38"/>
           </p:nvPr>
         </p:nvSpPr>
-        <p:spPr>
+        <p:spPr bwMode="auto">
           <a:xfrm>
             <a:off x="3884760" y="8685360"/>
             <a:ext cx="2971440" cy="458280"/>
@@ -675,13 +647,12 @@
           <a:p>
             <a:pPr indent="0" algn="l">
               <a:buNone/>
+              <a:defRPr/>
             </a:pPr>
             <a:endParaRPr lang="pt-BR" sz="1200" b="0" u="none" strike="noStrike">
               <a:solidFill>
                 <a:schemeClr val="dk1"/>
               </a:solidFill>
-              <a:effectLst/>
-              <a:uFillTx/>
               <a:latin typeface="+mn-lt"/>
             </a:endParaRPr>
           </a:p>
@@ -689,19 +660,22 @@
       </p:sp>
     </p:spTree>
   </p:cSld>
+  <p:clrMapOvr>
+    <a:masterClrMapping/>
+  </p:clrMapOvr>
 </p:notes>
 </file>
 
 <file path=ppt/notesSlides/notesSlide3.xml><?xml version="1.0" encoding="utf-8"?>
-<p:notes xmlns:a="http://schemas.openxmlformats.org/drawingml/2006/main" xmlns:p="http://schemas.openxmlformats.org/presentationml/2006/main" xmlns:r="http://schemas.openxmlformats.org/officeDocument/2006/relationships" xmlns:p14="http://schemas.microsoft.com/office/powerpoint/2010/main" xmlns:p15="http://schemas.microsoft.com/office/powerpoint/2012/main" xmlns:mc="http://schemas.openxmlformats.org/markup-compatibility/2006">
-  <p:cSld>
+<p:notes xmlns:a="http://schemas.openxmlformats.org/drawingml/2006/main" xmlns:r="http://schemas.openxmlformats.org/officeDocument/2006/relationships" xmlns:p="http://schemas.openxmlformats.org/presentationml/2006/main" xmlns:m="http://schemas.openxmlformats.org/officeDocument/2006/math" xmlns:w="http://schemas.openxmlformats.org/wordprocessingml/2006/main">
+  <p:cSld name="">
     <p:spTree>
       <p:nvGrpSpPr>
         <p:cNvPr id="1" name=""/>
         <p:cNvGrpSpPr/>
         <p:nvPr/>
       </p:nvGrpSpPr>
-      <p:grpSpPr>
+      <p:grpSpPr bwMode="auto">
         <a:xfrm>
           <a:off x="0" y="0"/>
           <a:ext cx="0" cy="0"/>
@@ -711,7 +685,7 @@
       </p:grpSpPr>
       <p:sp>
         <p:nvSpPr>
-          <p:cNvPr id="97" name="PlaceHolder 1"/>
+          <p:cNvPr id="701123626" name="PlaceHolder 1"/>
           <p:cNvSpPr>
             <a:spLocks noGrp="1"/>
           </p:cNvSpPr>
@@ -719,10 +693,10 @@
             <p:ph type="sldImg"/>
           </p:nvPr>
         </p:nvSpPr>
-        <p:spPr>
+        <p:spPr bwMode="auto">
           <a:xfrm>
             <a:off x="685800" y="1143000"/>
-            <a:ext cx="5486040" cy="3085920"/>
+            <a:ext cx="5486039" cy="3085920"/>
           </a:xfrm>
           <a:prstGeom prst="rect">
             <a:avLst/>
@@ -734,7 +708,7 @@
       </p:sp>
       <p:sp>
         <p:nvSpPr>
-          <p:cNvPr id="98" name="PlaceHolder 2"/>
+          <p:cNvPr id="109929119" name="PlaceHolder 2"/>
           <p:cNvSpPr>
             <a:spLocks noGrp="1"/>
           </p:cNvSpPr>
@@ -742,10 +716,10 @@
             <p:ph type="body"/>
           </p:nvPr>
         </p:nvSpPr>
-        <p:spPr>
+        <p:spPr bwMode="auto">
           <a:xfrm>
             <a:off x="685800" y="4400640"/>
-            <a:ext cx="5486040" cy="3600000"/>
+            <a:ext cx="5486039" cy="3600000"/>
           </a:xfrm>
           <a:prstGeom prst="rect">
             <a:avLst/>
@@ -762,13 +736,12 @@
           <a:p>
             <a:pPr indent="0" algn="l">
               <a:buNone/>
+              <a:defRPr/>
             </a:pPr>
             <a:endParaRPr lang="pt-BR" sz="1800" b="0" u="none" strike="noStrike">
               <a:solidFill>
                 <a:srgbClr val="000000"/>
               </a:solidFill>
-              <a:effectLst/>
-              <a:uFillTx/>
               <a:latin typeface="Arial"/>
             </a:endParaRPr>
           </a:p>
@@ -776,7 +749,7 @@
       </p:sp>
       <p:sp>
         <p:nvSpPr>
-          <p:cNvPr id="99" name="PlaceHolder 3"/>
+          <p:cNvPr id="1368642643" name="PlaceHolder 3"/>
           <p:cNvSpPr>
             <a:spLocks noGrp="1"/>
           </p:cNvSpPr>
@@ -784,7 +757,7 @@
             <p:ph type="sldNum" idx="39"/>
           </p:nvPr>
         </p:nvSpPr>
-        <p:spPr>
+        <p:spPr bwMode="auto">
           <a:xfrm>
             <a:off x="3884760" y="8685360"/>
             <a:ext cx="2971440" cy="458280"/>
@@ -804,13 +777,12 @@
           <a:p>
             <a:pPr indent="0" algn="l">
               <a:buNone/>
+              <a:defRPr/>
             </a:pPr>
             <a:endParaRPr lang="pt-BR" sz="1200" b="0" u="none" strike="noStrike">
               <a:solidFill>
                 <a:schemeClr val="dk1"/>
               </a:solidFill>
-              <a:effectLst/>
-              <a:uFillTx/>
               <a:latin typeface="+mn-lt"/>
             </a:endParaRPr>
           </a:p>
@@ -818,19 +790,22 @@
       </p:sp>
     </p:spTree>
   </p:cSld>
+  <p:clrMapOvr>
+    <a:masterClrMapping/>
+  </p:clrMapOvr>
 </p:notes>
 </file>
 
 <file path=ppt/notesSlides/notesSlide4.xml><?xml version="1.0" encoding="utf-8"?>
-<p:notes xmlns:a="http://schemas.openxmlformats.org/drawingml/2006/main" xmlns:p="http://schemas.openxmlformats.org/presentationml/2006/main" xmlns:r="http://schemas.openxmlformats.org/officeDocument/2006/relationships" xmlns:p14="http://schemas.microsoft.com/office/powerpoint/2010/main" xmlns:p15="http://schemas.microsoft.com/office/powerpoint/2012/main" xmlns:mc="http://schemas.openxmlformats.org/markup-compatibility/2006">
-  <p:cSld>
+<p:notes xmlns:a="http://schemas.openxmlformats.org/drawingml/2006/main" xmlns:r="http://schemas.openxmlformats.org/officeDocument/2006/relationships" xmlns:p="http://schemas.openxmlformats.org/presentationml/2006/main" xmlns:m="http://schemas.openxmlformats.org/officeDocument/2006/math" xmlns:w="http://schemas.openxmlformats.org/wordprocessingml/2006/main">
+  <p:cSld name="">
     <p:spTree>
       <p:nvGrpSpPr>
         <p:cNvPr id="1" name=""/>
         <p:cNvGrpSpPr/>
         <p:nvPr/>
       </p:nvGrpSpPr>
-      <p:grpSpPr>
+      <p:grpSpPr bwMode="auto">
         <a:xfrm>
           <a:off x="0" y="0"/>
           <a:ext cx="0" cy="0"/>
@@ -840,7 +815,7 @@
       </p:grpSpPr>
       <p:sp>
         <p:nvSpPr>
-          <p:cNvPr id="100" name="PlaceHolder 1"/>
+          <p:cNvPr id="711039023" name="PlaceHolder 1"/>
           <p:cNvSpPr>
             <a:spLocks noGrp="1"/>
           </p:cNvSpPr>
@@ -848,10 +823,10 @@
             <p:ph type="sldImg"/>
           </p:nvPr>
         </p:nvSpPr>
-        <p:spPr>
+        <p:spPr bwMode="auto">
           <a:xfrm>
             <a:off x="685800" y="1143000"/>
-            <a:ext cx="5486040" cy="3085920"/>
+            <a:ext cx="5486039" cy="3085920"/>
           </a:xfrm>
           <a:prstGeom prst="rect">
             <a:avLst/>
@@ -863,7 +838,7 @@
       </p:sp>
       <p:sp>
         <p:nvSpPr>
-          <p:cNvPr id="101" name="PlaceHolder 2"/>
+          <p:cNvPr id="53269625" name="PlaceHolder 2"/>
           <p:cNvSpPr>
             <a:spLocks noGrp="1"/>
           </p:cNvSpPr>
@@ -871,10 +846,10 @@
             <p:ph type="body"/>
           </p:nvPr>
         </p:nvSpPr>
-        <p:spPr>
+        <p:spPr bwMode="auto">
           <a:xfrm>
             <a:off x="685800" y="4400640"/>
-            <a:ext cx="5486040" cy="3600000"/>
+            <a:ext cx="5486039" cy="3600000"/>
           </a:xfrm>
           <a:prstGeom prst="rect">
             <a:avLst/>
@@ -891,13 +866,12 @@
           <a:p>
             <a:pPr indent="0" algn="l">
               <a:buNone/>
+              <a:defRPr/>
             </a:pPr>
             <a:endParaRPr lang="pt-BR" sz="1800" b="0" u="none" strike="noStrike">
               <a:solidFill>
                 <a:srgbClr val="000000"/>
               </a:solidFill>
-              <a:effectLst/>
-              <a:uFillTx/>
               <a:latin typeface="Arial"/>
             </a:endParaRPr>
           </a:p>
@@ -905,7 +879,7 @@
       </p:sp>
       <p:sp>
         <p:nvSpPr>
-          <p:cNvPr id="102" name="PlaceHolder 3"/>
+          <p:cNvPr id="841780834" name="PlaceHolder 3"/>
           <p:cNvSpPr>
             <a:spLocks noGrp="1"/>
           </p:cNvSpPr>
@@ -913,7 +887,7 @@
             <p:ph type="sldNum" idx="40"/>
           </p:nvPr>
         </p:nvSpPr>
-        <p:spPr>
+        <p:spPr bwMode="auto">
           <a:xfrm>
             <a:off x="3884760" y="8685360"/>
             <a:ext cx="2971440" cy="458280"/>
@@ -933,13 +907,12 @@
           <a:p>
             <a:pPr indent="0" algn="l">
               <a:buNone/>
+              <a:defRPr/>
             </a:pPr>
             <a:endParaRPr lang="pt-BR" sz="1200" b="0" u="none" strike="noStrike">
               <a:solidFill>
                 <a:schemeClr val="dk1"/>
               </a:solidFill>
-              <a:effectLst/>
-              <a:uFillTx/>
               <a:latin typeface="+mn-lt"/>
             </a:endParaRPr>
           </a:p>
@@ -947,14 +920,187 @@
       </p:sp>
     </p:spTree>
   </p:cSld>
+  <p:clrMapOvr>
+    <a:masterClrMapping/>
+  </p:clrMapOvr>
+</p:notes>
+</file>
+
+<file path=ppt/notesSlides/notesSlide5.xml><?xml version="1.0" encoding="utf-8"?>
+<p:notes xmlns:a="http://schemas.openxmlformats.org/drawingml/2006/main" xmlns:r="http://schemas.openxmlformats.org/officeDocument/2006/relationships" xmlns:p="http://schemas.openxmlformats.org/presentationml/2006/main" xmlns:m="http://schemas.openxmlformats.org/officeDocument/2006/math" xmlns:w="http://schemas.openxmlformats.org/wordprocessingml/2006/main">
+  <p:cSld name="">
+    <p:spTree>
+      <p:nvGrpSpPr>
+        <p:cNvPr id="1" name=""/>
+        <p:cNvGrpSpPr/>
+        <p:nvPr/>
+      </p:nvGrpSpPr>
+      <p:grpSpPr bwMode="auto">
+        <a:xfrm>
+          <a:off x="0" y="0"/>
+          <a:ext cx="0" cy="0"/>
+          <a:chOff x="0" y="0"/>
+          <a:chExt cx="0" cy="0"/>
+        </a:xfrm>
+      </p:grpSpPr>
+      <p:sp>
+        <p:nvSpPr>
+          <p:cNvPr id="2" name="Slide Image Placeholder 1"/>
+          <p:cNvSpPr>
+            <a:spLocks noChangeAspect="1" noGrp="1" noRot="1"/>
+          </p:cNvSpPr>
+          <p:nvPr>
+            <p:ph type="sldImg"/>
+          </p:nvPr>
+        </p:nvSpPr>
+        <p:spPr bwMode="auto"/>
+      </p:sp>
+      <p:sp>
+        <p:nvSpPr>
+          <p:cNvPr id="3" name="Notes Placeholder 2"/>
+          <p:cNvSpPr>
+            <a:spLocks noGrp="1"/>
+          </p:cNvSpPr>
+          <p:nvPr>
+            <p:ph type="body" idx="1"/>
+          </p:nvPr>
+        </p:nvSpPr>
+        <p:spPr bwMode="auto"/>
+        <p:txBody>
+          <a:bodyPr/>
+          <a:lstStyle/>
+          <a:p>
+            <a:pPr>
+              <a:defRPr/>
+            </a:pPr>
+            <a:endParaRPr/>
+          </a:p>
+        </p:txBody>
+      </p:sp>
+      <p:sp>
+        <p:nvSpPr>
+          <p:cNvPr id="4" name="Slide Number Placeholder 3"/>
+          <p:cNvSpPr>
+            <a:spLocks noGrp="1"/>
+          </p:cNvSpPr>
+          <p:nvPr>
+            <p:ph type="sldNum" sz="quarter" idx="10"/>
+          </p:nvPr>
+        </p:nvSpPr>
+        <p:spPr bwMode="auto"/>
+        <p:txBody>
+          <a:bodyPr/>
+          <a:lstStyle/>
+          <a:p>
+            <a:pPr>
+              <a:defRPr/>
+            </a:pPr>
+            <a:fld id="{B47F03B5-DAF6-903B-ED1F-8FAA077F3E7A}" type="slidenum">
+              <a:rPr/>
+              <a:t/>
+            </a:fld>
+            <a:endParaRPr/>
+          </a:p>
+        </p:txBody>
+      </p:sp>
+    </p:spTree>
+  </p:cSld>
+  <p:clrMapOvr>
+    <a:masterClrMapping/>
+  </p:clrMapOvr>
+</p:notes>
+</file>
+
+<file path=ppt/notesSlides/notesSlide6.xml><?xml version="1.0" encoding="utf-8"?>
+<p:notes xmlns:a="http://schemas.openxmlformats.org/drawingml/2006/main" xmlns:r="http://schemas.openxmlformats.org/officeDocument/2006/relationships" xmlns:p="http://schemas.openxmlformats.org/presentationml/2006/main" xmlns:m="http://schemas.openxmlformats.org/officeDocument/2006/math" xmlns:w="http://schemas.openxmlformats.org/wordprocessingml/2006/main">
+  <p:cSld name="">
+    <p:spTree>
+      <p:nvGrpSpPr>
+        <p:cNvPr id="1" name=""/>
+        <p:cNvGrpSpPr/>
+        <p:nvPr/>
+      </p:nvGrpSpPr>
+      <p:grpSpPr bwMode="auto">
+        <a:xfrm>
+          <a:off x="0" y="0"/>
+          <a:ext cx="0" cy="0"/>
+          <a:chOff x="0" y="0"/>
+          <a:chExt cx="0" cy="0"/>
+        </a:xfrm>
+      </p:grpSpPr>
+      <p:sp>
+        <p:nvSpPr>
+          <p:cNvPr id="2" name="Slide Image Placeholder 1"/>
+          <p:cNvSpPr>
+            <a:spLocks noChangeAspect="1" noGrp="1" noRot="1"/>
+          </p:cNvSpPr>
+          <p:nvPr>
+            <p:ph type="sldImg"/>
+          </p:nvPr>
+        </p:nvSpPr>
+        <p:spPr bwMode="auto"/>
+      </p:sp>
+      <p:sp>
+        <p:nvSpPr>
+          <p:cNvPr id="3" name="Notes Placeholder 2"/>
+          <p:cNvSpPr>
+            <a:spLocks noGrp="1"/>
+          </p:cNvSpPr>
+          <p:nvPr>
+            <p:ph type="body" idx="1"/>
+          </p:nvPr>
+        </p:nvSpPr>
+        <p:spPr bwMode="auto"/>
+        <p:txBody>
+          <a:bodyPr/>
+          <a:lstStyle/>
+          <a:p>
+            <a:pPr>
+              <a:defRPr/>
+            </a:pPr>
+            <a:endParaRPr/>
+          </a:p>
+        </p:txBody>
+      </p:sp>
+      <p:sp>
+        <p:nvSpPr>
+          <p:cNvPr id="4" name="Slide Number Placeholder 3"/>
+          <p:cNvSpPr>
+            <a:spLocks noGrp="1"/>
+          </p:cNvSpPr>
+          <p:nvPr>
+            <p:ph type="sldNum" sz="quarter" idx="10"/>
+          </p:nvPr>
+        </p:nvSpPr>
+        <p:spPr bwMode="auto"/>
+        <p:txBody>
+          <a:bodyPr/>
+          <a:lstStyle/>
+          <a:p>
+            <a:pPr>
+              <a:defRPr/>
+            </a:pPr>
+            <a:fld id="{2F821983-05AB-F7C6-EF69-69EFE3F9CFF3}" type="slidenum">
+              <a:rPr/>
+              <a:t/>
+            </a:fld>
+            <a:endParaRPr/>
+          </a:p>
+        </p:txBody>
+      </p:sp>
+    </p:spTree>
+  </p:cSld>
+  <p:clrMapOvr>
+    <a:masterClrMapping/>
+  </p:clrMapOvr>
 </p:notes>
 </file>
 
 <file path=ppt/slideLayouts/slideLayout1.xml><?xml version="1.0" encoding="utf-8"?>
-<p:sldLayout xmlns:a="http://schemas.openxmlformats.org/drawingml/2006/main" xmlns:p="http://schemas.openxmlformats.org/presentationml/2006/main" xmlns:r="http://schemas.openxmlformats.org/officeDocument/2006/relationships" xmlns:p14="http://schemas.microsoft.com/office/powerpoint/2010/main" xmlns:p15="http://schemas.microsoft.com/office/powerpoint/2012/main" xmlns:mc="http://schemas.openxmlformats.org/markup-compatibility/2006" type="title" preserve="1">
+<p:sldLayout xmlns:a="http://schemas.openxmlformats.org/drawingml/2006/main" xmlns:r="http://schemas.openxmlformats.org/officeDocument/2006/relationships" xmlns:p="http://schemas.openxmlformats.org/presentationml/2006/main" xmlns:m="http://schemas.openxmlformats.org/officeDocument/2006/math" xmlns:w="http://schemas.openxmlformats.org/wordprocessingml/2006/main" matchingName="" preserve="1" showMasterPhAnim="0" showMasterSp="1" type="title" userDrawn="1">
   <p:cSld name="Diapositivo de título">
     <p:bg>
-      <p:bgPr>
+      <p:bgPr shadeToTitle="0">
         <a:solidFill>
           <a:srgbClr val="FFFFFF"/>
         </a:solidFill>
@@ -966,7 +1112,7 @@
         <p:cNvGrpSpPr/>
         <p:nvPr/>
       </p:nvGrpSpPr>
-      <p:grpSpPr>
+      <p:grpSpPr bwMode="auto">
         <a:xfrm>
           <a:off x="0" y="0"/>
           <a:ext cx="0" cy="0"/>
@@ -976,7 +1122,7 @@
       </p:grpSpPr>
       <p:sp>
         <p:nvSpPr>
-          <p:cNvPr id="2" name="PlaceHolder 1"/>
+          <p:cNvPr id="363117676" name="PlaceHolder 1"/>
           <p:cNvSpPr>
             <a:spLocks noGrp="1"/>
           </p:cNvSpPr>
@@ -984,7 +1130,7 @@
             <p:ph type="title"/>
           </p:nvPr>
         </p:nvSpPr>
-        <p:spPr>
+        <p:spPr bwMode="auto">
           <a:xfrm>
             <a:off x="1523880" y="1122480"/>
             <a:ext cx="9143640" cy="2387160"/>
@@ -1011,8 +1157,6 @@
                 <a:solidFill>
                   <a:schemeClr val="dk1"/>
                 </a:solidFill>
-                <a:effectLst/>
-                <a:uFillTx/>
                 <a:latin typeface="Arial"/>
                 <a:ea typeface="Arial"/>
               </a:defRPr>
@@ -1024,14 +1168,13 @@
                 <a:spcPct val="90000"/>
               </a:lnSpc>
               <a:buNone/>
+              <a:defRPr/>
             </a:pPr>
             <a:r>
               <a:rPr lang="pt-BR" sz="6000" b="0" u="none" strike="noStrike">
                 <a:solidFill>
                   <a:schemeClr val="dk1"/>
                 </a:solidFill>
-                <a:effectLst/>
-                <a:uFillTx/>
                 <a:latin typeface="Arial"/>
                 <a:ea typeface="Arial"/>
               </a:rPr>
@@ -1041,8 +1184,6 @@
               <a:solidFill>
                 <a:schemeClr val="dk1"/>
               </a:solidFill>
-              <a:effectLst/>
-              <a:uFillTx/>
               <a:latin typeface="Arial"/>
             </a:endParaRPr>
           </a:p>
@@ -1050,7 +1191,7 @@
       </p:sp>
       <p:sp>
         <p:nvSpPr>
-          <p:cNvPr id="3" name="PlaceHolder 2"/>
+          <p:cNvPr id="703133120" name="PlaceHolder 2"/>
           <p:cNvSpPr>
             <a:spLocks noGrp="1"/>
           </p:cNvSpPr>
@@ -1058,7 +1199,7 @@
             <p:ph type="dt" idx="1"/>
           </p:nvPr>
         </p:nvSpPr>
-        <p:spPr>
+        <p:spPr bwMode="auto">
           <a:xfrm>
             <a:off x="838080" y="6356520"/>
             <a:ext cx="2742840" cy="364680"/>
@@ -1087,8 +1228,6 @@
                     <a:tint val="75000"/>
                   </a:schemeClr>
                 </a:solidFill>
-                <a:effectLst/>
-                <a:uFillTx/>
                 <a:latin typeface="Arial"/>
                 <a:ea typeface="Arial"/>
               </a:defRPr>
@@ -1100,6 +1239,7 @@
                 <a:spcPct val="100000"/>
               </a:lnSpc>
               <a:buNone/>
+              <a:defRPr/>
             </a:pPr>
             <a:r>
               <a:rPr lang="pt-BR" sz="1200" b="0" u="none" strike="noStrike">
@@ -1108,8 +1248,6 @@
                     <a:tint val="75000"/>
                   </a:schemeClr>
                 </a:solidFill>
-                <a:effectLst/>
-                <a:uFillTx/>
                 <a:latin typeface="Arial"/>
                 <a:ea typeface="Arial"/>
               </a:rPr>
@@ -1119,8 +1257,6 @@
               <a:solidFill>
                 <a:srgbClr val="000000"/>
               </a:solidFill>
-              <a:effectLst/>
-              <a:uFillTx/>
               <a:latin typeface="Times New Roman"/>
             </a:endParaRPr>
           </a:p>
@@ -1128,7 +1264,7 @@
       </p:sp>
       <p:sp>
         <p:nvSpPr>
-          <p:cNvPr id="4" name="PlaceHolder 3"/>
+          <p:cNvPr id="691705878" name="PlaceHolder 3"/>
           <p:cNvSpPr>
             <a:spLocks noGrp="1"/>
           </p:cNvSpPr>
@@ -1136,7 +1272,7 @@
             <p:ph type="ftr" idx="2"/>
           </p:nvPr>
         </p:nvSpPr>
-        <p:spPr>
+        <p:spPr bwMode="auto">
           <a:xfrm>
             <a:off x="4038480" y="6356520"/>
             <a:ext cx="4114440" cy="364680"/>
@@ -1160,8 +1296,6 @@
                 <a:solidFill>
                   <a:srgbClr val="000000"/>
                 </a:solidFill>
-                <a:effectLst/>
-                <a:uFillTx/>
                 <a:latin typeface="Times New Roman"/>
               </a:defRPr>
             </a:lvl1pPr>
@@ -1169,14 +1303,13 @@
           <a:p>
             <a:pPr indent="0" algn="ctr">
               <a:buNone/>
+              <a:defRPr/>
             </a:pPr>
             <a:r>
               <a:rPr lang="pt-BR" sz="1400" b="0" u="none" strike="noStrike">
                 <a:solidFill>
                   <a:srgbClr val="000000"/>
                 </a:solidFill>
-                <a:effectLst/>
-                <a:uFillTx/>
                 <a:latin typeface="Times New Roman"/>
               </a:rPr>
               <a:t>&lt;rodapé&gt;</a:t>
@@ -1185,8 +1318,6 @@
               <a:solidFill>
                 <a:srgbClr val="000000"/>
               </a:solidFill>
-              <a:effectLst/>
-              <a:uFillTx/>
               <a:latin typeface="Times New Roman"/>
             </a:endParaRPr>
           </a:p>
@@ -1194,7 +1325,7 @@
       </p:sp>
       <p:sp>
         <p:nvSpPr>
-          <p:cNvPr id="5" name="PlaceHolder 4"/>
+          <p:cNvPr id="920763694" name="PlaceHolder 4"/>
           <p:cNvSpPr>
             <a:spLocks noGrp="1"/>
           </p:cNvSpPr>
@@ -1202,7 +1333,7 @@
             <p:ph type="sldNum" idx="3"/>
           </p:nvPr>
         </p:nvSpPr>
-        <p:spPr>
+        <p:spPr bwMode="auto">
           <a:xfrm>
             <a:off x="8610480" y="6356520"/>
             <a:ext cx="2742840" cy="364680"/>
@@ -1231,8 +1362,6 @@
                     <a:tint val="75000"/>
                   </a:schemeClr>
                 </a:solidFill>
-                <a:effectLst/>
-                <a:uFillTx/>
                 <a:latin typeface="Arial"/>
                 <a:ea typeface="Arial"/>
               </a:defRPr>
@@ -1244,6 +1373,7 @@
                 <a:spcPct val="100000"/>
               </a:lnSpc>
               <a:buNone/>
+              <a:defRPr/>
             </a:pPr>
             <a:fld id="{C52D9B73-794C-4426-A138-B5AB627A5461}" type="slidenum">
               <a:rPr lang="pt-BR" sz="1200" b="0" u="none" strike="noStrike">
@@ -1252,8 +1382,6 @@
                     <a:tint val="75000"/>
                   </a:schemeClr>
                 </a:solidFill>
-                <a:effectLst/>
-                <a:uFillTx/>
                 <a:latin typeface="Arial"/>
                 <a:ea typeface="Arial"/>
               </a:rPr>
@@ -1263,8 +1391,6 @@
               <a:solidFill>
                 <a:srgbClr val="000000"/>
               </a:solidFill>
-              <a:effectLst/>
-              <a:uFillTx/>
               <a:latin typeface="Times New Roman"/>
             </a:endParaRPr>
           </a:p>
@@ -1272,7 +1398,7 @@
       </p:sp>
       <p:sp>
         <p:nvSpPr>
-          <p:cNvPr id="6" name="PlaceHolder 5"/>
+          <p:cNvPr id="391605409" name="PlaceHolder 5"/>
           <p:cNvSpPr>
             <a:spLocks noGrp="1"/>
           </p:cNvSpPr>
@@ -1280,7 +1406,7 @@
             <p:ph type="body"/>
           </p:nvPr>
         </p:nvSpPr>
-        <p:spPr>
+        <p:spPr bwMode="auto">
           <a:xfrm>
             <a:off x="609480" y="1604520"/>
             <a:ext cx="10972440" cy="3977280"/>
@@ -1314,8 +1440,6 @@
                 <a:solidFill>
                   <a:schemeClr val="dk1"/>
                 </a:solidFill>
-                <a:effectLst/>
-                <a:uFillTx/>
                 <a:latin typeface="Arial"/>
               </a:defRPr>
             </a:lvl1pPr>
@@ -1330,14 +1454,12 @@
                 <a:srgbClr val="000000"/>
               </a:buClr>
               <a:buSzPct val="75000"/>
-              <a:buFont typeface="Symbol" charset="2"/>
+              <a:buFont typeface="Symbol"/>
               <a:buChar char=""/>
               <a:defRPr lang="pt-BR" sz="2400" b="0" u="none" strike="noStrike">
                 <a:solidFill>
                   <a:schemeClr val="dk1"/>
                 </a:solidFill>
-                <a:effectLst/>
-                <a:uFillTx/>
                 <a:latin typeface="Arial"/>
               </a:defRPr>
             </a:lvl2pPr>
@@ -1352,14 +1474,12 @@
                 <a:srgbClr val="000000"/>
               </a:buClr>
               <a:buSzPct val="45000"/>
-              <a:buFont typeface="Wingdings" charset="2"/>
+              <a:buFont typeface="Wingdings"/>
               <a:buChar char=""/>
               <a:defRPr lang="pt-BR" sz="2000" b="0" u="none" strike="noStrike">
                 <a:solidFill>
                   <a:schemeClr val="dk1"/>
                 </a:solidFill>
-                <a:effectLst/>
-                <a:uFillTx/>
                 <a:latin typeface="Arial"/>
               </a:defRPr>
             </a:lvl3pPr>
@@ -1374,14 +1494,12 @@
                 <a:srgbClr val="000000"/>
               </a:buClr>
               <a:buSzPct val="75000"/>
-              <a:buFont typeface="Symbol" charset="2"/>
+              <a:buFont typeface="Symbol"/>
               <a:buChar char=""/>
               <a:defRPr lang="pt-BR" sz="1800" b="0" u="none" strike="noStrike">
                 <a:solidFill>
                   <a:schemeClr val="dk1"/>
                 </a:solidFill>
-                <a:effectLst/>
-                <a:uFillTx/>
                 <a:latin typeface="Arial"/>
               </a:defRPr>
             </a:lvl4pPr>
@@ -1396,14 +1514,12 @@
                 <a:srgbClr val="000000"/>
               </a:buClr>
               <a:buSzPct val="45000"/>
-              <a:buFont typeface="Wingdings" charset="2"/>
+              <a:buFont typeface="Wingdings"/>
               <a:buChar char=""/>
               <a:defRPr lang="pt-BR" sz="1800" b="0" u="none" strike="noStrike">
                 <a:solidFill>
                   <a:schemeClr val="dk1"/>
                 </a:solidFill>
-                <a:effectLst/>
-                <a:uFillTx/>
                 <a:latin typeface="Arial"/>
               </a:defRPr>
             </a:lvl5pPr>
@@ -1418,14 +1534,12 @@
                 <a:srgbClr val="000000"/>
               </a:buClr>
               <a:buSzPct val="45000"/>
-              <a:buFont typeface="Wingdings" charset="2"/>
+              <a:buFont typeface="Wingdings"/>
               <a:buChar char=""/>
               <a:defRPr lang="pt-BR" sz="2000" b="0" u="none" strike="noStrike">
                 <a:solidFill>
                   <a:schemeClr val="dk1"/>
                 </a:solidFill>
-                <a:effectLst/>
-                <a:uFillTx/>
                 <a:latin typeface="Arial"/>
               </a:defRPr>
             </a:lvl6pPr>
@@ -1440,14 +1554,12 @@
                 <a:srgbClr val="000000"/>
               </a:buClr>
               <a:buSzPct val="45000"/>
-              <a:buFont typeface="Wingdings" charset="2"/>
+              <a:buFont typeface="Wingdings"/>
               <a:buChar char=""/>
               <a:defRPr lang="pt-BR" sz="2000" b="0" u="none" strike="noStrike">
                 <a:solidFill>
                   <a:schemeClr val="dk1"/>
                 </a:solidFill>
-                <a:effectLst/>
-                <a:uFillTx/>
                 <a:latin typeface="Arial"/>
               </a:defRPr>
             </a:lvl7pPr>
@@ -1465,14 +1577,13 @@
               </a:buClr>
               <a:buFont typeface="Arial"/>
               <a:buChar char="•"/>
+              <a:defRPr/>
             </a:pPr>
             <a:r>
               <a:rPr lang="pt-BR" sz="2800" b="0" u="none" strike="noStrike">
                 <a:solidFill>
                   <a:schemeClr val="dk1"/>
                 </a:solidFill>
-                <a:effectLst/>
-                <a:uFillTx/>
                 <a:latin typeface="Arial"/>
               </a:rPr>
               <a:t>Clique para editar o formato de texto dos tópicos</a:t>
@@ -1481,8 +1592,6 @@
               <a:solidFill>
                 <a:schemeClr val="dk1"/>
               </a:solidFill>
-              <a:effectLst/>
-              <a:uFillTx/>
               <a:latin typeface="Arial"/>
             </a:endParaRPr>
           </a:p>
@@ -1498,16 +1607,15 @@
                 <a:srgbClr val="000000"/>
               </a:buClr>
               <a:buSzPct val="75000"/>
-              <a:buFont typeface="Symbol" charset="2"/>
+              <a:buFont typeface="Symbol"/>
               <a:buChar char=""/>
+              <a:defRPr/>
             </a:pPr>
             <a:r>
               <a:rPr lang="pt-BR" sz="2400" b="0" u="none" strike="noStrike">
                 <a:solidFill>
                   <a:schemeClr val="dk1"/>
                 </a:solidFill>
-                <a:effectLst/>
-                <a:uFillTx/>
                 <a:latin typeface="Arial"/>
               </a:rPr>
               <a:t>2.º nível de tópicos</a:t>
@@ -1516,8 +1624,6 @@
               <a:solidFill>
                 <a:schemeClr val="dk1"/>
               </a:solidFill>
-              <a:effectLst/>
-              <a:uFillTx/>
               <a:latin typeface="Arial"/>
             </a:endParaRPr>
           </a:p>
@@ -1533,16 +1639,15 @@
                 <a:srgbClr val="000000"/>
               </a:buClr>
               <a:buSzPct val="45000"/>
-              <a:buFont typeface="Wingdings" charset="2"/>
+              <a:buFont typeface="Wingdings"/>
               <a:buChar char=""/>
+              <a:defRPr/>
             </a:pPr>
             <a:r>
               <a:rPr lang="pt-BR" sz="2000" b="0" u="none" strike="noStrike">
                 <a:solidFill>
                   <a:schemeClr val="dk1"/>
                 </a:solidFill>
-                <a:effectLst/>
-                <a:uFillTx/>
                 <a:latin typeface="Arial"/>
               </a:rPr>
               <a:t>3.º nível de tópicos</a:t>
@@ -1551,8 +1656,6 @@
               <a:solidFill>
                 <a:schemeClr val="dk1"/>
               </a:solidFill>
-              <a:effectLst/>
-              <a:uFillTx/>
               <a:latin typeface="Arial"/>
             </a:endParaRPr>
           </a:p>
@@ -1568,16 +1671,15 @@
                 <a:srgbClr val="000000"/>
               </a:buClr>
               <a:buSzPct val="75000"/>
-              <a:buFont typeface="Symbol" charset="2"/>
+              <a:buFont typeface="Symbol"/>
               <a:buChar char=""/>
+              <a:defRPr/>
             </a:pPr>
             <a:r>
               <a:rPr lang="pt-BR" sz="1800" b="0" u="none" strike="noStrike">
                 <a:solidFill>
                   <a:schemeClr val="dk1"/>
                 </a:solidFill>
-                <a:effectLst/>
-                <a:uFillTx/>
                 <a:latin typeface="Arial"/>
               </a:rPr>
               <a:t>4.º nível de tópicos</a:t>
@@ -1586,8 +1688,6 @@
               <a:solidFill>
                 <a:schemeClr val="dk1"/>
               </a:solidFill>
-              <a:effectLst/>
-              <a:uFillTx/>
               <a:latin typeface="Arial"/>
             </a:endParaRPr>
           </a:p>
@@ -1603,16 +1703,15 @@
                 <a:srgbClr val="000000"/>
               </a:buClr>
               <a:buSzPct val="45000"/>
-              <a:buFont typeface="Wingdings" charset="2"/>
+              <a:buFont typeface="Wingdings"/>
               <a:buChar char=""/>
+              <a:defRPr/>
             </a:pPr>
             <a:r>
               <a:rPr lang="pt-BR" sz="1800" b="0" u="none" strike="noStrike">
                 <a:solidFill>
                   <a:schemeClr val="dk1"/>
                 </a:solidFill>
-                <a:effectLst/>
-                <a:uFillTx/>
                 <a:latin typeface="Arial"/>
               </a:rPr>
               <a:t>5.º nível de tópicos</a:t>
@@ -1621,8 +1720,6 @@
               <a:solidFill>
                 <a:schemeClr val="dk1"/>
               </a:solidFill>
-              <a:effectLst/>
-              <a:uFillTx/>
               <a:latin typeface="Arial"/>
             </a:endParaRPr>
           </a:p>
@@ -1638,16 +1735,15 @@
                 <a:srgbClr val="000000"/>
               </a:buClr>
               <a:buSzPct val="45000"/>
-              <a:buFont typeface="Wingdings" charset="2"/>
+              <a:buFont typeface="Wingdings"/>
               <a:buChar char=""/>
+              <a:defRPr/>
             </a:pPr>
             <a:r>
               <a:rPr lang="pt-BR" sz="2000" b="0" u="none" strike="noStrike">
                 <a:solidFill>
                   <a:schemeClr val="dk1"/>
                 </a:solidFill>
-                <a:effectLst/>
-                <a:uFillTx/>
                 <a:latin typeface="Arial"/>
               </a:rPr>
               <a:t>6.º nível de tópicos</a:t>
@@ -1656,8 +1752,6 @@
               <a:solidFill>
                 <a:schemeClr val="dk1"/>
               </a:solidFill>
-              <a:effectLst/>
-              <a:uFillTx/>
               <a:latin typeface="Arial"/>
             </a:endParaRPr>
           </a:p>
@@ -1673,16 +1767,15 @@
                 <a:srgbClr val="000000"/>
               </a:buClr>
               <a:buSzPct val="45000"/>
-              <a:buFont typeface="Wingdings" charset="2"/>
+              <a:buFont typeface="Wingdings"/>
               <a:buChar char=""/>
+              <a:defRPr/>
             </a:pPr>
             <a:r>
               <a:rPr lang="pt-BR" sz="2000" b="0" u="none" strike="noStrike">
                 <a:solidFill>
                   <a:schemeClr val="dk1"/>
                 </a:solidFill>
-                <a:effectLst/>
-                <a:uFillTx/>
                 <a:latin typeface="Arial"/>
               </a:rPr>
               <a:t>7.º nível de tópicos</a:t>
@@ -1691,8 +1784,6 @@
               <a:solidFill>
                 <a:schemeClr val="dk1"/>
               </a:solidFill>
-              <a:effectLst/>
-              <a:uFillTx/>
               <a:latin typeface="Arial"/>
             </a:endParaRPr>
           </a:p>
@@ -1700,14 +1791,17 @@
       </p:sp>
     </p:spTree>
   </p:cSld>
+  <p:clrMapOvr>
+    <a:masterClrMapping/>
+  </p:clrMapOvr>
 </p:sldLayout>
 </file>
 
 <file path=ppt/slideLayouts/slideLayout10.xml><?xml version="1.0" encoding="utf-8"?>
-<p:sldLayout xmlns:a="http://schemas.openxmlformats.org/drawingml/2006/main" xmlns:p="http://schemas.openxmlformats.org/presentationml/2006/main" xmlns:r="http://schemas.openxmlformats.org/officeDocument/2006/relationships" xmlns:p14="http://schemas.microsoft.com/office/powerpoint/2010/main" xmlns:p15="http://schemas.microsoft.com/office/powerpoint/2012/main" xmlns:mc="http://schemas.openxmlformats.org/markup-compatibility/2006" type="blank" preserve="1">
+<p:sldLayout xmlns:a="http://schemas.openxmlformats.org/drawingml/2006/main" xmlns:r="http://schemas.openxmlformats.org/officeDocument/2006/relationships" xmlns:p="http://schemas.openxmlformats.org/presentationml/2006/main" xmlns:m="http://schemas.openxmlformats.org/officeDocument/2006/math" xmlns:w="http://schemas.openxmlformats.org/wordprocessingml/2006/main" matchingName="" preserve="1" showMasterPhAnim="0" showMasterSp="1" type="blank" userDrawn="1">
   <p:cSld name="Conteúdo com Legenda">
     <p:bg>
-      <p:bgPr>
+      <p:bgPr shadeToTitle="0">
         <a:solidFill>
           <a:srgbClr val="FFFFFF"/>
         </a:solidFill>
@@ -1719,7 +1813,7 @@
         <p:cNvGrpSpPr/>
         <p:nvPr/>
       </p:nvGrpSpPr>
-      <p:grpSpPr>
+      <p:grpSpPr bwMode="auto">
         <a:xfrm>
           <a:off x="0" y="0"/>
           <a:ext cx="0" cy="0"/>
@@ -1729,7 +1823,7 @@
       </p:grpSpPr>
       <p:sp>
         <p:nvSpPr>
-          <p:cNvPr id="48" name="PlaceHolder 1"/>
+          <p:cNvPr id="804430053" name="PlaceHolder 1"/>
           <p:cNvSpPr>
             <a:spLocks noGrp="1"/>
           </p:cNvSpPr>
@@ -1737,9 +1831,9 @@
             <p:ph type="title"/>
           </p:nvPr>
         </p:nvSpPr>
-        <p:spPr>
+        <p:spPr bwMode="auto">
           <a:xfrm>
-            <a:off x="839880" y="457200"/>
+            <a:off x="839879" y="457200"/>
             <a:ext cx="3931920" cy="1599840"/>
           </a:xfrm>
           <a:prstGeom prst="rect">
@@ -1764,8 +1858,6 @@
                 <a:solidFill>
                   <a:schemeClr val="dk1"/>
                 </a:solidFill>
-                <a:effectLst/>
-                <a:uFillTx/>
                 <a:latin typeface="Arial"/>
                 <a:ea typeface="Arial"/>
               </a:defRPr>
@@ -1777,14 +1869,13 @@
                 <a:spcPct val="90000"/>
               </a:lnSpc>
               <a:buNone/>
+              <a:defRPr/>
             </a:pPr>
             <a:r>
               <a:rPr lang="pt-BR" sz="3200" b="0" u="none" strike="noStrike">
                 <a:solidFill>
                   <a:schemeClr val="dk1"/>
                 </a:solidFill>
-                <a:effectLst/>
-                <a:uFillTx/>
                 <a:latin typeface="Arial"/>
                 <a:ea typeface="Arial"/>
               </a:rPr>
@@ -1794,8 +1885,6 @@
               <a:solidFill>
                 <a:schemeClr val="dk1"/>
               </a:solidFill>
-              <a:effectLst/>
-              <a:uFillTx/>
               <a:latin typeface="Arial"/>
             </a:endParaRPr>
           </a:p>
@@ -1803,7 +1892,7 @@
       </p:sp>
       <p:sp>
         <p:nvSpPr>
-          <p:cNvPr id="49" name="PlaceHolder 2"/>
+          <p:cNvPr id="1944465865" name="PlaceHolder 2"/>
           <p:cNvSpPr>
             <a:spLocks noGrp="1"/>
           </p:cNvSpPr>
@@ -1811,7 +1900,7 @@
             <p:ph type="body"/>
           </p:nvPr>
         </p:nvSpPr>
-        <p:spPr>
+        <p:spPr bwMode="auto">
           <a:xfrm>
             <a:off x="5183280" y="987480"/>
             <a:ext cx="6171840" cy="4873320"/>
@@ -1845,8 +1934,6 @@
                 <a:solidFill>
                   <a:schemeClr val="dk1"/>
                 </a:solidFill>
-                <a:effectLst/>
-                <a:uFillTx/>
                 <a:latin typeface="Arial"/>
                 <a:ea typeface="Arial"/>
               </a:defRPr>
@@ -1867,8 +1954,6 @@
                 <a:solidFill>
                   <a:schemeClr val="dk1"/>
                 </a:solidFill>
-                <a:effectLst/>
-                <a:uFillTx/>
                 <a:latin typeface="Arial"/>
                 <a:ea typeface="Arial"/>
               </a:defRPr>
@@ -1889,8 +1974,6 @@
                 <a:solidFill>
                   <a:schemeClr val="dk1"/>
                 </a:solidFill>
-                <a:effectLst/>
-                <a:uFillTx/>
                 <a:latin typeface="Arial"/>
                 <a:ea typeface="Arial"/>
               </a:defRPr>
@@ -1911,8 +1994,6 @@
                 <a:solidFill>
                   <a:schemeClr val="dk1"/>
                 </a:solidFill>
-                <a:effectLst/>
-                <a:uFillTx/>
                 <a:latin typeface="Arial"/>
                 <a:ea typeface="Arial"/>
               </a:defRPr>
@@ -1933,8 +2014,6 @@
                 <a:solidFill>
                   <a:schemeClr val="dk1"/>
                 </a:solidFill>
-                <a:effectLst/>
-                <a:uFillTx/>
                 <a:latin typeface="Arial"/>
                 <a:ea typeface="Arial"/>
               </a:defRPr>
@@ -1953,14 +2032,13 @@
               </a:buClr>
               <a:buFont typeface="Arial"/>
               <a:buChar char="•"/>
+              <a:defRPr/>
             </a:pPr>
             <a:r>
               <a:rPr lang="pt-BR" sz="3200" b="0" u="none" strike="noStrike">
                 <a:solidFill>
                   <a:schemeClr val="dk1"/>
                 </a:solidFill>
-                <a:effectLst/>
-                <a:uFillTx/>
                 <a:latin typeface="Arial"/>
                 <a:ea typeface="Arial"/>
               </a:rPr>
@@ -1970,8 +2048,6 @@
               <a:solidFill>
                 <a:schemeClr val="dk1"/>
               </a:solidFill>
-              <a:effectLst/>
-              <a:uFillTx/>
               <a:latin typeface="Arial"/>
             </a:endParaRPr>
           </a:p>
@@ -1988,14 +2064,13 @@
               </a:buClr>
               <a:buFont typeface="Arial"/>
               <a:buChar char="•"/>
+              <a:defRPr/>
             </a:pPr>
             <a:r>
               <a:rPr lang="pt-BR" sz="2800" b="0" u="none" strike="noStrike">
                 <a:solidFill>
                   <a:schemeClr val="dk1"/>
                 </a:solidFill>
-                <a:effectLst/>
-                <a:uFillTx/>
                 <a:latin typeface="Arial"/>
                 <a:ea typeface="Arial"/>
               </a:rPr>
@@ -2005,8 +2080,6 @@
               <a:solidFill>
                 <a:schemeClr val="dk1"/>
               </a:solidFill>
-              <a:effectLst/>
-              <a:uFillTx/>
               <a:latin typeface="Arial"/>
             </a:endParaRPr>
           </a:p>
@@ -2023,14 +2096,13 @@
               </a:buClr>
               <a:buFont typeface="Arial"/>
               <a:buChar char="•"/>
+              <a:defRPr/>
             </a:pPr>
             <a:r>
               <a:rPr lang="pt-BR" sz="2400" b="0" u="none" strike="noStrike">
                 <a:solidFill>
                   <a:schemeClr val="dk1"/>
                 </a:solidFill>
-                <a:effectLst/>
-                <a:uFillTx/>
                 <a:latin typeface="Arial"/>
                 <a:ea typeface="Arial"/>
               </a:rPr>
@@ -2040,8 +2112,6 @@
               <a:solidFill>
                 <a:schemeClr val="dk1"/>
               </a:solidFill>
-              <a:effectLst/>
-              <a:uFillTx/>
               <a:latin typeface="Arial"/>
             </a:endParaRPr>
           </a:p>
@@ -2058,14 +2128,13 @@
               </a:buClr>
               <a:buFont typeface="Arial"/>
               <a:buChar char="•"/>
+              <a:defRPr/>
             </a:pPr>
             <a:r>
               <a:rPr lang="pt-BR" sz="2000" b="0" u="none" strike="noStrike">
                 <a:solidFill>
                   <a:schemeClr val="dk1"/>
                 </a:solidFill>
-                <a:effectLst/>
-                <a:uFillTx/>
                 <a:latin typeface="Arial"/>
                 <a:ea typeface="Arial"/>
               </a:rPr>
@@ -2075,8 +2144,6 @@
               <a:solidFill>
                 <a:schemeClr val="dk1"/>
               </a:solidFill>
-              <a:effectLst/>
-              <a:uFillTx/>
               <a:latin typeface="Arial"/>
             </a:endParaRPr>
           </a:p>
@@ -2093,14 +2160,13 @@
               </a:buClr>
               <a:buFont typeface="Arial"/>
               <a:buChar char="•"/>
+              <a:defRPr/>
             </a:pPr>
             <a:r>
               <a:rPr lang="pt-BR" sz="2000" b="0" u="none" strike="noStrike">
                 <a:solidFill>
                   <a:schemeClr val="dk1"/>
                 </a:solidFill>
-                <a:effectLst/>
-                <a:uFillTx/>
                 <a:latin typeface="Arial"/>
                 <a:ea typeface="Arial"/>
               </a:rPr>
@@ -2110,8 +2176,6 @@
               <a:solidFill>
                 <a:schemeClr val="dk1"/>
               </a:solidFill>
-              <a:effectLst/>
-              <a:uFillTx/>
               <a:latin typeface="Arial"/>
             </a:endParaRPr>
           </a:p>
@@ -2119,7 +2183,7 @@
       </p:sp>
       <p:sp>
         <p:nvSpPr>
-          <p:cNvPr id="50" name="PlaceHolder 3"/>
+          <p:cNvPr id="393126950" name="PlaceHolder 3"/>
           <p:cNvSpPr>
             <a:spLocks noGrp="1"/>
           </p:cNvSpPr>
@@ -2127,9 +2191,9 @@
             <p:ph type="body"/>
           </p:nvPr>
         </p:nvSpPr>
-        <p:spPr>
+        <p:spPr bwMode="auto">
           <a:xfrm>
-            <a:off x="839880" y="2057400"/>
+            <a:off x="839879" y="2057400"/>
             <a:ext cx="3931920" cy="3811320"/>
           </a:xfrm>
           <a:prstGeom prst="rect">
@@ -2160,8 +2224,6 @@
                 <a:solidFill>
                   <a:schemeClr val="dk1"/>
                 </a:solidFill>
-                <a:effectLst/>
-                <a:uFillTx/>
                 <a:latin typeface="Arial"/>
                 <a:ea typeface="Arial"/>
               </a:defRPr>
@@ -2179,14 +2241,13 @@
               <a:tabLst>
                 <a:tab pos="0" algn="l"/>
               </a:tabLst>
+              <a:defRPr/>
             </a:pPr>
             <a:r>
               <a:rPr lang="pt-BR" sz="1600" b="0" u="none" strike="noStrike">
                 <a:solidFill>
                   <a:schemeClr val="dk1"/>
                 </a:solidFill>
-                <a:effectLst/>
-                <a:uFillTx/>
                 <a:latin typeface="Arial"/>
                 <a:ea typeface="Arial"/>
               </a:rPr>
@@ -2196,8 +2257,6 @@
               <a:solidFill>
                 <a:schemeClr val="dk1"/>
               </a:solidFill>
-              <a:effectLst/>
-              <a:uFillTx/>
               <a:latin typeface="Arial"/>
             </a:endParaRPr>
           </a:p>
@@ -2205,7 +2264,7 @@
       </p:sp>
       <p:sp>
         <p:nvSpPr>
-          <p:cNvPr id="51" name="PlaceHolder 4"/>
+          <p:cNvPr id="2053596681" name="PlaceHolder 4"/>
           <p:cNvSpPr>
             <a:spLocks noGrp="1"/>
           </p:cNvSpPr>
@@ -2213,7 +2272,7 @@
             <p:ph type="dt" idx="28"/>
           </p:nvPr>
         </p:nvSpPr>
-        <p:spPr>
+        <p:spPr bwMode="auto">
           <a:xfrm>
             <a:off x="838080" y="6356520"/>
             <a:ext cx="2742840" cy="364680"/>
@@ -2242,8 +2301,6 @@
                     <a:tint val="75000"/>
                   </a:schemeClr>
                 </a:solidFill>
-                <a:effectLst/>
-                <a:uFillTx/>
                 <a:latin typeface="Arial"/>
                 <a:ea typeface="Arial"/>
               </a:defRPr>
@@ -2255,6 +2312,7 @@
                 <a:spcPct val="100000"/>
               </a:lnSpc>
               <a:buNone/>
+              <a:defRPr/>
             </a:pPr>
             <a:r>
               <a:rPr lang="pt-BR" sz="1200" b="0" u="none" strike="noStrike">
@@ -2263,8 +2321,6 @@
                     <a:tint val="75000"/>
                   </a:schemeClr>
                 </a:solidFill>
-                <a:effectLst/>
-                <a:uFillTx/>
                 <a:latin typeface="Arial"/>
                 <a:ea typeface="Arial"/>
               </a:rPr>
@@ -2274,8 +2330,6 @@
               <a:solidFill>
                 <a:srgbClr val="000000"/>
               </a:solidFill>
-              <a:effectLst/>
-              <a:uFillTx/>
               <a:latin typeface="Times New Roman"/>
             </a:endParaRPr>
           </a:p>
@@ -2283,7 +2337,7 @@
       </p:sp>
       <p:sp>
         <p:nvSpPr>
-          <p:cNvPr id="52" name="PlaceHolder 5"/>
+          <p:cNvPr id="512309032" name="PlaceHolder 5"/>
           <p:cNvSpPr>
             <a:spLocks noGrp="1"/>
           </p:cNvSpPr>
@@ -2291,7 +2345,7 @@
             <p:ph type="ftr" idx="29"/>
           </p:nvPr>
         </p:nvSpPr>
-        <p:spPr>
+        <p:spPr bwMode="auto">
           <a:xfrm>
             <a:off x="4038480" y="6356520"/>
             <a:ext cx="4114440" cy="364680"/>
@@ -2315,8 +2369,6 @@
                 <a:solidFill>
                   <a:srgbClr val="000000"/>
                 </a:solidFill>
-                <a:effectLst/>
-                <a:uFillTx/>
                 <a:latin typeface="Times New Roman"/>
               </a:defRPr>
             </a:lvl1pPr>
@@ -2324,14 +2376,13 @@
           <a:p>
             <a:pPr indent="0" algn="ctr">
               <a:buNone/>
+              <a:defRPr/>
             </a:pPr>
             <a:r>
               <a:rPr lang="pt-BR" sz="1400" b="0" u="none" strike="noStrike">
                 <a:solidFill>
                   <a:srgbClr val="000000"/>
                 </a:solidFill>
-                <a:effectLst/>
-                <a:uFillTx/>
                 <a:latin typeface="Times New Roman"/>
               </a:rPr>
               <a:t>&lt;rodapé&gt;</a:t>
@@ -2340,8 +2391,6 @@
               <a:solidFill>
                 <a:srgbClr val="000000"/>
               </a:solidFill>
-              <a:effectLst/>
-              <a:uFillTx/>
               <a:latin typeface="Times New Roman"/>
             </a:endParaRPr>
           </a:p>
@@ -2349,7 +2398,7 @@
       </p:sp>
       <p:sp>
         <p:nvSpPr>
-          <p:cNvPr id="53" name="PlaceHolder 6"/>
+          <p:cNvPr id="1842481286" name="PlaceHolder 6"/>
           <p:cNvSpPr>
             <a:spLocks noGrp="1"/>
           </p:cNvSpPr>
@@ -2357,7 +2406,7 @@
             <p:ph type="sldNum" idx="30"/>
           </p:nvPr>
         </p:nvSpPr>
-        <p:spPr>
+        <p:spPr bwMode="auto">
           <a:xfrm>
             <a:off x="8610480" y="6356520"/>
             <a:ext cx="2742840" cy="364680"/>
@@ -2386,8 +2435,6 @@
                     <a:tint val="75000"/>
                   </a:schemeClr>
                 </a:solidFill>
-                <a:effectLst/>
-                <a:uFillTx/>
                 <a:latin typeface="Arial"/>
                 <a:ea typeface="Arial"/>
               </a:defRPr>
@@ -2399,6 +2446,7 @@
                 <a:spcPct val="100000"/>
               </a:lnSpc>
               <a:buNone/>
+              <a:defRPr/>
             </a:pPr>
             <a:fld id="{D246CB51-DBFB-4016-9ABF-976A861A7A24}" type="slidenum">
               <a:rPr lang="pt-BR" sz="1200" b="0" u="none" strike="noStrike">
@@ -2407,8 +2455,6 @@
                     <a:tint val="75000"/>
                   </a:schemeClr>
                 </a:solidFill>
-                <a:effectLst/>
-                <a:uFillTx/>
                 <a:latin typeface="Arial"/>
                 <a:ea typeface="Arial"/>
               </a:rPr>
@@ -2418,8 +2464,6 @@
               <a:solidFill>
                 <a:srgbClr val="000000"/>
               </a:solidFill>
-              <a:effectLst/>
-              <a:uFillTx/>
               <a:latin typeface="Times New Roman"/>
             </a:endParaRPr>
           </a:p>
@@ -2427,14 +2471,17 @@
       </p:sp>
     </p:spTree>
   </p:cSld>
+  <p:clrMapOvr>
+    <a:masterClrMapping/>
+  </p:clrMapOvr>
 </p:sldLayout>
 </file>
 
 <file path=ppt/slideLayouts/slideLayout11.xml><?xml version="1.0" encoding="utf-8"?>
-<p:sldLayout xmlns:a="http://schemas.openxmlformats.org/drawingml/2006/main" xmlns:p="http://schemas.openxmlformats.org/presentationml/2006/main" xmlns:r="http://schemas.openxmlformats.org/officeDocument/2006/relationships" xmlns:p14="http://schemas.microsoft.com/office/powerpoint/2010/main" xmlns:p15="http://schemas.microsoft.com/office/powerpoint/2012/main" xmlns:mc="http://schemas.openxmlformats.org/markup-compatibility/2006" type="blank" preserve="1">
+<p:sldLayout xmlns:a="http://schemas.openxmlformats.org/drawingml/2006/main" xmlns:r="http://schemas.openxmlformats.org/officeDocument/2006/relationships" xmlns:p="http://schemas.openxmlformats.org/presentationml/2006/main" xmlns:m="http://schemas.openxmlformats.org/officeDocument/2006/math" xmlns:w="http://schemas.openxmlformats.org/wordprocessingml/2006/main" matchingName="" preserve="1" showMasterPhAnim="0" showMasterSp="1" type="blank" userDrawn="1">
   <p:cSld name="Imagem com Legenda">
     <p:bg>
-      <p:bgPr>
+      <p:bgPr shadeToTitle="0">
         <a:solidFill>
           <a:srgbClr val="FFFFFF"/>
         </a:solidFill>
@@ -2446,7 +2493,7 @@
         <p:cNvGrpSpPr/>
         <p:nvPr/>
       </p:nvGrpSpPr>
-      <p:grpSpPr>
+      <p:grpSpPr bwMode="auto">
         <a:xfrm>
           <a:off x="0" y="0"/>
           <a:ext cx="0" cy="0"/>
@@ -2456,7 +2503,7 @@
       </p:grpSpPr>
       <p:sp>
         <p:nvSpPr>
-          <p:cNvPr id="54" name="PlaceHolder 1"/>
+          <p:cNvPr id="440905788" name="PlaceHolder 1"/>
           <p:cNvSpPr>
             <a:spLocks noGrp="1"/>
           </p:cNvSpPr>
@@ -2464,9 +2511,9 @@
             <p:ph type="title"/>
           </p:nvPr>
         </p:nvSpPr>
-        <p:spPr>
+        <p:spPr bwMode="auto">
           <a:xfrm>
-            <a:off x="839880" y="457200"/>
+            <a:off x="839879" y="457200"/>
             <a:ext cx="3931920" cy="1599840"/>
           </a:xfrm>
           <a:prstGeom prst="rect">
@@ -2491,8 +2538,6 @@
                 <a:solidFill>
                   <a:schemeClr val="dk1"/>
                 </a:solidFill>
-                <a:effectLst/>
-                <a:uFillTx/>
                 <a:latin typeface="Arial"/>
                 <a:ea typeface="Arial"/>
               </a:defRPr>
@@ -2504,14 +2549,13 @@
                 <a:spcPct val="90000"/>
               </a:lnSpc>
               <a:buNone/>
+              <a:defRPr/>
             </a:pPr>
             <a:r>
               <a:rPr lang="pt-BR" sz="3200" b="0" u="none" strike="noStrike">
                 <a:solidFill>
                   <a:schemeClr val="dk1"/>
                 </a:solidFill>
-                <a:effectLst/>
-                <a:uFillTx/>
                 <a:latin typeface="Arial"/>
                 <a:ea typeface="Arial"/>
               </a:rPr>
@@ -2521,8 +2565,6 @@
               <a:solidFill>
                 <a:schemeClr val="dk1"/>
               </a:solidFill>
-              <a:effectLst/>
-              <a:uFillTx/>
               <a:latin typeface="Arial"/>
             </a:endParaRPr>
           </a:p>
@@ -2530,7 +2572,7 @@
       </p:sp>
       <p:sp>
         <p:nvSpPr>
-          <p:cNvPr id="55" name="PlaceHolder 2"/>
+          <p:cNvPr id="1311788162" name="PlaceHolder 2"/>
           <p:cNvSpPr>
             <a:spLocks noGrp="1"/>
           </p:cNvSpPr>
@@ -2538,7 +2580,7 @@
             <p:ph type="body"/>
           </p:nvPr>
         </p:nvSpPr>
-        <p:spPr>
+        <p:spPr bwMode="auto">
           <a:xfrm>
             <a:off x="5183280" y="987480"/>
             <a:ext cx="6171840" cy="4873320"/>
@@ -2568,8 +2610,6 @@
                 <a:solidFill>
                   <a:schemeClr val="dk1"/>
                 </a:solidFill>
-                <a:effectLst/>
-                <a:uFillTx/>
                 <a:latin typeface="Arial"/>
                 <a:ea typeface="Arial"/>
               </a:defRPr>
@@ -2584,14 +2624,13 @@
               <a:tabLst>
                 <a:tab pos="0" algn="l"/>
               </a:tabLst>
+              <a:defRPr/>
             </a:pPr>
             <a:r>
               <a:rPr lang="pt-BR" sz="3200" b="0" u="none" strike="noStrike">
                 <a:solidFill>
                   <a:schemeClr val="dk1"/>
                 </a:solidFill>
-                <a:effectLst/>
-                <a:uFillTx/>
                 <a:latin typeface="Arial"/>
                 <a:ea typeface="Arial"/>
               </a:rPr>
@@ -2601,8 +2640,6 @@
               <a:solidFill>
                 <a:schemeClr val="dk1"/>
               </a:solidFill>
-              <a:effectLst/>
-              <a:uFillTx/>
               <a:latin typeface="Arial"/>
             </a:endParaRPr>
           </a:p>
@@ -2610,7 +2647,7 @@
       </p:sp>
       <p:sp>
         <p:nvSpPr>
-          <p:cNvPr id="56" name="PlaceHolder 3"/>
+          <p:cNvPr id="790365473" name="PlaceHolder 3"/>
           <p:cNvSpPr>
             <a:spLocks noGrp="1"/>
           </p:cNvSpPr>
@@ -2618,9 +2655,9 @@
             <p:ph type="body"/>
           </p:nvPr>
         </p:nvSpPr>
-        <p:spPr>
+        <p:spPr bwMode="auto">
           <a:xfrm>
-            <a:off x="839880" y="2057400"/>
+            <a:off x="839879" y="2057400"/>
             <a:ext cx="3931920" cy="3811320"/>
           </a:xfrm>
           <a:prstGeom prst="rect">
@@ -2651,8 +2688,6 @@
                 <a:solidFill>
                   <a:schemeClr val="dk1"/>
                 </a:solidFill>
-                <a:effectLst/>
-                <a:uFillTx/>
                 <a:latin typeface="Arial"/>
                 <a:ea typeface="Arial"/>
               </a:defRPr>
@@ -2670,14 +2705,13 @@
               <a:tabLst>
                 <a:tab pos="0" algn="l"/>
               </a:tabLst>
+              <a:defRPr/>
             </a:pPr>
             <a:r>
               <a:rPr lang="pt-BR" sz="1600" b="0" u="none" strike="noStrike">
                 <a:solidFill>
                   <a:schemeClr val="dk1"/>
                 </a:solidFill>
-                <a:effectLst/>
-                <a:uFillTx/>
                 <a:latin typeface="Arial"/>
                 <a:ea typeface="Arial"/>
               </a:rPr>
@@ -2687,8 +2721,6 @@
               <a:solidFill>
                 <a:schemeClr val="dk1"/>
               </a:solidFill>
-              <a:effectLst/>
-              <a:uFillTx/>
               <a:latin typeface="Arial"/>
             </a:endParaRPr>
           </a:p>
@@ -2696,7 +2728,7 @@
       </p:sp>
       <p:sp>
         <p:nvSpPr>
-          <p:cNvPr id="57" name="PlaceHolder 4"/>
+          <p:cNvPr id="107168517" name="PlaceHolder 4"/>
           <p:cNvSpPr>
             <a:spLocks noGrp="1"/>
           </p:cNvSpPr>
@@ -2704,7 +2736,7 @@
             <p:ph type="dt" idx="31"/>
           </p:nvPr>
         </p:nvSpPr>
-        <p:spPr>
+        <p:spPr bwMode="auto">
           <a:xfrm>
             <a:off x="838080" y="6356520"/>
             <a:ext cx="2742840" cy="364680"/>
@@ -2733,8 +2765,6 @@
                     <a:tint val="75000"/>
                   </a:schemeClr>
                 </a:solidFill>
-                <a:effectLst/>
-                <a:uFillTx/>
                 <a:latin typeface="Arial"/>
                 <a:ea typeface="Arial"/>
               </a:defRPr>
@@ -2746,6 +2776,7 @@
                 <a:spcPct val="100000"/>
               </a:lnSpc>
               <a:buNone/>
+              <a:defRPr/>
             </a:pPr>
             <a:r>
               <a:rPr lang="pt-BR" sz="1200" b="0" u="none" strike="noStrike">
@@ -2754,8 +2785,6 @@
                     <a:tint val="75000"/>
                   </a:schemeClr>
                 </a:solidFill>
-                <a:effectLst/>
-                <a:uFillTx/>
                 <a:latin typeface="Arial"/>
                 <a:ea typeface="Arial"/>
               </a:rPr>
@@ -2765,8 +2794,6 @@
               <a:solidFill>
                 <a:srgbClr val="000000"/>
               </a:solidFill>
-              <a:effectLst/>
-              <a:uFillTx/>
               <a:latin typeface="Times New Roman"/>
             </a:endParaRPr>
           </a:p>
@@ -2774,7 +2801,7 @@
       </p:sp>
       <p:sp>
         <p:nvSpPr>
-          <p:cNvPr id="58" name="PlaceHolder 5"/>
+          <p:cNvPr id="1851282986" name="PlaceHolder 5"/>
           <p:cNvSpPr>
             <a:spLocks noGrp="1"/>
           </p:cNvSpPr>
@@ -2782,7 +2809,7 @@
             <p:ph type="ftr" idx="32"/>
           </p:nvPr>
         </p:nvSpPr>
-        <p:spPr>
+        <p:spPr bwMode="auto">
           <a:xfrm>
             <a:off x="4038480" y="6356520"/>
             <a:ext cx="4114440" cy="364680"/>
@@ -2806,8 +2833,6 @@
                 <a:solidFill>
                   <a:srgbClr val="000000"/>
                 </a:solidFill>
-                <a:effectLst/>
-                <a:uFillTx/>
                 <a:latin typeface="Times New Roman"/>
               </a:defRPr>
             </a:lvl1pPr>
@@ -2815,14 +2840,13 @@
           <a:p>
             <a:pPr indent="0" algn="ctr">
               <a:buNone/>
+              <a:defRPr/>
             </a:pPr>
             <a:r>
               <a:rPr lang="pt-BR" sz="1400" b="0" u="none" strike="noStrike">
                 <a:solidFill>
                   <a:srgbClr val="000000"/>
                 </a:solidFill>
-                <a:effectLst/>
-                <a:uFillTx/>
                 <a:latin typeface="Times New Roman"/>
               </a:rPr>
               <a:t>&lt;rodapé&gt;</a:t>
@@ -2831,8 +2855,6 @@
               <a:solidFill>
                 <a:srgbClr val="000000"/>
               </a:solidFill>
-              <a:effectLst/>
-              <a:uFillTx/>
               <a:latin typeface="Times New Roman"/>
             </a:endParaRPr>
           </a:p>
@@ -2840,7 +2862,7 @@
       </p:sp>
       <p:sp>
         <p:nvSpPr>
-          <p:cNvPr id="59" name="PlaceHolder 6"/>
+          <p:cNvPr id="654637862" name="PlaceHolder 6"/>
           <p:cNvSpPr>
             <a:spLocks noGrp="1"/>
           </p:cNvSpPr>
@@ -2848,7 +2870,7 @@
             <p:ph type="sldNum" idx="33"/>
           </p:nvPr>
         </p:nvSpPr>
-        <p:spPr>
+        <p:spPr bwMode="auto">
           <a:xfrm>
             <a:off x="8610480" y="6356520"/>
             <a:ext cx="2742840" cy="364680"/>
@@ -2877,8 +2899,6 @@
                     <a:tint val="75000"/>
                   </a:schemeClr>
                 </a:solidFill>
-                <a:effectLst/>
-                <a:uFillTx/>
                 <a:latin typeface="Arial"/>
                 <a:ea typeface="Arial"/>
               </a:defRPr>
@@ -2890,6 +2910,7 @@
                 <a:spcPct val="100000"/>
               </a:lnSpc>
               <a:buNone/>
+              <a:defRPr/>
             </a:pPr>
             <a:fld id="{7ABC76D8-5264-4616-BFC1-67054919A427}" type="slidenum">
               <a:rPr lang="pt-BR" sz="1200" b="0" u="none" strike="noStrike">
@@ -2898,8 +2919,6 @@
                     <a:tint val="75000"/>
                   </a:schemeClr>
                 </a:solidFill>
-                <a:effectLst/>
-                <a:uFillTx/>
                 <a:latin typeface="Arial"/>
                 <a:ea typeface="Arial"/>
               </a:rPr>
@@ -2909,8 +2928,6 @@
               <a:solidFill>
                 <a:srgbClr val="000000"/>
               </a:solidFill>
-              <a:effectLst/>
-              <a:uFillTx/>
               <a:latin typeface="Times New Roman"/>
             </a:endParaRPr>
           </a:p>
@@ -2918,14 +2935,17 @@
       </p:sp>
     </p:spTree>
   </p:cSld>
+  <p:clrMapOvr>
+    <a:masterClrMapping/>
+  </p:clrMapOvr>
 </p:sldLayout>
 </file>
 
 <file path=ppt/slideLayouts/slideLayout2.xml><?xml version="1.0" encoding="utf-8"?>
-<p:sldLayout xmlns:a="http://schemas.openxmlformats.org/drawingml/2006/main" xmlns:p="http://schemas.openxmlformats.org/presentationml/2006/main" xmlns:r="http://schemas.openxmlformats.org/officeDocument/2006/relationships" xmlns:p14="http://schemas.microsoft.com/office/powerpoint/2010/main" xmlns:p15="http://schemas.microsoft.com/office/powerpoint/2012/main" xmlns:mc="http://schemas.openxmlformats.org/markup-compatibility/2006" type="vertTx" preserve="1">
+<p:sldLayout xmlns:a="http://schemas.openxmlformats.org/drawingml/2006/main" xmlns:r="http://schemas.openxmlformats.org/officeDocument/2006/relationships" xmlns:p="http://schemas.openxmlformats.org/presentationml/2006/main" xmlns:m="http://schemas.openxmlformats.org/officeDocument/2006/math" xmlns:w="http://schemas.openxmlformats.org/wordprocessingml/2006/main" matchingName="" preserve="1" showMasterPhAnim="0" showMasterSp="1" type="vertTx" userDrawn="1">
   <p:cSld name="Título e texto vertical">
     <p:bg>
-      <p:bgPr>
+      <p:bgPr shadeToTitle="0">
         <a:solidFill>
           <a:srgbClr val="FFFFFF"/>
         </a:solidFill>
@@ -2937,7 +2957,7 @@
         <p:cNvGrpSpPr/>
         <p:nvPr/>
       </p:nvGrpSpPr>
-      <p:grpSpPr>
+      <p:grpSpPr bwMode="auto">
         <a:xfrm>
           <a:off x="0" y="0"/>
           <a:ext cx="0" cy="0"/>
@@ -2947,7 +2967,7 @@
       </p:grpSpPr>
       <p:sp>
         <p:nvSpPr>
-          <p:cNvPr id="7" name="PlaceHolder 1"/>
+          <p:cNvPr id="1584126007" name="PlaceHolder 1"/>
           <p:cNvSpPr>
             <a:spLocks noGrp="1"/>
           </p:cNvSpPr>
@@ -2955,7 +2975,7 @@
             <p:ph type="title"/>
           </p:nvPr>
         </p:nvSpPr>
-        <p:spPr>
+        <p:spPr bwMode="auto">
           <a:xfrm>
             <a:off x="838080" y="365040"/>
             <a:ext cx="10515240" cy="1325160"/>
@@ -2982,8 +3002,6 @@
                 <a:solidFill>
                   <a:schemeClr val="dk1"/>
                 </a:solidFill>
-                <a:effectLst/>
-                <a:uFillTx/>
                 <a:latin typeface="Arial"/>
                 <a:ea typeface="Arial"/>
               </a:defRPr>
@@ -2995,14 +3013,13 @@
                 <a:spcPct val="90000"/>
               </a:lnSpc>
               <a:buNone/>
+              <a:defRPr/>
             </a:pPr>
             <a:r>
               <a:rPr lang="pt-BR" sz="4400" b="0" u="none" strike="noStrike">
                 <a:solidFill>
                   <a:schemeClr val="dk1"/>
                 </a:solidFill>
-                <a:effectLst/>
-                <a:uFillTx/>
                 <a:latin typeface="Arial"/>
                 <a:ea typeface="Arial"/>
               </a:rPr>
@@ -3012,8 +3029,6 @@
               <a:solidFill>
                 <a:schemeClr val="dk1"/>
               </a:solidFill>
-              <a:effectLst/>
-              <a:uFillTx/>
               <a:latin typeface="Arial"/>
             </a:endParaRPr>
           </a:p>
@@ -3021,7 +3036,7 @@
       </p:sp>
       <p:sp>
         <p:nvSpPr>
-          <p:cNvPr id="8" name="PlaceHolder 2"/>
+          <p:cNvPr id="1449216983" name="PlaceHolder 2"/>
           <p:cNvSpPr>
             <a:spLocks noGrp="1"/>
           </p:cNvSpPr>
@@ -3029,7 +3044,7 @@
             <p:ph type="body"/>
           </p:nvPr>
         </p:nvSpPr>
-        <p:spPr>
+        <p:spPr bwMode="auto">
           <a:xfrm>
             <a:off x="838080" y="1825560"/>
             <a:ext cx="10515240" cy="4350960"/>
@@ -3043,7 +3058,7 @@
           </a:ln>
         </p:spPr>
         <p:txBody>
-          <a:bodyPr lIns="91440" tIns="45720" rIns="91440" bIns="45720" anchor="t" vert="eaVert">
+          <a:bodyPr vert="eaVert" lIns="91440" tIns="45720" rIns="91440" bIns="45720" anchor="t">
             <a:noAutofit/>
           </a:bodyPr>
           <a:lstStyle>
@@ -3063,8 +3078,6 @@
                 <a:solidFill>
                   <a:schemeClr val="dk1"/>
                 </a:solidFill>
-                <a:effectLst/>
-                <a:uFillTx/>
                 <a:latin typeface="Arial"/>
                 <a:ea typeface="Arial"/>
               </a:defRPr>
@@ -3085,8 +3098,6 @@
                 <a:solidFill>
                   <a:schemeClr val="dk1"/>
                 </a:solidFill>
-                <a:effectLst/>
-                <a:uFillTx/>
                 <a:latin typeface="Arial"/>
                 <a:ea typeface="Arial"/>
               </a:defRPr>
@@ -3107,8 +3118,6 @@
                 <a:solidFill>
                   <a:schemeClr val="dk1"/>
                 </a:solidFill>
-                <a:effectLst/>
-                <a:uFillTx/>
                 <a:latin typeface="Arial"/>
                 <a:ea typeface="Arial"/>
               </a:defRPr>
@@ -3129,8 +3138,6 @@
                 <a:solidFill>
                   <a:schemeClr val="dk1"/>
                 </a:solidFill>
-                <a:effectLst/>
-                <a:uFillTx/>
                 <a:latin typeface="Arial"/>
                 <a:ea typeface="Arial"/>
               </a:defRPr>
@@ -3151,8 +3158,6 @@
                 <a:solidFill>
                   <a:schemeClr val="dk1"/>
                 </a:solidFill>
-                <a:effectLst/>
-                <a:uFillTx/>
                 <a:latin typeface="Arial"/>
                 <a:ea typeface="Arial"/>
               </a:defRPr>
@@ -3171,14 +3176,13 @@
               </a:buClr>
               <a:buFont typeface="Arial"/>
               <a:buChar char="•"/>
+              <a:defRPr/>
             </a:pPr>
             <a:r>
               <a:rPr lang="pt-BR" sz="2800" b="0" u="none" strike="noStrike">
                 <a:solidFill>
                   <a:schemeClr val="dk1"/>
                 </a:solidFill>
-                <a:effectLst/>
-                <a:uFillTx/>
                 <a:latin typeface="Arial"/>
                 <a:ea typeface="Arial"/>
               </a:rPr>
@@ -3188,8 +3192,6 @@
               <a:solidFill>
                 <a:schemeClr val="dk1"/>
               </a:solidFill>
-              <a:effectLst/>
-              <a:uFillTx/>
               <a:latin typeface="Arial"/>
             </a:endParaRPr>
           </a:p>
@@ -3206,14 +3208,13 @@
               </a:buClr>
               <a:buFont typeface="Arial"/>
               <a:buChar char="•"/>
+              <a:defRPr/>
             </a:pPr>
             <a:r>
               <a:rPr lang="pt-BR" sz="2400" b="0" u="none" strike="noStrike">
                 <a:solidFill>
                   <a:schemeClr val="dk1"/>
                 </a:solidFill>
-                <a:effectLst/>
-                <a:uFillTx/>
                 <a:latin typeface="Arial"/>
                 <a:ea typeface="Arial"/>
               </a:rPr>
@@ -3223,8 +3224,6 @@
               <a:solidFill>
                 <a:schemeClr val="dk1"/>
               </a:solidFill>
-              <a:effectLst/>
-              <a:uFillTx/>
               <a:latin typeface="Arial"/>
             </a:endParaRPr>
           </a:p>
@@ -3241,14 +3240,13 @@
               </a:buClr>
               <a:buFont typeface="Arial"/>
               <a:buChar char="•"/>
+              <a:defRPr/>
             </a:pPr>
             <a:r>
               <a:rPr lang="pt-BR" sz="2000" b="0" u="none" strike="noStrike">
                 <a:solidFill>
                   <a:schemeClr val="dk1"/>
                 </a:solidFill>
-                <a:effectLst/>
-                <a:uFillTx/>
                 <a:latin typeface="Arial"/>
                 <a:ea typeface="Arial"/>
               </a:rPr>
@@ -3258,8 +3256,6 @@
               <a:solidFill>
                 <a:schemeClr val="dk1"/>
               </a:solidFill>
-              <a:effectLst/>
-              <a:uFillTx/>
               <a:latin typeface="Arial"/>
             </a:endParaRPr>
           </a:p>
@@ -3276,14 +3272,13 @@
               </a:buClr>
               <a:buFont typeface="Arial"/>
               <a:buChar char="•"/>
+              <a:defRPr/>
             </a:pPr>
             <a:r>
               <a:rPr lang="pt-BR" sz="1800" b="0" u="none" strike="noStrike">
                 <a:solidFill>
                   <a:schemeClr val="dk1"/>
                 </a:solidFill>
-                <a:effectLst/>
-                <a:uFillTx/>
                 <a:latin typeface="Arial"/>
                 <a:ea typeface="Arial"/>
               </a:rPr>
@@ -3293,8 +3288,6 @@
               <a:solidFill>
                 <a:schemeClr val="dk1"/>
               </a:solidFill>
-              <a:effectLst/>
-              <a:uFillTx/>
               <a:latin typeface="Arial"/>
             </a:endParaRPr>
           </a:p>
@@ -3311,14 +3304,13 @@
               </a:buClr>
               <a:buFont typeface="Arial"/>
               <a:buChar char="•"/>
+              <a:defRPr/>
             </a:pPr>
             <a:r>
               <a:rPr lang="pt-BR" sz="1800" b="0" u="none" strike="noStrike">
                 <a:solidFill>
                   <a:schemeClr val="dk1"/>
                 </a:solidFill>
-                <a:effectLst/>
-                <a:uFillTx/>
                 <a:latin typeface="Arial"/>
                 <a:ea typeface="Arial"/>
               </a:rPr>
@@ -3328,8 +3320,6 @@
               <a:solidFill>
                 <a:schemeClr val="dk1"/>
               </a:solidFill>
-              <a:effectLst/>
-              <a:uFillTx/>
               <a:latin typeface="Arial"/>
             </a:endParaRPr>
           </a:p>
@@ -3337,7 +3327,7 @@
       </p:sp>
       <p:sp>
         <p:nvSpPr>
-          <p:cNvPr id="9" name="PlaceHolder 3"/>
+          <p:cNvPr id="1298845483" name="PlaceHolder 3"/>
           <p:cNvSpPr>
             <a:spLocks noGrp="1"/>
           </p:cNvSpPr>
@@ -3345,7 +3335,7 @@
             <p:ph type="dt" idx="4"/>
           </p:nvPr>
         </p:nvSpPr>
-        <p:spPr>
+        <p:spPr bwMode="auto">
           <a:xfrm>
             <a:off x="838080" y="6356520"/>
             <a:ext cx="2742840" cy="364680"/>
@@ -3374,8 +3364,6 @@
                     <a:tint val="75000"/>
                   </a:schemeClr>
                 </a:solidFill>
-                <a:effectLst/>
-                <a:uFillTx/>
                 <a:latin typeface="Arial"/>
                 <a:ea typeface="Arial"/>
               </a:defRPr>
@@ -3387,6 +3375,7 @@
                 <a:spcPct val="100000"/>
               </a:lnSpc>
               <a:buNone/>
+              <a:defRPr/>
             </a:pPr>
             <a:r>
               <a:rPr lang="pt-BR" sz="1200" b="0" u="none" strike="noStrike">
@@ -3395,8 +3384,6 @@
                     <a:tint val="75000"/>
                   </a:schemeClr>
                 </a:solidFill>
-                <a:effectLst/>
-                <a:uFillTx/>
                 <a:latin typeface="Arial"/>
                 <a:ea typeface="Arial"/>
               </a:rPr>
@@ -3406,8 +3393,6 @@
               <a:solidFill>
                 <a:srgbClr val="000000"/>
               </a:solidFill>
-              <a:effectLst/>
-              <a:uFillTx/>
               <a:latin typeface="Times New Roman"/>
             </a:endParaRPr>
           </a:p>
@@ -3415,7 +3400,7 @@
       </p:sp>
       <p:sp>
         <p:nvSpPr>
-          <p:cNvPr id="10" name="PlaceHolder 4"/>
+          <p:cNvPr id="2116260608" name="PlaceHolder 4"/>
           <p:cNvSpPr>
             <a:spLocks noGrp="1"/>
           </p:cNvSpPr>
@@ -3423,7 +3408,7 @@
             <p:ph type="ftr" idx="5"/>
           </p:nvPr>
         </p:nvSpPr>
-        <p:spPr>
+        <p:spPr bwMode="auto">
           <a:xfrm>
             <a:off x="4038480" y="6356520"/>
             <a:ext cx="4114440" cy="364680"/>
@@ -3447,8 +3432,6 @@
                 <a:solidFill>
                   <a:srgbClr val="000000"/>
                 </a:solidFill>
-                <a:effectLst/>
-                <a:uFillTx/>
                 <a:latin typeface="Times New Roman"/>
               </a:defRPr>
             </a:lvl1pPr>
@@ -3456,14 +3439,13 @@
           <a:p>
             <a:pPr indent="0" algn="ctr">
               <a:buNone/>
+              <a:defRPr/>
             </a:pPr>
             <a:r>
               <a:rPr lang="pt-BR" sz="1400" b="0" u="none" strike="noStrike">
                 <a:solidFill>
                   <a:srgbClr val="000000"/>
                 </a:solidFill>
-                <a:effectLst/>
-                <a:uFillTx/>
                 <a:latin typeface="Times New Roman"/>
               </a:rPr>
               <a:t>&lt;rodapé&gt;</a:t>
@@ -3472,8 +3454,6 @@
               <a:solidFill>
                 <a:srgbClr val="000000"/>
               </a:solidFill>
-              <a:effectLst/>
-              <a:uFillTx/>
               <a:latin typeface="Times New Roman"/>
             </a:endParaRPr>
           </a:p>
@@ -3481,7 +3461,7 @@
       </p:sp>
       <p:sp>
         <p:nvSpPr>
-          <p:cNvPr id="11" name="PlaceHolder 5"/>
+          <p:cNvPr id="157519908" name="PlaceHolder 5"/>
           <p:cNvSpPr>
             <a:spLocks noGrp="1"/>
           </p:cNvSpPr>
@@ -3489,7 +3469,7 @@
             <p:ph type="sldNum" idx="6"/>
           </p:nvPr>
         </p:nvSpPr>
-        <p:spPr>
+        <p:spPr bwMode="auto">
           <a:xfrm>
             <a:off x="8610480" y="6356520"/>
             <a:ext cx="2742840" cy="364680"/>
@@ -3518,8 +3498,6 @@
                     <a:tint val="75000"/>
                   </a:schemeClr>
                 </a:solidFill>
-                <a:effectLst/>
-                <a:uFillTx/>
                 <a:latin typeface="Arial"/>
                 <a:ea typeface="Arial"/>
               </a:defRPr>
@@ -3531,6 +3509,7 @@
                 <a:spcPct val="100000"/>
               </a:lnSpc>
               <a:buNone/>
+              <a:defRPr/>
             </a:pPr>
             <a:fld id="{34A6E6AD-6A23-4A00-9862-7005AF7FFA8B}" type="slidenum">
               <a:rPr lang="pt-BR" sz="1200" b="0" u="none" strike="noStrike">
@@ -3539,8 +3518,6 @@
                     <a:tint val="75000"/>
                   </a:schemeClr>
                 </a:solidFill>
-                <a:effectLst/>
-                <a:uFillTx/>
                 <a:latin typeface="Arial"/>
                 <a:ea typeface="Arial"/>
               </a:rPr>
@@ -3550,8 +3527,6 @@
               <a:solidFill>
                 <a:srgbClr val="000000"/>
               </a:solidFill>
-              <a:effectLst/>
-              <a:uFillTx/>
               <a:latin typeface="Times New Roman"/>
             </a:endParaRPr>
           </a:p>
@@ -3559,14 +3534,17 @@
       </p:sp>
     </p:spTree>
   </p:cSld>
+  <p:clrMapOvr>
+    <a:masterClrMapping/>
+  </p:clrMapOvr>
 </p:sldLayout>
 </file>
 
 <file path=ppt/slideLayouts/slideLayout3.xml><?xml version="1.0" encoding="utf-8"?>
-<p:sldLayout xmlns:a="http://schemas.openxmlformats.org/drawingml/2006/main" xmlns:p="http://schemas.openxmlformats.org/presentationml/2006/main" xmlns:r="http://schemas.openxmlformats.org/officeDocument/2006/relationships" xmlns:p14="http://schemas.microsoft.com/office/powerpoint/2010/main" xmlns:p15="http://schemas.microsoft.com/office/powerpoint/2012/main" xmlns:mc="http://schemas.openxmlformats.org/markup-compatibility/2006" type="vertTitleAndTx" preserve="1">
+<p:sldLayout xmlns:a="http://schemas.openxmlformats.org/drawingml/2006/main" xmlns:r="http://schemas.openxmlformats.org/officeDocument/2006/relationships" xmlns:p="http://schemas.openxmlformats.org/presentationml/2006/main" xmlns:m="http://schemas.openxmlformats.org/officeDocument/2006/math" xmlns:w="http://schemas.openxmlformats.org/wordprocessingml/2006/main" matchingName="" preserve="1" showMasterPhAnim="0" showMasterSp="1" type="vertTitleAndTx" userDrawn="1">
   <p:cSld name="Título vertical e texto">
     <p:bg>
-      <p:bgPr>
+      <p:bgPr shadeToTitle="0">
         <a:solidFill>
           <a:srgbClr val="FFFFFF"/>
         </a:solidFill>
@@ -3578,7 +3556,7 @@
         <p:cNvGrpSpPr/>
         <p:nvPr/>
       </p:nvGrpSpPr>
-      <p:grpSpPr>
+      <p:grpSpPr bwMode="auto">
         <a:xfrm>
           <a:off x="0" y="0"/>
           <a:ext cx="0" cy="0"/>
@@ -3588,7 +3566,7 @@
       </p:grpSpPr>
       <p:sp>
         <p:nvSpPr>
-          <p:cNvPr id="12" name="PlaceHolder 1"/>
+          <p:cNvPr id="2145676932" name="PlaceHolder 1"/>
           <p:cNvSpPr>
             <a:spLocks noGrp="1"/>
           </p:cNvSpPr>
@@ -3596,7 +3574,7 @@
             <p:ph type="title"/>
           </p:nvPr>
         </p:nvSpPr>
-        <p:spPr>
+        <p:spPr bwMode="auto">
           <a:xfrm>
             <a:off x="8724960" y="365040"/>
             <a:ext cx="2628720" cy="5811480"/>
@@ -3610,7 +3588,7 @@
           </a:ln>
         </p:spPr>
         <p:txBody>
-          <a:bodyPr lIns="91440" tIns="45720" rIns="91440" bIns="45720" anchor="ctr" vert="eaVert">
+          <a:bodyPr vert="eaVert" lIns="91440" tIns="45720" rIns="91440" bIns="45720" anchor="ctr">
             <a:noAutofit/>
           </a:bodyPr>
           <a:lstStyle>
@@ -3623,8 +3601,6 @@
                 <a:solidFill>
                   <a:schemeClr val="dk1"/>
                 </a:solidFill>
-                <a:effectLst/>
-                <a:uFillTx/>
                 <a:latin typeface="Arial"/>
                 <a:ea typeface="Arial"/>
               </a:defRPr>
@@ -3636,14 +3612,13 @@
                 <a:spcPct val="90000"/>
               </a:lnSpc>
               <a:buNone/>
+              <a:defRPr/>
             </a:pPr>
             <a:r>
               <a:rPr lang="pt-BR" sz="4400" b="0" u="none" strike="noStrike">
                 <a:solidFill>
                   <a:schemeClr val="dk1"/>
                 </a:solidFill>
-                <a:effectLst/>
-                <a:uFillTx/>
                 <a:latin typeface="Arial"/>
                 <a:ea typeface="Arial"/>
               </a:rPr>
@@ -3653,8 +3628,6 @@
               <a:solidFill>
                 <a:schemeClr val="dk1"/>
               </a:solidFill>
-              <a:effectLst/>
-              <a:uFillTx/>
               <a:latin typeface="Arial"/>
             </a:endParaRPr>
           </a:p>
@@ -3662,7 +3635,7 @@
       </p:sp>
       <p:sp>
         <p:nvSpPr>
-          <p:cNvPr id="13" name="PlaceHolder 2"/>
+          <p:cNvPr id="965801683" name="PlaceHolder 2"/>
           <p:cNvSpPr>
             <a:spLocks noGrp="1"/>
           </p:cNvSpPr>
@@ -3670,7 +3643,7 @@
             <p:ph type="body"/>
           </p:nvPr>
         </p:nvSpPr>
-        <p:spPr>
+        <p:spPr bwMode="auto">
           <a:xfrm>
             <a:off x="838080" y="365040"/>
             <a:ext cx="7733880" cy="5811480"/>
@@ -3684,7 +3657,7 @@
           </a:ln>
         </p:spPr>
         <p:txBody>
-          <a:bodyPr lIns="91440" tIns="45720" rIns="91440" bIns="45720" anchor="t" vert="eaVert">
+          <a:bodyPr vert="eaVert" lIns="91440" tIns="45720" rIns="91440" bIns="45720" anchor="t">
             <a:noAutofit/>
           </a:bodyPr>
           <a:lstStyle>
@@ -3704,8 +3677,6 @@
                 <a:solidFill>
                   <a:schemeClr val="dk1"/>
                 </a:solidFill>
-                <a:effectLst/>
-                <a:uFillTx/>
                 <a:latin typeface="Arial"/>
                 <a:ea typeface="Arial"/>
               </a:defRPr>
@@ -3726,8 +3697,6 @@
                 <a:solidFill>
                   <a:schemeClr val="dk1"/>
                 </a:solidFill>
-                <a:effectLst/>
-                <a:uFillTx/>
                 <a:latin typeface="Arial"/>
                 <a:ea typeface="Arial"/>
               </a:defRPr>
@@ -3748,8 +3717,6 @@
                 <a:solidFill>
                   <a:schemeClr val="dk1"/>
                 </a:solidFill>
-                <a:effectLst/>
-                <a:uFillTx/>
                 <a:latin typeface="Arial"/>
                 <a:ea typeface="Arial"/>
               </a:defRPr>
@@ -3770,8 +3737,6 @@
                 <a:solidFill>
                   <a:schemeClr val="dk1"/>
                 </a:solidFill>
-                <a:effectLst/>
-                <a:uFillTx/>
                 <a:latin typeface="Arial"/>
                 <a:ea typeface="Arial"/>
               </a:defRPr>
@@ -3792,8 +3757,6 @@
                 <a:solidFill>
                   <a:schemeClr val="dk1"/>
                 </a:solidFill>
-                <a:effectLst/>
-                <a:uFillTx/>
                 <a:latin typeface="Arial"/>
                 <a:ea typeface="Arial"/>
               </a:defRPr>
@@ -3812,14 +3775,13 @@
               </a:buClr>
               <a:buFont typeface="Arial"/>
               <a:buChar char="•"/>
+              <a:defRPr/>
             </a:pPr>
             <a:r>
               <a:rPr lang="pt-BR" sz="2800" b="0" u="none" strike="noStrike">
                 <a:solidFill>
                   <a:schemeClr val="dk1"/>
                 </a:solidFill>
-                <a:effectLst/>
-                <a:uFillTx/>
                 <a:latin typeface="Arial"/>
                 <a:ea typeface="Arial"/>
               </a:rPr>
@@ -3829,8 +3791,6 @@
               <a:solidFill>
                 <a:schemeClr val="dk1"/>
               </a:solidFill>
-              <a:effectLst/>
-              <a:uFillTx/>
               <a:latin typeface="Arial"/>
             </a:endParaRPr>
           </a:p>
@@ -3847,14 +3807,13 @@
               </a:buClr>
               <a:buFont typeface="Arial"/>
               <a:buChar char="•"/>
+              <a:defRPr/>
             </a:pPr>
             <a:r>
               <a:rPr lang="pt-BR" sz="2400" b="0" u="none" strike="noStrike">
                 <a:solidFill>
                   <a:schemeClr val="dk1"/>
                 </a:solidFill>
-                <a:effectLst/>
-                <a:uFillTx/>
                 <a:latin typeface="Arial"/>
                 <a:ea typeface="Arial"/>
               </a:rPr>
@@ -3864,8 +3823,6 @@
               <a:solidFill>
                 <a:schemeClr val="dk1"/>
               </a:solidFill>
-              <a:effectLst/>
-              <a:uFillTx/>
               <a:latin typeface="Arial"/>
             </a:endParaRPr>
           </a:p>
@@ -3882,14 +3839,13 @@
               </a:buClr>
               <a:buFont typeface="Arial"/>
               <a:buChar char="•"/>
+              <a:defRPr/>
             </a:pPr>
             <a:r>
               <a:rPr lang="pt-BR" sz="2000" b="0" u="none" strike="noStrike">
                 <a:solidFill>
                   <a:schemeClr val="dk1"/>
                 </a:solidFill>
-                <a:effectLst/>
-                <a:uFillTx/>
                 <a:latin typeface="Arial"/>
                 <a:ea typeface="Arial"/>
               </a:rPr>
@@ -3899,8 +3855,6 @@
               <a:solidFill>
                 <a:schemeClr val="dk1"/>
               </a:solidFill>
-              <a:effectLst/>
-              <a:uFillTx/>
               <a:latin typeface="Arial"/>
             </a:endParaRPr>
           </a:p>
@@ -3917,14 +3871,13 @@
               </a:buClr>
               <a:buFont typeface="Arial"/>
               <a:buChar char="•"/>
+              <a:defRPr/>
             </a:pPr>
             <a:r>
               <a:rPr lang="pt-BR" sz="1800" b="0" u="none" strike="noStrike">
                 <a:solidFill>
                   <a:schemeClr val="dk1"/>
                 </a:solidFill>
-                <a:effectLst/>
-                <a:uFillTx/>
                 <a:latin typeface="Arial"/>
                 <a:ea typeface="Arial"/>
               </a:rPr>
@@ -3934,8 +3887,6 @@
               <a:solidFill>
                 <a:schemeClr val="dk1"/>
               </a:solidFill>
-              <a:effectLst/>
-              <a:uFillTx/>
               <a:latin typeface="Arial"/>
             </a:endParaRPr>
           </a:p>
@@ -3952,14 +3903,13 @@
               </a:buClr>
               <a:buFont typeface="Arial"/>
               <a:buChar char="•"/>
+              <a:defRPr/>
             </a:pPr>
             <a:r>
               <a:rPr lang="pt-BR" sz="1800" b="0" u="none" strike="noStrike">
                 <a:solidFill>
                   <a:schemeClr val="dk1"/>
                 </a:solidFill>
-                <a:effectLst/>
-                <a:uFillTx/>
                 <a:latin typeface="Arial"/>
                 <a:ea typeface="Arial"/>
               </a:rPr>
@@ -3969,8 +3919,6 @@
               <a:solidFill>
                 <a:schemeClr val="dk1"/>
               </a:solidFill>
-              <a:effectLst/>
-              <a:uFillTx/>
               <a:latin typeface="Arial"/>
             </a:endParaRPr>
           </a:p>
@@ -3978,7 +3926,7 @@
       </p:sp>
       <p:sp>
         <p:nvSpPr>
-          <p:cNvPr id="14" name="PlaceHolder 3"/>
+          <p:cNvPr id="183102972" name="PlaceHolder 3"/>
           <p:cNvSpPr>
             <a:spLocks noGrp="1"/>
           </p:cNvSpPr>
@@ -3986,7 +3934,7 @@
             <p:ph type="dt" idx="7"/>
           </p:nvPr>
         </p:nvSpPr>
-        <p:spPr>
+        <p:spPr bwMode="auto">
           <a:xfrm>
             <a:off x="838080" y="6356520"/>
             <a:ext cx="2742840" cy="364680"/>
@@ -4015,8 +3963,6 @@
                     <a:tint val="75000"/>
                   </a:schemeClr>
                 </a:solidFill>
-                <a:effectLst/>
-                <a:uFillTx/>
                 <a:latin typeface="Arial"/>
                 <a:ea typeface="Arial"/>
               </a:defRPr>
@@ -4028,6 +3974,7 @@
                 <a:spcPct val="100000"/>
               </a:lnSpc>
               <a:buNone/>
+              <a:defRPr/>
             </a:pPr>
             <a:r>
               <a:rPr lang="pt-BR" sz="1200" b="0" u="none" strike="noStrike">
@@ -4036,8 +3983,6 @@
                     <a:tint val="75000"/>
                   </a:schemeClr>
                 </a:solidFill>
-                <a:effectLst/>
-                <a:uFillTx/>
                 <a:latin typeface="Arial"/>
                 <a:ea typeface="Arial"/>
               </a:rPr>
@@ -4047,8 +3992,6 @@
               <a:solidFill>
                 <a:srgbClr val="000000"/>
               </a:solidFill>
-              <a:effectLst/>
-              <a:uFillTx/>
               <a:latin typeface="Times New Roman"/>
             </a:endParaRPr>
           </a:p>
@@ -4056,7 +3999,7 @@
       </p:sp>
       <p:sp>
         <p:nvSpPr>
-          <p:cNvPr id="15" name="PlaceHolder 4"/>
+          <p:cNvPr id="674327111" name="PlaceHolder 4"/>
           <p:cNvSpPr>
             <a:spLocks noGrp="1"/>
           </p:cNvSpPr>
@@ -4064,7 +4007,7 @@
             <p:ph type="ftr" idx="8"/>
           </p:nvPr>
         </p:nvSpPr>
-        <p:spPr>
+        <p:spPr bwMode="auto">
           <a:xfrm>
             <a:off x="4038480" y="6356520"/>
             <a:ext cx="4114440" cy="364680"/>
@@ -4088,8 +4031,6 @@
                 <a:solidFill>
                   <a:srgbClr val="000000"/>
                 </a:solidFill>
-                <a:effectLst/>
-                <a:uFillTx/>
                 <a:latin typeface="Times New Roman"/>
               </a:defRPr>
             </a:lvl1pPr>
@@ -4097,14 +4038,13 @@
           <a:p>
             <a:pPr indent="0" algn="ctr">
               <a:buNone/>
+              <a:defRPr/>
             </a:pPr>
             <a:r>
               <a:rPr lang="pt-BR" sz="1400" b="0" u="none" strike="noStrike">
                 <a:solidFill>
                   <a:srgbClr val="000000"/>
                 </a:solidFill>
-                <a:effectLst/>
-                <a:uFillTx/>
                 <a:latin typeface="Times New Roman"/>
               </a:rPr>
               <a:t>&lt;rodapé&gt;</a:t>
@@ -4113,8 +4053,6 @@
               <a:solidFill>
                 <a:srgbClr val="000000"/>
               </a:solidFill>
-              <a:effectLst/>
-              <a:uFillTx/>
               <a:latin typeface="Times New Roman"/>
             </a:endParaRPr>
           </a:p>
@@ -4122,7 +4060,7 @@
       </p:sp>
       <p:sp>
         <p:nvSpPr>
-          <p:cNvPr id="16" name="PlaceHolder 5"/>
+          <p:cNvPr id="426161506" name="PlaceHolder 5"/>
           <p:cNvSpPr>
             <a:spLocks noGrp="1"/>
           </p:cNvSpPr>
@@ -4130,7 +4068,7 @@
             <p:ph type="sldNum" idx="9"/>
           </p:nvPr>
         </p:nvSpPr>
-        <p:spPr>
+        <p:spPr bwMode="auto">
           <a:xfrm>
             <a:off x="8610480" y="6356520"/>
             <a:ext cx="2742840" cy="364680"/>
@@ -4159,8 +4097,6 @@
                     <a:tint val="75000"/>
                   </a:schemeClr>
                 </a:solidFill>
-                <a:effectLst/>
-                <a:uFillTx/>
                 <a:latin typeface="Arial"/>
                 <a:ea typeface="Arial"/>
               </a:defRPr>
@@ -4172,6 +4108,7 @@
                 <a:spcPct val="100000"/>
               </a:lnSpc>
               <a:buNone/>
+              <a:defRPr/>
             </a:pPr>
             <a:fld id="{F0776A56-DD25-490D-9483-2C3F2B59FA2D}" type="slidenum">
               <a:rPr lang="pt-BR" sz="1200" b="0" u="none" strike="noStrike">
@@ -4180,8 +4117,6 @@
                     <a:tint val="75000"/>
                   </a:schemeClr>
                 </a:solidFill>
-                <a:effectLst/>
-                <a:uFillTx/>
                 <a:latin typeface="Arial"/>
                 <a:ea typeface="Arial"/>
               </a:rPr>
@@ -4191,8 +4126,6 @@
               <a:solidFill>
                 <a:srgbClr val="000000"/>
               </a:solidFill>
-              <a:effectLst/>
-              <a:uFillTx/>
               <a:latin typeface="Times New Roman"/>
             </a:endParaRPr>
           </a:p>
@@ -4200,14 +4133,17 @@
       </p:sp>
     </p:spTree>
   </p:cSld>
+  <p:clrMapOvr>
+    <a:masterClrMapping/>
+  </p:clrMapOvr>
 </p:sldLayout>
 </file>
 
 <file path=ppt/slideLayouts/slideLayout4.xml><?xml version="1.0" encoding="utf-8"?>
-<p:sldLayout xmlns:a="http://schemas.openxmlformats.org/drawingml/2006/main" xmlns:p="http://schemas.openxmlformats.org/presentationml/2006/main" xmlns:r="http://schemas.openxmlformats.org/officeDocument/2006/relationships" xmlns:p14="http://schemas.microsoft.com/office/powerpoint/2010/main" xmlns:p15="http://schemas.microsoft.com/office/powerpoint/2012/main" xmlns:mc="http://schemas.openxmlformats.org/markup-compatibility/2006" type="obj" preserve="1">
+<p:sldLayout xmlns:a="http://schemas.openxmlformats.org/drawingml/2006/main" xmlns:r="http://schemas.openxmlformats.org/officeDocument/2006/relationships" xmlns:p="http://schemas.openxmlformats.org/presentationml/2006/main" xmlns:m="http://schemas.openxmlformats.org/officeDocument/2006/math" xmlns:w="http://schemas.openxmlformats.org/wordprocessingml/2006/main" matchingName="" preserve="1" showMasterPhAnim="0" showMasterSp="1" type="obj" userDrawn="1">
   <p:cSld name="Título e objecto">
     <p:bg>
-      <p:bgPr>
+      <p:bgPr shadeToTitle="0">
         <a:solidFill>
           <a:srgbClr val="FFFFFF"/>
         </a:solidFill>
@@ -4219,7 +4155,7 @@
         <p:cNvGrpSpPr/>
         <p:nvPr/>
       </p:nvGrpSpPr>
-      <p:grpSpPr>
+      <p:grpSpPr bwMode="auto">
         <a:xfrm>
           <a:off x="0" y="0"/>
           <a:ext cx="0" cy="0"/>
@@ -4229,7 +4165,7 @@
       </p:grpSpPr>
       <p:sp>
         <p:nvSpPr>
-          <p:cNvPr id="17" name="PlaceHolder 1"/>
+          <p:cNvPr id="320777856" name="PlaceHolder 1"/>
           <p:cNvSpPr>
             <a:spLocks noGrp="1"/>
           </p:cNvSpPr>
@@ -4237,7 +4173,7 @@
             <p:ph type="title"/>
           </p:nvPr>
         </p:nvSpPr>
-        <p:spPr>
+        <p:spPr bwMode="auto">
           <a:xfrm>
             <a:off x="838080" y="365040"/>
             <a:ext cx="10515240" cy="1325160"/>
@@ -4264,8 +4200,6 @@
                 <a:solidFill>
                   <a:schemeClr val="dk1"/>
                 </a:solidFill>
-                <a:effectLst/>
-                <a:uFillTx/>
                 <a:latin typeface="Arial"/>
                 <a:ea typeface="Arial"/>
               </a:defRPr>
@@ -4277,14 +4211,13 @@
                 <a:spcPct val="90000"/>
               </a:lnSpc>
               <a:buNone/>
+              <a:defRPr/>
             </a:pPr>
             <a:r>
               <a:rPr lang="pt-BR" sz="4400" b="0" u="none" strike="noStrike">
                 <a:solidFill>
                   <a:schemeClr val="dk1"/>
                 </a:solidFill>
-                <a:effectLst/>
-                <a:uFillTx/>
                 <a:latin typeface="Arial"/>
                 <a:ea typeface="Arial"/>
               </a:rPr>
@@ -4294,8 +4227,6 @@
               <a:solidFill>
                 <a:schemeClr val="dk1"/>
               </a:solidFill>
-              <a:effectLst/>
-              <a:uFillTx/>
               <a:latin typeface="Arial"/>
             </a:endParaRPr>
           </a:p>
@@ -4303,7 +4234,7 @@
       </p:sp>
       <p:sp>
         <p:nvSpPr>
-          <p:cNvPr id="18" name="PlaceHolder 2"/>
+          <p:cNvPr id="1447155070" name="PlaceHolder 2"/>
           <p:cNvSpPr>
             <a:spLocks noGrp="1"/>
           </p:cNvSpPr>
@@ -4311,7 +4242,7 @@
             <p:ph type="body"/>
           </p:nvPr>
         </p:nvSpPr>
-        <p:spPr>
+        <p:spPr bwMode="auto">
           <a:xfrm>
             <a:off x="838080" y="1825560"/>
             <a:ext cx="10515240" cy="4350960"/>
@@ -4345,8 +4276,6 @@
                 <a:solidFill>
                   <a:schemeClr val="dk1"/>
                 </a:solidFill>
-                <a:effectLst/>
-                <a:uFillTx/>
                 <a:latin typeface="Arial"/>
                 <a:ea typeface="Arial"/>
               </a:defRPr>
@@ -4367,8 +4296,6 @@
                 <a:solidFill>
                   <a:schemeClr val="dk1"/>
                 </a:solidFill>
-                <a:effectLst/>
-                <a:uFillTx/>
                 <a:latin typeface="Arial"/>
                 <a:ea typeface="Arial"/>
               </a:defRPr>
@@ -4389,8 +4316,6 @@
                 <a:solidFill>
                   <a:schemeClr val="dk1"/>
                 </a:solidFill>
-                <a:effectLst/>
-                <a:uFillTx/>
                 <a:latin typeface="Arial"/>
                 <a:ea typeface="Arial"/>
               </a:defRPr>
@@ -4411,8 +4336,6 @@
                 <a:solidFill>
                   <a:schemeClr val="dk1"/>
                 </a:solidFill>
-                <a:effectLst/>
-                <a:uFillTx/>
                 <a:latin typeface="Arial"/>
                 <a:ea typeface="Arial"/>
               </a:defRPr>
@@ -4433,8 +4356,6 @@
                 <a:solidFill>
                   <a:schemeClr val="dk1"/>
                 </a:solidFill>
-                <a:effectLst/>
-                <a:uFillTx/>
                 <a:latin typeface="Arial"/>
                 <a:ea typeface="Arial"/>
               </a:defRPr>
@@ -4453,14 +4374,13 @@
               </a:buClr>
               <a:buFont typeface="Arial"/>
               <a:buChar char="•"/>
+              <a:defRPr/>
             </a:pPr>
             <a:r>
               <a:rPr lang="pt-BR" sz="2800" b="0" u="none" strike="noStrike">
                 <a:solidFill>
                   <a:schemeClr val="dk1"/>
                 </a:solidFill>
-                <a:effectLst/>
-                <a:uFillTx/>
                 <a:latin typeface="Arial"/>
                 <a:ea typeface="Arial"/>
               </a:rPr>
@@ -4470,8 +4390,6 @@
               <a:solidFill>
                 <a:schemeClr val="dk1"/>
               </a:solidFill>
-              <a:effectLst/>
-              <a:uFillTx/>
               <a:latin typeface="Arial"/>
             </a:endParaRPr>
           </a:p>
@@ -4488,14 +4406,13 @@
               </a:buClr>
               <a:buFont typeface="Arial"/>
               <a:buChar char="•"/>
+              <a:defRPr/>
             </a:pPr>
             <a:r>
               <a:rPr lang="pt-BR" sz="2400" b="0" u="none" strike="noStrike">
                 <a:solidFill>
                   <a:schemeClr val="dk1"/>
                 </a:solidFill>
-                <a:effectLst/>
-                <a:uFillTx/>
                 <a:latin typeface="Arial"/>
                 <a:ea typeface="Arial"/>
               </a:rPr>
@@ -4505,8 +4422,6 @@
               <a:solidFill>
                 <a:schemeClr val="dk1"/>
               </a:solidFill>
-              <a:effectLst/>
-              <a:uFillTx/>
               <a:latin typeface="Arial"/>
             </a:endParaRPr>
           </a:p>
@@ -4523,14 +4438,13 @@
               </a:buClr>
               <a:buFont typeface="Arial"/>
               <a:buChar char="•"/>
+              <a:defRPr/>
             </a:pPr>
             <a:r>
               <a:rPr lang="pt-BR" sz="2000" b="0" u="none" strike="noStrike">
                 <a:solidFill>
                   <a:schemeClr val="dk1"/>
                 </a:solidFill>
-                <a:effectLst/>
-                <a:uFillTx/>
                 <a:latin typeface="Arial"/>
                 <a:ea typeface="Arial"/>
               </a:rPr>
@@ -4540,8 +4454,6 @@
               <a:solidFill>
                 <a:schemeClr val="dk1"/>
               </a:solidFill>
-              <a:effectLst/>
-              <a:uFillTx/>
               <a:latin typeface="Arial"/>
             </a:endParaRPr>
           </a:p>
@@ -4558,14 +4470,13 @@
               </a:buClr>
               <a:buFont typeface="Arial"/>
               <a:buChar char="•"/>
+              <a:defRPr/>
             </a:pPr>
             <a:r>
               <a:rPr lang="pt-BR" sz="1800" b="0" u="none" strike="noStrike">
                 <a:solidFill>
                   <a:schemeClr val="dk1"/>
                 </a:solidFill>
-                <a:effectLst/>
-                <a:uFillTx/>
                 <a:latin typeface="Arial"/>
                 <a:ea typeface="Arial"/>
               </a:rPr>
@@ -4575,8 +4486,6 @@
               <a:solidFill>
                 <a:schemeClr val="dk1"/>
               </a:solidFill>
-              <a:effectLst/>
-              <a:uFillTx/>
               <a:latin typeface="Arial"/>
             </a:endParaRPr>
           </a:p>
@@ -4593,14 +4502,13 @@
               </a:buClr>
               <a:buFont typeface="Arial"/>
               <a:buChar char="•"/>
+              <a:defRPr/>
             </a:pPr>
             <a:r>
               <a:rPr lang="pt-BR" sz="1800" b="0" u="none" strike="noStrike">
                 <a:solidFill>
                   <a:schemeClr val="dk1"/>
                 </a:solidFill>
-                <a:effectLst/>
-                <a:uFillTx/>
                 <a:latin typeface="Arial"/>
                 <a:ea typeface="Arial"/>
               </a:rPr>
@@ -4610,8 +4518,6 @@
               <a:solidFill>
                 <a:schemeClr val="dk1"/>
               </a:solidFill>
-              <a:effectLst/>
-              <a:uFillTx/>
               <a:latin typeface="Arial"/>
             </a:endParaRPr>
           </a:p>
@@ -4619,7 +4525,7 @@
       </p:sp>
       <p:sp>
         <p:nvSpPr>
-          <p:cNvPr id="19" name="PlaceHolder 3"/>
+          <p:cNvPr id="320746890" name="PlaceHolder 3"/>
           <p:cNvSpPr>
             <a:spLocks noGrp="1"/>
           </p:cNvSpPr>
@@ -4627,7 +4533,7 @@
             <p:ph type="dt" idx="10"/>
           </p:nvPr>
         </p:nvSpPr>
-        <p:spPr>
+        <p:spPr bwMode="auto">
           <a:xfrm>
             <a:off x="838080" y="6356520"/>
             <a:ext cx="2742840" cy="364680"/>
@@ -4656,8 +4562,6 @@
                     <a:tint val="75000"/>
                   </a:schemeClr>
                 </a:solidFill>
-                <a:effectLst/>
-                <a:uFillTx/>
                 <a:latin typeface="Arial"/>
                 <a:ea typeface="Arial"/>
               </a:defRPr>
@@ -4669,6 +4573,7 @@
                 <a:spcPct val="100000"/>
               </a:lnSpc>
               <a:buNone/>
+              <a:defRPr/>
             </a:pPr>
             <a:r>
               <a:rPr lang="pt-BR" sz="1200" b="0" u="none" strike="noStrike">
@@ -4677,8 +4582,6 @@
                     <a:tint val="75000"/>
                   </a:schemeClr>
                 </a:solidFill>
-                <a:effectLst/>
-                <a:uFillTx/>
                 <a:latin typeface="Arial"/>
                 <a:ea typeface="Arial"/>
               </a:rPr>
@@ -4688,8 +4591,6 @@
               <a:solidFill>
                 <a:srgbClr val="000000"/>
               </a:solidFill>
-              <a:effectLst/>
-              <a:uFillTx/>
               <a:latin typeface="Times New Roman"/>
             </a:endParaRPr>
           </a:p>
@@ -4697,7 +4598,7 @@
       </p:sp>
       <p:sp>
         <p:nvSpPr>
-          <p:cNvPr id="20" name="PlaceHolder 4"/>
+          <p:cNvPr id="1948315392" name="PlaceHolder 4"/>
           <p:cNvSpPr>
             <a:spLocks noGrp="1"/>
           </p:cNvSpPr>
@@ -4705,7 +4606,7 @@
             <p:ph type="ftr" idx="11"/>
           </p:nvPr>
         </p:nvSpPr>
-        <p:spPr>
+        <p:spPr bwMode="auto">
           <a:xfrm>
             <a:off x="4038480" y="6356520"/>
             <a:ext cx="4114440" cy="364680"/>
@@ -4729,8 +4630,6 @@
                 <a:solidFill>
                   <a:srgbClr val="000000"/>
                 </a:solidFill>
-                <a:effectLst/>
-                <a:uFillTx/>
                 <a:latin typeface="Times New Roman"/>
               </a:defRPr>
             </a:lvl1pPr>
@@ -4738,14 +4637,13 @@
           <a:p>
             <a:pPr indent="0" algn="ctr">
               <a:buNone/>
+              <a:defRPr/>
             </a:pPr>
             <a:r>
               <a:rPr lang="pt-BR" sz="1400" b="0" u="none" strike="noStrike">
                 <a:solidFill>
                   <a:srgbClr val="000000"/>
                 </a:solidFill>
-                <a:effectLst/>
-                <a:uFillTx/>
                 <a:latin typeface="Times New Roman"/>
               </a:rPr>
               <a:t>&lt;rodapé&gt;</a:t>
@@ -4754,8 +4652,6 @@
               <a:solidFill>
                 <a:srgbClr val="000000"/>
               </a:solidFill>
-              <a:effectLst/>
-              <a:uFillTx/>
               <a:latin typeface="Times New Roman"/>
             </a:endParaRPr>
           </a:p>
@@ -4763,7 +4659,7 @@
       </p:sp>
       <p:sp>
         <p:nvSpPr>
-          <p:cNvPr id="21" name="PlaceHolder 5"/>
+          <p:cNvPr id="1193928494" name="PlaceHolder 5"/>
           <p:cNvSpPr>
             <a:spLocks noGrp="1"/>
           </p:cNvSpPr>
@@ -4771,7 +4667,7 @@
             <p:ph type="sldNum" idx="12"/>
           </p:nvPr>
         </p:nvSpPr>
-        <p:spPr>
+        <p:spPr bwMode="auto">
           <a:xfrm>
             <a:off x="8610480" y="6356520"/>
             <a:ext cx="2742840" cy="364680"/>
@@ -4800,8 +4696,6 @@
                     <a:tint val="75000"/>
                   </a:schemeClr>
                 </a:solidFill>
-                <a:effectLst/>
-                <a:uFillTx/>
                 <a:latin typeface="Arial"/>
                 <a:ea typeface="Arial"/>
               </a:defRPr>
@@ -4813,6 +4707,7 @@
                 <a:spcPct val="100000"/>
               </a:lnSpc>
               <a:buNone/>
+              <a:defRPr/>
             </a:pPr>
             <a:fld id="{CE901782-9E46-4ABF-B691-3FAB25E6530C}" type="slidenum">
               <a:rPr lang="pt-BR" sz="1200" b="0" u="none" strike="noStrike">
@@ -4821,8 +4716,6 @@
                     <a:tint val="75000"/>
                   </a:schemeClr>
                 </a:solidFill>
-                <a:effectLst/>
-                <a:uFillTx/>
                 <a:latin typeface="Arial"/>
                 <a:ea typeface="Arial"/>
               </a:rPr>
@@ -4832,8 +4725,6 @@
               <a:solidFill>
                 <a:srgbClr val="000000"/>
               </a:solidFill>
-              <a:effectLst/>
-              <a:uFillTx/>
               <a:latin typeface="Times New Roman"/>
             </a:endParaRPr>
           </a:p>
@@ -4841,14 +4732,17 @@
       </p:sp>
     </p:spTree>
   </p:cSld>
+  <p:clrMapOvr>
+    <a:masterClrMapping/>
+  </p:clrMapOvr>
 </p:sldLayout>
 </file>
 
 <file path=ppt/slideLayouts/slideLayout5.xml><?xml version="1.0" encoding="utf-8"?>
-<p:sldLayout xmlns:a="http://schemas.openxmlformats.org/drawingml/2006/main" xmlns:p="http://schemas.openxmlformats.org/presentationml/2006/main" xmlns:r="http://schemas.openxmlformats.org/officeDocument/2006/relationships" xmlns:p14="http://schemas.microsoft.com/office/powerpoint/2010/main" xmlns:p15="http://schemas.microsoft.com/office/powerpoint/2012/main" xmlns:mc="http://schemas.openxmlformats.org/markup-compatibility/2006" type="blank" preserve="1">
+<p:sldLayout xmlns:a="http://schemas.openxmlformats.org/drawingml/2006/main" xmlns:r="http://schemas.openxmlformats.org/officeDocument/2006/relationships" xmlns:p="http://schemas.openxmlformats.org/presentationml/2006/main" xmlns:m="http://schemas.openxmlformats.org/officeDocument/2006/math" xmlns:w="http://schemas.openxmlformats.org/wordprocessingml/2006/main" matchingName="" preserve="1" showMasterPhAnim="0" showMasterSp="1" type="blank" userDrawn="1">
   <p:cSld name="Cabeçalho da Secção">
     <p:bg>
-      <p:bgPr>
+      <p:bgPr shadeToTitle="0">
         <a:solidFill>
           <a:srgbClr val="FFFFFF"/>
         </a:solidFill>
@@ -4860,7 +4754,7 @@
         <p:cNvGrpSpPr/>
         <p:nvPr/>
       </p:nvGrpSpPr>
-      <p:grpSpPr>
+      <p:grpSpPr bwMode="auto">
         <a:xfrm>
           <a:off x="0" y="0"/>
           <a:ext cx="0" cy="0"/>
@@ -4870,7 +4764,7 @@
       </p:grpSpPr>
       <p:sp>
         <p:nvSpPr>
-          <p:cNvPr id="22" name="PlaceHolder 1"/>
+          <p:cNvPr id="1502733387" name="PlaceHolder 1"/>
           <p:cNvSpPr>
             <a:spLocks noGrp="1"/>
           </p:cNvSpPr>
@@ -4878,7 +4772,7 @@
             <p:ph type="title"/>
           </p:nvPr>
         </p:nvSpPr>
-        <p:spPr>
+        <p:spPr bwMode="auto">
           <a:xfrm>
             <a:off x="831960" y="1709640"/>
             <a:ext cx="10515240" cy="2852280"/>
@@ -4905,8 +4799,6 @@
                 <a:solidFill>
                   <a:schemeClr val="dk1"/>
                 </a:solidFill>
-                <a:effectLst/>
-                <a:uFillTx/>
                 <a:latin typeface="Arial"/>
                 <a:ea typeface="Arial"/>
               </a:defRPr>
@@ -4918,14 +4810,13 @@
                 <a:spcPct val="90000"/>
               </a:lnSpc>
               <a:buNone/>
+              <a:defRPr/>
             </a:pPr>
             <a:r>
               <a:rPr lang="pt-BR" sz="6000" b="0" u="none" strike="noStrike">
                 <a:solidFill>
                   <a:schemeClr val="dk1"/>
                 </a:solidFill>
-                <a:effectLst/>
-                <a:uFillTx/>
                 <a:latin typeface="Arial"/>
                 <a:ea typeface="Arial"/>
               </a:rPr>
@@ -4935,8 +4826,6 @@
               <a:solidFill>
                 <a:schemeClr val="dk1"/>
               </a:solidFill>
-              <a:effectLst/>
-              <a:uFillTx/>
               <a:latin typeface="Arial"/>
             </a:endParaRPr>
           </a:p>
@@ -4944,7 +4833,7 @@
       </p:sp>
       <p:sp>
         <p:nvSpPr>
-          <p:cNvPr id="23" name="PlaceHolder 2"/>
+          <p:cNvPr id="152610612" name="PlaceHolder 2"/>
           <p:cNvSpPr>
             <a:spLocks noGrp="1"/>
           </p:cNvSpPr>
@@ -4952,10 +4841,10 @@
             <p:ph type="body"/>
           </p:nvPr>
         </p:nvSpPr>
-        <p:spPr>
+        <p:spPr bwMode="auto">
           <a:xfrm>
             <a:off x="831960" y="4589640"/>
-            <a:ext cx="10515240" cy="1499760"/>
+            <a:ext cx="10515240" cy="1499759"/>
           </a:xfrm>
           <a:prstGeom prst="rect">
             <a:avLst/>
@@ -4987,8 +4876,6 @@
                     <a:tint val="75000"/>
                   </a:schemeClr>
                 </a:solidFill>
-                <a:effectLst/>
-                <a:uFillTx/>
                 <a:latin typeface="Arial"/>
                 <a:ea typeface="Arial"/>
               </a:defRPr>
@@ -5006,6 +4893,7 @@
               <a:tabLst>
                 <a:tab pos="0" algn="l"/>
               </a:tabLst>
+              <a:defRPr/>
             </a:pPr>
             <a:r>
               <a:rPr lang="pt-BR" sz="2400" b="0" u="none" strike="noStrike">
@@ -5014,8 +4902,6 @@
                     <a:tint val="75000"/>
                   </a:schemeClr>
                 </a:solidFill>
-                <a:effectLst/>
-                <a:uFillTx/>
                 <a:latin typeface="Arial"/>
                 <a:ea typeface="Arial"/>
               </a:rPr>
@@ -5027,8 +4913,6 @@
                   <a:tint val="75000"/>
                 </a:schemeClr>
               </a:solidFill>
-              <a:effectLst/>
-              <a:uFillTx/>
               <a:latin typeface="Arial"/>
             </a:endParaRPr>
           </a:p>
@@ -5036,7 +4920,7 @@
       </p:sp>
       <p:sp>
         <p:nvSpPr>
-          <p:cNvPr id="24" name="PlaceHolder 3"/>
+          <p:cNvPr id="1910755729" name="PlaceHolder 3"/>
           <p:cNvSpPr>
             <a:spLocks noGrp="1"/>
           </p:cNvSpPr>
@@ -5044,7 +4928,7 @@
             <p:ph type="dt" idx="13"/>
           </p:nvPr>
         </p:nvSpPr>
-        <p:spPr>
+        <p:spPr bwMode="auto">
           <a:xfrm>
             <a:off x="838080" y="6356520"/>
             <a:ext cx="2742840" cy="364680"/>
@@ -5073,8 +4957,6 @@
                     <a:tint val="75000"/>
                   </a:schemeClr>
                 </a:solidFill>
-                <a:effectLst/>
-                <a:uFillTx/>
                 <a:latin typeface="Arial"/>
                 <a:ea typeface="Arial"/>
               </a:defRPr>
@@ -5086,6 +4968,7 @@
                 <a:spcPct val="100000"/>
               </a:lnSpc>
               <a:buNone/>
+              <a:defRPr/>
             </a:pPr>
             <a:r>
               <a:rPr lang="pt-BR" sz="1200" b="0" u="none" strike="noStrike">
@@ -5094,8 +4977,6 @@
                     <a:tint val="75000"/>
                   </a:schemeClr>
                 </a:solidFill>
-                <a:effectLst/>
-                <a:uFillTx/>
                 <a:latin typeface="Arial"/>
                 <a:ea typeface="Arial"/>
               </a:rPr>
@@ -5105,8 +4986,6 @@
               <a:solidFill>
                 <a:srgbClr val="000000"/>
               </a:solidFill>
-              <a:effectLst/>
-              <a:uFillTx/>
               <a:latin typeface="Times New Roman"/>
             </a:endParaRPr>
           </a:p>
@@ -5114,7 +4993,7 @@
       </p:sp>
       <p:sp>
         <p:nvSpPr>
-          <p:cNvPr id="25" name="PlaceHolder 4"/>
+          <p:cNvPr id="1490239857" name="PlaceHolder 4"/>
           <p:cNvSpPr>
             <a:spLocks noGrp="1"/>
           </p:cNvSpPr>
@@ -5122,7 +5001,7 @@
             <p:ph type="ftr" idx="14"/>
           </p:nvPr>
         </p:nvSpPr>
-        <p:spPr>
+        <p:spPr bwMode="auto">
           <a:xfrm>
             <a:off x="4038480" y="6356520"/>
             <a:ext cx="4114440" cy="364680"/>
@@ -5146,8 +5025,6 @@
                 <a:solidFill>
                   <a:srgbClr val="000000"/>
                 </a:solidFill>
-                <a:effectLst/>
-                <a:uFillTx/>
                 <a:latin typeface="Times New Roman"/>
               </a:defRPr>
             </a:lvl1pPr>
@@ -5155,14 +5032,13 @@
           <a:p>
             <a:pPr indent="0" algn="ctr">
               <a:buNone/>
+              <a:defRPr/>
             </a:pPr>
             <a:r>
               <a:rPr lang="pt-BR" sz="1400" b="0" u="none" strike="noStrike">
                 <a:solidFill>
                   <a:srgbClr val="000000"/>
                 </a:solidFill>
-                <a:effectLst/>
-                <a:uFillTx/>
                 <a:latin typeface="Times New Roman"/>
               </a:rPr>
               <a:t>&lt;rodapé&gt;</a:t>
@@ -5171,8 +5047,6 @@
               <a:solidFill>
                 <a:srgbClr val="000000"/>
               </a:solidFill>
-              <a:effectLst/>
-              <a:uFillTx/>
               <a:latin typeface="Times New Roman"/>
             </a:endParaRPr>
           </a:p>
@@ -5180,7 +5054,7 @@
       </p:sp>
       <p:sp>
         <p:nvSpPr>
-          <p:cNvPr id="26" name="PlaceHolder 5"/>
+          <p:cNvPr id="521780362" name="PlaceHolder 5"/>
           <p:cNvSpPr>
             <a:spLocks noGrp="1"/>
           </p:cNvSpPr>
@@ -5188,7 +5062,7 @@
             <p:ph type="sldNum" idx="15"/>
           </p:nvPr>
         </p:nvSpPr>
-        <p:spPr>
+        <p:spPr bwMode="auto">
           <a:xfrm>
             <a:off x="8610480" y="6356520"/>
             <a:ext cx="2742840" cy="364680"/>
@@ -5217,8 +5091,6 @@
                     <a:tint val="75000"/>
                   </a:schemeClr>
                 </a:solidFill>
-                <a:effectLst/>
-                <a:uFillTx/>
                 <a:latin typeface="Arial"/>
                 <a:ea typeface="Arial"/>
               </a:defRPr>
@@ -5230,6 +5102,7 @@
                 <a:spcPct val="100000"/>
               </a:lnSpc>
               <a:buNone/>
+              <a:defRPr/>
             </a:pPr>
             <a:fld id="{07638DD0-3A94-4F33-BC1D-A0D228190074}" type="slidenum">
               <a:rPr lang="pt-BR" sz="1200" b="0" u="none" strike="noStrike">
@@ -5238,8 +5111,6 @@
                     <a:tint val="75000"/>
                   </a:schemeClr>
                 </a:solidFill>
-                <a:effectLst/>
-                <a:uFillTx/>
                 <a:latin typeface="Arial"/>
                 <a:ea typeface="Arial"/>
               </a:rPr>
@@ -5249,8 +5120,6 @@
               <a:solidFill>
                 <a:srgbClr val="000000"/>
               </a:solidFill>
-              <a:effectLst/>
-              <a:uFillTx/>
               <a:latin typeface="Times New Roman"/>
             </a:endParaRPr>
           </a:p>
@@ -5258,14 +5127,17 @@
       </p:sp>
     </p:spTree>
   </p:cSld>
+  <p:clrMapOvr>
+    <a:masterClrMapping/>
+  </p:clrMapOvr>
 </p:sldLayout>
 </file>
 
 <file path=ppt/slideLayouts/slideLayout6.xml><?xml version="1.0" encoding="utf-8"?>
-<p:sldLayout xmlns:a="http://schemas.openxmlformats.org/drawingml/2006/main" xmlns:p="http://schemas.openxmlformats.org/presentationml/2006/main" xmlns:r="http://schemas.openxmlformats.org/officeDocument/2006/relationships" xmlns:p14="http://schemas.microsoft.com/office/powerpoint/2010/main" xmlns:p15="http://schemas.microsoft.com/office/powerpoint/2012/main" xmlns:mc="http://schemas.openxmlformats.org/markup-compatibility/2006" type="twoObj" preserve="1">
+<p:sldLayout xmlns:a="http://schemas.openxmlformats.org/drawingml/2006/main" xmlns:r="http://schemas.openxmlformats.org/officeDocument/2006/relationships" xmlns:p="http://schemas.openxmlformats.org/presentationml/2006/main" xmlns:m="http://schemas.openxmlformats.org/officeDocument/2006/math" xmlns:w="http://schemas.openxmlformats.org/wordprocessingml/2006/main" matchingName="" preserve="1" showMasterPhAnim="0" showMasterSp="1" type="twoObj" userDrawn="1">
   <p:cSld name="Conteúdo Duplo">
     <p:bg>
-      <p:bgPr>
+      <p:bgPr shadeToTitle="0">
         <a:solidFill>
           <a:srgbClr val="FFFFFF"/>
         </a:solidFill>
@@ -5277,7 +5149,7 @@
         <p:cNvGrpSpPr/>
         <p:nvPr/>
       </p:nvGrpSpPr>
-      <p:grpSpPr>
+      <p:grpSpPr bwMode="auto">
         <a:xfrm>
           <a:off x="0" y="0"/>
           <a:ext cx="0" cy="0"/>
@@ -5287,7 +5159,7 @@
       </p:grpSpPr>
       <p:sp>
         <p:nvSpPr>
-          <p:cNvPr id="27" name="PlaceHolder 1"/>
+          <p:cNvPr id="1682563866" name="PlaceHolder 1"/>
           <p:cNvSpPr>
             <a:spLocks noGrp="1"/>
           </p:cNvSpPr>
@@ -5295,7 +5167,7 @@
             <p:ph type="title"/>
           </p:nvPr>
         </p:nvSpPr>
-        <p:spPr>
+        <p:spPr bwMode="auto">
           <a:xfrm>
             <a:off x="838080" y="365040"/>
             <a:ext cx="10515240" cy="1325160"/>
@@ -5322,8 +5194,6 @@
                 <a:solidFill>
                   <a:schemeClr val="dk1"/>
                 </a:solidFill>
-                <a:effectLst/>
-                <a:uFillTx/>
                 <a:latin typeface="Arial"/>
                 <a:ea typeface="Arial"/>
               </a:defRPr>
@@ -5335,14 +5205,13 @@
                 <a:spcPct val="90000"/>
               </a:lnSpc>
               <a:buNone/>
+              <a:defRPr/>
             </a:pPr>
             <a:r>
               <a:rPr lang="pt-BR" sz="4400" b="0" u="none" strike="noStrike">
                 <a:solidFill>
                   <a:schemeClr val="dk1"/>
                 </a:solidFill>
-                <a:effectLst/>
-                <a:uFillTx/>
                 <a:latin typeface="Arial"/>
                 <a:ea typeface="Arial"/>
               </a:rPr>
@@ -5352,8 +5221,6 @@
               <a:solidFill>
                 <a:schemeClr val="dk1"/>
               </a:solidFill>
-              <a:effectLst/>
-              <a:uFillTx/>
               <a:latin typeface="Arial"/>
             </a:endParaRPr>
           </a:p>
@@ -5361,7 +5228,7 @@
       </p:sp>
       <p:sp>
         <p:nvSpPr>
-          <p:cNvPr id="28" name="PlaceHolder 2"/>
+          <p:cNvPr id="2000280901" name="PlaceHolder 2"/>
           <p:cNvSpPr>
             <a:spLocks noGrp="1"/>
           </p:cNvSpPr>
@@ -5369,7 +5236,7 @@
             <p:ph type="body"/>
           </p:nvPr>
         </p:nvSpPr>
-        <p:spPr>
+        <p:spPr bwMode="auto">
           <a:xfrm>
             <a:off x="838080" y="1825560"/>
             <a:ext cx="5181120" cy="4350960"/>
@@ -5403,8 +5270,6 @@
                 <a:solidFill>
                   <a:schemeClr val="dk1"/>
                 </a:solidFill>
-                <a:effectLst/>
-                <a:uFillTx/>
                 <a:latin typeface="Arial"/>
                 <a:ea typeface="Arial"/>
               </a:defRPr>
@@ -5425,8 +5290,6 @@
                 <a:solidFill>
                   <a:schemeClr val="dk1"/>
                 </a:solidFill>
-                <a:effectLst/>
-                <a:uFillTx/>
                 <a:latin typeface="Arial"/>
                 <a:ea typeface="Arial"/>
               </a:defRPr>
@@ -5447,8 +5310,6 @@
                 <a:solidFill>
                   <a:schemeClr val="dk1"/>
                 </a:solidFill>
-                <a:effectLst/>
-                <a:uFillTx/>
                 <a:latin typeface="Arial"/>
                 <a:ea typeface="Arial"/>
               </a:defRPr>
@@ -5469,8 +5330,6 @@
                 <a:solidFill>
                   <a:schemeClr val="dk1"/>
                 </a:solidFill>
-                <a:effectLst/>
-                <a:uFillTx/>
                 <a:latin typeface="Arial"/>
                 <a:ea typeface="Arial"/>
               </a:defRPr>
@@ -5491,8 +5350,6 @@
                 <a:solidFill>
                   <a:schemeClr val="dk1"/>
                 </a:solidFill>
-                <a:effectLst/>
-                <a:uFillTx/>
                 <a:latin typeface="Arial"/>
                 <a:ea typeface="Arial"/>
               </a:defRPr>
@@ -5511,14 +5368,13 @@
               </a:buClr>
               <a:buFont typeface="Arial"/>
               <a:buChar char="•"/>
+              <a:defRPr/>
             </a:pPr>
             <a:r>
               <a:rPr lang="pt-BR" sz="2800" b="0" u="none" strike="noStrike">
                 <a:solidFill>
                   <a:schemeClr val="dk1"/>
                 </a:solidFill>
-                <a:effectLst/>
-                <a:uFillTx/>
                 <a:latin typeface="Arial"/>
                 <a:ea typeface="Arial"/>
               </a:rPr>
@@ -5528,8 +5384,6 @@
               <a:solidFill>
                 <a:schemeClr val="dk1"/>
               </a:solidFill>
-              <a:effectLst/>
-              <a:uFillTx/>
               <a:latin typeface="Arial"/>
             </a:endParaRPr>
           </a:p>
@@ -5546,14 +5400,13 @@
               </a:buClr>
               <a:buFont typeface="Arial"/>
               <a:buChar char="•"/>
+              <a:defRPr/>
             </a:pPr>
             <a:r>
               <a:rPr lang="pt-BR" sz="2400" b="0" u="none" strike="noStrike">
                 <a:solidFill>
                   <a:schemeClr val="dk1"/>
                 </a:solidFill>
-                <a:effectLst/>
-                <a:uFillTx/>
                 <a:latin typeface="Arial"/>
                 <a:ea typeface="Arial"/>
               </a:rPr>
@@ -5563,8 +5416,6 @@
               <a:solidFill>
                 <a:schemeClr val="dk1"/>
               </a:solidFill>
-              <a:effectLst/>
-              <a:uFillTx/>
               <a:latin typeface="Arial"/>
             </a:endParaRPr>
           </a:p>
@@ -5581,14 +5432,13 @@
               </a:buClr>
               <a:buFont typeface="Arial"/>
               <a:buChar char="•"/>
+              <a:defRPr/>
             </a:pPr>
             <a:r>
               <a:rPr lang="pt-BR" sz="2000" b="0" u="none" strike="noStrike">
                 <a:solidFill>
                   <a:schemeClr val="dk1"/>
                 </a:solidFill>
-                <a:effectLst/>
-                <a:uFillTx/>
                 <a:latin typeface="Arial"/>
                 <a:ea typeface="Arial"/>
               </a:rPr>
@@ -5598,8 +5448,6 @@
               <a:solidFill>
                 <a:schemeClr val="dk1"/>
               </a:solidFill>
-              <a:effectLst/>
-              <a:uFillTx/>
               <a:latin typeface="Arial"/>
             </a:endParaRPr>
           </a:p>
@@ -5616,14 +5464,13 @@
               </a:buClr>
               <a:buFont typeface="Arial"/>
               <a:buChar char="•"/>
+              <a:defRPr/>
             </a:pPr>
             <a:r>
               <a:rPr lang="pt-BR" sz="1800" b="0" u="none" strike="noStrike">
                 <a:solidFill>
                   <a:schemeClr val="dk1"/>
                 </a:solidFill>
-                <a:effectLst/>
-                <a:uFillTx/>
                 <a:latin typeface="Arial"/>
                 <a:ea typeface="Arial"/>
               </a:rPr>
@@ -5633,8 +5480,6 @@
               <a:solidFill>
                 <a:schemeClr val="dk1"/>
               </a:solidFill>
-              <a:effectLst/>
-              <a:uFillTx/>
               <a:latin typeface="Arial"/>
             </a:endParaRPr>
           </a:p>
@@ -5651,14 +5496,13 @@
               </a:buClr>
               <a:buFont typeface="Arial"/>
               <a:buChar char="•"/>
+              <a:defRPr/>
             </a:pPr>
             <a:r>
               <a:rPr lang="pt-BR" sz="1800" b="0" u="none" strike="noStrike">
                 <a:solidFill>
                   <a:schemeClr val="dk1"/>
                 </a:solidFill>
-                <a:effectLst/>
-                <a:uFillTx/>
                 <a:latin typeface="Arial"/>
                 <a:ea typeface="Arial"/>
               </a:rPr>
@@ -5668,8 +5512,6 @@
               <a:solidFill>
                 <a:schemeClr val="dk1"/>
               </a:solidFill>
-              <a:effectLst/>
-              <a:uFillTx/>
               <a:latin typeface="Arial"/>
             </a:endParaRPr>
           </a:p>
@@ -5677,7 +5519,7 @@
       </p:sp>
       <p:sp>
         <p:nvSpPr>
-          <p:cNvPr id="29" name="PlaceHolder 3"/>
+          <p:cNvPr id="435969075" name="PlaceHolder 3"/>
           <p:cNvSpPr>
             <a:spLocks noGrp="1"/>
           </p:cNvSpPr>
@@ -5685,7 +5527,7 @@
             <p:ph type="body"/>
           </p:nvPr>
         </p:nvSpPr>
-        <p:spPr>
+        <p:spPr bwMode="auto">
           <a:xfrm>
             <a:off x="6172200" y="1825560"/>
             <a:ext cx="5181120" cy="4350960"/>
@@ -5719,8 +5561,6 @@
                 <a:solidFill>
                   <a:schemeClr val="dk1"/>
                 </a:solidFill>
-                <a:effectLst/>
-                <a:uFillTx/>
                 <a:latin typeface="Arial"/>
                 <a:ea typeface="Arial"/>
               </a:defRPr>
@@ -5741,8 +5581,6 @@
                 <a:solidFill>
                   <a:schemeClr val="dk1"/>
                 </a:solidFill>
-                <a:effectLst/>
-                <a:uFillTx/>
                 <a:latin typeface="Arial"/>
                 <a:ea typeface="Arial"/>
               </a:defRPr>
@@ -5763,8 +5601,6 @@
                 <a:solidFill>
                   <a:schemeClr val="dk1"/>
                 </a:solidFill>
-                <a:effectLst/>
-                <a:uFillTx/>
                 <a:latin typeface="Arial"/>
                 <a:ea typeface="Arial"/>
               </a:defRPr>
@@ -5785,8 +5621,6 @@
                 <a:solidFill>
                   <a:schemeClr val="dk1"/>
                 </a:solidFill>
-                <a:effectLst/>
-                <a:uFillTx/>
                 <a:latin typeface="Arial"/>
                 <a:ea typeface="Arial"/>
               </a:defRPr>
@@ -5807,8 +5641,6 @@
                 <a:solidFill>
                   <a:schemeClr val="dk1"/>
                 </a:solidFill>
-                <a:effectLst/>
-                <a:uFillTx/>
                 <a:latin typeface="Arial"/>
                 <a:ea typeface="Arial"/>
               </a:defRPr>
@@ -5827,14 +5659,13 @@
               </a:buClr>
               <a:buFont typeface="Arial"/>
               <a:buChar char="•"/>
+              <a:defRPr/>
             </a:pPr>
             <a:r>
               <a:rPr lang="pt-BR" sz="2800" b="0" u="none" strike="noStrike">
                 <a:solidFill>
                   <a:schemeClr val="dk1"/>
                 </a:solidFill>
-                <a:effectLst/>
-                <a:uFillTx/>
                 <a:latin typeface="Arial"/>
                 <a:ea typeface="Arial"/>
               </a:rPr>
@@ -5844,8 +5675,6 @@
               <a:solidFill>
                 <a:schemeClr val="dk1"/>
               </a:solidFill>
-              <a:effectLst/>
-              <a:uFillTx/>
               <a:latin typeface="Arial"/>
             </a:endParaRPr>
           </a:p>
@@ -5862,14 +5691,13 @@
               </a:buClr>
               <a:buFont typeface="Arial"/>
               <a:buChar char="•"/>
+              <a:defRPr/>
             </a:pPr>
             <a:r>
               <a:rPr lang="pt-BR" sz="2400" b="0" u="none" strike="noStrike">
                 <a:solidFill>
                   <a:schemeClr val="dk1"/>
                 </a:solidFill>
-                <a:effectLst/>
-                <a:uFillTx/>
                 <a:latin typeface="Arial"/>
                 <a:ea typeface="Arial"/>
               </a:rPr>
@@ -5879,8 +5707,6 @@
               <a:solidFill>
                 <a:schemeClr val="dk1"/>
               </a:solidFill>
-              <a:effectLst/>
-              <a:uFillTx/>
               <a:latin typeface="Arial"/>
             </a:endParaRPr>
           </a:p>
@@ -5897,14 +5723,13 @@
               </a:buClr>
               <a:buFont typeface="Arial"/>
               <a:buChar char="•"/>
+              <a:defRPr/>
             </a:pPr>
             <a:r>
               <a:rPr lang="pt-BR" sz="2000" b="0" u="none" strike="noStrike">
                 <a:solidFill>
                   <a:schemeClr val="dk1"/>
                 </a:solidFill>
-                <a:effectLst/>
-                <a:uFillTx/>
                 <a:latin typeface="Arial"/>
                 <a:ea typeface="Arial"/>
               </a:rPr>
@@ -5914,8 +5739,6 @@
               <a:solidFill>
                 <a:schemeClr val="dk1"/>
               </a:solidFill>
-              <a:effectLst/>
-              <a:uFillTx/>
               <a:latin typeface="Arial"/>
             </a:endParaRPr>
           </a:p>
@@ -5932,14 +5755,13 @@
               </a:buClr>
               <a:buFont typeface="Arial"/>
               <a:buChar char="•"/>
+              <a:defRPr/>
             </a:pPr>
             <a:r>
               <a:rPr lang="pt-BR" sz="1800" b="0" u="none" strike="noStrike">
                 <a:solidFill>
                   <a:schemeClr val="dk1"/>
                 </a:solidFill>
-                <a:effectLst/>
-                <a:uFillTx/>
                 <a:latin typeface="Arial"/>
                 <a:ea typeface="Arial"/>
               </a:rPr>
@@ -5949,8 +5771,6 @@
               <a:solidFill>
                 <a:schemeClr val="dk1"/>
               </a:solidFill>
-              <a:effectLst/>
-              <a:uFillTx/>
               <a:latin typeface="Arial"/>
             </a:endParaRPr>
           </a:p>
@@ -5967,14 +5787,13 @@
               </a:buClr>
               <a:buFont typeface="Arial"/>
               <a:buChar char="•"/>
+              <a:defRPr/>
             </a:pPr>
             <a:r>
               <a:rPr lang="pt-BR" sz="1800" b="0" u="none" strike="noStrike">
                 <a:solidFill>
                   <a:schemeClr val="dk1"/>
                 </a:solidFill>
-                <a:effectLst/>
-                <a:uFillTx/>
                 <a:latin typeface="Arial"/>
                 <a:ea typeface="Arial"/>
               </a:rPr>
@@ -5984,8 +5803,6 @@
               <a:solidFill>
                 <a:schemeClr val="dk1"/>
               </a:solidFill>
-              <a:effectLst/>
-              <a:uFillTx/>
               <a:latin typeface="Arial"/>
             </a:endParaRPr>
           </a:p>
@@ -5993,7 +5810,7 @@
       </p:sp>
       <p:sp>
         <p:nvSpPr>
-          <p:cNvPr id="30" name="PlaceHolder 4"/>
+          <p:cNvPr id="604451316" name="PlaceHolder 4"/>
           <p:cNvSpPr>
             <a:spLocks noGrp="1"/>
           </p:cNvSpPr>
@@ -6001,7 +5818,7 @@
             <p:ph type="dt" idx="16"/>
           </p:nvPr>
         </p:nvSpPr>
-        <p:spPr>
+        <p:spPr bwMode="auto">
           <a:xfrm>
             <a:off x="838080" y="6356520"/>
             <a:ext cx="2742840" cy="364680"/>
@@ -6030,8 +5847,6 @@
                     <a:tint val="75000"/>
                   </a:schemeClr>
                 </a:solidFill>
-                <a:effectLst/>
-                <a:uFillTx/>
                 <a:latin typeface="Arial"/>
                 <a:ea typeface="Arial"/>
               </a:defRPr>
@@ -6043,6 +5858,7 @@
                 <a:spcPct val="100000"/>
               </a:lnSpc>
               <a:buNone/>
+              <a:defRPr/>
             </a:pPr>
             <a:r>
               <a:rPr lang="pt-BR" sz="1200" b="0" u="none" strike="noStrike">
@@ -6051,8 +5867,6 @@
                     <a:tint val="75000"/>
                   </a:schemeClr>
                 </a:solidFill>
-                <a:effectLst/>
-                <a:uFillTx/>
                 <a:latin typeface="Arial"/>
                 <a:ea typeface="Arial"/>
               </a:rPr>
@@ -6062,8 +5876,6 @@
               <a:solidFill>
                 <a:srgbClr val="000000"/>
               </a:solidFill>
-              <a:effectLst/>
-              <a:uFillTx/>
               <a:latin typeface="Times New Roman"/>
             </a:endParaRPr>
           </a:p>
@@ -6071,7 +5883,7 @@
       </p:sp>
       <p:sp>
         <p:nvSpPr>
-          <p:cNvPr id="31" name="PlaceHolder 5"/>
+          <p:cNvPr id="399019528" name="PlaceHolder 5"/>
           <p:cNvSpPr>
             <a:spLocks noGrp="1"/>
           </p:cNvSpPr>
@@ -6079,7 +5891,7 @@
             <p:ph type="ftr" idx="17"/>
           </p:nvPr>
         </p:nvSpPr>
-        <p:spPr>
+        <p:spPr bwMode="auto">
           <a:xfrm>
             <a:off x="4038480" y="6356520"/>
             <a:ext cx="4114440" cy="364680"/>
@@ -6103,8 +5915,6 @@
                 <a:solidFill>
                   <a:srgbClr val="000000"/>
                 </a:solidFill>
-                <a:effectLst/>
-                <a:uFillTx/>
                 <a:latin typeface="Times New Roman"/>
               </a:defRPr>
             </a:lvl1pPr>
@@ -6112,14 +5922,13 @@
           <a:p>
             <a:pPr indent="0" algn="ctr">
               <a:buNone/>
+              <a:defRPr/>
             </a:pPr>
             <a:r>
               <a:rPr lang="pt-BR" sz="1400" b="0" u="none" strike="noStrike">
                 <a:solidFill>
                   <a:srgbClr val="000000"/>
                 </a:solidFill>
-                <a:effectLst/>
-                <a:uFillTx/>
                 <a:latin typeface="Times New Roman"/>
               </a:rPr>
               <a:t>&lt;rodapé&gt;</a:t>
@@ -6128,8 +5937,6 @@
               <a:solidFill>
                 <a:srgbClr val="000000"/>
               </a:solidFill>
-              <a:effectLst/>
-              <a:uFillTx/>
               <a:latin typeface="Times New Roman"/>
             </a:endParaRPr>
           </a:p>
@@ -6137,7 +5944,7 @@
       </p:sp>
       <p:sp>
         <p:nvSpPr>
-          <p:cNvPr id="32" name="PlaceHolder 6"/>
+          <p:cNvPr id="1580433817" name="PlaceHolder 6"/>
           <p:cNvSpPr>
             <a:spLocks noGrp="1"/>
           </p:cNvSpPr>
@@ -6145,7 +5952,7 @@
             <p:ph type="sldNum" idx="18"/>
           </p:nvPr>
         </p:nvSpPr>
-        <p:spPr>
+        <p:spPr bwMode="auto">
           <a:xfrm>
             <a:off x="8610480" y="6356520"/>
             <a:ext cx="2742840" cy="364680"/>
@@ -6174,8 +5981,6 @@
                     <a:tint val="75000"/>
                   </a:schemeClr>
                 </a:solidFill>
-                <a:effectLst/>
-                <a:uFillTx/>
                 <a:latin typeface="Arial"/>
                 <a:ea typeface="Arial"/>
               </a:defRPr>
@@ -6187,6 +5992,7 @@
                 <a:spcPct val="100000"/>
               </a:lnSpc>
               <a:buNone/>
+              <a:defRPr/>
             </a:pPr>
             <a:fld id="{E7F597EC-3617-438D-B5DB-3A111EB62035}" type="slidenum">
               <a:rPr lang="pt-BR" sz="1200" b="0" u="none" strike="noStrike">
@@ -6195,8 +6001,6 @@
                     <a:tint val="75000"/>
                   </a:schemeClr>
                 </a:solidFill>
-                <a:effectLst/>
-                <a:uFillTx/>
                 <a:latin typeface="Arial"/>
                 <a:ea typeface="Arial"/>
               </a:rPr>
@@ -6206,8 +6010,6 @@
               <a:solidFill>
                 <a:srgbClr val="000000"/>
               </a:solidFill>
-              <a:effectLst/>
-              <a:uFillTx/>
               <a:latin typeface="Times New Roman"/>
             </a:endParaRPr>
           </a:p>
@@ -6215,14 +6017,17 @@
       </p:sp>
     </p:spTree>
   </p:cSld>
+  <p:clrMapOvr>
+    <a:masterClrMapping/>
+  </p:clrMapOvr>
 </p:sldLayout>
 </file>
 
 <file path=ppt/slideLayouts/slideLayout7.xml><?xml version="1.0" encoding="utf-8"?>
-<p:sldLayout xmlns:a="http://schemas.openxmlformats.org/drawingml/2006/main" xmlns:p="http://schemas.openxmlformats.org/presentationml/2006/main" xmlns:r="http://schemas.openxmlformats.org/officeDocument/2006/relationships" xmlns:p14="http://schemas.microsoft.com/office/powerpoint/2010/main" xmlns:p15="http://schemas.microsoft.com/office/powerpoint/2012/main" xmlns:mc="http://schemas.openxmlformats.org/markup-compatibility/2006" type="blank" preserve="1">
+<p:sldLayout xmlns:a="http://schemas.openxmlformats.org/drawingml/2006/main" xmlns:r="http://schemas.openxmlformats.org/officeDocument/2006/relationships" xmlns:p="http://schemas.openxmlformats.org/presentationml/2006/main" xmlns:m="http://schemas.openxmlformats.org/officeDocument/2006/math" xmlns:w="http://schemas.openxmlformats.org/wordprocessingml/2006/main" matchingName="" preserve="1" showMasterPhAnim="0" showMasterSp="1" type="blank" userDrawn="1">
   <p:cSld name="Comparação">
     <p:bg>
-      <p:bgPr>
+      <p:bgPr shadeToTitle="0">
         <a:solidFill>
           <a:srgbClr val="FFFFFF"/>
         </a:solidFill>
@@ -6234,7 +6039,7 @@
         <p:cNvGrpSpPr/>
         <p:nvPr/>
       </p:nvGrpSpPr>
-      <p:grpSpPr>
+      <p:grpSpPr bwMode="auto">
         <a:xfrm>
           <a:off x="0" y="0"/>
           <a:ext cx="0" cy="0"/>
@@ -6244,7 +6049,7 @@
       </p:grpSpPr>
       <p:sp>
         <p:nvSpPr>
-          <p:cNvPr id="33" name="PlaceHolder 1"/>
+          <p:cNvPr id="456233132" name="PlaceHolder 1"/>
           <p:cNvSpPr>
             <a:spLocks noGrp="1"/>
           </p:cNvSpPr>
@@ -6252,9 +6057,9 @@
             <p:ph type="title"/>
           </p:nvPr>
         </p:nvSpPr>
-        <p:spPr>
+        <p:spPr bwMode="auto">
           <a:xfrm>
-            <a:off x="839880" y="365040"/>
+            <a:off x="839879" y="365040"/>
             <a:ext cx="10515240" cy="1325160"/>
           </a:xfrm>
           <a:prstGeom prst="rect">
@@ -6279,8 +6084,6 @@
                 <a:solidFill>
                   <a:schemeClr val="dk1"/>
                 </a:solidFill>
-                <a:effectLst/>
-                <a:uFillTx/>
                 <a:latin typeface="Arial"/>
                 <a:ea typeface="Arial"/>
               </a:defRPr>
@@ -6292,14 +6095,13 @@
                 <a:spcPct val="90000"/>
               </a:lnSpc>
               <a:buNone/>
+              <a:defRPr/>
             </a:pPr>
             <a:r>
               <a:rPr lang="pt-BR" sz="4400" b="0" u="none" strike="noStrike">
                 <a:solidFill>
                   <a:schemeClr val="dk1"/>
                 </a:solidFill>
-                <a:effectLst/>
-                <a:uFillTx/>
                 <a:latin typeface="Arial"/>
                 <a:ea typeface="Arial"/>
               </a:rPr>
@@ -6309,8 +6111,6 @@
               <a:solidFill>
                 <a:schemeClr val="dk1"/>
               </a:solidFill>
-              <a:effectLst/>
-              <a:uFillTx/>
               <a:latin typeface="Arial"/>
             </a:endParaRPr>
           </a:p>
@@ -6318,7 +6118,7 @@
       </p:sp>
       <p:sp>
         <p:nvSpPr>
-          <p:cNvPr id="34" name="PlaceHolder 2"/>
+          <p:cNvPr id="564613065" name="PlaceHolder 2"/>
           <p:cNvSpPr>
             <a:spLocks noGrp="1"/>
           </p:cNvSpPr>
@@ -6326,9 +6126,9 @@
             <p:ph type="body"/>
           </p:nvPr>
         </p:nvSpPr>
-        <p:spPr>
+        <p:spPr bwMode="auto">
           <a:xfrm>
-            <a:off x="839880" y="1681200"/>
+            <a:off x="839879" y="1681200"/>
             <a:ext cx="5157360" cy="823680"/>
           </a:xfrm>
           <a:prstGeom prst="rect">
@@ -6359,8 +6159,6 @@
                 <a:solidFill>
                   <a:schemeClr val="dk1"/>
                 </a:solidFill>
-                <a:effectLst/>
-                <a:uFillTx/>
                 <a:latin typeface="Arial"/>
                 <a:ea typeface="Arial"/>
               </a:defRPr>
@@ -6378,14 +6176,13 @@
               <a:tabLst>
                 <a:tab pos="0" algn="l"/>
               </a:tabLst>
+              <a:defRPr/>
             </a:pPr>
             <a:r>
               <a:rPr lang="pt-BR" sz="2400" b="1" u="none" strike="noStrike">
                 <a:solidFill>
                   <a:schemeClr val="dk1"/>
                 </a:solidFill>
-                <a:effectLst/>
-                <a:uFillTx/>
                 <a:latin typeface="Arial"/>
                 <a:ea typeface="Arial"/>
               </a:rPr>
@@ -6395,8 +6192,6 @@
               <a:solidFill>
                 <a:schemeClr val="dk1"/>
               </a:solidFill>
-              <a:effectLst/>
-              <a:uFillTx/>
               <a:latin typeface="Arial"/>
             </a:endParaRPr>
           </a:p>
@@ -6404,7 +6199,7 @@
       </p:sp>
       <p:sp>
         <p:nvSpPr>
-          <p:cNvPr id="35" name="PlaceHolder 3"/>
+          <p:cNvPr id="1761442551" name="PlaceHolder 3"/>
           <p:cNvSpPr>
             <a:spLocks noGrp="1"/>
           </p:cNvSpPr>
@@ -6412,9 +6207,9 @@
             <p:ph type="body"/>
           </p:nvPr>
         </p:nvSpPr>
-        <p:spPr>
+        <p:spPr bwMode="auto">
           <a:xfrm>
-            <a:off x="839880" y="2505240"/>
+            <a:off x="839879" y="2505240"/>
             <a:ext cx="5157360" cy="3684240"/>
           </a:xfrm>
           <a:prstGeom prst="rect">
@@ -6449,8 +6244,6 @@
                 <a:solidFill>
                   <a:schemeClr val="dk1"/>
                 </a:solidFill>
-                <a:effectLst/>
-                <a:uFillTx/>
                 <a:latin typeface="Arial"/>
                 <a:ea typeface="Arial"/>
               </a:defRPr>
@@ -6474,8 +6267,6 @@
                 <a:solidFill>
                   <a:schemeClr val="dk1"/>
                 </a:solidFill>
-                <a:effectLst/>
-                <a:uFillTx/>
                 <a:latin typeface="Arial"/>
                 <a:ea typeface="Arial"/>
               </a:defRPr>
@@ -6499,8 +6290,6 @@
                 <a:solidFill>
                   <a:schemeClr val="dk1"/>
                 </a:solidFill>
-                <a:effectLst/>
-                <a:uFillTx/>
                 <a:latin typeface="Arial"/>
                 <a:ea typeface="Arial"/>
               </a:defRPr>
@@ -6524,8 +6313,6 @@
                 <a:solidFill>
                   <a:schemeClr val="dk1"/>
                 </a:solidFill>
-                <a:effectLst/>
-                <a:uFillTx/>
                 <a:latin typeface="Arial"/>
                 <a:ea typeface="Arial"/>
               </a:defRPr>
@@ -6549,8 +6336,6 @@
                 <a:solidFill>
                   <a:schemeClr val="dk1"/>
                 </a:solidFill>
-                <a:effectLst/>
-                <a:uFillTx/>
                 <a:latin typeface="Arial"/>
                 <a:ea typeface="Arial"/>
               </a:defRPr>
@@ -6572,14 +6357,13 @@
               <a:tabLst>
                 <a:tab pos="0" algn="l"/>
               </a:tabLst>
+              <a:defRPr/>
             </a:pPr>
             <a:r>
               <a:rPr lang="pt-BR" sz="2800" b="0" u="none" strike="noStrike">
                 <a:solidFill>
                   <a:schemeClr val="dk1"/>
                 </a:solidFill>
-                <a:effectLst/>
-                <a:uFillTx/>
                 <a:latin typeface="Arial"/>
                 <a:ea typeface="Arial"/>
               </a:rPr>
@@ -6589,8 +6373,6 @@
               <a:solidFill>
                 <a:schemeClr val="dk1"/>
               </a:solidFill>
-              <a:effectLst/>
-              <a:uFillTx/>
               <a:latin typeface="Arial"/>
             </a:endParaRPr>
           </a:p>
@@ -6610,14 +6392,13 @@
               <a:tabLst>
                 <a:tab pos="0" algn="l"/>
               </a:tabLst>
+              <a:defRPr/>
             </a:pPr>
             <a:r>
               <a:rPr lang="pt-BR" sz="2400" b="0" u="none" strike="noStrike">
                 <a:solidFill>
                   <a:schemeClr val="dk1"/>
                 </a:solidFill>
-                <a:effectLst/>
-                <a:uFillTx/>
                 <a:latin typeface="Arial"/>
                 <a:ea typeface="Arial"/>
               </a:rPr>
@@ -6627,8 +6408,6 @@
               <a:solidFill>
                 <a:schemeClr val="dk1"/>
               </a:solidFill>
-              <a:effectLst/>
-              <a:uFillTx/>
               <a:latin typeface="Arial"/>
             </a:endParaRPr>
           </a:p>
@@ -6648,14 +6427,13 @@
               <a:tabLst>
                 <a:tab pos="0" algn="l"/>
               </a:tabLst>
+              <a:defRPr/>
             </a:pPr>
             <a:r>
               <a:rPr lang="pt-BR" sz="2000" b="0" u="none" strike="noStrike">
                 <a:solidFill>
                   <a:schemeClr val="dk1"/>
                 </a:solidFill>
-                <a:effectLst/>
-                <a:uFillTx/>
                 <a:latin typeface="Arial"/>
                 <a:ea typeface="Arial"/>
               </a:rPr>
@@ -6665,8 +6443,6 @@
               <a:solidFill>
                 <a:schemeClr val="dk1"/>
               </a:solidFill>
-              <a:effectLst/>
-              <a:uFillTx/>
               <a:latin typeface="Arial"/>
             </a:endParaRPr>
           </a:p>
@@ -6686,14 +6462,13 @@
               <a:tabLst>
                 <a:tab pos="0" algn="l"/>
               </a:tabLst>
+              <a:defRPr/>
             </a:pPr>
             <a:r>
               <a:rPr lang="pt-BR" sz="1800" b="0" u="none" strike="noStrike">
                 <a:solidFill>
                   <a:schemeClr val="dk1"/>
                 </a:solidFill>
-                <a:effectLst/>
-                <a:uFillTx/>
                 <a:latin typeface="Arial"/>
                 <a:ea typeface="Arial"/>
               </a:rPr>
@@ -6703,8 +6478,6 @@
               <a:solidFill>
                 <a:schemeClr val="dk1"/>
               </a:solidFill>
-              <a:effectLst/>
-              <a:uFillTx/>
               <a:latin typeface="Arial"/>
             </a:endParaRPr>
           </a:p>
@@ -6724,14 +6497,13 @@
               <a:tabLst>
                 <a:tab pos="0" algn="l"/>
               </a:tabLst>
+              <a:defRPr/>
             </a:pPr>
             <a:r>
               <a:rPr lang="pt-BR" sz="1800" b="0" u="none" strike="noStrike">
                 <a:solidFill>
                   <a:schemeClr val="dk1"/>
                 </a:solidFill>
-                <a:effectLst/>
-                <a:uFillTx/>
                 <a:latin typeface="Arial"/>
                 <a:ea typeface="Arial"/>
               </a:rPr>
@@ -6741,8 +6513,6 @@
               <a:solidFill>
                 <a:schemeClr val="dk1"/>
               </a:solidFill>
-              <a:effectLst/>
-              <a:uFillTx/>
               <a:latin typeface="Arial"/>
             </a:endParaRPr>
           </a:p>
@@ -6750,7 +6520,7 @@
       </p:sp>
       <p:sp>
         <p:nvSpPr>
-          <p:cNvPr id="36" name="PlaceHolder 4"/>
+          <p:cNvPr id="1788926141" name="PlaceHolder 4"/>
           <p:cNvSpPr>
             <a:spLocks noGrp="1"/>
           </p:cNvSpPr>
@@ -6758,7 +6528,7 @@
             <p:ph type="body"/>
           </p:nvPr>
         </p:nvSpPr>
-        <p:spPr>
+        <p:spPr bwMode="auto">
           <a:xfrm>
             <a:off x="6172200" y="1681200"/>
             <a:ext cx="5182920" cy="823680"/>
@@ -6791,8 +6561,6 @@
                 <a:solidFill>
                   <a:schemeClr val="dk1"/>
                 </a:solidFill>
-                <a:effectLst/>
-                <a:uFillTx/>
                 <a:latin typeface="Arial"/>
                 <a:ea typeface="Arial"/>
               </a:defRPr>
@@ -6810,14 +6578,13 @@
               <a:tabLst>
                 <a:tab pos="0" algn="l"/>
               </a:tabLst>
+              <a:defRPr/>
             </a:pPr>
             <a:r>
               <a:rPr lang="pt-BR" sz="2400" b="1" u="none" strike="noStrike">
                 <a:solidFill>
                   <a:schemeClr val="dk1"/>
                 </a:solidFill>
-                <a:effectLst/>
-                <a:uFillTx/>
                 <a:latin typeface="Arial"/>
                 <a:ea typeface="Arial"/>
               </a:rPr>
@@ -6827,8 +6594,6 @@
               <a:solidFill>
                 <a:schemeClr val="dk1"/>
               </a:solidFill>
-              <a:effectLst/>
-              <a:uFillTx/>
               <a:latin typeface="Arial"/>
             </a:endParaRPr>
           </a:p>
@@ -6836,7 +6601,7 @@
       </p:sp>
       <p:sp>
         <p:nvSpPr>
-          <p:cNvPr id="37" name="PlaceHolder 5"/>
+          <p:cNvPr id="1215580430" name="PlaceHolder 5"/>
           <p:cNvSpPr>
             <a:spLocks noGrp="1"/>
           </p:cNvSpPr>
@@ -6844,7 +6609,7 @@
             <p:ph type="body"/>
           </p:nvPr>
         </p:nvSpPr>
-        <p:spPr>
+        <p:spPr bwMode="auto">
           <a:xfrm>
             <a:off x="6172200" y="2505240"/>
             <a:ext cx="5182920" cy="3684240"/>
@@ -6881,8 +6646,6 @@
                 <a:solidFill>
                   <a:schemeClr val="dk1"/>
                 </a:solidFill>
-                <a:effectLst/>
-                <a:uFillTx/>
                 <a:latin typeface="Arial"/>
                 <a:ea typeface="Arial"/>
               </a:defRPr>
@@ -6906,8 +6669,6 @@
                 <a:solidFill>
                   <a:schemeClr val="dk1"/>
                 </a:solidFill>
-                <a:effectLst/>
-                <a:uFillTx/>
                 <a:latin typeface="Arial"/>
                 <a:ea typeface="Arial"/>
               </a:defRPr>
@@ -6931,8 +6692,6 @@
                 <a:solidFill>
                   <a:schemeClr val="dk1"/>
                 </a:solidFill>
-                <a:effectLst/>
-                <a:uFillTx/>
                 <a:latin typeface="Arial"/>
                 <a:ea typeface="Arial"/>
               </a:defRPr>
@@ -6956,8 +6715,6 @@
                 <a:solidFill>
                   <a:schemeClr val="dk1"/>
                 </a:solidFill>
-                <a:effectLst/>
-                <a:uFillTx/>
                 <a:latin typeface="Arial"/>
                 <a:ea typeface="Arial"/>
               </a:defRPr>
@@ -6981,8 +6738,6 @@
                 <a:solidFill>
                   <a:schemeClr val="dk1"/>
                 </a:solidFill>
-                <a:effectLst/>
-                <a:uFillTx/>
                 <a:latin typeface="Arial"/>
                 <a:ea typeface="Arial"/>
               </a:defRPr>
@@ -7004,14 +6759,13 @@
               <a:tabLst>
                 <a:tab pos="0" algn="l"/>
               </a:tabLst>
+              <a:defRPr/>
             </a:pPr>
             <a:r>
               <a:rPr lang="pt-BR" sz="2800" b="0" u="none" strike="noStrike">
                 <a:solidFill>
                   <a:schemeClr val="dk1"/>
                 </a:solidFill>
-                <a:effectLst/>
-                <a:uFillTx/>
                 <a:latin typeface="Arial"/>
                 <a:ea typeface="Arial"/>
               </a:rPr>
@@ -7021,8 +6775,6 @@
               <a:solidFill>
                 <a:schemeClr val="dk1"/>
               </a:solidFill>
-              <a:effectLst/>
-              <a:uFillTx/>
               <a:latin typeface="Arial"/>
             </a:endParaRPr>
           </a:p>
@@ -7042,14 +6794,13 @@
               <a:tabLst>
                 <a:tab pos="0" algn="l"/>
               </a:tabLst>
+              <a:defRPr/>
             </a:pPr>
             <a:r>
               <a:rPr lang="pt-BR" sz="2400" b="0" u="none" strike="noStrike">
                 <a:solidFill>
                   <a:schemeClr val="dk1"/>
                 </a:solidFill>
-                <a:effectLst/>
-                <a:uFillTx/>
                 <a:latin typeface="Arial"/>
                 <a:ea typeface="Arial"/>
               </a:rPr>
@@ -7059,8 +6810,6 @@
               <a:solidFill>
                 <a:schemeClr val="dk1"/>
               </a:solidFill>
-              <a:effectLst/>
-              <a:uFillTx/>
               <a:latin typeface="Arial"/>
             </a:endParaRPr>
           </a:p>
@@ -7080,14 +6829,13 @@
               <a:tabLst>
                 <a:tab pos="0" algn="l"/>
               </a:tabLst>
+              <a:defRPr/>
             </a:pPr>
             <a:r>
               <a:rPr lang="pt-BR" sz="2000" b="0" u="none" strike="noStrike">
                 <a:solidFill>
                   <a:schemeClr val="dk1"/>
                 </a:solidFill>
-                <a:effectLst/>
-                <a:uFillTx/>
                 <a:latin typeface="Arial"/>
                 <a:ea typeface="Arial"/>
               </a:rPr>
@@ -7097,8 +6845,6 @@
               <a:solidFill>
                 <a:schemeClr val="dk1"/>
               </a:solidFill>
-              <a:effectLst/>
-              <a:uFillTx/>
               <a:latin typeface="Arial"/>
             </a:endParaRPr>
           </a:p>
@@ -7118,14 +6864,13 @@
               <a:tabLst>
                 <a:tab pos="0" algn="l"/>
               </a:tabLst>
+              <a:defRPr/>
             </a:pPr>
             <a:r>
               <a:rPr lang="pt-BR" sz="1800" b="0" u="none" strike="noStrike">
                 <a:solidFill>
                   <a:schemeClr val="dk1"/>
                 </a:solidFill>
-                <a:effectLst/>
-                <a:uFillTx/>
                 <a:latin typeface="Arial"/>
                 <a:ea typeface="Arial"/>
               </a:rPr>
@@ -7135,8 +6880,6 @@
               <a:solidFill>
                 <a:schemeClr val="dk1"/>
               </a:solidFill>
-              <a:effectLst/>
-              <a:uFillTx/>
               <a:latin typeface="Arial"/>
             </a:endParaRPr>
           </a:p>
@@ -7156,14 +6899,13 @@
               <a:tabLst>
                 <a:tab pos="0" algn="l"/>
               </a:tabLst>
+              <a:defRPr/>
             </a:pPr>
             <a:r>
               <a:rPr lang="pt-BR" sz="1800" b="0" u="none" strike="noStrike">
                 <a:solidFill>
                   <a:schemeClr val="dk1"/>
                 </a:solidFill>
-                <a:effectLst/>
-                <a:uFillTx/>
                 <a:latin typeface="Arial"/>
                 <a:ea typeface="Arial"/>
               </a:rPr>
@@ -7173,8 +6915,6 @@
               <a:solidFill>
                 <a:schemeClr val="dk1"/>
               </a:solidFill>
-              <a:effectLst/>
-              <a:uFillTx/>
               <a:latin typeface="Arial"/>
             </a:endParaRPr>
           </a:p>
@@ -7182,7 +6922,7 @@
       </p:sp>
       <p:sp>
         <p:nvSpPr>
-          <p:cNvPr id="38" name="PlaceHolder 6"/>
+          <p:cNvPr id="1420142342" name="PlaceHolder 6"/>
           <p:cNvSpPr>
             <a:spLocks noGrp="1"/>
           </p:cNvSpPr>
@@ -7190,7 +6930,7 @@
             <p:ph type="dt" idx="19"/>
           </p:nvPr>
         </p:nvSpPr>
-        <p:spPr>
+        <p:spPr bwMode="auto">
           <a:xfrm>
             <a:off x="838080" y="6356520"/>
             <a:ext cx="2742840" cy="364680"/>
@@ -7219,8 +6959,6 @@
                     <a:tint val="75000"/>
                   </a:schemeClr>
                 </a:solidFill>
-                <a:effectLst/>
-                <a:uFillTx/>
                 <a:latin typeface="Arial"/>
                 <a:ea typeface="Arial"/>
               </a:defRPr>
@@ -7232,6 +6970,7 @@
                 <a:spcPct val="100000"/>
               </a:lnSpc>
               <a:buNone/>
+              <a:defRPr/>
             </a:pPr>
             <a:r>
               <a:rPr lang="pt-BR" sz="1200" b="0" u="none" strike="noStrike">
@@ -7240,8 +6979,6 @@
                     <a:tint val="75000"/>
                   </a:schemeClr>
                 </a:solidFill>
-                <a:effectLst/>
-                <a:uFillTx/>
                 <a:latin typeface="Arial"/>
                 <a:ea typeface="Arial"/>
               </a:rPr>
@@ -7251,8 +6988,6 @@
               <a:solidFill>
                 <a:srgbClr val="000000"/>
               </a:solidFill>
-              <a:effectLst/>
-              <a:uFillTx/>
               <a:latin typeface="Times New Roman"/>
             </a:endParaRPr>
           </a:p>
@@ -7260,7 +6995,7 @@
       </p:sp>
       <p:sp>
         <p:nvSpPr>
-          <p:cNvPr id="39" name="PlaceHolder 7"/>
+          <p:cNvPr id="15619401" name="PlaceHolder 7"/>
           <p:cNvSpPr>
             <a:spLocks noGrp="1"/>
           </p:cNvSpPr>
@@ -7268,7 +7003,7 @@
             <p:ph type="ftr" idx="20"/>
           </p:nvPr>
         </p:nvSpPr>
-        <p:spPr>
+        <p:spPr bwMode="auto">
           <a:xfrm>
             <a:off x="4038480" y="6356520"/>
             <a:ext cx="4114440" cy="364680"/>
@@ -7292,8 +7027,6 @@
                 <a:solidFill>
                   <a:srgbClr val="000000"/>
                 </a:solidFill>
-                <a:effectLst/>
-                <a:uFillTx/>
                 <a:latin typeface="Times New Roman"/>
               </a:defRPr>
             </a:lvl1pPr>
@@ -7301,14 +7034,13 @@
           <a:p>
             <a:pPr indent="0" algn="ctr">
               <a:buNone/>
+              <a:defRPr/>
             </a:pPr>
             <a:r>
               <a:rPr lang="pt-BR" sz="1400" b="0" u="none" strike="noStrike">
                 <a:solidFill>
                   <a:srgbClr val="000000"/>
                 </a:solidFill>
-                <a:effectLst/>
-                <a:uFillTx/>
                 <a:latin typeface="Times New Roman"/>
               </a:rPr>
               <a:t>&lt;rodapé&gt;</a:t>
@@ -7317,8 +7049,6 @@
               <a:solidFill>
                 <a:srgbClr val="000000"/>
               </a:solidFill>
-              <a:effectLst/>
-              <a:uFillTx/>
               <a:latin typeface="Times New Roman"/>
             </a:endParaRPr>
           </a:p>
@@ -7326,7 +7056,7 @@
       </p:sp>
       <p:sp>
         <p:nvSpPr>
-          <p:cNvPr id="40" name="PlaceHolder 8"/>
+          <p:cNvPr id="1014703731" name="PlaceHolder 8"/>
           <p:cNvSpPr>
             <a:spLocks noGrp="1"/>
           </p:cNvSpPr>
@@ -7334,7 +7064,7 @@
             <p:ph type="sldNum" idx="21"/>
           </p:nvPr>
         </p:nvSpPr>
-        <p:spPr>
+        <p:spPr bwMode="auto">
           <a:xfrm>
             <a:off x="8610480" y="6356520"/>
             <a:ext cx="2742840" cy="364680"/>
@@ -7363,8 +7093,6 @@
                     <a:tint val="75000"/>
                   </a:schemeClr>
                 </a:solidFill>
-                <a:effectLst/>
-                <a:uFillTx/>
                 <a:latin typeface="Arial"/>
                 <a:ea typeface="Arial"/>
               </a:defRPr>
@@ -7376,6 +7104,7 @@
                 <a:spcPct val="100000"/>
               </a:lnSpc>
               <a:buNone/>
+              <a:defRPr/>
             </a:pPr>
             <a:fld id="{71A7DDD8-99CC-494B-89CD-657EB54FAB46}" type="slidenum">
               <a:rPr lang="pt-BR" sz="1200" b="0" u="none" strike="noStrike">
@@ -7384,8 +7113,6 @@
                     <a:tint val="75000"/>
                   </a:schemeClr>
                 </a:solidFill>
-                <a:effectLst/>
-                <a:uFillTx/>
                 <a:latin typeface="Arial"/>
                 <a:ea typeface="Arial"/>
               </a:rPr>
@@ -7395,8 +7122,6 @@
               <a:solidFill>
                 <a:srgbClr val="000000"/>
               </a:solidFill>
-              <a:effectLst/>
-              <a:uFillTx/>
               <a:latin typeface="Times New Roman"/>
             </a:endParaRPr>
           </a:p>
@@ -7404,14 +7129,17 @@
       </p:sp>
     </p:spTree>
   </p:cSld>
+  <p:clrMapOvr>
+    <a:masterClrMapping/>
+  </p:clrMapOvr>
 </p:sldLayout>
 </file>
 
 <file path=ppt/slideLayouts/slideLayout8.xml><?xml version="1.0" encoding="utf-8"?>
-<p:sldLayout xmlns:a="http://schemas.openxmlformats.org/drawingml/2006/main" xmlns:p="http://schemas.openxmlformats.org/presentationml/2006/main" xmlns:r="http://schemas.openxmlformats.org/officeDocument/2006/relationships" xmlns:p14="http://schemas.microsoft.com/office/powerpoint/2010/main" xmlns:p15="http://schemas.microsoft.com/office/powerpoint/2012/main" xmlns:mc="http://schemas.openxmlformats.org/markup-compatibility/2006" type="titleOnly" preserve="1">
+<p:sldLayout xmlns:a="http://schemas.openxmlformats.org/drawingml/2006/main" xmlns:r="http://schemas.openxmlformats.org/officeDocument/2006/relationships" xmlns:p="http://schemas.openxmlformats.org/presentationml/2006/main" xmlns:m="http://schemas.openxmlformats.org/officeDocument/2006/math" xmlns:w="http://schemas.openxmlformats.org/wordprocessingml/2006/main" matchingName="" preserve="1" showMasterPhAnim="0" showMasterSp="1" type="titleOnly" userDrawn="1">
   <p:cSld name="Só título">
     <p:bg>
-      <p:bgPr>
+      <p:bgPr shadeToTitle="0">
         <a:solidFill>
           <a:srgbClr val="FFFFFF"/>
         </a:solidFill>
@@ -7423,7 +7151,7 @@
         <p:cNvGrpSpPr/>
         <p:nvPr/>
       </p:nvGrpSpPr>
-      <p:grpSpPr>
+      <p:grpSpPr bwMode="auto">
         <a:xfrm>
           <a:off x="0" y="0"/>
           <a:ext cx="0" cy="0"/>
@@ -7433,7 +7161,7 @@
       </p:grpSpPr>
       <p:sp>
         <p:nvSpPr>
-          <p:cNvPr id="41" name="PlaceHolder 1"/>
+          <p:cNvPr id="1038790440" name="PlaceHolder 1"/>
           <p:cNvSpPr>
             <a:spLocks noGrp="1"/>
           </p:cNvSpPr>
@@ -7441,7 +7169,7 @@
             <p:ph type="title"/>
           </p:nvPr>
         </p:nvSpPr>
-        <p:spPr>
+        <p:spPr bwMode="auto">
           <a:xfrm>
             <a:off x="838080" y="365040"/>
             <a:ext cx="10515240" cy="1325160"/>
@@ -7468,8 +7196,6 @@
                 <a:solidFill>
                   <a:schemeClr val="dk1"/>
                 </a:solidFill>
-                <a:effectLst/>
-                <a:uFillTx/>
                 <a:latin typeface="Arial"/>
                 <a:ea typeface="Arial"/>
               </a:defRPr>
@@ -7481,14 +7207,13 @@
                 <a:spcPct val="90000"/>
               </a:lnSpc>
               <a:buNone/>
+              <a:defRPr/>
             </a:pPr>
             <a:r>
               <a:rPr lang="pt-BR" sz="4400" b="0" u="none" strike="noStrike">
                 <a:solidFill>
                   <a:schemeClr val="dk1"/>
                 </a:solidFill>
-                <a:effectLst/>
-                <a:uFillTx/>
                 <a:latin typeface="Arial"/>
                 <a:ea typeface="Arial"/>
               </a:rPr>
@@ -7498,8 +7223,6 @@
               <a:solidFill>
                 <a:schemeClr val="dk1"/>
               </a:solidFill>
-              <a:effectLst/>
-              <a:uFillTx/>
               <a:latin typeface="Arial"/>
             </a:endParaRPr>
           </a:p>
@@ -7507,7 +7230,7 @@
       </p:sp>
       <p:sp>
         <p:nvSpPr>
-          <p:cNvPr id="42" name="PlaceHolder 2"/>
+          <p:cNvPr id="355126429" name="PlaceHolder 2"/>
           <p:cNvSpPr>
             <a:spLocks noGrp="1"/>
           </p:cNvSpPr>
@@ -7515,7 +7238,7 @@
             <p:ph type="dt" idx="22"/>
           </p:nvPr>
         </p:nvSpPr>
-        <p:spPr>
+        <p:spPr bwMode="auto">
           <a:xfrm>
             <a:off x="838080" y="6356520"/>
             <a:ext cx="2742840" cy="364680"/>
@@ -7544,8 +7267,6 @@
                     <a:tint val="75000"/>
                   </a:schemeClr>
                 </a:solidFill>
-                <a:effectLst/>
-                <a:uFillTx/>
                 <a:latin typeface="Arial"/>
                 <a:ea typeface="Arial"/>
               </a:defRPr>
@@ -7557,6 +7278,7 @@
                 <a:spcPct val="100000"/>
               </a:lnSpc>
               <a:buNone/>
+              <a:defRPr/>
             </a:pPr>
             <a:r>
               <a:rPr lang="pt-BR" sz="1200" b="0" u="none" strike="noStrike">
@@ -7565,8 +7287,6 @@
                     <a:tint val="75000"/>
                   </a:schemeClr>
                 </a:solidFill>
-                <a:effectLst/>
-                <a:uFillTx/>
                 <a:latin typeface="Arial"/>
                 <a:ea typeface="Arial"/>
               </a:rPr>
@@ -7576,8 +7296,6 @@
               <a:solidFill>
                 <a:srgbClr val="000000"/>
               </a:solidFill>
-              <a:effectLst/>
-              <a:uFillTx/>
               <a:latin typeface="Times New Roman"/>
             </a:endParaRPr>
           </a:p>
@@ -7585,7 +7303,7 @@
       </p:sp>
       <p:sp>
         <p:nvSpPr>
-          <p:cNvPr id="43" name="PlaceHolder 3"/>
+          <p:cNvPr id="2038838023" name="PlaceHolder 3"/>
           <p:cNvSpPr>
             <a:spLocks noGrp="1"/>
           </p:cNvSpPr>
@@ -7593,7 +7311,7 @@
             <p:ph type="ftr" idx="23"/>
           </p:nvPr>
         </p:nvSpPr>
-        <p:spPr>
+        <p:spPr bwMode="auto">
           <a:xfrm>
             <a:off x="4038480" y="6356520"/>
             <a:ext cx="4114440" cy="364680"/>
@@ -7617,8 +7335,6 @@
                 <a:solidFill>
                   <a:srgbClr val="000000"/>
                 </a:solidFill>
-                <a:effectLst/>
-                <a:uFillTx/>
                 <a:latin typeface="Times New Roman"/>
               </a:defRPr>
             </a:lvl1pPr>
@@ -7626,14 +7342,13 @@
           <a:p>
             <a:pPr indent="0" algn="ctr">
               <a:buNone/>
+              <a:defRPr/>
             </a:pPr>
             <a:r>
               <a:rPr lang="pt-BR" sz="1400" b="0" u="none" strike="noStrike">
                 <a:solidFill>
                   <a:srgbClr val="000000"/>
                 </a:solidFill>
-                <a:effectLst/>
-                <a:uFillTx/>
                 <a:latin typeface="Times New Roman"/>
               </a:rPr>
               <a:t>&lt;rodapé&gt;</a:t>
@@ -7642,8 +7357,6 @@
               <a:solidFill>
                 <a:srgbClr val="000000"/>
               </a:solidFill>
-              <a:effectLst/>
-              <a:uFillTx/>
               <a:latin typeface="Times New Roman"/>
             </a:endParaRPr>
           </a:p>
@@ -7651,7 +7364,7 @@
       </p:sp>
       <p:sp>
         <p:nvSpPr>
-          <p:cNvPr id="44" name="PlaceHolder 4"/>
+          <p:cNvPr id="1723772465" name="PlaceHolder 4"/>
           <p:cNvSpPr>
             <a:spLocks noGrp="1"/>
           </p:cNvSpPr>
@@ -7659,7 +7372,7 @@
             <p:ph type="sldNum" idx="24"/>
           </p:nvPr>
         </p:nvSpPr>
-        <p:spPr>
+        <p:spPr bwMode="auto">
           <a:xfrm>
             <a:off x="8610480" y="6356520"/>
             <a:ext cx="2742840" cy="364680"/>
@@ -7688,8 +7401,6 @@
                     <a:tint val="75000"/>
                   </a:schemeClr>
                 </a:solidFill>
-                <a:effectLst/>
-                <a:uFillTx/>
                 <a:latin typeface="Arial"/>
                 <a:ea typeface="Arial"/>
               </a:defRPr>
@@ -7701,6 +7412,7 @@
                 <a:spcPct val="100000"/>
               </a:lnSpc>
               <a:buNone/>
+              <a:defRPr/>
             </a:pPr>
             <a:fld id="{5BBE4307-3055-4912-9177-EA7E3C69B32C}" type="slidenum">
               <a:rPr lang="pt-BR" sz="1200" b="0" u="none" strike="noStrike">
@@ -7709,8 +7421,6 @@
                     <a:tint val="75000"/>
                   </a:schemeClr>
                 </a:solidFill>
-                <a:effectLst/>
-                <a:uFillTx/>
                 <a:latin typeface="Arial"/>
                 <a:ea typeface="Arial"/>
               </a:rPr>
@@ -7720,8 +7430,6 @@
               <a:solidFill>
                 <a:srgbClr val="000000"/>
               </a:solidFill>
-              <a:effectLst/>
-              <a:uFillTx/>
               <a:latin typeface="Times New Roman"/>
             </a:endParaRPr>
           </a:p>
@@ -7729,14 +7437,17 @@
       </p:sp>
     </p:spTree>
   </p:cSld>
+  <p:clrMapOvr>
+    <a:masterClrMapping/>
+  </p:clrMapOvr>
 </p:sldLayout>
 </file>
 
 <file path=ppt/slideLayouts/slideLayout9.xml><?xml version="1.0" encoding="utf-8"?>
-<p:sldLayout xmlns:a="http://schemas.openxmlformats.org/drawingml/2006/main" xmlns:p="http://schemas.openxmlformats.org/presentationml/2006/main" xmlns:r="http://schemas.openxmlformats.org/officeDocument/2006/relationships" xmlns:p14="http://schemas.microsoft.com/office/powerpoint/2010/main" xmlns:p15="http://schemas.microsoft.com/office/powerpoint/2012/main" xmlns:mc="http://schemas.openxmlformats.org/markup-compatibility/2006" type="blank" preserve="1">
+<p:sldLayout xmlns:a="http://schemas.openxmlformats.org/drawingml/2006/main" xmlns:r="http://schemas.openxmlformats.org/officeDocument/2006/relationships" xmlns:p="http://schemas.openxmlformats.org/presentationml/2006/main" xmlns:m="http://schemas.openxmlformats.org/officeDocument/2006/math" xmlns:w="http://schemas.openxmlformats.org/wordprocessingml/2006/main" matchingName="" preserve="1" showMasterPhAnim="0" showMasterSp="1" type="blank" userDrawn="1">
   <p:cSld name="Em branco">
     <p:bg>
-      <p:bgPr>
+      <p:bgPr shadeToTitle="0">
         <a:solidFill>
           <a:srgbClr val="FFFFFF"/>
         </a:solidFill>
@@ -7748,7 +7459,7 @@
         <p:cNvGrpSpPr/>
         <p:nvPr/>
       </p:nvGrpSpPr>
-      <p:grpSpPr>
+      <p:grpSpPr bwMode="auto">
         <a:xfrm>
           <a:off x="0" y="0"/>
           <a:ext cx="0" cy="0"/>
@@ -7758,7 +7469,7 @@
       </p:grpSpPr>
       <p:sp>
         <p:nvSpPr>
-          <p:cNvPr id="45" name="PlaceHolder 1"/>
+          <p:cNvPr id="910547802" name="PlaceHolder 1"/>
           <p:cNvSpPr>
             <a:spLocks noGrp="1"/>
           </p:cNvSpPr>
@@ -7766,7 +7477,7 @@
             <p:ph type="dt" idx="25"/>
           </p:nvPr>
         </p:nvSpPr>
-        <p:spPr>
+        <p:spPr bwMode="auto">
           <a:xfrm>
             <a:off x="838080" y="6356520"/>
             <a:ext cx="2742840" cy="364680"/>
@@ -7795,8 +7506,6 @@
                     <a:tint val="75000"/>
                   </a:schemeClr>
                 </a:solidFill>
-                <a:effectLst/>
-                <a:uFillTx/>
                 <a:latin typeface="Arial"/>
                 <a:ea typeface="Arial"/>
               </a:defRPr>
@@ -7808,6 +7517,7 @@
                 <a:spcPct val="100000"/>
               </a:lnSpc>
               <a:buNone/>
+              <a:defRPr/>
             </a:pPr>
             <a:r>
               <a:rPr lang="pt-BR" sz="1200" b="0" u="none" strike="noStrike">
@@ -7816,8 +7526,6 @@
                     <a:tint val="75000"/>
                   </a:schemeClr>
                 </a:solidFill>
-                <a:effectLst/>
-                <a:uFillTx/>
                 <a:latin typeface="Arial"/>
                 <a:ea typeface="Arial"/>
               </a:rPr>
@@ -7827,8 +7535,6 @@
               <a:solidFill>
                 <a:srgbClr val="000000"/>
               </a:solidFill>
-              <a:effectLst/>
-              <a:uFillTx/>
               <a:latin typeface="Times New Roman"/>
             </a:endParaRPr>
           </a:p>
@@ -7836,7 +7542,7 @@
       </p:sp>
       <p:sp>
         <p:nvSpPr>
-          <p:cNvPr id="46" name="PlaceHolder 2"/>
+          <p:cNvPr id="1272649353" name="PlaceHolder 2"/>
           <p:cNvSpPr>
             <a:spLocks noGrp="1"/>
           </p:cNvSpPr>
@@ -7844,7 +7550,7 @@
             <p:ph type="ftr" idx="26"/>
           </p:nvPr>
         </p:nvSpPr>
-        <p:spPr>
+        <p:spPr bwMode="auto">
           <a:xfrm>
             <a:off x="4038480" y="6356520"/>
             <a:ext cx="4114440" cy="364680"/>
@@ -7868,8 +7574,6 @@
                 <a:solidFill>
                   <a:srgbClr val="000000"/>
                 </a:solidFill>
-                <a:effectLst/>
-                <a:uFillTx/>
                 <a:latin typeface="Times New Roman"/>
               </a:defRPr>
             </a:lvl1pPr>
@@ -7877,14 +7581,13 @@
           <a:p>
             <a:pPr indent="0" algn="ctr">
               <a:buNone/>
+              <a:defRPr/>
             </a:pPr>
             <a:r>
               <a:rPr lang="pt-BR" sz="1400" b="0" u="none" strike="noStrike">
                 <a:solidFill>
                   <a:srgbClr val="000000"/>
                 </a:solidFill>
-                <a:effectLst/>
-                <a:uFillTx/>
                 <a:latin typeface="Times New Roman"/>
               </a:rPr>
               <a:t>&lt;rodapé&gt;</a:t>
@@ -7893,8 +7596,6 @@
               <a:solidFill>
                 <a:srgbClr val="000000"/>
               </a:solidFill>
-              <a:effectLst/>
-              <a:uFillTx/>
               <a:latin typeface="Times New Roman"/>
             </a:endParaRPr>
           </a:p>
@@ -7902,7 +7603,7 @@
       </p:sp>
       <p:sp>
         <p:nvSpPr>
-          <p:cNvPr id="47" name="PlaceHolder 3"/>
+          <p:cNvPr id="857529630" name="PlaceHolder 3"/>
           <p:cNvSpPr>
             <a:spLocks noGrp="1"/>
           </p:cNvSpPr>
@@ -7910,7 +7611,7 @@
             <p:ph type="sldNum" idx="27"/>
           </p:nvPr>
         </p:nvSpPr>
-        <p:spPr>
+        <p:spPr bwMode="auto">
           <a:xfrm>
             <a:off x="8610480" y="6356520"/>
             <a:ext cx="2742840" cy="364680"/>
@@ -7939,8 +7640,6 @@
                     <a:tint val="75000"/>
                   </a:schemeClr>
                 </a:solidFill>
-                <a:effectLst/>
-                <a:uFillTx/>
                 <a:latin typeface="Arial"/>
                 <a:ea typeface="Arial"/>
               </a:defRPr>
@@ -7952,6 +7651,7 @@
                 <a:spcPct val="100000"/>
               </a:lnSpc>
               <a:buNone/>
+              <a:defRPr/>
             </a:pPr>
             <a:fld id="{F9646893-D917-4210-8256-4E51AB9AF3A8}" type="slidenum">
               <a:rPr lang="pt-BR" sz="1200" b="0" u="none" strike="noStrike">
@@ -7960,8 +7660,6 @@
                     <a:tint val="75000"/>
                   </a:schemeClr>
                 </a:solidFill>
-                <a:effectLst/>
-                <a:uFillTx/>
                 <a:latin typeface="Arial"/>
                 <a:ea typeface="Arial"/>
               </a:rPr>
@@ -7971,8 +7669,6 @@
               <a:solidFill>
                 <a:srgbClr val="000000"/>
               </a:solidFill>
-              <a:effectLst/>
-              <a:uFillTx/>
               <a:latin typeface="Times New Roman"/>
             </a:endParaRPr>
           </a:p>
@@ -7980,19 +7676,22 @@
       </p:sp>
     </p:spTree>
   </p:cSld>
+  <p:clrMapOvr>
+    <a:masterClrMapping/>
+  </p:clrMapOvr>
 </p:sldLayout>
 </file>
 
 <file path=ppt/slideMasters/slideMaster1.xml><?xml version="1.0" encoding="utf-8"?>
-<p:sldMaster xmlns:a="http://schemas.openxmlformats.org/drawingml/2006/main" xmlns:p="http://schemas.openxmlformats.org/presentationml/2006/main" xmlns:r="http://schemas.openxmlformats.org/officeDocument/2006/relationships" xmlns:p14="http://schemas.microsoft.com/office/powerpoint/2010/main" xmlns:p15="http://schemas.microsoft.com/office/powerpoint/2012/main" xmlns:mc="http://schemas.openxmlformats.org/markup-compatibility/2006">
-  <p:cSld>
+<p:sldMaster xmlns:a="http://schemas.openxmlformats.org/drawingml/2006/main" xmlns:r="http://schemas.openxmlformats.org/officeDocument/2006/relationships" xmlns:p="http://schemas.openxmlformats.org/presentationml/2006/main" xmlns:m="http://schemas.openxmlformats.org/officeDocument/2006/math" xmlns:w="http://schemas.openxmlformats.org/wordprocessingml/2006/main" preserve="0">
+  <p:cSld name="">
     <p:spTree>
       <p:nvGrpSpPr>
         <p:cNvPr id="1" name=""/>
         <p:cNvGrpSpPr/>
         <p:nvPr/>
       </p:nvGrpSpPr>
-      <p:grpSpPr>
+      <p:grpSpPr bwMode="auto">
         <a:xfrm>
           <a:off x="0" y="0"/>
           <a:ext cx="0" cy="0"/>
@@ -8004,31 +7703,31 @@
   </p:cSld>
   <p:clrMap bg1="lt1" tx1="dk1" bg2="lt2" tx2="dk2" accent1="accent1" accent2="accent2" accent3="accent3" accent4="accent4" accent5="accent5" accent6="accent6" hlink="hlink" folHlink="folHlink"/>
   <p:sldLayoutIdLst>
-    <p:sldLayoutId id="2147483649" r:id="rId2"/>
-    <p:sldLayoutId id="2147483650" r:id="rId3"/>
-    <p:sldLayoutId id="2147483651" r:id="rId4"/>
-    <p:sldLayoutId id="2147483652" r:id="rId5"/>
-    <p:sldLayoutId id="2147483653" r:id="rId6"/>
-    <p:sldLayoutId id="2147483654" r:id="rId7"/>
-    <p:sldLayoutId id="2147483655" r:id="rId8"/>
-    <p:sldLayoutId id="2147483656" r:id="rId9"/>
-    <p:sldLayoutId id="2147483657" r:id="rId10"/>
-    <p:sldLayoutId id="2147483658" r:id="rId11"/>
-    <p:sldLayoutId id="2147483659" r:id="rId12"/>
+    <p:sldLayoutId id="2147483649" r:id="rId1"/>
+    <p:sldLayoutId id="2147483650" r:id="rId2"/>
+    <p:sldLayoutId id="2147483651" r:id="rId3"/>
+    <p:sldLayoutId id="2147483652" r:id="rId4"/>
+    <p:sldLayoutId id="2147483653" r:id="rId5"/>
+    <p:sldLayoutId id="2147483654" r:id="rId6"/>
+    <p:sldLayoutId id="2147483655" r:id="rId7"/>
+    <p:sldLayoutId id="2147483656" r:id="rId8"/>
+    <p:sldLayoutId id="2147483657" r:id="rId9"/>
+    <p:sldLayoutId id="2147483658" r:id="rId10"/>
+    <p:sldLayoutId id="2147483659" r:id="rId11"/>
   </p:sldLayoutIdLst>
 </p:sldMaster>
 </file>
 
 <file path=ppt/slides/slide1.xml><?xml version="1.0" encoding="utf-8"?>
-<p:sld xmlns:a="http://schemas.openxmlformats.org/drawingml/2006/main" xmlns:p="http://schemas.openxmlformats.org/presentationml/2006/main" xmlns:r="http://schemas.openxmlformats.org/officeDocument/2006/relationships" xmlns:p14="http://schemas.microsoft.com/office/powerpoint/2010/main" xmlns:p15="http://schemas.microsoft.com/office/powerpoint/2012/main" xmlns:mc="http://schemas.openxmlformats.org/markup-compatibility/2006">
-  <p:cSld>
+<p:sld xmlns:a="http://schemas.openxmlformats.org/drawingml/2006/main" xmlns:r="http://schemas.openxmlformats.org/officeDocument/2006/relationships" xmlns:p="http://schemas.openxmlformats.org/presentationml/2006/main" xmlns:m="http://schemas.openxmlformats.org/officeDocument/2006/math" xmlns:w="http://schemas.openxmlformats.org/wordprocessingml/2006/main" xmlns:mc="http://schemas.openxmlformats.org/markup-compatibility/2006" showMasterPhAnim="0" showMasterSp="1" show="1">
+  <p:cSld name="">
     <p:spTree>
       <p:nvGrpSpPr>
         <p:cNvPr id="1" name=""/>
         <p:cNvGrpSpPr/>
         <p:nvPr/>
       </p:nvGrpSpPr>
-      <p:grpSpPr>
+      <p:grpSpPr bwMode="auto">
         <a:xfrm>
           <a:off x="0" y="0"/>
           <a:ext cx="0" cy="0"/>
@@ -8038,15 +7737,15 @@
       </p:grpSpPr>
       <p:pic>
         <p:nvPicPr>
-          <p:cNvPr id="66" name=""/>
+          <p:cNvPr id="3769159" name=""/>
           <p:cNvPicPr/>
           <p:nvPr/>
         </p:nvPicPr>
-        <p:blipFill>
-          <a:blip r:embed="rId1"/>
+        <p:blipFill rotWithShape="1">
+          <a:blip r:embed="rId3"/>
           <a:stretch/>
         </p:blipFill>
-        <p:spPr>
+        <p:spPr bwMode="auto">
           <a:xfrm>
             <a:off x="14760" y="0"/>
             <a:ext cx="4674600" cy="6857640"/>
@@ -8062,11 +7761,11 @@
       </p:pic>
       <p:sp>
         <p:nvSpPr>
-          <p:cNvPr id="67" name=""/>
+          <p:cNvPr id="327286701" name=""/>
           <p:cNvSpPr/>
           <p:nvPr/>
         </p:nvSpPr>
-        <p:spPr>
+        <p:spPr bwMode="auto">
           <a:xfrm>
             <a:off x="3559320" y="52560"/>
             <a:ext cx="1111680" cy="701640"/>
@@ -8100,12 +7799,13 @@
             <a:noAutofit/>
           </a:bodyPr>
           <a:p>
+            <a:pPr>
+              <a:defRPr/>
+            </a:pPr>
             <a:endParaRPr lang="pt-BR" sz="1800" b="0" u="none" strike="noStrike">
               <a:solidFill>
                 <a:srgbClr val="000000"/>
               </a:solidFill>
-              <a:effectLst/>
-              <a:uFillTx/>
               <a:latin typeface="Arial"/>
             </a:endParaRPr>
           </a:p>
@@ -8113,11 +7813,11 @@
       </p:sp>
       <p:sp>
         <p:nvSpPr>
-          <p:cNvPr id="68" name=""/>
+          <p:cNvPr id="1776629127" name=""/>
           <p:cNvSpPr/>
           <p:nvPr/>
         </p:nvSpPr>
-        <p:spPr>
+        <p:spPr bwMode="auto">
           <a:xfrm>
             <a:off x="3559320" y="754560"/>
             <a:ext cx="1111680" cy="701640"/>
@@ -8151,12 +7851,13 @@
             <a:noAutofit/>
           </a:bodyPr>
           <a:p>
+            <a:pPr>
+              <a:defRPr/>
+            </a:pPr>
             <a:endParaRPr lang="pt-BR" sz="1800" b="0" u="none" strike="noStrike">
               <a:solidFill>
                 <a:srgbClr val="000000"/>
               </a:solidFill>
-              <a:effectLst/>
-              <a:uFillTx/>
               <a:latin typeface="Arial"/>
             </a:endParaRPr>
           </a:p>
@@ -8164,11 +7865,11 @@
       </p:sp>
       <p:sp>
         <p:nvSpPr>
-          <p:cNvPr id="69" name=""/>
+          <p:cNvPr id="271061626" name=""/>
           <p:cNvSpPr/>
           <p:nvPr/>
         </p:nvSpPr>
-        <p:spPr>
+        <p:spPr bwMode="auto">
           <a:xfrm>
             <a:off x="2446920" y="754560"/>
             <a:ext cx="1111680" cy="701640"/>
@@ -8202,12 +7903,13 @@
             <a:noAutofit/>
           </a:bodyPr>
           <a:p>
+            <a:pPr>
+              <a:defRPr/>
+            </a:pPr>
             <a:endParaRPr lang="pt-BR" sz="1800" b="0" u="none" strike="noStrike">
               <a:solidFill>
                 <a:srgbClr val="000000"/>
               </a:solidFill>
-              <a:effectLst/>
-              <a:uFillTx/>
               <a:latin typeface="Arial"/>
             </a:endParaRPr>
           </a:p>
@@ -8215,11 +7917,11 @@
       </p:sp>
       <p:sp>
         <p:nvSpPr>
-          <p:cNvPr id="70" name=""/>
+          <p:cNvPr id="801121492" name=""/>
           <p:cNvSpPr/>
           <p:nvPr/>
         </p:nvSpPr>
-        <p:spPr>
+        <p:spPr bwMode="auto">
           <a:xfrm>
             <a:off x="3559320" y="2175120"/>
             <a:ext cx="1111680" cy="701640"/>
@@ -8253,12 +7955,13 @@
             <a:noAutofit/>
           </a:bodyPr>
           <a:p>
+            <a:pPr>
+              <a:defRPr/>
+            </a:pPr>
             <a:endParaRPr lang="pt-BR" sz="1800" b="0" u="none" strike="noStrike">
               <a:solidFill>
                 <a:srgbClr val="000000"/>
               </a:solidFill>
-              <a:effectLst/>
-              <a:uFillTx/>
               <a:latin typeface="Arial"/>
             </a:endParaRPr>
           </a:p>
@@ -8266,11 +7969,11 @@
       </p:sp>
       <p:sp>
         <p:nvSpPr>
-          <p:cNvPr id="71" name=""/>
+          <p:cNvPr id="351742565" name=""/>
           <p:cNvSpPr/>
           <p:nvPr/>
         </p:nvSpPr>
-        <p:spPr>
+        <p:spPr bwMode="auto">
           <a:xfrm>
             <a:off x="3559320" y="2877120"/>
             <a:ext cx="1111680" cy="701640"/>
@@ -8304,12 +8007,13 @@
             <a:noAutofit/>
           </a:bodyPr>
           <a:p>
+            <a:pPr>
+              <a:defRPr/>
+            </a:pPr>
             <a:endParaRPr lang="pt-BR" sz="1800" b="0" u="none" strike="noStrike">
               <a:solidFill>
                 <a:srgbClr val="000000"/>
               </a:solidFill>
-              <a:effectLst/>
-              <a:uFillTx/>
               <a:latin typeface="Arial"/>
             </a:endParaRPr>
           </a:p>
@@ -8317,11 +8021,11 @@
       </p:sp>
       <p:sp>
         <p:nvSpPr>
-          <p:cNvPr id="72" name=""/>
+          <p:cNvPr id="7265437" name=""/>
           <p:cNvSpPr/>
           <p:nvPr/>
         </p:nvSpPr>
-        <p:spPr>
+        <p:spPr bwMode="auto">
           <a:xfrm>
             <a:off x="1334880" y="4287960"/>
             <a:ext cx="1111680" cy="701640"/>
@@ -8355,12 +8059,13 @@
             <a:noAutofit/>
           </a:bodyPr>
           <a:p>
+            <a:pPr>
+              <a:defRPr/>
+            </a:pPr>
             <a:endParaRPr lang="pt-BR" sz="1800" b="0" u="none" strike="noStrike">
               <a:solidFill>
                 <a:srgbClr val="000000"/>
               </a:solidFill>
-              <a:effectLst/>
-              <a:uFillTx/>
               <a:latin typeface="Arial"/>
             </a:endParaRPr>
           </a:p>
@@ -8368,11 +8073,11 @@
       </p:sp>
       <p:sp>
         <p:nvSpPr>
-          <p:cNvPr id="73" name=""/>
+          <p:cNvPr id="1125946093" name=""/>
           <p:cNvSpPr/>
           <p:nvPr/>
         </p:nvSpPr>
-        <p:spPr>
+        <p:spPr bwMode="auto">
           <a:xfrm>
             <a:off x="5081760" y="259560"/>
             <a:ext cx="6864480" cy="1371960"/>
@@ -8392,7 +8097,7 @@
           <a:fontRef idx="minor"/>
         </p:style>
         <p:txBody>
-          <a:bodyPr numCol="1" spcCol="0" horzOverflow="overflow" anchor="t">
+          <a:bodyPr horzOverflow="overflow" numCol="1" spcCol="0" anchor="t">
             <a:spAutoFit/>
           </a:bodyPr>
           <a:p>
@@ -8400,14 +8105,13 @@
               <a:lnSpc>
                 <a:spcPct val="100000"/>
               </a:lnSpc>
+              <a:defRPr/>
             </a:pPr>
             <a:r>
               <a:rPr lang="pt-BR" sz="1400" b="1" u="none" strike="noStrike">
                 <a:solidFill>
                   <a:schemeClr val="dk1"/>
                 </a:solidFill>
-                <a:effectLst/>
-                <a:uFillTx/>
                 <a:latin typeface="Consolas"/>
                 <a:ea typeface="Consolas"/>
               </a:rPr>
@@ -8418,8 +8122,6 @@
                 <a:solidFill>
                   <a:schemeClr val="dk1"/>
                 </a:solidFill>
-                <a:effectLst/>
-                <a:uFillTx/>
                 <a:latin typeface="Consolas"/>
                 <a:ea typeface="Consolas"/>
               </a:rPr>
@@ -8429,8 +8131,6 @@
               <a:solidFill>
                 <a:srgbClr val="000000"/>
               </a:solidFill>
-              <a:effectLst/>
-              <a:uFillTx/>
               <a:latin typeface="Arial"/>
             </a:endParaRPr>
           </a:p>
@@ -8439,13 +8139,12 @@
               <a:lnSpc>
                 <a:spcPct val="100000"/>
               </a:lnSpc>
+              <a:defRPr/>
             </a:pPr>
             <a:endParaRPr lang="pt-BR" sz="1400" b="0" u="none" strike="noStrike">
               <a:solidFill>
                 <a:srgbClr val="000000"/>
               </a:solidFill>
-              <a:effectLst/>
-              <a:uFillTx/>
               <a:latin typeface="Arial"/>
             </a:endParaRPr>
           </a:p>
@@ -8459,14 +8158,13 @@
               </a:buClr>
               <a:buFont typeface="Arial"/>
               <a:buChar char="•"/>
+              <a:defRPr/>
             </a:pPr>
             <a:r>
               <a:rPr lang="pt-BR" sz="1400" b="1" u="none" strike="noStrike">
                 <a:solidFill>
                   <a:schemeClr val="dk1"/>
                 </a:solidFill>
-                <a:effectLst/>
-                <a:uFillTx/>
                 <a:latin typeface="Consolas"/>
                 <a:ea typeface="Consolas"/>
               </a:rPr>
@@ -8477,8 +8175,6 @@
                 <a:solidFill>
                   <a:schemeClr val="dk1"/>
                 </a:solidFill>
-                <a:effectLst/>
-                <a:uFillTx/>
                 <a:latin typeface="Consolas"/>
                 <a:ea typeface="Consolas"/>
               </a:rPr>
@@ -8489,8 +8185,6 @@
                 <a:solidFill>
                   <a:schemeClr val="dk1"/>
                 </a:solidFill>
-                <a:effectLst/>
-                <a:uFillTx/>
                 <a:latin typeface="Consolas"/>
                 <a:ea typeface="Consolas"/>
               </a:rPr>
@@ -8501,8 +8195,6 @@
                 <a:solidFill>
                   <a:schemeClr val="dk1"/>
                 </a:solidFill>
-                <a:effectLst/>
-                <a:uFillTx/>
                 <a:latin typeface="Consolas"/>
                 <a:ea typeface="Consolas"/>
               </a:rPr>
@@ -8512,8 +8204,6 @@
               <a:solidFill>
                 <a:srgbClr val="000000"/>
               </a:solidFill>
-              <a:effectLst/>
-              <a:uFillTx/>
               <a:latin typeface="Arial"/>
             </a:endParaRPr>
           </a:p>
@@ -8527,14 +8217,13 @@
               </a:buClr>
               <a:buFont typeface="Arial"/>
               <a:buChar char="•"/>
+              <a:defRPr/>
             </a:pPr>
             <a:r>
               <a:rPr lang="pt-BR" sz="1400" b="1" u="none" strike="noStrike">
                 <a:solidFill>
                   <a:schemeClr val="dk1"/>
                 </a:solidFill>
-                <a:effectLst/>
-                <a:uFillTx/>
                 <a:latin typeface="Consolas"/>
                 <a:ea typeface="Consolas"/>
               </a:rPr>
@@ -8545,8 +8234,6 @@
                 <a:solidFill>
                   <a:schemeClr val="dk1"/>
                 </a:solidFill>
-                <a:effectLst/>
-                <a:uFillTx/>
                 <a:latin typeface="Consolas"/>
                 <a:ea typeface="Consolas"/>
               </a:rPr>
@@ -8556,8 +8243,6 @@
               <a:solidFill>
                 <a:srgbClr val="000000"/>
               </a:solidFill>
-              <a:effectLst/>
-              <a:uFillTx/>
               <a:latin typeface="Arial"/>
             </a:endParaRPr>
           </a:p>
@@ -8566,13 +8251,12 @@
               <a:lnSpc>
                 <a:spcPct val="100000"/>
               </a:lnSpc>
+              <a:defRPr/>
             </a:pPr>
             <a:endParaRPr lang="pt-BR" sz="1400" b="0" u="none" strike="noStrike">
               <a:solidFill>
                 <a:srgbClr val="000000"/>
               </a:solidFill>
-              <a:effectLst/>
-              <a:uFillTx/>
               <a:latin typeface="Arial"/>
             </a:endParaRPr>
           </a:p>
@@ -8581,14 +8265,13 @@
               <a:lnSpc>
                 <a:spcPct val="100000"/>
               </a:lnSpc>
+              <a:defRPr/>
             </a:pPr>
             <a:r>
               <a:rPr lang="pt-BR" sz="1400" b="0" u="none" strike="noStrike">
                 <a:solidFill>
                   <a:schemeClr val="dk1"/>
                 </a:solidFill>
-                <a:effectLst/>
-                <a:uFillTx/>
                 <a:latin typeface="Consolas"/>
                 <a:ea typeface="Consolas"/>
               </a:rPr>
@@ -8598,8 +8281,6 @@
               <a:solidFill>
                 <a:srgbClr val="000000"/>
               </a:solidFill>
-              <a:effectLst/>
-              <a:uFillTx/>
               <a:latin typeface="Arial"/>
             </a:endParaRPr>
           </a:p>
@@ -8607,11 +8288,11 @@
       </p:sp>
       <p:sp>
         <p:nvSpPr>
-          <p:cNvPr id="74" name=""/>
+          <p:cNvPr id="188333879" name=""/>
           <p:cNvSpPr/>
           <p:nvPr/>
         </p:nvSpPr>
-        <p:spPr>
+        <p:spPr bwMode="auto">
           <a:xfrm>
             <a:off x="5081760" y="6182640"/>
             <a:ext cx="6856560" cy="304920"/>
@@ -8631,7 +8312,7 @@
           <a:fontRef idx="minor"/>
         </p:style>
         <p:txBody>
-          <a:bodyPr numCol="1" spcCol="0" horzOverflow="overflow" anchor="t">
+          <a:bodyPr horzOverflow="overflow" numCol="1" spcCol="0" anchor="t">
             <a:spAutoFit/>
           </a:bodyPr>
           <a:p>
@@ -8639,14 +8320,13 @@
               <a:lnSpc>
                 <a:spcPct val="100000"/>
               </a:lnSpc>
+              <a:defRPr/>
             </a:pPr>
             <a:r>
               <a:rPr lang="pt-BR" sz="1400" b="0" u="none" strike="noStrike">
                 <a:solidFill>
                   <a:schemeClr val="dk1"/>
                 </a:solidFill>
-                <a:effectLst/>
-                <a:uFillTx/>
                 <a:latin typeface="Consolas"/>
                 <a:ea typeface="Consolas"/>
               </a:rPr>
@@ -8657,8 +8337,6 @@
                 <a:solidFill>
                   <a:schemeClr val="dk1"/>
                 </a:solidFill>
-                <a:effectLst/>
-                <a:uFillTx/>
                 <a:latin typeface="Consolas"/>
                 <a:ea typeface="Consolas"/>
               </a:rPr>
@@ -8669,8 +8347,6 @@
                 <a:solidFill>
                   <a:schemeClr val="dk1"/>
                 </a:solidFill>
-                <a:effectLst/>
-                <a:uFillTx/>
                 <a:latin typeface="Consolas"/>
                 <a:ea typeface="Consolas"/>
               </a:rPr>
@@ -8680,8 +8356,6 @@
               <a:solidFill>
                 <a:srgbClr val="000000"/>
               </a:solidFill>
-              <a:effectLst/>
-              <a:uFillTx/>
               <a:latin typeface="Arial"/>
             </a:endParaRPr>
           </a:p>
@@ -8689,27 +8363,30 @@
       </p:sp>
     </p:spTree>
   </p:cSld>
-  <mc:AlternateContent>
-    <mc:Choice Requires="p14">
-      <p:transition spd="slow" p14:dur="2000"/>
+  <p:clrMapOvr>
+    <a:masterClrMapping/>
+  </p:clrMapOvr>
+  <mc:AlternateContent xmlns:mc="http://schemas.openxmlformats.org/markup-compatibility/2006">
+    <mc:Choice xmlns:p159="http://schemas.microsoft.com/office/powerpoint/2015/09/main" xmlns:p14="http://schemas.microsoft.com/office/powerpoint/2010/main" Requires="p159">
+      <p:transition p14:dur="2000" advClick="1"/>
     </mc:Choice>
     <mc:Fallback>
-      <p:transition spd="slow"/>
+      <p:transition advClick="1"/>
     </mc:Fallback>
   </mc:AlternateContent>
 </p:sld>
 </file>
 
 <file path=ppt/slides/slide2.xml><?xml version="1.0" encoding="utf-8"?>
-<p:sld xmlns:a="http://schemas.openxmlformats.org/drawingml/2006/main" xmlns:p="http://schemas.openxmlformats.org/presentationml/2006/main" xmlns:r="http://schemas.openxmlformats.org/officeDocument/2006/relationships" xmlns:p14="http://schemas.microsoft.com/office/powerpoint/2010/main" xmlns:p15="http://schemas.microsoft.com/office/powerpoint/2012/main" xmlns:mc="http://schemas.openxmlformats.org/markup-compatibility/2006">
-  <p:cSld>
+<p:sld xmlns:a="http://schemas.openxmlformats.org/drawingml/2006/main" xmlns:r="http://schemas.openxmlformats.org/officeDocument/2006/relationships" xmlns:p="http://schemas.openxmlformats.org/presentationml/2006/main" xmlns:m="http://schemas.openxmlformats.org/officeDocument/2006/math" xmlns:w="http://schemas.openxmlformats.org/wordprocessingml/2006/main" xmlns:mc="http://schemas.openxmlformats.org/markup-compatibility/2006" showMasterPhAnim="0" showMasterSp="1" show="1">
+  <p:cSld name="">
     <p:spTree>
       <p:nvGrpSpPr>
         <p:cNvPr id="1" name=""/>
         <p:cNvGrpSpPr/>
         <p:nvPr/>
       </p:nvGrpSpPr>
-      <p:grpSpPr>
+      <p:grpSpPr bwMode="auto">
         <a:xfrm>
           <a:off x="0" y="0"/>
           <a:ext cx="0" cy="0"/>
@@ -8719,15 +8396,15 @@
       </p:grpSpPr>
       <p:pic>
         <p:nvPicPr>
-          <p:cNvPr id="75" name=""/>
+          <p:cNvPr id="103635271" name=""/>
           <p:cNvPicPr/>
           <p:nvPr/>
         </p:nvPicPr>
-        <p:blipFill>
-          <a:blip r:embed="rId1"/>
+        <p:blipFill rotWithShape="1">
+          <a:blip r:embed="rId3"/>
           <a:stretch/>
         </p:blipFill>
-        <p:spPr>
+        <p:spPr bwMode="auto">
           <a:xfrm>
             <a:off x="5092920" y="677520"/>
             <a:ext cx="6506640" cy="5205960"/>
@@ -8743,27 +8420,30 @@
       </p:pic>
     </p:spTree>
   </p:cSld>
-  <mc:AlternateContent>
-    <mc:Choice Requires="p14">
-      <p:transition spd="slow" p14:dur="2000"/>
+  <p:clrMapOvr>
+    <a:masterClrMapping/>
+  </p:clrMapOvr>
+  <mc:AlternateContent xmlns:mc="http://schemas.openxmlformats.org/markup-compatibility/2006">
+    <mc:Choice xmlns:p159="http://schemas.microsoft.com/office/powerpoint/2015/09/main" xmlns:p14="http://schemas.microsoft.com/office/powerpoint/2010/main" Requires="p159">
+      <p:transition p14:dur="2000" advClick="1"/>
     </mc:Choice>
     <mc:Fallback>
-      <p:transition spd="slow"/>
+      <p:transition advClick="1"/>
     </mc:Fallback>
   </mc:AlternateContent>
 </p:sld>
 </file>
 
 <file path=ppt/slides/slide3.xml><?xml version="1.0" encoding="utf-8"?>
-<p:sld xmlns:a="http://schemas.openxmlformats.org/drawingml/2006/main" xmlns:p="http://schemas.openxmlformats.org/presentationml/2006/main" xmlns:r="http://schemas.openxmlformats.org/officeDocument/2006/relationships" xmlns:p14="http://schemas.microsoft.com/office/powerpoint/2010/main" xmlns:p15="http://schemas.microsoft.com/office/powerpoint/2012/main" xmlns:mc="http://schemas.openxmlformats.org/markup-compatibility/2006">
-  <p:cSld>
+<p:sld xmlns:a="http://schemas.openxmlformats.org/drawingml/2006/main" xmlns:r="http://schemas.openxmlformats.org/officeDocument/2006/relationships" xmlns:p="http://schemas.openxmlformats.org/presentationml/2006/main" xmlns:m="http://schemas.openxmlformats.org/officeDocument/2006/math" xmlns:w="http://schemas.openxmlformats.org/wordprocessingml/2006/main" xmlns:mc="http://schemas.openxmlformats.org/markup-compatibility/2006" showMasterPhAnim="0" showMasterSp="1" show="1">
+  <p:cSld name="">
     <p:spTree>
       <p:nvGrpSpPr>
         <p:cNvPr id="1" name=""/>
         <p:cNvGrpSpPr/>
         <p:nvPr/>
       </p:nvGrpSpPr>
-      <p:grpSpPr>
+      <p:grpSpPr bwMode="auto">
         <a:xfrm>
           <a:off x="0" y="0"/>
           <a:ext cx="0" cy="0"/>
@@ -8773,15 +8453,15 @@
       </p:grpSpPr>
       <p:pic>
         <p:nvPicPr>
-          <p:cNvPr id="76" name=""/>
+          <p:cNvPr id="1851063980" name=""/>
           <p:cNvPicPr/>
           <p:nvPr/>
         </p:nvPicPr>
-        <p:blipFill>
-          <a:blip r:embed="rId1"/>
+        <p:blipFill rotWithShape="1">
+          <a:blip r:embed="rId3"/>
           <a:stretch/>
         </p:blipFill>
-        <p:spPr>
+        <p:spPr bwMode="auto">
           <a:xfrm>
             <a:off x="781920" y="1641240"/>
             <a:ext cx="5476680" cy="4212720"/>
@@ -8797,11 +8477,11 @@
       </p:pic>
       <p:sp>
         <p:nvSpPr>
-          <p:cNvPr id="77" name=""/>
+          <p:cNvPr id="146339657" name=""/>
           <p:cNvSpPr/>
           <p:nvPr/>
         </p:nvSpPr>
-        <p:spPr>
+        <p:spPr bwMode="auto">
           <a:xfrm>
             <a:off x="1112760" y="1190520"/>
             <a:ext cx="4093560" cy="335160"/>
@@ -8821,7 +8501,7 @@
           <a:fontRef idx="minor"/>
         </p:style>
         <p:txBody>
-          <a:bodyPr numCol="1" spcCol="0" wrap="none" horzOverflow="overflow" anchor="t">
+          <a:bodyPr horzOverflow="overflow" wrap="none" numCol="1" spcCol="0" anchor="t">
             <a:spAutoFit/>
           </a:bodyPr>
           <a:p>
@@ -8829,14 +8509,13 @@
               <a:lnSpc>
                 <a:spcPct val="100000"/>
               </a:lnSpc>
+              <a:defRPr/>
             </a:pPr>
             <a:r>
               <a:rPr lang="pt-BR" sz="1600" b="0" u="none" strike="noStrike">
                 <a:solidFill>
                   <a:schemeClr val="dk1"/>
                 </a:solidFill>
-                <a:effectLst/>
-                <a:uFillTx/>
                 <a:latin typeface="Consolas"/>
                 <a:ea typeface="Consolas"/>
               </a:rPr>
@@ -8846,8 +8525,6 @@
               <a:solidFill>
                 <a:srgbClr val="000000"/>
               </a:solidFill>
-              <a:effectLst/>
-              <a:uFillTx/>
               <a:latin typeface="Arial"/>
             </a:endParaRPr>
           </a:p>
@@ -8855,15 +8532,15 @@
       </p:sp>
       <p:pic>
         <p:nvPicPr>
-          <p:cNvPr id="78" name=""/>
+          <p:cNvPr id="956131005" name=""/>
           <p:cNvPicPr/>
           <p:nvPr/>
         </p:nvPicPr>
-        <p:blipFill>
-          <a:blip r:embed="rId2"/>
+        <p:blipFill rotWithShape="1">
+          <a:blip r:embed="rId4"/>
           <a:stretch/>
         </p:blipFill>
-        <p:spPr>
+        <p:spPr bwMode="auto">
           <a:xfrm>
             <a:off x="6258600" y="1641240"/>
             <a:ext cx="5475240" cy="4211640"/>
@@ -8879,11 +8556,11 @@
       </p:pic>
       <p:sp>
         <p:nvSpPr>
-          <p:cNvPr id="79" name=""/>
+          <p:cNvPr id="1414901341" name=""/>
           <p:cNvSpPr/>
           <p:nvPr/>
         </p:nvSpPr>
-        <p:spPr>
+        <p:spPr bwMode="auto">
           <a:xfrm>
             <a:off x="6609600" y="1190520"/>
             <a:ext cx="4093560" cy="335160"/>
@@ -8903,7 +8580,7 @@
           <a:fontRef idx="minor"/>
         </p:style>
         <p:txBody>
-          <a:bodyPr numCol="1" spcCol="0" wrap="none" horzOverflow="overflow" anchor="t">
+          <a:bodyPr horzOverflow="overflow" wrap="none" numCol="1" spcCol="0" anchor="t">
             <a:spAutoFit/>
           </a:bodyPr>
           <a:p>
@@ -8911,14 +8588,13 @@
               <a:lnSpc>
                 <a:spcPct val="100000"/>
               </a:lnSpc>
+              <a:defRPr/>
             </a:pPr>
             <a:r>
               <a:rPr lang="pt-BR" sz="1600" b="0" u="none" strike="noStrike">
                 <a:solidFill>
                   <a:schemeClr val="dk1"/>
                 </a:solidFill>
-                <a:effectLst/>
-                <a:uFillTx/>
                 <a:latin typeface="Consolas"/>
                 <a:ea typeface="Consolas"/>
               </a:rPr>
@@ -8928,8 +8604,6 @@
               <a:solidFill>
                 <a:srgbClr val="000000"/>
               </a:solidFill>
-              <a:effectLst/>
-              <a:uFillTx/>
               <a:latin typeface="Arial"/>
             </a:endParaRPr>
           </a:p>
@@ -8937,11 +8611,11 @@
       </p:sp>
       <p:sp>
         <p:nvSpPr>
-          <p:cNvPr id="80" name=""/>
+          <p:cNvPr id="218434656" name=""/>
           <p:cNvSpPr/>
           <p:nvPr/>
         </p:nvSpPr>
-        <p:spPr>
+        <p:spPr bwMode="auto">
           <a:xfrm>
             <a:off x="1112760" y="824400"/>
             <a:ext cx="6551280" cy="335160"/>
@@ -8961,7 +8635,7 @@
           <a:fontRef idx="minor"/>
         </p:style>
         <p:txBody>
-          <a:bodyPr numCol="1" spcCol="0" wrap="none" horzOverflow="overflow" anchor="t">
+          <a:bodyPr horzOverflow="overflow" wrap="none" numCol="1" spcCol="0" anchor="t">
             <a:spAutoFit/>
           </a:bodyPr>
           <a:p>
@@ -8969,14 +8643,13 @@
               <a:lnSpc>
                 <a:spcPct val="100000"/>
               </a:lnSpc>
+              <a:defRPr/>
             </a:pPr>
             <a:r>
               <a:rPr lang="pt-BR" sz="1600" b="0" u="none" strike="noStrike">
                 <a:solidFill>
                   <a:schemeClr val="dk1"/>
                 </a:solidFill>
-                <a:effectLst/>
-                <a:uFillTx/>
                 <a:latin typeface="Consolas"/>
                 <a:ea typeface="Consolas"/>
               </a:rPr>
@@ -8986,8 +8659,6 @@
               <a:solidFill>
                 <a:srgbClr val="000000"/>
               </a:solidFill>
-              <a:effectLst/>
-              <a:uFillTx/>
               <a:latin typeface="Arial"/>
             </a:endParaRPr>
           </a:p>
@@ -8995,27 +8666,30 @@
       </p:sp>
     </p:spTree>
   </p:cSld>
-  <mc:AlternateContent>
-    <mc:Choice Requires="p14">
-      <p:transition spd="slow" p14:dur="2000"/>
+  <p:clrMapOvr>
+    <a:masterClrMapping/>
+  </p:clrMapOvr>
+  <mc:AlternateContent xmlns:mc="http://schemas.openxmlformats.org/markup-compatibility/2006">
+    <mc:Choice xmlns:p159="http://schemas.microsoft.com/office/powerpoint/2015/09/main" xmlns:p14="http://schemas.microsoft.com/office/powerpoint/2010/main" Requires="p159">
+      <p:transition p14:dur="2000" advClick="1"/>
     </mc:Choice>
     <mc:Fallback>
-      <p:transition spd="slow"/>
+      <p:transition advClick="1"/>
     </mc:Fallback>
   </mc:AlternateContent>
 </p:sld>
 </file>
 
 <file path=ppt/slides/slide4.xml><?xml version="1.0" encoding="utf-8"?>
-<p:sld xmlns:a="http://schemas.openxmlformats.org/drawingml/2006/main" xmlns:p="http://schemas.openxmlformats.org/presentationml/2006/main" xmlns:r="http://schemas.openxmlformats.org/officeDocument/2006/relationships" xmlns:p14="http://schemas.microsoft.com/office/powerpoint/2010/main" xmlns:p15="http://schemas.microsoft.com/office/powerpoint/2012/main" xmlns:mc="http://schemas.openxmlformats.org/markup-compatibility/2006">
-  <p:cSld>
+<p:sld xmlns:a="http://schemas.openxmlformats.org/drawingml/2006/main" xmlns:r="http://schemas.openxmlformats.org/officeDocument/2006/relationships" xmlns:p="http://schemas.openxmlformats.org/presentationml/2006/main" xmlns:m="http://schemas.openxmlformats.org/officeDocument/2006/math" xmlns:w="http://schemas.openxmlformats.org/wordprocessingml/2006/main" xmlns:mc="http://schemas.openxmlformats.org/markup-compatibility/2006" showMasterPhAnim="0" showMasterSp="1" show="1">
+  <p:cSld name="">
     <p:spTree>
       <p:nvGrpSpPr>
         <p:cNvPr id="1" name=""/>
         <p:cNvGrpSpPr/>
         <p:nvPr/>
       </p:nvGrpSpPr>
-      <p:grpSpPr>
+      <p:grpSpPr bwMode="auto">
         <a:xfrm>
           <a:off x="0" y="0"/>
           <a:ext cx="0" cy="0"/>
@@ -9025,15 +8699,15 @@
       </p:grpSpPr>
       <p:pic>
         <p:nvPicPr>
-          <p:cNvPr id="81" name=""/>
+          <p:cNvPr id="1501450082" name=""/>
           <p:cNvPicPr/>
           <p:nvPr/>
         </p:nvPicPr>
-        <p:blipFill>
-          <a:blip r:embed="rId1"/>
+        <p:blipFill rotWithShape="1">
+          <a:blip r:embed="rId3"/>
           <a:stretch/>
         </p:blipFill>
-        <p:spPr>
+        <p:spPr bwMode="auto">
           <a:xfrm>
             <a:off x="6226560" y="1830240"/>
             <a:ext cx="5270400" cy="3563640"/>
@@ -9049,15 +8723,15 @@
       </p:pic>
       <p:pic>
         <p:nvPicPr>
-          <p:cNvPr id="82" name=""/>
+          <p:cNvPr id="1091085512" name=""/>
           <p:cNvPicPr/>
           <p:nvPr/>
         </p:nvPicPr>
-        <p:blipFill>
-          <a:blip r:embed="rId2"/>
+        <p:blipFill rotWithShape="1">
+          <a:blip r:embed="rId4"/>
           <a:stretch/>
         </p:blipFill>
-        <p:spPr>
+        <p:spPr bwMode="auto">
           <a:xfrm>
             <a:off x="336960" y="1830240"/>
             <a:ext cx="5270400" cy="3563640"/>
@@ -9073,27 +8747,30 @@
       </p:pic>
     </p:spTree>
   </p:cSld>
-  <mc:AlternateContent>
-    <mc:Choice Requires="p14">
-      <p:transition spd="slow" p14:dur="2000"/>
+  <p:clrMapOvr>
+    <a:masterClrMapping/>
+  </p:clrMapOvr>
+  <mc:AlternateContent xmlns:mc="http://schemas.openxmlformats.org/markup-compatibility/2006">
+    <mc:Choice xmlns:p159="http://schemas.microsoft.com/office/powerpoint/2015/09/main" xmlns:p14="http://schemas.microsoft.com/office/powerpoint/2010/main" Requires="p159">
+      <p:transition p14:dur="2000" advClick="1"/>
     </mc:Choice>
     <mc:Fallback>
-      <p:transition spd="slow"/>
+      <p:transition advClick="1"/>
     </mc:Fallback>
   </mc:AlternateContent>
 </p:sld>
 </file>
 
 <file path=ppt/slides/slide5.xml><?xml version="1.0" encoding="utf-8"?>
-<p:sld xmlns:a="http://schemas.openxmlformats.org/drawingml/2006/main" xmlns:p="http://schemas.openxmlformats.org/presentationml/2006/main" xmlns:r="http://schemas.openxmlformats.org/officeDocument/2006/relationships" xmlns:p14="http://schemas.microsoft.com/office/powerpoint/2010/main" xmlns:p15="http://schemas.microsoft.com/office/powerpoint/2012/main" xmlns:mc="http://schemas.openxmlformats.org/markup-compatibility/2006">
-  <p:cSld>
+<p:sld xmlns:a="http://schemas.openxmlformats.org/drawingml/2006/main" xmlns:r="http://schemas.openxmlformats.org/officeDocument/2006/relationships" xmlns:p="http://schemas.openxmlformats.org/presentationml/2006/main" xmlns:m="http://schemas.openxmlformats.org/officeDocument/2006/math" xmlns:w="http://schemas.openxmlformats.org/wordprocessingml/2006/main" xmlns:mc="http://schemas.openxmlformats.org/markup-compatibility/2006" showMasterPhAnim="0" showMasterSp="1" show="1">
+  <p:cSld name="">
     <p:spTree>
       <p:nvGrpSpPr>
         <p:cNvPr id="1" name=""/>
         <p:cNvGrpSpPr/>
         <p:nvPr/>
       </p:nvGrpSpPr>
-      <p:grpSpPr>
+      <p:grpSpPr bwMode="auto">
         <a:xfrm>
           <a:off x="0" y="0"/>
           <a:ext cx="0" cy="0"/>
@@ -9103,11 +8780,11 @@
       </p:grpSpPr>
       <p:sp>
         <p:nvSpPr>
-          <p:cNvPr id="83" name=""/>
+          <p:cNvPr id="1009376142" name=""/>
           <p:cNvSpPr txBox="1"/>
           <p:nvPr/>
         </p:nvSpPr>
-        <p:spPr>
+        <p:spPr bwMode="auto">
           <a:xfrm>
             <a:off x="135360" y="121680"/>
             <a:ext cx="5012640" cy="602280"/>
@@ -9125,13 +8802,14 @@
             <a:spAutoFit/>
           </a:bodyPr>
           <a:p>
+            <a:pPr>
+              <a:defRPr/>
+            </a:pPr>
             <a:r>
               <a:rPr lang="pt-BR" sz="1800" b="0" u="none" strike="noStrike">
                 <a:solidFill>
                   <a:srgbClr val="000000"/>
                 </a:solidFill>
-                <a:effectLst/>
-                <a:uFillTx/>
                 <a:latin typeface="Arial"/>
               </a:rPr>
               <a:t>Testes com ‘perfil de verossimilhança’ p/ d-GEV</a:t>
@@ -9144,8 +8822,6 @@
                 <a:solidFill>
                   <a:srgbClr val="000000"/>
                 </a:solidFill>
-                <a:effectLst/>
-                <a:uFillTx/>
                 <a:latin typeface="Arial"/>
               </a:rPr>
               <a:t>Estação ‘430060402A’ sem informação </a:t>
@@ -9155,8 +8831,6 @@
                 <a:solidFill>
                   <a:srgbClr val="000000"/>
                 </a:solidFill>
-                <a:effectLst/>
-                <a:uFillTx/>
                 <a:latin typeface="Arial"/>
               </a:rPr>
               <a:t>a priori</a:t>
@@ -9165,8 +8839,6 @@
               <a:solidFill>
                 <a:srgbClr val="000000"/>
               </a:solidFill>
-              <a:effectLst/>
-              <a:uFillTx/>
               <a:latin typeface="Arial"/>
             </a:endParaRPr>
           </a:p>
@@ -9174,15 +8846,15 @@
       </p:sp>
       <p:pic>
         <p:nvPicPr>
-          <p:cNvPr id="84" name=""/>
+          <p:cNvPr id="1317488450" name=""/>
           <p:cNvPicPr/>
           <p:nvPr/>
         </p:nvPicPr>
-        <p:blipFill>
-          <a:blip r:embed="rId1"/>
+        <p:blipFill rotWithShape="1">
+          <a:blip r:embed="rId3"/>
           <a:stretch/>
         </p:blipFill>
-        <p:spPr>
+        <p:spPr bwMode="auto">
           <a:xfrm>
             <a:off x="180000" y="878040"/>
             <a:ext cx="3817440" cy="2361960"/>
@@ -9198,15 +8870,15 @@
       </p:pic>
       <p:pic>
         <p:nvPicPr>
-          <p:cNvPr id="85" name=""/>
+          <p:cNvPr id="1877867165" name=""/>
           <p:cNvPicPr/>
           <p:nvPr/>
         </p:nvPicPr>
-        <p:blipFill>
-          <a:blip r:embed="rId2"/>
+        <p:blipFill rotWithShape="1">
+          <a:blip r:embed="rId4"/>
           <a:stretch/>
         </p:blipFill>
-        <p:spPr>
+        <p:spPr bwMode="auto">
           <a:xfrm>
             <a:off x="3960000" y="878040"/>
             <a:ext cx="3817440" cy="2361960"/>
@@ -9222,15 +8894,15 @@
       </p:pic>
       <p:pic>
         <p:nvPicPr>
-          <p:cNvPr id="86" name=""/>
+          <p:cNvPr id="1974544190" name=""/>
           <p:cNvPicPr/>
           <p:nvPr/>
         </p:nvPicPr>
-        <p:blipFill>
-          <a:blip r:embed="rId3"/>
+        <p:blipFill rotWithShape="1">
+          <a:blip r:embed="rId5"/>
           <a:stretch/>
         </p:blipFill>
-        <p:spPr>
+        <p:spPr bwMode="auto">
           <a:xfrm>
             <a:off x="7702560" y="878040"/>
             <a:ext cx="3817440" cy="2361960"/>
@@ -9246,15 +8918,15 @@
       </p:pic>
       <p:pic>
         <p:nvPicPr>
-          <p:cNvPr id="87" name=""/>
+          <p:cNvPr id="1347206527" name=""/>
           <p:cNvPicPr/>
           <p:nvPr/>
         </p:nvPicPr>
-        <p:blipFill>
-          <a:blip r:embed="rId4"/>
+        <p:blipFill rotWithShape="1">
+          <a:blip r:embed="rId6"/>
           <a:stretch/>
         </p:blipFill>
-        <p:spPr>
+        <p:spPr bwMode="auto">
           <a:xfrm>
             <a:off x="212760" y="3240000"/>
             <a:ext cx="3784680" cy="2340000"/>
@@ -9270,15 +8942,15 @@
       </p:pic>
       <p:pic>
         <p:nvPicPr>
-          <p:cNvPr id="88" name=""/>
+          <p:cNvPr id="1730059755" name=""/>
           <p:cNvPicPr/>
           <p:nvPr/>
         </p:nvPicPr>
-        <p:blipFill>
-          <a:blip r:embed="rId5"/>
+        <p:blipFill rotWithShape="1">
+          <a:blip r:embed="rId7"/>
           <a:stretch/>
         </p:blipFill>
-        <p:spPr>
+        <p:spPr bwMode="auto">
           <a:xfrm>
             <a:off x="3955320" y="3240000"/>
             <a:ext cx="3784680" cy="2340000"/>
@@ -9294,27 +8966,30 @@
       </p:pic>
     </p:spTree>
   </p:cSld>
-  <mc:AlternateContent>
-    <mc:Choice Requires="p14">
-      <p:transition spd="slow" p14:dur="2000"/>
+  <p:clrMapOvr>
+    <a:masterClrMapping/>
+  </p:clrMapOvr>
+  <mc:AlternateContent xmlns:mc="http://schemas.openxmlformats.org/markup-compatibility/2006">
+    <mc:Choice xmlns:p159="http://schemas.microsoft.com/office/powerpoint/2015/09/main" xmlns:p14="http://schemas.microsoft.com/office/powerpoint/2010/main" Requires="p159">
+      <p:transition p14:dur="2000" advClick="1"/>
     </mc:Choice>
     <mc:Fallback>
-      <p:transition spd="slow"/>
+      <p:transition advClick="1"/>
     </mc:Fallback>
   </mc:AlternateContent>
 </p:sld>
 </file>
 
 <file path=ppt/slides/slide6.xml><?xml version="1.0" encoding="utf-8"?>
-<p:sld xmlns:a="http://schemas.openxmlformats.org/drawingml/2006/main" xmlns:p="http://schemas.openxmlformats.org/presentationml/2006/main" xmlns:r="http://schemas.openxmlformats.org/officeDocument/2006/relationships" xmlns:p14="http://schemas.microsoft.com/office/powerpoint/2010/main" xmlns:p15="http://schemas.microsoft.com/office/powerpoint/2012/main" xmlns:mc="http://schemas.openxmlformats.org/markup-compatibility/2006">
-  <p:cSld>
+<p:sld xmlns:a="http://schemas.openxmlformats.org/drawingml/2006/main" xmlns:r="http://schemas.openxmlformats.org/officeDocument/2006/relationships" xmlns:p="http://schemas.openxmlformats.org/presentationml/2006/main" xmlns:m="http://schemas.openxmlformats.org/officeDocument/2006/math" xmlns:w="http://schemas.openxmlformats.org/wordprocessingml/2006/main" xmlns:mc="http://schemas.openxmlformats.org/markup-compatibility/2006" showMasterPhAnim="0" showMasterSp="1" show="1">
+  <p:cSld name="">
     <p:spTree>
       <p:nvGrpSpPr>
         <p:cNvPr id="1" name=""/>
         <p:cNvGrpSpPr/>
         <p:nvPr/>
       </p:nvGrpSpPr>
-      <p:grpSpPr>
+      <p:grpSpPr bwMode="auto">
         <a:xfrm>
           <a:off x="0" y="0"/>
           <a:ext cx="0" cy="0"/>
@@ -9322,69 +8997,700 @@
           <a:chExt cx="0" cy="0"/>
         </a:xfrm>
       </p:grpSpPr>
-      <p:pic>
-        <p:nvPicPr>
-          <p:cNvPr id="89" name=""/>
-          <p:cNvPicPr/>
+      <p:sp>
+        <p:nvSpPr>
+          <p:cNvPr id="1372751485" name=""/>
+          <p:cNvSpPr txBox="1"/>
           <p:nvPr/>
-        </p:nvPicPr>
-        <p:blipFill>
-          <a:blip r:embed="rId1"/>
-          <a:stretch/>
-        </p:blipFill>
-        <p:spPr>
-          <a:xfrm>
-            <a:off x="249840" y="3913560"/>
-            <a:ext cx="4449600" cy="2750400"/>
+        </p:nvSpPr>
+        <p:spPr bwMode="auto">
+          <a:xfrm rot="0" flipH="0" flipV="0">
+            <a:off x="451145" y="423333"/>
+            <a:ext cx="4105567" cy="2202074"/>
           </a:xfrm>
           <a:prstGeom prst="rect">
             <a:avLst/>
           </a:prstGeom>
           <a:noFill/>
-          <a:ln w="0">
-            <a:noFill/>
-          </a:ln>
         </p:spPr>
-      </p:pic>
-      <p:pic>
-        <p:nvPicPr>
-          <p:cNvPr id="90" name=""/>
-          <p:cNvPicPr/>
-          <p:nvPr/>
-        </p:nvPicPr>
-        <p:blipFill>
-          <a:blip r:embed="rId2"/>
-          <a:stretch/>
-        </p:blipFill>
-        <p:spPr>
-          <a:xfrm>
-            <a:off x="5576040" y="3822840"/>
-            <a:ext cx="4449600" cy="2750400"/>
-          </a:xfrm>
-          <a:prstGeom prst="rect">
-            <a:avLst/>
-          </a:prstGeom>
-          <a:noFill/>
-          <a:ln w="0">
-            <a:noFill/>
-          </a:ln>
-        </p:spPr>
-      </p:pic>
+        <p:txBody>
+          <a:bodyPr vertOverflow="overflow" horzOverflow="overflow" vert="horz" wrap="none" lIns="91440" tIns="45720" rIns="91440" bIns="45720" numCol="1" spcCol="0" rtlCol="0" fromWordArt="0" anchor="t" anchorCtr="0" forceAA="0" upright="0" compatLnSpc="0">
+            <a:spAutoFit/>
+          </a:bodyPr>
+          <a:p>
+            <a:pPr>
+              <a:defRPr/>
+            </a:pPr>
+            <a:r>
+              <a:rPr lang="pt-BR" sz="1200"/>
+              <a:t>Perfil de verossimilhança p/ quantis i_d,p</a:t>
+            </a:r>
+            <a:r>
+              <a:rPr lang="pt-BR" sz="1200"/>
+              <a:t>:</a:t>
+            </a:r>
+            <a:br>
+              <a:rPr lang="pt-BR" sz="1200"/>
+            </a:br>
+            <a:br>
+              <a:rPr lang="pt-BR" sz="1200"/>
+            </a:br>
+            <a:r>
+              <a:rPr lang="pt-BR" sz="1200"/>
+              <a:t>1. Reescrever um dos parâmetros em função dos quantis:</a:t>
+            </a:r>
+            <a:endParaRPr lang="pt-BR" sz="1200"/>
+          </a:p>
+          <a:p>
+            <a:pPr>
+              <a:defRPr/>
+            </a:pPr>
+            <a:endParaRPr lang="pt-BR" sz="1200"/>
+          </a:p>
+          <a:p>
+            <a:pPr>
+              <a:defRPr/>
+            </a:pPr>
+            <mc:AlternateContent xmlns:mc="http://schemas.openxmlformats.org/markup-compatibility/2006" xmlns:m="http://schemas.openxmlformats.org/officeDocument/2006/math">
+              <mc:Choice xmlns:a14="http://schemas.microsoft.com/office/drawing/2010/main" Requires="a14">
+                <a14:m>
+                  <m:oMathPara>
+                    <m:oMathParaPr/>
+                    <m:oMath>
+                      <m:sSub>
+                        <m:sSubPr>
+                          <m:ctrlPr>
+                            <a:rPr lang="pt-BR" sz="1200" i="1" u="none" strike="noStrike" cap="none" spc="0">
+                              <a:solidFill>
+                                <a:srgbClr val="000000"/>
+                              </a:solidFill>
+                              <a:latin typeface="Cambria Math"/>
+                              <a:ea typeface="Cambria Math"/>
+                              <a:cs typeface="Cambria Math"/>
+                            </a:rPr>
+                          </m:ctrlPr>
+                        </m:sSubPr>
+                        <m:e>
+                          <m:r>
+                            <m:rPr>
+                              <m:sty m:val="i"/>
+                            </m:rPr>
+                            <a:rPr lang="pt-BR" sz="1200" u="none" strike="noStrike" cap="none" spc="0">
+                              <a:solidFill>
+                                <a:srgbClr val="000000"/>
+                              </a:solidFill>
+                              <a:latin typeface="Cambria Math"/>
+                              <a:ea typeface="Cambria Math"/>
+                              <a:cs typeface="Cambria Math"/>
+                            </a:rPr>
+                            <m:t>x</m:t>
+                          </m:r>
+                        </m:e>
+                        <m:sub>
+                          <m:r>
+                            <m:rPr>
+                              <m:sty m:val="i"/>
+                            </m:rPr>
+                            <a:rPr lang="pt-BR" sz="1200" u="none" strike="noStrike" cap="none" spc="0">
+                              <a:solidFill>
+                                <a:srgbClr val="000000"/>
+                              </a:solidFill>
+                              <a:latin typeface="Cambria Math"/>
+                              <a:ea typeface="Cambria Math"/>
+                              <a:cs typeface="Cambria Math"/>
+                            </a:rPr>
+                            <m:t>p</m:t>
+                          </m:r>
+                        </m:sub>
+                      </m:sSub>
+                      <m:r>
+                        <m:rPr>
+                          <m:sty m:val="i"/>
+                        </m:rPr>
+                        <a:rPr lang="pt-BR" sz="1200" u="none" strike="noStrike" cap="none" spc="0">
+                          <a:solidFill>
+                            <a:srgbClr val="000000"/>
+                          </a:solidFill>
+                          <a:latin typeface="Cambria Math"/>
+                          <a:ea typeface="Cambria Math"/>
+                          <a:cs typeface="Cambria Math"/>
+                        </a:rPr>
+                        <m:t>=μ+</m:t>
+                      </m:r>
+                      <m:f>
+                        <m:fPr>
+                          <m:ctrlPr>
+                            <a:rPr lang="pt-BR" sz="1200" i="1" u="none" strike="noStrike" cap="none" spc="0">
+                              <a:solidFill>
+                                <a:srgbClr val="000000"/>
+                              </a:solidFill>
+                              <a:latin typeface="Cambria Math"/>
+                              <a:ea typeface="Cambria Math"/>
+                              <a:cs typeface="Cambria Math"/>
+                            </a:rPr>
+                          </m:ctrlPr>
+                        </m:fPr>
+                        <m:num>
+                          <m:r>
+                            <m:rPr>
+                              <m:sty m:val="i"/>
+                            </m:rPr>
+                            <a:rPr lang="pt-BR" sz="1200" u="none" strike="noStrike" cap="none" spc="0">
+                              <a:solidFill>
+                                <a:srgbClr val="000000"/>
+                              </a:solidFill>
+                              <a:latin typeface="Cambria Math"/>
+                              <a:ea typeface="Cambria Math"/>
+                              <a:cs typeface="Cambria Math"/>
+                            </a:rPr>
+                            <m:t>σ</m:t>
+                          </m:r>
+                        </m:num>
+                        <m:den>
+                          <m:r>
+                            <m:rPr>
+                              <m:sty m:val="i"/>
+                            </m:rPr>
+                            <a:rPr lang="pt-BR" sz="1200" u="none" strike="noStrike" cap="none" spc="0">
+                              <a:solidFill>
+                                <a:srgbClr val="000000"/>
+                              </a:solidFill>
+                              <a:latin typeface="Cambria Math"/>
+                              <a:ea typeface="Cambria Math"/>
+                              <a:cs typeface="Cambria Math"/>
+                            </a:rPr>
+                            <m:t>ξ</m:t>
+                          </m:r>
+                        </m:den>
+                      </m:f>
+                      <m:d>
+                        <m:dPr>
+                          <m:begChr m:val="{"/>
+                          <m:endChr m:val="}"/>
+                          <m:ctrlPr>
+                            <a:rPr lang="pt-BR" sz="1200" i="1" u="none" strike="noStrike" cap="none" spc="0">
+                              <a:solidFill>
+                                <a:srgbClr val="000000"/>
+                              </a:solidFill>
+                              <a:latin typeface="Cambria Math"/>
+                              <a:ea typeface="Cambria Math"/>
+                              <a:cs typeface="Cambria Math"/>
+                            </a:rPr>
+                          </m:ctrlPr>
+                        </m:dPr>
+                        <m:e>
+                          <m:r>
+                            <m:rPr>
+                              <m:sty m:val="i"/>
+                            </m:rPr>
+                            <a:rPr lang="pt-BR" sz="1200" u="none" strike="noStrike" cap="none" spc="0">
+                              <a:solidFill>
+                                <a:srgbClr val="000000"/>
+                              </a:solidFill>
+                              <a:latin typeface="Cambria Math"/>
+                              <a:ea typeface="Cambria Math"/>
+                              <a:cs typeface="Cambria Math"/>
+                            </a:rPr>
+                            <m:t>1-</m:t>
+                          </m:r>
+                          <m:sSup>
+                            <m:sSupPr>
+                              <m:ctrlPr>
+                                <a:rPr lang="pt-BR" sz="1200" b="0" i="1" u="none" strike="noStrike" cap="none" spc="0">
+                                  <a:solidFill>
+                                    <a:srgbClr val="000000"/>
+                                  </a:solidFill>
+                                  <a:latin typeface="Cambria Math"/>
+                                  <a:ea typeface="Cambria Math"/>
+                                  <a:cs typeface="Cambria Math"/>
+                                </a:rPr>
+                              </m:ctrlPr>
+                            </m:sSupPr>
+                            <m:e>
+                              <m:d>
+                                <m:dPr>
+                                  <m:begChr m:val="["/>
+                                  <m:endChr m:val="]"/>
+                                  <m:ctrlPr>
+                                    <a:rPr lang="pt-BR" sz="1200" i="1" u="none" strike="noStrike" cap="none" spc="0">
+                                      <a:solidFill>
+                                        <a:srgbClr val="000000"/>
+                                      </a:solidFill>
+                                      <a:latin typeface="Cambria Math"/>
+                                      <a:ea typeface="Cambria Math"/>
+                                      <a:cs typeface="Cambria Math"/>
+                                    </a:rPr>
+                                  </m:ctrlPr>
+                                </m:dPr>
+                                <m:e>
+                                  <m:r>
+                                    <m:rPr>
+                                      <m:sty m:val="i"/>
+                                    </m:rPr>
+                                    <a:rPr lang="pt-BR" sz="1200" u="none" strike="noStrike" cap="none" spc="0">
+                                      <a:solidFill>
+                                        <a:srgbClr val="000000"/>
+                                      </a:solidFill>
+                                      <a:latin typeface="Cambria Math"/>
+                                      <a:ea typeface="Cambria Math"/>
+                                      <a:cs typeface="Cambria Math"/>
+                                    </a:rPr>
+                                    <m:t>-</m:t>
+                                  </m:r>
+                                  <m:func>
+                                    <m:funcPr>
+                                      <m:ctrlPr>
+                                        <a:rPr lang="pt-BR" sz="1200" i="1" u="none" strike="noStrike" cap="none" spc="0">
+                                          <a:solidFill>
+                                            <a:srgbClr val="000000"/>
+                                          </a:solidFill>
+                                          <a:latin typeface="Cambria Math"/>
+                                          <a:ea typeface="Cambria Math"/>
+                                          <a:cs typeface="Cambria Math"/>
+                                        </a:rPr>
+                                      </m:ctrlPr>
+                                    </m:funcPr>
+                                    <m:fName>
+                                      <m:r>
+                                        <m:rPr>
+                                          <m:sty m:val="i"/>
+                                        </m:rPr>
+                                        <a:rPr lang="pt-BR" sz="1200" u="none" strike="noStrike" cap="none" spc="0">
+                                          <a:solidFill>
+                                            <a:srgbClr val="000000"/>
+                                          </a:solidFill>
+                                          <a:latin typeface="Cambria Math"/>
+                                          <a:ea typeface="Cambria Math"/>
+                                          <a:cs typeface="Cambria Math"/>
+                                        </a:rPr>
+                                        <m:t>ln</m:t>
+                                      </m:r>
+                                    </m:fName>
+                                    <m:e>
+                                      <m:r>
+                                        <m:rPr>
+                                          <m:sty m:val="i"/>
+                                        </m:rPr>
+                                        <a:rPr lang="pt-BR" sz="1200" u="none" strike="noStrike" cap="none" spc="0">
+                                          <a:solidFill>
+                                            <a:srgbClr val="000000"/>
+                                          </a:solidFill>
+                                          <a:latin typeface="Cambria Math"/>
+                                          <a:ea typeface="Cambria Math"/>
+                                          <a:cs typeface="Cambria Math"/>
+                                        </a:rPr>
+                                        <m:t>(p)</m:t>
+                                      </m:r>
+                                    </m:e>
+                                  </m:func>
+                                </m:e>
+                              </m:d>
+                            </m:e>
+                            <m:sup>
+                              <m:r>
+                                <m:rPr>
+                                  <m:sty m:val="i"/>
+                                </m:rPr>
+                                <a:rPr lang="pt-BR" sz="1200" u="none" strike="noStrike" cap="none" spc="0">
+                                  <a:solidFill>
+                                    <a:srgbClr val="000000"/>
+                                  </a:solidFill>
+                                  <a:latin typeface="Cambria Math"/>
+                                  <a:ea typeface="Cambria Math"/>
+                                  <a:cs typeface="Cambria Math"/>
+                                </a:rPr>
+                                <m:t>ξ</m:t>
+                              </m:r>
+                            </m:sup>
+                          </m:sSup>
+                        </m:e>
+                      </m:d>
+                    </m:oMath>
+                  </m:oMathPara>
+                </a14:m>
+              </mc:Choice>
+              <mc:Fallback/>
+            </mc:AlternateContent>
+            <a:endParaRPr lang="pt-BR" sz="1200" i="1"/>
+          </a:p>
+          <a:p>
+            <a:pPr>
+              <a:defRPr/>
+            </a:pPr>
+            <a:endParaRPr lang="pt-BR" sz="1200" i="1"/>
+          </a:p>
+          <a:p>
+            <a:pPr>
+              <a:defRPr/>
+            </a:pPr>
+            <mc:AlternateContent xmlns:mc="http://schemas.openxmlformats.org/markup-compatibility/2006" xmlns:m="http://schemas.openxmlformats.org/officeDocument/2006/math">
+              <mc:Choice xmlns:a14="http://schemas.microsoft.com/office/drawing/2010/main" Requires="a14">
+                <a14:m>
+                  <m:oMathPara>
+                    <m:oMathParaPr/>
+                    <m:oMath>
+                      <m:sSub>
+                        <m:sSubPr>
+                          <m:ctrlPr>
+                            <a:rPr lang="pt-BR" sz="1200" u="none" strike="noStrike" cap="none" spc="0">
+                              <a:solidFill>
+                                <a:srgbClr val="000000"/>
+                              </a:solidFill>
+                              <a:latin typeface="Cambria Math"/>
+                              <a:ea typeface="Cambria Math"/>
+                              <a:cs typeface="Cambria Math"/>
+                            </a:rPr>
+                          </m:ctrlPr>
+                        </m:sSubPr>
+                        <m:e>
+                          <m:r>
+                            <m:rPr>
+                              <m:sty m:val="i"/>
+                            </m:rPr>
+                            <a:rPr lang="pt-BR" sz="1200" u="none" strike="noStrike" cap="none" spc="0">
+                              <a:solidFill>
+                                <a:srgbClr val="000000"/>
+                              </a:solidFill>
+                              <a:latin typeface="Cambria Math"/>
+                              <a:ea typeface="Cambria Math"/>
+                              <a:cs typeface="Cambria Math"/>
+                            </a:rPr>
+                            <m:t>μ</m:t>
+                          </m:r>
+                        </m:e>
+                        <m:sub>
+                          <m:r>
+                            <m:rPr>
+                              <m:sty m:val="i"/>
+                            </m:rPr>
+                            <a:rPr lang="pt-BR" sz="1200" u="none" strike="noStrike" cap="none" spc="0">
+                              <a:solidFill>
+                                <a:srgbClr val="000000"/>
+                              </a:solidFill>
+                              <a:latin typeface="Cambria Math"/>
+                              <a:ea typeface="Cambria Math"/>
+                              <a:cs typeface="Cambria Math"/>
+                            </a:rPr>
+                            <m:t>p</m:t>
+                          </m:r>
+                        </m:sub>
+                      </m:sSub>
+                      <m:r>
+                        <m:rPr/>
+                        <a:rPr lang="pt-BR" sz="1200" u="none" strike="noStrike" cap="none" spc="0">
+                          <a:solidFill>
+                            <a:srgbClr val="000000"/>
+                          </a:solidFill>
+                          <a:latin typeface="Cambria Math"/>
+                          <a:ea typeface="Cambria Math"/>
+                          <a:cs typeface="Cambria Math"/>
+                        </a:rPr>
+                        <m:t>=</m:t>
+                      </m:r>
+                      <m:sSubSup>
+                        <m:sSubSupPr>
+                          <m:alnScr m:val="off"/>
+                          <m:ctrlPr>
+                            <a:rPr lang="pt-BR" sz="1200" u="none" strike="noStrike" cap="none" spc="0">
+                              <a:solidFill>
+                                <a:srgbClr val="000000"/>
+                              </a:solidFill>
+                              <a:latin typeface="Cambria Math"/>
+                              <a:ea typeface="Cambria Math"/>
+                              <a:cs typeface="Cambria Math"/>
+                            </a:rPr>
+                          </m:ctrlPr>
+                        </m:sSubSupPr>
+                        <m:e>
+                          <m:r>
+                            <m:rPr/>
+                            <a:rPr lang="pt-BR" sz="1200" u="none" strike="noStrike" cap="none" spc="0">
+                              <a:solidFill>
+                                <a:srgbClr val="000000"/>
+                              </a:solidFill>
+                              <a:latin typeface="Cambria Math"/>
+                              <a:ea typeface="Cambria Math"/>
+                              <a:cs typeface="Cambria Math"/>
+                            </a:rPr>
+                            <m:t>x</m:t>
+                          </m:r>
+                        </m:e>
+                        <m:sub>
+                          <m:r>
+                            <m:rPr/>
+                            <a:rPr lang="pt-BR" sz="1200" u="none" strike="noStrike" cap="none" spc="0">
+                              <a:solidFill>
+                                <a:srgbClr val="000000"/>
+                              </a:solidFill>
+                              <a:latin typeface="Cambria Math"/>
+                              <a:ea typeface="Cambria Math"/>
+                              <a:cs typeface="Cambria Math"/>
+                            </a:rPr>
+                            <m:t>p</m:t>
+                          </m:r>
+                        </m:sub>
+                        <m:sup>
+                          <m:r>
+                            <m:rPr/>
+                            <a:rPr>
+                              <a:latin typeface="Cambria Math"/>
+                              <a:ea typeface="Cambria Math"/>
+                              <a:cs typeface="Cambria Math"/>
+                            </a:rPr>
+                            <m:t>'</m:t>
+                          </m:r>
+                        </m:sup>
+                      </m:sSubSup>
+                      <m:r>
+                        <m:rPr/>
+                        <a:rPr lang="pt-BR" sz="1200" u="none" strike="noStrike" cap="none" spc="0">
+                          <a:solidFill>
+                            <a:srgbClr val="000000"/>
+                          </a:solidFill>
+                          <a:latin typeface="Cambria Math"/>
+                          <a:ea typeface="Cambria Math"/>
+                          <a:cs typeface="Cambria Math"/>
+                        </a:rPr>
+                        <m:t>-</m:t>
+                      </m:r>
+                      <m:f>
+                        <m:fPr>
+                          <m:ctrlPr>
+                            <a:rPr lang="pt-BR" sz="1200" i="1" u="none" strike="noStrike" cap="none" spc="0">
+                              <a:solidFill>
+                                <a:srgbClr val="000000"/>
+                              </a:solidFill>
+                              <a:latin typeface="Cambria Math"/>
+                              <a:ea typeface="Cambria Math"/>
+                              <a:cs typeface="Cambria Math"/>
+                            </a:rPr>
+                          </m:ctrlPr>
+                        </m:fPr>
+                        <m:num>
+                          <m:r>
+                            <m:rPr>
+                              <m:sty m:val="i"/>
+                            </m:rPr>
+                            <a:rPr lang="pt-BR" sz="1200" u="none" strike="noStrike" cap="none" spc="0">
+                              <a:solidFill>
+                                <a:srgbClr val="000000"/>
+                              </a:solidFill>
+                              <a:latin typeface="Cambria Math"/>
+                              <a:ea typeface="Cambria Math"/>
+                              <a:cs typeface="Cambria Math"/>
+                            </a:rPr>
+                            <m:t>σ</m:t>
+                          </m:r>
+                        </m:num>
+                        <m:den>
+                          <m:r>
+                            <m:rPr>
+                              <m:sty m:val="i"/>
+                            </m:rPr>
+                            <a:rPr lang="pt-BR" sz="1200" u="none" strike="noStrike" cap="none" spc="0">
+                              <a:solidFill>
+                                <a:srgbClr val="000000"/>
+                              </a:solidFill>
+                              <a:latin typeface="Cambria Math"/>
+                              <a:ea typeface="Cambria Math"/>
+                              <a:cs typeface="Cambria Math"/>
+                            </a:rPr>
+                            <m:t>ξ</m:t>
+                          </m:r>
+                        </m:den>
+                      </m:f>
+                      <m:d>
+                        <m:dPr>
+                          <m:begChr m:val="{"/>
+                          <m:endChr m:val="}"/>
+                          <m:ctrlPr>
+                            <a:rPr lang="pt-BR" sz="1200" i="1" u="none" strike="noStrike" cap="none" spc="0">
+                              <a:solidFill>
+                                <a:srgbClr val="000000"/>
+                              </a:solidFill>
+                              <a:latin typeface="Cambria Math"/>
+                              <a:ea typeface="Cambria Math"/>
+                              <a:cs typeface="Cambria Math"/>
+                            </a:rPr>
+                          </m:ctrlPr>
+                        </m:dPr>
+                        <m:e>
+                          <m:r>
+                            <m:rPr>
+                              <m:sty m:val="i"/>
+                            </m:rPr>
+                            <a:rPr lang="pt-BR" sz="1200" u="none" strike="noStrike" cap="none" spc="0">
+                              <a:solidFill>
+                                <a:srgbClr val="000000"/>
+                              </a:solidFill>
+                              <a:latin typeface="Cambria Math"/>
+                              <a:ea typeface="Cambria Math"/>
+                              <a:cs typeface="Cambria Math"/>
+                            </a:rPr>
+                            <m:t>1-</m:t>
+                          </m:r>
+                          <m:sSup>
+                            <m:sSupPr>
+                              <m:ctrlPr>
+                                <a:rPr lang="pt-BR" sz="1200" b="0" i="1" u="none" strike="noStrike" cap="none" spc="0">
+                                  <a:solidFill>
+                                    <a:srgbClr val="000000"/>
+                                  </a:solidFill>
+                                  <a:latin typeface="Cambria Math"/>
+                                  <a:ea typeface="Cambria Math"/>
+                                  <a:cs typeface="Cambria Math"/>
+                                </a:rPr>
+                              </m:ctrlPr>
+                            </m:sSupPr>
+                            <m:e>
+                              <m:d>
+                                <m:dPr>
+                                  <m:begChr m:val="["/>
+                                  <m:endChr m:val="]"/>
+                                  <m:ctrlPr>
+                                    <a:rPr lang="pt-BR" sz="1200" i="1" u="none" strike="noStrike" cap="none" spc="0">
+                                      <a:solidFill>
+                                        <a:srgbClr val="000000"/>
+                                      </a:solidFill>
+                                      <a:latin typeface="Cambria Math"/>
+                                      <a:ea typeface="Cambria Math"/>
+                                      <a:cs typeface="Cambria Math"/>
+                                    </a:rPr>
+                                  </m:ctrlPr>
+                                </m:dPr>
+                                <m:e>
+                                  <m:r>
+                                    <m:rPr>
+                                      <m:sty m:val="i"/>
+                                    </m:rPr>
+                                    <a:rPr lang="pt-BR" sz="1200" u="none" strike="noStrike" cap="none" spc="0">
+                                      <a:solidFill>
+                                        <a:srgbClr val="000000"/>
+                                      </a:solidFill>
+                                      <a:latin typeface="Cambria Math"/>
+                                      <a:ea typeface="Cambria Math"/>
+                                      <a:cs typeface="Cambria Math"/>
+                                    </a:rPr>
+                                    <m:t>-</m:t>
+                                  </m:r>
+                                  <m:func>
+                                    <m:funcPr>
+                                      <m:ctrlPr>
+                                        <a:rPr lang="pt-BR" sz="1200" i="1" u="none" strike="noStrike" cap="none" spc="0">
+                                          <a:solidFill>
+                                            <a:srgbClr val="000000"/>
+                                          </a:solidFill>
+                                          <a:latin typeface="Cambria Math"/>
+                                          <a:ea typeface="Cambria Math"/>
+                                          <a:cs typeface="Cambria Math"/>
+                                        </a:rPr>
+                                      </m:ctrlPr>
+                                    </m:funcPr>
+                                    <m:fName>
+                                      <m:r>
+                                        <m:rPr>
+                                          <m:sty m:val="i"/>
+                                        </m:rPr>
+                                        <a:rPr lang="pt-BR" sz="1200" u="none" strike="noStrike" cap="none" spc="0">
+                                          <a:solidFill>
+                                            <a:srgbClr val="000000"/>
+                                          </a:solidFill>
+                                          <a:latin typeface="Cambria Math"/>
+                                          <a:ea typeface="Cambria Math"/>
+                                          <a:cs typeface="Cambria Math"/>
+                                        </a:rPr>
+                                        <m:t>ln</m:t>
+                                      </m:r>
+                                    </m:fName>
+                                    <m:e>
+                                      <m:r>
+                                        <m:rPr>
+                                          <m:sty m:val="i"/>
+                                        </m:rPr>
+                                        <a:rPr lang="pt-BR" sz="1200" u="none" strike="noStrike" cap="none" spc="0">
+                                          <a:solidFill>
+                                            <a:srgbClr val="000000"/>
+                                          </a:solidFill>
+                                          <a:latin typeface="Cambria Math"/>
+                                          <a:ea typeface="Cambria Math"/>
+                                          <a:cs typeface="Cambria Math"/>
+                                        </a:rPr>
+                                        <m:t>(p)</m:t>
+                                      </m:r>
+                                    </m:e>
+                                  </m:func>
+                                </m:e>
+                              </m:d>
+                            </m:e>
+                            <m:sup>
+                              <m:r>
+                                <m:rPr>
+                                  <m:sty m:val="i"/>
+                                </m:rPr>
+                                <a:rPr lang="pt-BR" sz="1200" u="none" strike="noStrike" cap="none" spc="0">
+                                  <a:solidFill>
+                                    <a:srgbClr val="000000"/>
+                                  </a:solidFill>
+                                  <a:latin typeface="Cambria Math"/>
+                                  <a:ea typeface="Cambria Math"/>
+                                  <a:cs typeface="Cambria Math"/>
+                                </a:rPr>
+                                <m:t>ξ</m:t>
+                              </m:r>
+                            </m:sup>
+                          </m:sSup>
+                        </m:e>
+                      </m:d>
+                    </m:oMath>
+                  </m:oMathPara>
+                </a14:m>
+              </mc:Choice>
+              <mc:Fallback/>
+            </mc:AlternateContent>
+            <a:endParaRPr lang="pt-BR" sz="1200" i="1"/>
+          </a:p>
+          <a:p>
+            <a:pPr>
+              <a:defRPr/>
+            </a:pPr>
+            <a:endParaRPr sz="1200" i="1"/>
+          </a:p>
+          <a:p>
+            <a:pPr>
+              <a:defRPr/>
+            </a:pPr>
+            <a:r>
+              <a:rPr lang="pt-BR" sz="1200" i="0"/>
+              <a:t>na d-GEV:</a:t>
+            </a:r>
+            <a:endParaRPr lang="pt-BR" sz="1200" i="0"/>
+          </a:p>
+          <a:p>
+            <a:pPr>
+              <a:defRPr/>
+            </a:pPr>
+            <a:endParaRPr sz="1200" i="0"/>
+          </a:p>
+        </p:txBody>
+      </p:sp>
     </p:spTree>
   </p:cSld>
-  <mc:AlternateContent>
-    <mc:Choice Requires="p14">
-      <p:transition spd="slow" p14:dur="2000"/>
+  <p:clrMapOvr>
+    <a:masterClrMapping/>
+  </p:clrMapOvr>
+  <mc:AlternateContent xmlns:mc="http://schemas.openxmlformats.org/markup-compatibility/2006">
+    <mc:Choice xmlns:p159="http://schemas.microsoft.com/office/powerpoint/2015/09/main" xmlns:p14="http://schemas.microsoft.com/office/powerpoint/2010/main" Requires="p159">
+      <p:transition p14:dur="2000" advClick="1"/>
     </mc:Choice>
     <mc:Fallback>
-      <p:transition spd="slow"/>
+      <p:transition advClick="1"/>
     </mc:Fallback>
   </mc:AlternateContent>
 </p:sld>
 </file>
 
 <file path=ppt/theme/theme1.xml><?xml version="1.0" encoding="utf-8"?>
-<a:theme xmlns:a="http://schemas.openxmlformats.org/drawingml/2006/main" xmlns:r="http://schemas.openxmlformats.org/officeDocument/2006/relationships" name="Office Theme">
+<a:theme xmlns:a="http://schemas.openxmlformats.org/drawingml/2006/main" xmlns:r="http://schemas.openxmlformats.org/officeDocument/2006/relationships" xmlns:p="http://schemas.openxmlformats.org/presentationml/2006/main" name="Office Theme">
   <a:themeElements>
     <a:clrScheme name="New Office">
       <a:dk1>
@@ -9426,17 +9732,17 @@
     </a:clrScheme>
     <a:fontScheme name="Office Theme">
       <a:majorFont>
-        <a:latin typeface="Arial" pitchFamily="0" charset="1"/>
-        <a:ea typeface="Arial" pitchFamily="0" charset="1"/>
-        <a:cs typeface="Arial" pitchFamily="0" charset="1"/>
+        <a:latin typeface="Arial"/>
+        <a:ea typeface="Arial"/>
+        <a:cs typeface="Arial"/>
       </a:majorFont>
       <a:minorFont>
-        <a:latin typeface="Arial" pitchFamily="0" charset="1"/>
-        <a:ea typeface="Arial" pitchFamily="0" charset="1"/>
-        <a:cs typeface="Arial" pitchFamily="0" charset="1"/>
+        <a:latin typeface="Arial"/>
+        <a:ea typeface="Arial"/>
+        <a:cs typeface="Arial"/>
       </a:minorFont>
     </a:fontScheme>
-    <a:fmtScheme>
+    <a:fmtScheme name="">
       <a:fillStyleLst>
         <a:solidFill>
           <a:schemeClr val="phClr"/>
@@ -9463,7 +9769,6 @@
             </a:gs>
           </a:gsLst>
           <a:lin ang="5400000" scaled="0"/>
-          <a:tileRect l="0" t="0" r="0" b="0"/>
         </a:gradFill>
         <a:gradFill>
           <a:gsLst>
@@ -9487,7 +9792,6 @@
             </a:gs>
           </a:gsLst>
           <a:lin ang="5400000" scaled="0"/>
-          <a:tileRect l="0" t="0" r="0" b="0"/>
         </a:gradFill>
       </a:fillStyleLst>
       <a:lnStyleLst>
@@ -9547,16 +9851,16 @@
             </a:gs>
           </a:gsLst>
           <a:lin ang="5400000" scaled="0"/>
-          <a:tileRect l="0" t="0" r="0" b="0"/>
         </a:gradFill>
       </a:bgFillStyleLst>
     </a:fmtScheme>
   </a:themeElements>
+  <a:objectDefaults/>
 </a:theme>
 </file>
 
-<file path=ppt/theme/theme12.xml><?xml version="1.0" encoding="utf-8"?>
-<a:theme xmlns:a="http://schemas.openxmlformats.org/drawingml/2006/main" xmlns:r="http://schemas.openxmlformats.org/officeDocument/2006/relationships" name="Office Theme">
+<file path=ppt/theme/theme2.xml><?xml version="1.0" encoding="utf-8"?>
+<a:theme xmlns:a="http://schemas.openxmlformats.org/drawingml/2006/main" xmlns:r="http://schemas.openxmlformats.org/officeDocument/2006/relationships" xmlns:p="http://schemas.openxmlformats.org/presentationml/2006/main" name="Office Theme">
   <a:themeElements>
     <a:clrScheme name="LibreOffice">
       <a:dk1>
@@ -9598,17 +9902,17 @@
     </a:clrScheme>
     <a:fontScheme name="Office">
       <a:majorFont>
-        <a:latin typeface="Arial" pitchFamily="0" charset="1"/>
-        <a:ea typeface="DejaVu Sans" pitchFamily="0" charset="1"/>
-        <a:cs typeface="DejaVu Sans" pitchFamily="0" charset="1"/>
+        <a:latin typeface="Arial"/>
+        <a:ea typeface="DejaVu Sans"/>
+        <a:cs typeface="DejaVu Sans"/>
       </a:majorFont>
       <a:minorFont>
-        <a:latin typeface="Arial" pitchFamily="0" charset="1"/>
-        <a:ea typeface="DejaVu Sans" pitchFamily="0" charset="1"/>
-        <a:cs typeface="DejaVu Sans" pitchFamily="0" charset="1"/>
+        <a:latin typeface="Arial"/>
+        <a:ea typeface="DejaVu Sans"/>
+        <a:cs typeface="DejaVu Sans"/>
       </a:minorFont>
     </a:fontScheme>
-    <a:fmtScheme>
+    <a:fmtScheme name="">
       <a:fillStyleLst>
         <a:solidFill>
           <a:schemeClr val="phClr"/>
@@ -9658,5 +9962,6 @@
       </a:bgFillStyleLst>
     </a:fmtScheme>
   </a:themeElements>
+  <a:objectDefaults/>
 </a:theme>
 </file>
--- a/resultados.pptx
+++ b/resultados.pptx
@@ -5,7 +5,7 @@
     <p:sldMasterId id="2147483648" r:id="rId1"/>
   </p:sldMasterIdLst>
   <p:notesMasterIdLst>
-    <p:notesMasterId r:id="rId10"/>
+    <p:notesMasterId r:id="rId20"/>
   </p:notesMasterIdLst>
   <p:sldIdLst>
     <p:sldId id="256" r:id="rId4"/>
@@ -14,6 +14,16 @@
     <p:sldId id="259" r:id="rId7"/>
     <p:sldId id="260" r:id="rId8"/>
     <p:sldId id="261" r:id="rId9"/>
+    <p:sldId id="262" r:id="rId10"/>
+    <p:sldId id="263" r:id="rId11"/>
+    <p:sldId id="264" r:id="rId12"/>
+    <p:sldId id="265" r:id="rId13"/>
+    <p:sldId id="266" r:id="rId14"/>
+    <p:sldId id="267" r:id="rId15"/>
+    <p:sldId id="268" r:id="rId16"/>
+    <p:sldId id="269" r:id="rId17"/>
+    <p:sldId id="270" r:id="rId18"/>
+    <p:sldId id="271" r:id="rId19"/>
   </p:sldIdLst>
   <p:sldSz cx="12192000" cy="6858000"/>
   <p:notesSz cx="6858000" cy="9144000"/>
@@ -39,7 +49,7 @@
       </p:grpSpPr>
       <p:sp>
         <p:nvSpPr>
-          <p:cNvPr id="122481442" name="PlaceHolder 1"/>
+          <p:cNvPr id="1822775390" name="PlaceHolder 1"/>
           <p:cNvSpPr>
             <a:spLocks noGrp="1"/>
           </p:cNvSpPr>
@@ -91,7 +101,7 @@
       </p:sp>
       <p:sp>
         <p:nvSpPr>
-          <p:cNvPr id="473440889" name="PlaceHolder 2"/>
+          <p:cNvPr id="143577885" name="PlaceHolder 2"/>
           <p:cNvSpPr>
             <a:spLocks noGrp="1"/>
           </p:cNvSpPr>
@@ -141,7 +151,7 @@
       </p:sp>
       <p:sp>
         <p:nvSpPr>
-          <p:cNvPr id="113264666" name="PlaceHolder 3"/>
+          <p:cNvPr id="2140466323" name="PlaceHolder 3"/>
           <p:cNvSpPr>
             <a:spLocks noGrp="1"/>
           </p:cNvSpPr>
@@ -191,7 +201,7 @@
       </p:sp>
       <p:sp>
         <p:nvSpPr>
-          <p:cNvPr id="769139441" name="PlaceHolder 4"/>
+          <p:cNvPr id="1717237145" name="PlaceHolder 4"/>
           <p:cNvSpPr>
             <a:spLocks noGrp="1"/>
           </p:cNvSpPr>
@@ -252,7 +262,7 @@
       </p:sp>
       <p:sp>
         <p:nvSpPr>
-          <p:cNvPr id="1389237422" name="PlaceHolder 5"/>
+          <p:cNvPr id="1577631780" name="PlaceHolder 5"/>
           <p:cNvSpPr>
             <a:spLocks noGrp="1"/>
           </p:cNvSpPr>
@@ -313,7 +323,7 @@
       </p:sp>
       <p:sp>
         <p:nvSpPr>
-          <p:cNvPr id="432064687" name="PlaceHolder 6"/>
+          <p:cNvPr id="599952041" name="PlaceHolder 6"/>
           <p:cNvSpPr>
             <a:spLocks noGrp="1"/>
           </p:cNvSpPr>
@@ -397,7 +407,7 @@
       </p:grpSpPr>
       <p:sp>
         <p:nvSpPr>
-          <p:cNvPr id="144580020" name="PlaceHolder 1"/>
+          <p:cNvPr id="96311650" name="PlaceHolder 1"/>
           <p:cNvSpPr>
             <a:spLocks noGrp="1"/>
           </p:cNvSpPr>
@@ -420,7 +430,7 @@
       </p:sp>
       <p:sp>
         <p:nvSpPr>
-          <p:cNvPr id="1946191098" name="PlaceHolder 2"/>
+          <p:cNvPr id="1029394812" name="PlaceHolder 2"/>
           <p:cNvSpPr>
             <a:spLocks noGrp="1"/>
           </p:cNvSpPr>
@@ -461,7 +471,7 @@
       </p:sp>
       <p:sp>
         <p:nvSpPr>
-          <p:cNvPr id="1542018822" name="PlaceHolder 3"/>
+          <p:cNvPr id="1250569244" name="PlaceHolder 3"/>
           <p:cNvSpPr>
             <a:spLocks noGrp="1"/>
           </p:cNvSpPr>
@@ -525,6 +535,601 @@
               </a:solidFill>
               <a:latin typeface="Times New Roman"/>
             </a:endParaRPr>
+          </a:p>
+        </p:txBody>
+      </p:sp>
+    </p:spTree>
+  </p:cSld>
+  <p:clrMapOvr>
+    <a:masterClrMapping/>
+  </p:clrMapOvr>
+</p:notes>
+</file>
+
+<file path=ppt/notesSlides/notesSlide10.xml><?xml version="1.0" encoding="utf-8"?>
+<p:notes xmlns:a="http://schemas.openxmlformats.org/drawingml/2006/main" xmlns:r="http://schemas.openxmlformats.org/officeDocument/2006/relationships" xmlns:p="http://schemas.openxmlformats.org/presentationml/2006/main" xmlns:m="http://schemas.openxmlformats.org/officeDocument/2006/math" xmlns:w="http://schemas.openxmlformats.org/wordprocessingml/2006/main">
+  <p:cSld name="">
+    <p:spTree>
+      <p:nvGrpSpPr>
+        <p:cNvPr id="1" name=""/>
+        <p:cNvGrpSpPr/>
+        <p:nvPr/>
+      </p:nvGrpSpPr>
+      <p:grpSpPr bwMode="auto">
+        <a:xfrm>
+          <a:off x="0" y="0"/>
+          <a:ext cx="0" cy="0"/>
+          <a:chOff x="0" y="0"/>
+          <a:chExt cx="0" cy="0"/>
+        </a:xfrm>
+      </p:grpSpPr>
+      <p:sp>
+        <p:nvSpPr>
+          <p:cNvPr id="784447719" name="Slide Image Placeholder 1"/>
+          <p:cNvSpPr>
+            <a:spLocks noChangeAspect="1" noGrp="1" noRot="1"/>
+          </p:cNvSpPr>
+          <p:nvPr>
+            <p:ph type="sldImg"/>
+          </p:nvPr>
+        </p:nvSpPr>
+        <p:spPr bwMode="auto"/>
+      </p:sp>
+      <p:sp>
+        <p:nvSpPr>
+          <p:cNvPr id="1083122398" name="Notes Placeholder 2"/>
+          <p:cNvSpPr>
+            <a:spLocks noGrp="1"/>
+          </p:cNvSpPr>
+          <p:nvPr>
+            <p:ph type="body" idx="1"/>
+          </p:nvPr>
+        </p:nvSpPr>
+        <p:spPr bwMode="auto"/>
+        <p:txBody>
+          <a:bodyPr/>
+          <a:lstStyle/>
+          <a:p>
+            <a:pPr>
+              <a:defRPr/>
+            </a:pPr>
+            <a:endParaRPr/>
+          </a:p>
+        </p:txBody>
+      </p:sp>
+      <p:sp>
+        <p:nvSpPr>
+          <p:cNvPr id="1003312316" name="Slide Number Placeholder 3"/>
+          <p:cNvSpPr>
+            <a:spLocks noGrp="1"/>
+          </p:cNvSpPr>
+          <p:nvPr>
+            <p:ph type="sldNum" sz="quarter" idx="10"/>
+          </p:nvPr>
+        </p:nvSpPr>
+        <p:spPr bwMode="auto"/>
+        <p:txBody>
+          <a:bodyPr/>
+          <a:lstStyle/>
+          <a:p>
+            <a:pPr>
+              <a:defRPr/>
+            </a:pPr>
+            <a:fld id="{795B7E21-7D7D-DF90-DBA7-73257D54500D}" type="slidenum">
+              <a:rPr/>
+              <a:t/>
+            </a:fld>
+            <a:endParaRPr/>
+          </a:p>
+        </p:txBody>
+      </p:sp>
+    </p:spTree>
+  </p:cSld>
+  <p:clrMapOvr>
+    <a:masterClrMapping/>
+  </p:clrMapOvr>
+</p:notes>
+</file>
+
+<file path=ppt/notesSlides/notesSlide11.xml><?xml version="1.0" encoding="utf-8"?>
+<p:notes xmlns:a="http://schemas.openxmlformats.org/drawingml/2006/main" xmlns:r="http://schemas.openxmlformats.org/officeDocument/2006/relationships" xmlns:p="http://schemas.openxmlformats.org/presentationml/2006/main" xmlns:m="http://schemas.openxmlformats.org/officeDocument/2006/math" xmlns:w="http://schemas.openxmlformats.org/wordprocessingml/2006/main">
+  <p:cSld name="">
+    <p:spTree>
+      <p:nvGrpSpPr>
+        <p:cNvPr id="1" name=""/>
+        <p:cNvGrpSpPr/>
+        <p:nvPr/>
+      </p:nvGrpSpPr>
+      <p:grpSpPr bwMode="auto">
+        <a:xfrm>
+          <a:off x="0" y="0"/>
+          <a:ext cx="0" cy="0"/>
+          <a:chOff x="0" y="0"/>
+          <a:chExt cx="0" cy="0"/>
+        </a:xfrm>
+      </p:grpSpPr>
+      <p:sp>
+        <p:nvSpPr>
+          <p:cNvPr id="1002554621" name="Slide Image Placeholder 1"/>
+          <p:cNvSpPr>
+            <a:spLocks noChangeAspect="1" noGrp="1" noRot="1"/>
+          </p:cNvSpPr>
+          <p:nvPr>
+            <p:ph type="sldImg"/>
+          </p:nvPr>
+        </p:nvSpPr>
+        <p:spPr bwMode="auto"/>
+      </p:sp>
+      <p:sp>
+        <p:nvSpPr>
+          <p:cNvPr id="973166301" name="Notes Placeholder 2"/>
+          <p:cNvSpPr>
+            <a:spLocks noGrp="1"/>
+          </p:cNvSpPr>
+          <p:nvPr>
+            <p:ph type="body" idx="1"/>
+          </p:nvPr>
+        </p:nvSpPr>
+        <p:spPr bwMode="auto"/>
+        <p:txBody>
+          <a:bodyPr/>
+          <a:lstStyle/>
+          <a:p>
+            <a:pPr>
+              <a:defRPr/>
+            </a:pPr>
+            <a:endParaRPr/>
+          </a:p>
+        </p:txBody>
+      </p:sp>
+      <p:sp>
+        <p:nvSpPr>
+          <p:cNvPr id="713920897" name="Slide Number Placeholder 3"/>
+          <p:cNvSpPr>
+            <a:spLocks noGrp="1"/>
+          </p:cNvSpPr>
+          <p:nvPr>
+            <p:ph type="sldNum" sz="quarter" idx="10"/>
+          </p:nvPr>
+        </p:nvSpPr>
+        <p:spPr bwMode="auto"/>
+        <p:txBody>
+          <a:bodyPr/>
+          <a:lstStyle/>
+          <a:p>
+            <a:pPr>
+              <a:defRPr/>
+            </a:pPr>
+            <a:fld id="{5AB35431-DB28-6382-7A44-7A2D7C523D2C}" type="slidenum">
+              <a:rPr/>
+              <a:t/>
+            </a:fld>
+            <a:endParaRPr/>
+          </a:p>
+        </p:txBody>
+      </p:sp>
+    </p:spTree>
+  </p:cSld>
+  <p:clrMapOvr>
+    <a:masterClrMapping/>
+  </p:clrMapOvr>
+</p:notes>
+</file>
+
+<file path=ppt/notesSlides/notesSlide12.xml><?xml version="1.0" encoding="utf-8"?>
+<p:notes xmlns:a="http://schemas.openxmlformats.org/drawingml/2006/main" xmlns:r="http://schemas.openxmlformats.org/officeDocument/2006/relationships" xmlns:p="http://schemas.openxmlformats.org/presentationml/2006/main" xmlns:m="http://schemas.openxmlformats.org/officeDocument/2006/math" xmlns:w="http://schemas.openxmlformats.org/wordprocessingml/2006/main">
+  <p:cSld name="">
+    <p:spTree>
+      <p:nvGrpSpPr>
+        <p:cNvPr id="1" name=""/>
+        <p:cNvGrpSpPr/>
+        <p:nvPr/>
+      </p:nvGrpSpPr>
+      <p:grpSpPr bwMode="auto">
+        <a:xfrm>
+          <a:off x="0" y="0"/>
+          <a:ext cx="0" cy="0"/>
+          <a:chOff x="0" y="0"/>
+          <a:chExt cx="0" cy="0"/>
+        </a:xfrm>
+      </p:grpSpPr>
+      <p:sp>
+        <p:nvSpPr>
+          <p:cNvPr id="1685758631" name="Slide Image Placeholder 1"/>
+          <p:cNvSpPr>
+            <a:spLocks noChangeAspect="1" noGrp="1" noRot="1"/>
+          </p:cNvSpPr>
+          <p:nvPr>
+            <p:ph type="sldImg"/>
+          </p:nvPr>
+        </p:nvSpPr>
+        <p:spPr bwMode="auto"/>
+      </p:sp>
+      <p:sp>
+        <p:nvSpPr>
+          <p:cNvPr id="535814348" name="Notes Placeholder 2"/>
+          <p:cNvSpPr>
+            <a:spLocks noGrp="1"/>
+          </p:cNvSpPr>
+          <p:nvPr>
+            <p:ph type="body" idx="1"/>
+          </p:nvPr>
+        </p:nvSpPr>
+        <p:spPr bwMode="auto"/>
+        <p:txBody>
+          <a:bodyPr/>
+          <a:lstStyle/>
+          <a:p>
+            <a:pPr>
+              <a:defRPr/>
+            </a:pPr>
+            <a:endParaRPr/>
+          </a:p>
+        </p:txBody>
+      </p:sp>
+      <p:sp>
+        <p:nvSpPr>
+          <p:cNvPr id="1571419182" name="Slide Number Placeholder 3"/>
+          <p:cNvSpPr>
+            <a:spLocks noGrp="1"/>
+          </p:cNvSpPr>
+          <p:nvPr>
+            <p:ph type="sldNum" sz="quarter" idx="10"/>
+          </p:nvPr>
+        </p:nvSpPr>
+        <p:spPr bwMode="auto"/>
+        <p:txBody>
+          <a:bodyPr/>
+          <a:lstStyle/>
+          <a:p>
+            <a:pPr>
+              <a:defRPr/>
+            </a:pPr>
+            <a:fld id="{C334738E-1728-D436-A257-8C78F7D225E1}" type="slidenum">
+              <a:rPr/>
+              <a:t/>
+            </a:fld>
+            <a:endParaRPr/>
+          </a:p>
+        </p:txBody>
+      </p:sp>
+    </p:spTree>
+  </p:cSld>
+  <p:clrMapOvr>
+    <a:masterClrMapping/>
+  </p:clrMapOvr>
+</p:notes>
+</file>
+
+<file path=ppt/notesSlides/notesSlide13.xml><?xml version="1.0" encoding="utf-8"?>
+<p:notes xmlns:a="http://schemas.openxmlformats.org/drawingml/2006/main" xmlns:r="http://schemas.openxmlformats.org/officeDocument/2006/relationships" xmlns:p="http://schemas.openxmlformats.org/presentationml/2006/main" xmlns:m="http://schemas.openxmlformats.org/officeDocument/2006/math" xmlns:w="http://schemas.openxmlformats.org/wordprocessingml/2006/main">
+  <p:cSld name="">
+    <p:spTree>
+      <p:nvGrpSpPr>
+        <p:cNvPr id="1" name=""/>
+        <p:cNvGrpSpPr/>
+        <p:nvPr/>
+      </p:nvGrpSpPr>
+      <p:grpSpPr bwMode="auto">
+        <a:xfrm>
+          <a:off x="0" y="0"/>
+          <a:ext cx="0" cy="0"/>
+          <a:chOff x="0" y="0"/>
+          <a:chExt cx="0" cy="0"/>
+        </a:xfrm>
+      </p:grpSpPr>
+      <p:sp>
+        <p:nvSpPr>
+          <p:cNvPr id="1380716321" name="Slide Image Placeholder 1"/>
+          <p:cNvSpPr>
+            <a:spLocks noChangeAspect="1" noGrp="1" noRot="1"/>
+          </p:cNvSpPr>
+          <p:nvPr>
+            <p:ph type="sldImg"/>
+          </p:nvPr>
+        </p:nvSpPr>
+        <p:spPr bwMode="auto"/>
+      </p:sp>
+      <p:sp>
+        <p:nvSpPr>
+          <p:cNvPr id="1239951302" name="Notes Placeholder 2"/>
+          <p:cNvSpPr>
+            <a:spLocks noGrp="1"/>
+          </p:cNvSpPr>
+          <p:nvPr>
+            <p:ph type="body" idx="1"/>
+          </p:nvPr>
+        </p:nvSpPr>
+        <p:spPr bwMode="auto"/>
+        <p:txBody>
+          <a:bodyPr/>
+          <a:lstStyle/>
+          <a:p>
+            <a:pPr>
+              <a:defRPr/>
+            </a:pPr>
+            <a:endParaRPr/>
+          </a:p>
+        </p:txBody>
+      </p:sp>
+      <p:sp>
+        <p:nvSpPr>
+          <p:cNvPr id="562046501" name="Slide Number Placeholder 3"/>
+          <p:cNvSpPr>
+            <a:spLocks noGrp="1"/>
+          </p:cNvSpPr>
+          <p:nvPr>
+            <p:ph type="sldNum" sz="quarter" idx="10"/>
+          </p:nvPr>
+        </p:nvSpPr>
+        <p:spPr bwMode="auto"/>
+        <p:txBody>
+          <a:bodyPr/>
+          <a:lstStyle/>
+          <a:p>
+            <a:pPr>
+              <a:defRPr/>
+            </a:pPr>
+            <a:fld id="{4A8543F0-E80D-CF50-8DD8-4594DC4F0C2C}" type="slidenum">
+              <a:rPr/>
+              <a:t/>
+            </a:fld>
+            <a:endParaRPr/>
+          </a:p>
+        </p:txBody>
+      </p:sp>
+    </p:spTree>
+  </p:cSld>
+  <p:clrMapOvr>
+    <a:masterClrMapping/>
+  </p:clrMapOvr>
+</p:notes>
+</file>
+
+<file path=ppt/notesSlides/notesSlide14.xml><?xml version="1.0" encoding="utf-8"?>
+<p:notes xmlns:a="http://schemas.openxmlformats.org/drawingml/2006/main" xmlns:r="http://schemas.openxmlformats.org/officeDocument/2006/relationships" xmlns:p="http://schemas.openxmlformats.org/presentationml/2006/main" xmlns:m="http://schemas.openxmlformats.org/officeDocument/2006/math" xmlns:w="http://schemas.openxmlformats.org/wordprocessingml/2006/main">
+  <p:cSld name="">
+    <p:spTree>
+      <p:nvGrpSpPr>
+        <p:cNvPr id="1" name=""/>
+        <p:cNvGrpSpPr/>
+        <p:nvPr/>
+      </p:nvGrpSpPr>
+      <p:grpSpPr bwMode="auto">
+        <a:xfrm>
+          <a:off x="0" y="0"/>
+          <a:ext cx="0" cy="0"/>
+          <a:chOff x="0" y="0"/>
+          <a:chExt cx="0" cy="0"/>
+        </a:xfrm>
+      </p:grpSpPr>
+      <p:sp>
+        <p:nvSpPr>
+          <p:cNvPr id="796716451" name="Slide Image Placeholder 1"/>
+          <p:cNvSpPr>
+            <a:spLocks noChangeAspect="1" noGrp="1" noRot="1"/>
+          </p:cNvSpPr>
+          <p:nvPr>
+            <p:ph type="sldImg"/>
+          </p:nvPr>
+        </p:nvSpPr>
+        <p:spPr bwMode="auto"/>
+      </p:sp>
+      <p:sp>
+        <p:nvSpPr>
+          <p:cNvPr id="407123078" name="Notes Placeholder 2"/>
+          <p:cNvSpPr>
+            <a:spLocks noGrp="1"/>
+          </p:cNvSpPr>
+          <p:nvPr>
+            <p:ph type="body" idx="1"/>
+          </p:nvPr>
+        </p:nvSpPr>
+        <p:spPr bwMode="auto"/>
+        <p:txBody>
+          <a:bodyPr/>
+          <a:lstStyle/>
+          <a:p>
+            <a:pPr>
+              <a:defRPr/>
+            </a:pPr>
+            <a:endParaRPr/>
+          </a:p>
+        </p:txBody>
+      </p:sp>
+      <p:sp>
+        <p:nvSpPr>
+          <p:cNvPr id="1908487578" name="Slide Number Placeholder 3"/>
+          <p:cNvSpPr>
+            <a:spLocks noGrp="1"/>
+          </p:cNvSpPr>
+          <p:nvPr>
+            <p:ph type="sldNum" sz="quarter" idx="10"/>
+          </p:nvPr>
+        </p:nvSpPr>
+        <p:spPr bwMode="auto"/>
+        <p:txBody>
+          <a:bodyPr/>
+          <a:lstStyle/>
+          <a:p>
+            <a:pPr>
+              <a:defRPr/>
+            </a:pPr>
+            <a:fld id="{281D9171-18E3-9597-6761-CD17260A051E}" type="slidenum">
+              <a:rPr/>
+              <a:t/>
+            </a:fld>
+            <a:endParaRPr/>
+          </a:p>
+        </p:txBody>
+      </p:sp>
+    </p:spTree>
+  </p:cSld>
+  <p:clrMapOvr>
+    <a:masterClrMapping/>
+  </p:clrMapOvr>
+</p:notes>
+</file>
+
+<file path=ppt/notesSlides/notesSlide15.xml><?xml version="1.0" encoding="utf-8"?>
+<p:notes xmlns:a="http://schemas.openxmlformats.org/drawingml/2006/main" xmlns:r="http://schemas.openxmlformats.org/officeDocument/2006/relationships" xmlns:p="http://schemas.openxmlformats.org/presentationml/2006/main" xmlns:m="http://schemas.openxmlformats.org/officeDocument/2006/math" xmlns:w="http://schemas.openxmlformats.org/wordprocessingml/2006/main">
+  <p:cSld name="">
+    <p:spTree>
+      <p:nvGrpSpPr>
+        <p:cNvPr id="1" name=""/>
+        <p:cNvGrpSpPr/>
+        <p:nvPr/>
+      </p:nvGrpSpPr>
+      <p:grpSpPr bwMode="auto">
+        <a:xfrm>
+          <a:off x="0" y="0"/>
+          <a:ext cx="0" cy="0"/>
+          <a:chOff x="0" y="0"/>
+          <a:chExt cx="0" cy="0"/>
+        </a:xfrm>
+      </p:grpSpPr>
+      <p:sp>
+        <p:nvSpPr>
+          <p:cNvPr id="1022939616" name="Slide Image Placeholder 1"/>
+          <p:cNvSpPr>
+            <a:spLocks noChangeAspect="1" noGrp="1" noRot="1"/>
+          </p:cNvSpPr>
+          <p:nvPr>
+            <p:ph type="sldImg"/>
+          </p:nvPr>
+        </p:nvSpPr>
+        <p:spPr bwMode="auto"/>
+      </p:sp>
+      <p:sp>
+        <p:nvSpPr>
+          <p:cNvPr id="1856609657" name="Notes Placeholder 2"/>
+          <p:cNvSpPr>
+            <a:spLocks noGrp="1"/>
+          </p:cNvSpPr>
+          <p:nvPr>
+            <p:ph type="body" idx="1"/>
+          </p:nvPr>
+        </p:nvSpPr>
+        <p:spPr bwMode="auto"/>
+        <p:txBody>
+          <a:bodyPr/>
+          <a:lstStyle/>
+          <a:p>
+            <a:pPr>
+              <a:defRPr/>
+            </a:pPr>
+            <a:endParaRPr/>
+          </a:p>
+        </p:txBody>
+      </p:sp>
+      <p:sp>
+        <p:nvSpPr>
+          <p:cNvPr id="1225839336" name="Slide Number Placeholder 3"/>
+          <p:cNvSpPr>
+            <a:spLocks noGrp="1"/>
+          </p:cNvSpPr>
+          <p:nvPr>
+            <p:ph type="sldNum" sz="quarter" idx="10"/>
+          </p:nvPr>
+        </p:nvSpPr>
+        <p:spPr bwMode="auto"/>
+        <p:txBody>
+          <a:bodyPr/>
+          <a:lstStyle/>
+          <a:p>
+            <a:pPr>
+              <a:defRPr/>
+            </a:pPr>
+            <a:fld id="{05B492FB-7BD6-7466-6903-CD9B020B3F77}" type="slidenum">
+              <a:rPr/>
+              <a:t/>
+            </a:fld>
+            <a:endParaRPr/>
+          </a:p>
+        </p:txBody>
+      </p:sp>
+    </p:spTree>
+  </p:cSld>
+  <p:clrMapOvr>
+    <a:masterClrMapping/>
+  </p:clrMapOvr>
+</p:notes>
+</file>
+
+<file path=ppt/notesSlides/notesSlide16.xml><?xml version="1.0" encoding="utf-8"?>
+<p:notes xmlns:a="http://schemas.openxmlformats.org/drawingml/2006/main" xmlns:r="http://schemas.openxmlformats.org/officeDocument/2006/relationships" xmlns:p="http://schemas.openxmlformats.org/presentationml/2006/main" xmlns:m="http://schemas.openxmlformats.org/officeDocument/2006/math" xmlns:w="http://schemas.openxmlformats.org/wordprocessingml/2006/main">
+  <p:cSld name="">
+    <p:spTree>
+      <p:nvGrpSpPr>
+        <p:cNvPr id="1" name=""/>
+        <p:cNvGrpSpPr/>
+        <p:nvPr/>
+      </p:nvGrpSpPr>
+      <p:grpSpPr bwMode="auto">
+        <a:xfrm>
+          <a:off x="0" y="0"/>
+          <a:ext cx="0" cy="0"/>
+          <a:chOff x="0" y="0"/>
+          <a:chExt cx="0" cy="0"/>
+        </a:xfrm>
+      </p:grpSpPr>
+      <p:sp>
+        <p:nvSpPr>
+          <p:cNvPr id="94073891" name="Slide Image Placeholder 1"/>
+          <p:cNvSpPr>
+            <a:spLocks noChangeAspect="1" noGrp="1" noRot="1"/>
+          </p:cNvSpPr>
+          <p:nvPr>
+            <p:ph type="sldImg"/>
+          </p:nvPr>
+        </p:nvSpPr>
+        <p:spPr bwMode="auto"/>
+      </p:sp>
+      <p:sp>
+        <p:nvSpPr>
+          <p:cNvPr id="358536159" name="Notes Placeholder 2"/>
+          <p:cNvSpPr>
+            <a:spLocks noGrp="1"/>
+          </p:cNvSpPr>
+          <p:nvPr>
+            <p:ph type="body" idx="1"/>
+          </p:nvPr>
+        </p:nvSpPr>
+        <p:spPr bwMode="auto"/>
+        <p:txBody>
+          <a:bodyPr/>
+          <a:lstStyle/>
+          <a:p>
+            <a:pPr>
+              <a:defRPr/>
+            </a:pPr>
+            <a:endParaRPr/>
+          </a:p>
+        </p:txBody>
+      </p:sp>
+      <p:sp>
+        <p:nvSpPr>
+          <p:cNvPr id="742444864" name="Slide Number Placeholder 3"/>
+          <p:cNvSpPr>
+            <a:spLocks noGrp="1"/>
+          </p:cNvSpPr>
+          <p:nvPr>
+            <p:ph type="sldNum" sz="quarter" idx="10"/>
+          </p:nvPr>
+        </p:nvSpPr>
+        <p:spPr bwMode="auto"/>
+        <p:txBody>
+          <a:bodyPr/>
+          <a:lstStyle/>
+          <a:p>
+            <a:pPr>
+              <a:defRPr/>
+            </a:pPr>
+            <a:fld id="{6345C6A7-AEE4-C883-DEA2-3985C4FA823C}" type="slidenum">
+              <a:rPr/>
+              <a:t/>
+            </a:fld>
+            <a:endParaRPr/>
           </a:p>
         </p:txBody>
       </p:sp>
@@ -555,7 +1160,7 @@
       </p:grpSpPr>
       <p:sp>
         <p:nvSpPr>
-          <p:cNvPr id="664456361" name="PlaceHolder 1"/>
+          <p:cNvPr id="857966831" name="PlaceHolder 1"/>
           <p:cNvSpPr>
             <a:spLocks noGrp="1"/>
           </p:cNvSpPr>
@@ -578,7 +1183,7 @@
       </p:sp>
       <p:sp>
         <p:nvSpPr>
-          <p:cNvPr id="1425494050" name="PlaceHolder 2"/>
+          <p:cNvPr id="1826028892" name="PlaceHolder 2"/>
           <p:cNvSpPr>
             <a:spLocks noGrp="1"/>
           </p:cNvSpPr>
@@ -619,7 +1224,7 @@
       </p:sp>
       <p:sp>
         <p:nvSpPr>
-          <p:cNvPr id="2064353035" name="PlaceHolder 3"/>
+          <p:cNvPr id="1203886361" name="PlaceHolder 3"/>
           <p:cNvSpPr>
             <a:spLocks noGrp="1"/>
           </p:cNvSpPr>
@@ -685,7 +1290,7 @@
       </p:grpSpPr>
       <p:sp>
         <p:nvSpPr>
-          <p:cNvPr id="701123626" name="PlaceHolder 1"/>
+          <p:cNvPr id="1173815340" name="PlaceHolder 1"/>
           <p:cNvSpPr>
             <a:spLocks noGrp="1"/>
           </p:cNvSpPr>
@@ -708,7 +1313,7 @@
       </p:sp>
       <p:sp>
         <p:nvSpPr>
-          <p:cNvPr id="109929119" name="PlaceHolder 2"/>
+          <p:cNvPr id="733610254" name="PlaceHolder 2"/>
           <p:cNvSpPr>
             <a:spLocks noGrp="1"/>
           </p:cNvSpPr>
@@ -749,7 +1354,7 @@
       </p:sp>
       <p:sp>
         <p:nvSpPr>
-          <p:cNvPr id="1368642643" name="PlaceHolder 3"/>
+          <p:cNvPr id="1653954352" name="PlaceHolder 3"/>
           <p:cNvSpPr>
             <a:spLocks noGrp="1"/>
           </p:cNvSpPr>
@@ -815,7 +1420,7 @@
       </p:grpSpPr>
       <p:sp>
         <p:nvSpPr>
-          <p:cNvPr id="711039023" name="PlaceHolder 1"/>
+          <p:cNvPr id="580864892" name="PlaceHolder 1"/>
           <p:cNvSpPr>
             <a:spLocks noGrp="1"/>
           </p:cNvSpPr>
@@ -838,7 +1443,7 @@
       </p:sp>
       <p:sp>
         <p:nvSpPr>
-          <p:cNvPr id="53269625" name="PlaceHolder 2"/>
+          <p:cNvPr id="181562846" name="PlaceHolder 2"/>
           <p:cNvSpPr>
             <a:spLocks noGrp="1"/>
           </p:cNvSpPr>
@@ -879,7 +1484,7 @@
       </p:sp>
       <p:sp>
         <p:nvSpPr>
-          <p:cNvPr id="841780834" name="PlaceHolder 3"/>
+          <p:cNvPr id="711361814" name="PlaceHolder 3"/>
           <p:cNvSpPr>
             <a:spLocks noGrp="1"/>
           </p:cNvSpPr>
@@ -945,7 +1550,7 @@
       </p:grpSpPr>
       <p:sp>
         <p:nvSpPr>
-          <p:cNvPr id="2" name="Slide Image Placeholder 1"/>
+          <p:cNvPr id="1216563471" name="Slide Image Placeholder 1"/>
           <p:cNvSpPr>
             <a:spLocks noChangeAspect="1" noGrp="1" noRot="1"/>
           </p:cNvSpPr>
@@ -957,7 +1562,7 @@
       </p:sp>
       <p:sp>
         <p:nvSpPr>
-          <p:cNvPr id="3" name="Notes Placeholder 2"/>
+          <p:cNvPr id="638736036" name="Notes Placeholder 2"/>
           <p:cNvSpPr>
             <a:spLocks noGrp="1"/>
           </p:cNvSpPr>
@@ -979,7 +1584,7 @@
       </p:sp>
       <p:sp>
         <p:nvSpPr>
-          <p:cNvPr id="4" name="Slide Number Placeholder 3"/>
+          <p:cNvPr id="1219191562" name="Slide Number Placeholder 3"/>
           <p:cNvSpPr>
             <a:spLocks noGrp="1"/>
           </p:cNvSpPr>
@@ -1030,7 +1635,7 @@
       </p:grpSpPr>
       <p:sp>
         <p:nvSpPr>
-          <p:cNvPr id="2" name="Slide Image Placeholder 1"/>
+          <p:cNvPr id="1496520517" name="Slide Image Placeholder 1"/>
           <p:cNvSpPr>
             <a:spLocks noChangeAspect="1" noGrp="1" noRot="1"/>
           </p:cNvSpPr>
@@ -1042,7 +1647,7 @@
       </p:sp>
       <p:sp>
         <p:nvSpPr>
-          <p:cNvPr id="3" name="Notes Placeholder 2"/>
+          <p:cNvPr id="79451300" name="Notes Placeholder 2"/>
           <p:cNvSpPr>
             <a:spLocks noGrp="1"/>
           </p:cNvSpPr>
@@ -1064,7 +1669,7 @@
       </p:sp>
       <p:sp>
         <p:nvSpPr>
-          <p:cNvPr id="4" name="Slide Number Placeholder 3"/>
+          <p:cNvPr id="575236655" name="Slide Number Placeholder 3"/>
           <p:cNvSpPr>
             <a:spLocks noGrp="1"/>
           </p:cNvSpPr>
@@ -1081,6 +1686,261 @@
               <a:defRPr/>
             </a:pPr>
             <a:fld id="{2F821983-05AB-F7C6-EF69-69EFE3F9CFF3}" type="slidenum">
+              <a:rPr/>
+              <a:t/>
+            </a:fld>
+            <a:endParaRPr/>
+          </a:p>
+        </p:txBody>
+      </p:sp>
+    </p:spTree>
+  </p:cSld>
+  <p:clrMapOvr>
+    <a:masterClrMapping/>
+  </p:clrMapOvr>
+</p:notes>
+</file>
+
+<file path=ppt/notesSlides/notesSlide7.xml><?xml version="1.0" encoding="utf-8"?>
+<p:notes xmlns:a="http://schemas.openxmlformats.org/drawingml/2006/main" xmlns:r="http://schemas.openxmlformats.org/officeDocument/2006/relationships" xmlns:p="http://schemas.openxmlformats.org/presentationml/2006/main" xmlns:m="http://schemas.openxmlformats.org/officeDocument/2006/math" xmlns:w="http://schemas.openxmlformats.org/wordprocessingml/2006/main">
+  <p:cSld name="">
+    <p:spTree>
+      <p:nvGrpSpPr>
+        <p:cNvPr id="1" name=""/>
+        <p:cNvGrpSpPr/>
+        <p:nvPr/>
+      </p:nvGrpSpPr>
+      <p:grpSpPr bwMode="auto">
+        <a:xfrm>
+          <a:off x="0" y="0"/>
+          <a:ext cx="0" cy="0"/>
+          <a:chOff x="0" y="0"/>
+          <a:chExt cx="0" cy="0"/>
+        </a:xfrm>
+      </p:grpSpPr>
+      <p:sp>
+        <p:nvSpPr>
+          <p:cNvPr id="1806189844" name="Slide Image Placeholder 1"/>
+          <p:cNvSpPr>
+            <a:spLocks noChangeAspect="1" noGrp="1" noRot="1"/>
+          </p:cNvSpPr>
+          <p:nvPr>
+            <p:ph type="sldImg"/>
+          </p:nvPr>
+        </p:nvSpPr>
+        <p:spPr bwMode="auto"/>
+      </p:sp>
+      <p:sp>
+        <p:nvSpPr>
+          <p:cNvPr id="1730988393" name="Notes Placeholder 2"/>
+          <p:cNvSpPr>
+            <a:spLocks noGrp="1"/>
+          </p:cNvSpPr>
+          <p:nvPr>
+            <p:ph type="body" idx="1"/>
+          </p:nvPr>
+        </p:nvSpPr>
+        <p:spPr bwMode="auto"/>
+        <p:txBody>
+          <a:bodyPr/>
+          <a:lstStyle/>
+          <a:p>
+            <a:pPr>
+              <a:defRPr/>
+            </a:pPr>
+            <a:endParaRPr/>
+          </a:p>
+        </p:txBody>
+      </p:sp>
+      <p:sp>
+        <p:nvSpPr>
+          <p:cNvPr id="1508941630" name="Slide Number Placeholder 3"/>
+          <p:cNvSpPr>
+            <a:spLocks noGrp="1"/>
+          </p:cNvSpPr>
+          <p:nvPr>
+            <p:ph type="sldNum" sz="quarter" idx="10"/>
+          </p:nvPr>
+        </p:nvSpPr>
+        <p:spPr bwMode="auto"/>
+        <p:txBody>
+          <a:bodyPr/>
+          <a:lstStyle/>
+          <a:p>
+            <a:pPr>
+              <a:defRPr/>
+            </a:pPr>
+            <a:fld id="{5118051D-DC67-F740-534A-27A3C64BF1D2}" type="slidenum">
+              <a:rPr/>
+              <a:t/>
+            </a:fld>
+            <a:endParaRPr/>
+          </a:p>
+        </p:txBody>
+      </p:sp>
+    </p:spTree>
+  </p:cSld>
+  <p:clrMapOvr>
+    <a:masterClrMapping/>
+  </p:clrMapOvr>
+</p:notes>
+</file>
+
+<file path=ppt/notesSlides/notesSlide8.xml><?xml version="1.0" encoding="utf-8"?>
+<p:notes xmlns:a="http://schemas.openxmlformats.org/drawingml/2006/main" xmlns:r="http://schemas.openxmlformats.org/officeDocument/2006/relationships" xmlns:p="http://schemas.openxmlformats.org/presentationml/2006/main" xmlns:m="http://schemas.openxmlformats.org/officeDocument/2006/math" xmlns:w="http://schemas.openxmlformats.org/wordprocessingml/2006/main">
+  <p:cSld name="">
+    <p:spTree>
+      <p:nvGrpSpPr>
+        <p:cNvPr id="1" name=""/>
+        <p:cNvGrpSpPr/>
+        <p:nvPr/>
+      </p:nvGrpSpPr>
+      <p:grpSpPr bwMode="auto">
+        <a:xfrm>
+          <a:off x="0" y="0"/>
+          <a:ext cx="0" cy="0"/>
+          <a:chOff x="0" y="0"/>
+          <a:chExt cx="0" cy="0"/>
+        </a:xfrm>
+      </p:grpSpPr>
+      <p:sp>
+        <p:nvSpPr>
+          <p:cNvPr id="919979120" name="Slide Image Placeholder 1"/>
+          <p:cNvSpPr>
+            <a:spLocks noChangeAspect="1" noGrp="1" noRot="1"/>
+          </p:cNvSpPr>
+          <p:nvPr>
+            <p:ph type="sldImg"/>
+          </p:nvPr>
+        </p:nvSpPr>
+        <p:spPr bwMode="auto"/>
+      </p:sp>
+      <p:sp>
+        <p:nvSpPr>
+          <p:cNvPr id="624903324" name="Notes Placeholder 2"/>
+          <p:cNvSpPr>
+            <a:spLocks noGrp="1"/>
+          </p:cNvSpPr>
+          <p:nvPr>
+            <p:ph type="body" idx="1"/>
+          </p:nvPr>
+        </p:nvSpPr>
+        <p:spPr bwMode="auto"/>
+        <p:txBody>
+          <a:bodyPr/>
+          <a:lstStyle/>
+          <a:p>
+            <a:pPr>
+              <a:defRPr/>
+            </a:pPr>
+            <a:endParaRPr/>
+          </a:p>
+        </p:txBody>
+      </p:sp>
+      <p:sp>
+        <p:nvSpPr>
+          <p:cNvPr id="1708904986" name="Slide Number Placeholder 3"/>
+          <p:cNvSpPr>
+            <a:spLocks noGrp="1"/>
+          </p:cNvSpPr>
+          <p:nvPr>
+            <p:ph type="sldNum" sz="quarter" idx="10"/>
+          </p:nvPr>
+        </p:nvSpPr>
+        <p:spPr bwMode="auto"/>
+        <p:txBody>
+          <a:bodyPr/>
+          <a:lstStyle/>
+          <a:p>
+            <a:pPr>
+              <a:defRPr/>
+            </a:pPr>
+            <a:fld id="{662A5A16-74AB-7808-36CA-922CADF1650C}" type="slidenum">
+              <a:rPr/>
+              <a:t/>
+            </a:fld>
+            <a:endParaRPr/>
+          </a:p>
+        </p:txBody>
+      </p:sp>
+    </p:spTree>
+  </p:cSld>
+  <p:clrMapOvr>
+    <a:masterClrMapping/>
+  </p:clrMapOvr>
+</p:notes>
+</file>
+
+<file path=ppt/notesSlides/notesSlide9.xml><?xml version="1.0" encoding="utf-8"?>
+<p:notes xmlns:a="http://schemas.openxmlformats.org/drawingml/2006/main" xmlns:r="http://schemas.openxmlformats.org/officeDocument/2006/relationships" xmlns:p="http://schemas.openxmlformats.org/presentationml/2006/main" xmlns:m="http://schemas.openxmlformats.org/officeDocument/2006/math" xmlns:w="http://schemas.openxmlformats.org/wordprocessingml/2006/main">
+  <p:cSld name="">
+    <p:spTree>
+      <p:nvGrpSpPr>
+        <p:cNvPr id="1" name=""/>
+        <p:cNvGrpSpPr/>
+        <p:nvPr/>
+      </p:nvGrpSpPr>
+      <p:grpSpPr bwMode="auto">
+        <a:xfrm>
+          <a:off x="0" y="0"/>
+          <a:ext cx="0" cy="0"/>
+          <a:chOff x="0" y="0"/>
+          <a:chExt cx="0" cy="0"/>
+        </a:xfrm>
+      </p:grpSpPr>
+      <p:sp>
+        <p:nvSpPr>
+          <p:cNvPr id="971605200" name="Slide Image Placeholder 1"/>
+          <p:cNvSpPr>
+            <a:spLocks noChangeAspect="1" noGrp="1" noRot="1"/>
+          </p:cNvSpPr>
+          <p:nvPr>
+            <p:ph type="sldImg"/>
+          </p:nvPr>
+        </p:nvSpPr>
+        <p:spPr bwMode="auto"/>
+      </p:sp>
+      <p:sp>
+        <p:nvSpPr>
+          <p:cNvPr id="1413729684" name="Notes Placeholder 2"/>
+          <p:cNvSpPr>
+            <a:spLocks noGrp="1"/>
+          </p:cNvSpPr>
+          <p:nvPr>
+            <p:ph type="body" idx="1"/>
+          </p:nvPr>
+        </p:nvSpPr>
+        <p:spPr bwMode="auto"/>
+        <p:txBody>
+          <a:bodyPr/>
+          <a:lstStyle/>
+          <a:p>
+            <a:pPr>
+              <a:defRPr/>
+            </a:pPr>
+            <a:endParaRPr/>
+          </a:p>
+        </p:txBody>
+      </p:sp>
+      <p:sp>
+        <p:nvSpPr>
+          <p:cNvPr id="112818882" name="Slide Number Placeholder 3"/>
+          <p:cNvSpPr>
+            <a:spLocks noGrp="1"/>
+          </p:cNvSpPr>
+          <p:nvPr>
+            <p:ph type="sldNum" sz="quarter" idx="10"/>
+          </p:nvPr>
+        </p:nvSpPr>
+        <p:spPr bwMode="auto"/>
+        <p:txBody>
+          <a:bodyPr/>
+          <a:lstStyle/>
+          <a:p>
+            <a:pPr>
+              <a:defRPr/>
+            </a:pPr>
+            <a:fld id="{182411F9-A4A4-FC81-673B-AA4CD8679BE7}" type="slidenum">
               <a:rPr/>
               <a:t/>
             </a:fld>
@@ -1122,7 +1982,7 @@
       </p:grpSpPr>
       <p:sp>
         <p:nvSpPr>
-          <p:cNvPr id="363117676" name="PlaceHolder 1"/>
+          <p:cNvPr id="1411753055" name="PlaceHolder 1"/>
           <p:cNvSpPr>
             <a:spLocks noGrp="1"/>
           </p:cNvSpPr>
@@ -1191,7 +2051,7 @@
       </p:sp>
       <p:sp>
         <p:nvSpPr>
-          <p:cNvPr id="703133120" name="PlaceHolder 2"/>
+          <p:cNvPr id="703011089" name="PlaceHolder 2"/>
           <p:cNvSpPr>
             <a:spLocks noGrp="1"/>
           </p:cNvSpPr>
@@ -1264,7 +2124,7 @@
       </p:sp>
       <p:sp>
         <p:nvSpPr>
-          <p:cNvPr id="691705878" name="PlaceHolder 3"/>
+          <p:cNvPr id="120025334" name="PlaceHolder 3"/>
           <p:cNvSpPr>
             <a:spLocks noGrp="1"/>
           </p:cNvSpPr>
@@ -1325,7 +2185,7 @@
       </p:sp>
       <p:sp>
         <p:nvSpPr>
-          <p:cNvPr id="920763694" name="PlaceHolder 4"/>
+          <p:cNvPr id="1386525875" name="PlaceHolder 4"/>
           <p:cNvSpPr>
             <a:spLocks noGrp="1"/>
           </p:cNvSpPr>
@@ -1398,7 +2258,7 @@
       </p:sp>
       <p:sp>
         <p:nvSpPr>
-          <p:cNvPr id="391605409" name="PlaceHolder 5"/>
+          <p:cNvPr id="480479244" name="PlaceHolder 5"/>
           <p:cNvSpPr>
             <a:spLocks noGrp="1"/>
           </p:cNvSpPr>
@@ -1823,7 +2683,7 @@
       </p:grpSpPr>
       <p:sp>
         <p:nvSpPr>
-          <p:cNvPr id="804430053" name="PlaceHolder 1"/>
+          <p:cNvPr id="1629380632" name="PlaceHolder 1"/>
           <p:cNvSpPr>
             <a:spLocks noGrp="1"/>
           </p:cNvSpPr>
@@ -1892,7 +2752,7 @@
       </p:sp>
       <p:sp>
         <p:nvSpPr>
-          <p:cNvPr id="1944465865" name="PlaceHolder 2"/>
+          <p:cNvPr id="990146294" name="PlaceHolder 2"/>
           <p:cNvSpPr>
             <a:spLocks noGrp="1"/>
           </p:cNvSpPr>
@@ -2183,7 +3043,7 @@
       </p:sp>
       <p:sp>
         <p:nvSpPr>
-          <p:cNvPr id="393126950" name="PlaceHolder 3"/>
+          <p:cNvPr id="1648571289" name="PlaceHolder 3"/>
           <p:cNvSpPr>
             <a:spLocks noGrp="1"/>
           </p:cNvSpPr>
@@ -2264,7 +3124,7 @@
       </p:sp>
       <p:sp>
         <p:nvSpPr>
-          <p:cNvPr id="2053596681" name="PlaceHolder 4"/>
+          <p:cNvPr id="1792478586" name="PlaceHolder 4"/>
           <p:cNvSpPr>
             <a:spLocks noGrp="1"/>
           </p:cNvSpPr>
@@ -2337,7 +3197,7 @@
       </p:sp>
       <p:sp>
         <p:nvSpPr>
-          <p:cNvPr id="512309032" name="PlaceHolder 5"/>
+          <p:cNvPr id="1128361170" name="PlaceHolder 5"/>
           <p:cNvSpPr>
             <a:spLocks noGrp="1"/>
           </p:cNvSpPr>
@@ -2398,7 +3258,7 @@
       </p:sp>
       <p:sp>
         <p:nvSpPr>
-          <p:cNvPr id="1842481286" name="PlaceHolder 6"/>
+          <p:cNvPr id="2005609684" name="PlaceHolder 6"/>
           <p:cNvSpPr>
             <a:spLocks noGrp="1"/>
           </p:cNvSpPr>
@@ -2503,7 +3363,7 @@
       </p:grpSpPr>
       <p:sp>
         <p:nvSpPr>
-          <p:cNvPr id="440905788" name="PlaceHolder 1"/>
+          <p:cNvPr id="1766249290" name="PlaceHolder 1"/>
           <p:cNvSpPr>
             <a:spLocks noGrp="1"/>
           </p:cNvSpPr>
@@ -2572,7 +3432,7 @@
       </p:sp>
       <p:sp>
         <p:nvSpPr>
-          <p:cNvPr id="1311788162" name="PlaceHolder 2"/>
+          <p:cNvPr id="604431229" name="PlaceHolder 2"/>
           <p:cNvSpPr>
             <a:spLocks noGrp="1"/>
           </p:cNvSpPr>
@@ -2647,7 +3507,7 @@
       </p:sp>
       <p:sp>
         <p:nvSpPr>
-          <p:cNvPr id="790365473" name="PlaceHolder 3"/>
+          <p:cNvPr id="1964893234" name="PlaceHolder 3"/>
           <p:cNvSpPr>
             <a:spLocks noGrp="1"/>
           </p:cNvSpPr>
@@ -2728,7 +3588,7 @@
       </p:sp>
       <p:sp>
         <p:nvSpPr>
-          <p:cNvPr id="107168517" name="PlaceHolder 4"/>
+          <p:cNvPr id="863519999" name="PlaceHolder 4"/>
           <p:cNvSpPr>
             <a:spLocks noGrp="1"/>
           </p:cNvSpPr>
@@ -2801,7 +3661,7 @@
       </p:sp>
       <p:sp>
         <p:nvSpPr>
-          <p:cNvPr id="1851282986" name="PlaceHolder 5"/>
+          <p:cNvPr id="1864092733" name="PlaceHolder 5"/>
           <p:cNvSpPr>
             <a:spLocks noGrp="1"/>
           </p:cNvSpPr>
@@ -2862,7 +3722,7 @@
       </p:sp>
       <p:sp>
         <p:nvSpPr>
-          <p:cNvPr id="654637862" name="PlaceHolder 6"/>
+          <p:cNvPr id="194626513" name="PlaceHolder 6"/>
           <p:cNvSpPr>
             <a:spLocks noGrp="1"/>
           </p:cNvSpPr>
@@ -2967,7 +3827,7 @@
       </p:grpSpPr>
       <p:sp>
         <p:nvSpPr>
-          <p:cNvPr id="1584126007" name="PlaceHolder 1"/>
+          <p:cNvPr id="1151078240" name="PlaceHolder 1"/>
           <p:cNvSpPr>
             <a:spLocks noGrp="1"/>
           </p:cNvSpPr>
@@ -3036,7 +3896,7 @@
       </p:sp>
       <p:sp>
         <p:nvSpPr>
-          <p:cNvPr id="1449216983" name="PlaceHolder 2"/>
+          <p:cNvPr id="706567931" name="PlaceHolder 2"/>
           <p:cNvSpPr>
             <a:spLocks noGrp="1"/>
           </p:cNvSpPr>
@@ -3327,7 +4187,7 @@
       </p:sp>
       <p:sp>
         <p:nvSpPr>
-          <p:cNvPr id="1298845483" name="PlaceHolder 3"/>
+          <p:cNvPr id="1018383484" name="PlaceHolder 3"/>
           <p:cNvSpPr>
             <a:spLocks noGrp="1"/>
           </p:cNvSpPr>
@@ -3400,7 +4260,7 @@
       </p:sp>
       <p:sp>
         <p:nvSpPr>
-          <p:cNvPr id="2116260608" name="PlaceHolder 4"/>
+          <p:cNvPr id="958028248" name="PlaceHolder 4"/>
           <p:cNvSpPr>
             <a:spLocks noGrp="1"/>
           </p:cNvSpPr>
@@ -3461,7 +4321,7 @@
       </p:sp>
       <p:sp>
         <p:nvSpPr>
-          <p:cNvPr id="157519908" name="PlaceHolder 5"/>
+          <p:cNvPr id="1207064319" name="PlaceHolder 5"/>
           <p:cNvSpPr>
             <a:spLocks noGrp="1"/>
           </p:cNvSpPr>
@@ -3566,7 +4426,7 @@
       </p:grpSpPr>
       <p:sp>
         <p:nvSpPr>
-          <p:cNvPr id="2145676932" name="PlaceHolder 1"/>
+          <p:cNvPr id="908150541" name="PlaceHolder 1"/>
           <p:cNvSpPr>
             <a:spLocks noGrp="1"/>
           </p:cNvSpPr>
@@ -3635,7 +4495,7 @@
       </p:sp>
       <p:sp>
         <p:nvSpPr>
-          <p:cNvPr id="965801683" name="PlaceHolder 2"/>
+          <p:cNvPr id="280660252" name="PlaceHolder 2"/>
           <p:cNvSpPr>
             <a:spLocks noGrp="1"/>
           </p:cNvSpPr>
@@ -3926,7 +4786,7 @@
       </p:sp>
       <p:sp>
         <p:nvSpPr>
-          <p:cNvPr id="183102972" name="PlaceHolder 3"/>
+          <p:cNvPr id="1000899208" name="PlaceHolder 3"/>
           <p:cNvSpPr>
             <a:spLocks noGrp="1"/>
           </p:cNvSpPr>
@@ -3999,7 +4859,7 @@
       </p:sp>
       <p:sp>
         <p:nvSpPr>
-          <p:cNvPr id="674327111" name="PlaceHolder 4"/>
+          <p:cNvPr id="784952928" name="PlaceHolder 4"/>
           <p:cNvSpPr>
             <a:spLocks noGrp="1"/>
           </p:cNvSpPr>
@@ -4060,7 +4920,7 @@
       </p:sp>
       <p:sp>
         <p:nvSpPr>
-          <p:cNvPr id="426161506" name="PlaceHolder 5"/>
+          <p:cNvPr id="1194945079" name="PlaceHolder 5"/>
           <p:cNvSpPr>
             <a:spLocks noGrp="1"/>
           </p:cNvSpPr>
@@ -4165,7 +5025,7 @@
       </p:grpSpPr>
       <p:sp>
         <p:nvSpPr>
-          <p:cNvPr id="320777856" name="PlaceHolder 1"/>
+          <p:cNvPr id="1569614735" name="PlaceHolder 1"/>
           <p:cNvSpPr>
             <a:spLocks noGrp="1"/>
           </p:cNvSpPr>
@@ -4196,12 +5056,13 @@
                 <a:spcPct val="90000"/>
               </a:lnSpc>
               <a:buNone/>
-              <a:defRPr lang="pt-BR" sz="4400" b="0" u="none" strike="noStrike">
-                <a:solidFill>
-                  <a:schemeClr val="dk1"/>
-                </a:solidFill>
-                <a:latin typeface="Arial"/>
-                <a:ea typeface="Arial"/>
+              <a:defRPr lang="pt-BR" sz="100" b="1" u="none" strike="noStrike">
+                <a:solidFill>
+                  <a:schemeClr val="dk1"/>
+                </a:solidFill>
+                <a:latin typeface="Arial"/>
+                <a:ea typeface="Arial"/>
+                <a:cs typeface="Arial"/>
               </a:defRPr>
             </a:lvl1pPr>
           </a:lstStyle>
@@ -4221,7 +5082,7 @@
                 <a:latin typeface="Arial"/>
                 <a:ea typeface="Arial"/>
               </a:rPr>
-              <a:t>Clique para editar o estilo</a:t>
+              <a:t>Cliqasdasdue para editar o estilo</a:t>
             </a:r>
             <a:endParaRPr lang="pt-BR" sz="4400" b="0" u="none" strike="noStrike">
               <a:solidFill>
@@ -4234,7 +5095,7 @@
       </p:sp>
       <p:sp>
         <p:nvSpPr>
-          <p:cNvPr id="1447155070" name="PlaceHolder 2"/>
+          <p:cNvPr id="1089865774" name="PlaceHolder 2"/>
           <p:cNvSpPr>
             <a:spLocks noGrp="1"/>
           </p:cNvSpPr>
@@ -4525,7 +5386,7 @@
       </p:sp>
       <p:sp>
         <p:nvSpPr>
-          <p:cNvPr id="320746890" name="PlaceHolder 3"/>
+          <p:cNvPr id="914460418" name="PlaceHolder 3"/>
           <p:cNvSpPr>
             <a:spLocks noGrp="1"/>
           </p:cNvSpPr>
@@ -4598,7 +5459,7 @@
       </p:sp>
       <p:sp>
         <p:nvSpPr>
-          <p:cNvPr id="1948315392" name="PlaceHolder 4"/>
+          <p:cNvPr id="554285386" name="PlaceHolder 4"/>
           <p:cNvSpPr>
             <a:spLocks noGrp="1"/>
           </p:cNvSpPr>
@@ -4659,7 +5520,7 @@
       </p:sp>
       <p:sp>
         <p:nvSpPr>
-          <p:cNvPr id="1193928494" name="PlaceHolder 5"/>
+          <p:cNvPr id="753069630" name="PlaceHolder 5"/>
           <p:cNvSpPr>
             <a:spLocks noGrp="1"/>
           </p:cNvSpPr>
@@ -4764,7 +5625,7 @@
       </p:grpSpPr>
       <p:sp>
         <p:nvSpPr>
-          <p:cNvPr id="1502733387" name="PlaceHolder 1"/>
+          <p:cNvPr id="1207153842" name="PlaceHolder 1"/>
           <p:cNvSpPr>
             <a:spLocks noGrp="1"/>
           </p:cNvSpPr>
@@ -4833,7 +5694,7 @@
       </p:sp>
       <p:sp>
         <p:nvSpPr>
-          <p:cNvPr id="152610612" name="PlaceHolder 2"/>
+          <p:cNvPr id="1923625058" name="PlaceHolder 2"/>
           <p:cNvSpPr>
             <a:spLocks noGrp="1"/>
           </p:cNvSpPr>
@@ -4920,7 +5781,7 @@
       </p:sp>
       <p:sp>
         <p:nvSpPr>
-          <p:cNvPr id="1910755729" name="PlaceHolder 3"/>
+          <p:cNvPr id="1960260650" name="PlaceHolder 3"/>
           <p:cNvSpPr>
             <a:spLocks noGrp="1"/>
           </p:cNvSpPr>
@@ -4993,7 +5854,7 @@
       </p:sp>
       <p:sp>
         <p:nvSpPr>
-          <p:cNvPr id="1490239857" name="PlaceHolder 4"/>
+          <p:cNvPr id="1297644598" name="PlaceHolder 4"/>
           <p:cNvSpPr>
             <a:spLocks noGrp="1"/>
           </p:cNvSpPr>
@@ -5054,7 +5915,7 @@
       </p:sp>
       <p:sp>
         <p:nvSpPr>
-          <p:cNvPr id="521780362" name="PlaceHolder 5"/>
+          <p:cNvPr id="735044657" name="PlaceHolder 5"/>
           <p:cNvSpPr>
             <a:spLocks noGrp="1"/>
           </p:cNvSpPr>
@@ -5159,7 +6020,7 @@
       </p:grpSpPr>
       <p:sp>
         <p:nvSpPr>
-          <p:cNvPr id="1682563866" name="PlaceHolder 1"/>
+          <p:cNvPr id="1666783384" name="PlaceHolder 1"/>
           <p:cNvSpPr>
             <a:spLocks noGrp="1"/>
           </p:cNvSpPr>
@@ -5228,7 +6089,7 @@
       </p:sp>
       <p:sp>
         <p:nvSpPr>
-          <p:cNvPr id="2000280901" name="PlaceHolder 2"/>
+          <p:cNvPr id="1571772042" name="PlaceHolder 2"/>
           <p:cNvSpPr>
             <a:spLocks noGrp="1"/>
           </p:cNvSpPr>
@@ -5519,7 +6380,7 @@
       </p:sp>
       <p:sp>
         <p:nvSpPr>
-          <p:cNvPr id="435969075" name="PlaceHolder 3"/>
+          <p:cNvPr id="1251884534" name="PlaceHolder 3"/>
           <p:cNvSpPr>
             <a:spLocks noGrp="1"/>
           </p:cNvSpPr>
@@ -5810,7 +6671,7 @@
       </p:sp>
       <p:sp>
         <p:nvSpPr>
-          <p:cNvPr id="604451316" name="PlaceHolder 4"/>
+          <p:cNvPr id="1557417256" name="PlaceHolder 4"/>
           <p:cNvSpPr>
             <a:spLocks noGrp="1"/>
           </p:cNvSpPr>
@@ -5883,7 +6744,7 @@
       </p:sp>
       <p:sp>
         <p:nvSpPr>
-          <p:cNvPr id="399019528" name="PlaceHolder 5"/>
+          <p:cNvPr id="568317549" name="PlaceHolder 5"/>
           <p:cNvSpPr>
             <a:spLocks noGrp="1"/>
           </p:cNvSpPr>
@@ -5944,7 +6805,7 @@
       </p:sp>
       <p:sp>
         <p:nvSpPr>
-          <p:cNvPr id="1580433817" name="PlaceHolder 6"/>
+          <p:cNvPr id="679656649" name="PlaceHolder 6"/>
           <p:cNvSpPr>
             <a:spLocks noGrp="1"/>
           </p:cNvSpPr>
@@ -6049,7 +6910,7 @@
       </p:grpSpPr>
       <p:sp>
         <p:nvSpPr>
-          <p:cNvPr id="456233132" name="PlaceHolder 1"/>
+          <p:cNvPr id="1364817194" name="PlaceHolder 1"/>
           <p:cNvSpPr>
             <a:spLocks noGrp="1"/>
           </p:cNvSpPr>
@@ -6118,7 +6979,7 @@
       </p:sp>
       <p:sp>
         <p:nvSpPr>
-          <p:cNvPr id="564613065" name="PlaceHolder 2"/>
+          <p:cNvPr id="1760374354" name="PlaceHolder 2"/>
           <p:cNvSpPr>
             <a:spLocks noGrp="1"/>
           </p:cNvSpPr>
@@ -6199,7 +7060,7 @@
       </p:sp>
       <p:sp>
         <p:nvSpPr>
-          <p:cNvPr id="1761442551" name="PlaceHolder 3"/>
+          <p:cNvPr id="130944535" name="PlaceHolder 3"/>
           <p:cNvSpPr>
             <a:spLocks noGrp="1"/>
           </p:cNvSpPr>
@@ -6520,7 +7381,7 @@
       </p:sp>
       <p:sp>
         <p:nvSpPr>
-          <p:cNvPr id="1788926141" name="PlaceHolder 4"/>
+          <p:cNvPr id="1345420478" name="PlaceHolder 4"/>
           <p:cNvSpPr>
             <a:spLocks noGrp="1"/>
           </p:cNvSpPr>
@@ -6601,7 +7462,7 @@
       </p:sp>
       <p:sp>
         <p:nvSpPr>
-          <p:cNvPr id="1215580430" name="PlaceHolder 5"/>
+          <p:cNvPr id="828324777" name="PlaceHolder 5"/>
           <p:cNvSpPr>
             <a:spLocks noGrp="1"/>
           </p:cNvSpPr>
@@ -6922,7 +7783,7 @@
       </p:sp>
       <p:sp>
         <p:nvSpPr>
-          <p:cNvPr id="1420142342" name="PlaceHolder 6"/>
+          <p:cNvPr id="697404725" name="PlaceHolder 6"/>
           <p:cNvSpPr>
             <a:spLocks noGrp="1"/>
           </p:cNvSpPr>
@@ -6995,7 +7856,7 @@
       </p:sp>
       <p:sp>
         <p:nvSpPr>
-          <p:cNvPr id="15619401" name="PlaceHolder 7"/>
+          <p:cNvPr id="1522704167" name="PlaceHolder 7"/>
           <p:cNvSpPr>
             <a:spLocks noGrp="1"/>
           </p:cNvSpPr>
@@ -7056,7 +7917,7 @@
       </p:sp>
       <p:sp>
         <p:nvSpPr>
-          <p:cNvPr id="1014703731" name="PlaceHolder 8"/>
+          <p:cNvPr id="1828559167" name="PlaceHolder 8"/>
           <p:cNvSpPr>
             <a:spLocks noGrp="1"/>
           </p:cNvSpPr>
@@ -7161,7 +8022,7 @@
       </p:grpSpPr>
       <p:sp>
         <p:nvSpPr>
-          <p:cNvPr id="1038790440" name="PlaceHolder 1"/>
+          <p:cNvPr id="1696021105" name="PlaceHolder 1"/>
           <p:cNvSpPr>
             <a:spLocks noGrp="1"/>
           </p:cNvSpPr>
@@ -7230,7 +8091,7 @@
       </p:sp>
       <p:sp>
         <p:nvSpPr>
-          <p:cNvPr id="355126429" name="PlaceHolder 2"/>
+          <p:cNvPr id="1417938109" name="PlaceHolder 2"/>
           <p:cNvSpPr>
             <a:spLocks noGrp="1"/>
           </p:cNvSpPr>
@@ -7303,7 +8164,7 @@
       </p:sp>
       <p:sp>
         <p:nvSpPr>
-          <p:cNvPr id="2038838023" name="PlaceHolder 3"/>
+          <p:cNvPr id="11248556" name="PlaceHolder 3"/>
           <p:cNvSpPr>
             <a:spLocks noGrp="1"/>
           </p:cNvSpPr>
@@ -7364,7 +8225,7 @@
       </p:sp>
       <p:sp>
         <p:nvSpPr>
-          <p:cNvPr id="1723772465" name="PlaceHolder 4"/>
+          <p:cNvPr id="933670226" name="PlaceHolder 4"/>
           <p:cNvSpPr>
             <a:spLocks noGrp="1"/>
           </p:cNvSpPr>
@@ -7469,7 +8330,7 @@
       </p:grpSpPr>
       <p:sp>
         <p:nvSpPr>
-          <p:cNvPr id="910547802" name="PlaceHolder 1"/>
+          <p:cNvPr id="688272784" name="PlaceHolder 1"/>
           <p:cNvSpPr>
             <a:spLocks noGrp="1"/>
           </p:cNvSpPr>
@@ -7542,7 +8403,7 @@
       </p:sp>
       <p:sp>
         <p:nvSpPr>
-          <p:cNvPr id="1272649353" name="PlaceHolder 2"/>
+          <p:cNvPr id="777903928" name="PlaceHolder 2"/>
           <p:cNvSpPr>
             <a:spLocks noGrp="1"/>
           </p:cNvSpPr>
@@ -7603,7 +8464,7 @@
       </p:sp>
       <p:sp>
         <p:nvSpPr>
-          <p:cNvPr id="857529630" name="PlaceHolder 3"/>
+          <p:cNvPr id="273319540" name="PlaceHolder 3"/>
           <p:cNvSpPr>
             <a:spLocks noGrp="1"/>
           </p:cNvSpPr>
@@ -7737,7 +8598,7 @@
       </p:grpSpPr>
       <p:pic>
         <p:nvPicPr>
-          <p:cNvPr id="3769159" name=""/>
+          <p:cNvPr id="1349424834" name=""/>
           <p:cNvPicPr/>
           <p:nvPr/>
         </p:nvPicPr>
@@ -7761,7 +8622,7 @@
       </p:pic>
       <p:sp>
         <p:nvSpPr>
-          <p:cNvPr id="327286701" name=""/>
+          <p:cNvPr id="719859002" name=""/>
           <p:cNvSpPr/>
           <p:nvPr/>
         </p:nvSpPr>
@@ -7813,7 +8674,7 @@
       </p:sp>
       <p:sp>
         <p:nvSpPr>
-          <p:cNvPr id="1776629127" name=""/>
+          <p:cNvPr id="824532331" name=""/>
           <p:cNvSpPr/>
           <p:nvPr/>
         </p:nvSpPr>
@@ -7865,7 +8726,7 @@
       </p:sp>
       <p:sp>
         <p:nvSpPr>
-          <p:cNvPr id="271061626" name=""/>
+          <p:cNvPr id="295050607" name=""/>
           <p:cNvSpPr/>
           <p:nvPr/>
         </p:nvSpPr>
@@ -7917,7 +8778,7 @@
       </p:sp>
       <p:sp>
         <p:nvSpPr>
-          <p:cNvPr id="801121492" name=""/>
+          <p:cNvPr id="611507591" name=""/>
           <p:cNvSpPr/>
           <p:nvPr/>
         </p:nvSpPr>
@@ -7969,7 +8830,7 @@
       </p:sp>
       <p:sp>
         <p:nvSpPr>
-          <p:cNvPr id="351742565" name=""/>
+          <p:cNvPr id="1670848224" name=""/>
           <p:cNvSpPr/>
           <p:nvPr/>
         </p:nvSpPr>
@@ -8021,7 +8882,7 @@
       </p:sp>
       <p:sp>
         <p:nvSpPr>
-          <p:cNvPr id="7265437" name=""/>
+          <p:cNvPr id="1003284423" name=""/>
           <p:cNvSpPr/>
           <p:nvPr/>
         </p:nvSpPr>
@@ -8073,7 +8934,7 @@
       </p:sp>
       <p:sp>
         <p:nvSpPr>
-          <p:cNvPr id="1125946093" name=""/>
+          <p:cNvPr id="35389550" name=""/>
           <p:cNvSpPr/>
           <p:nvPr/>
         </p:nvSpPr>
@@ -8288,7 +9149,7 @@
       </p:sp>
       <p:sp>
         <p:nvSpPr>
-          <p:cNvPr id="188333879" name=""/>
+          <p:cNvPr id="2068389252" name=""/>
           <p:cNvSpPr/>
           <p:nvPr/>
         </p:nvSpPr>
@@ -8369,6 +9230,2559 @@
   <mc:AlternateContent xmlns:mc="http://schemas.openxmlformats.org/markup-compatibility/2006">
     <mc:Choice xmlns:p159="http://schemas.microsoft.com/office/powerpoint/2015/09/main" xmlns:p14="http://schemas.microsoft.com/office/powerpoint/2010/main" Requires="p159">
       <p:transition p14:dur="2000" advClick="1"/>
+    </mc:Choice>
+    <mc:Fallback>
+      <p:transition advClick="1"/>
+    </mc:Fallback>
+  </mc:AlternateContent>
+</p:sld>
+</file>
+
+<file path=ppt/slides/slide10.xml><?xml version="1.0" encoding="utf-8"?>
+<p:sld xmlns:a="http://schemas.openxmlformats.org/drawingml/2006/main" xmlns:r="http://schemas.openxmlformats.org/officeDocument/2006/relationships" xmlns:p="http://schemas.openxmlformats.org/presentationml/2006/main" xmlns:m="http://schemas.openxmlformats.org/officeDocument/2006/math" xmlns:w="http://schemas.openxmlformats.org/wordprocessingml/2006/main" xmlns:mc="http://schemas.openxmlformats.org/markup-compatibility/2006" showMasterPhAnim="0" showMasterSp="1" show="1">
+  <p:cSld name="">
+    <p:spTree>
+      <p:nvGrpSpPr>
+        <p:cNvPr id="1" name=""/>
+        <p:cNvGrpSpPr/>
+        <p:nvPr/>
+      </p:nvGrpSpPr>
+      <p:grpSpPr bwMode="auto">
+        <a:xfrm>
+          <a:off x="0" y="0"/>
+          <a:ext cx="0" cy="0"/>
+          <a:chOff x="0" y="0"/>
+          <a:chExt cx="0" cy="0"/>
+        </a:xfrm>
+      </p:grpSpPr>
+      <p:pic>
+        <p:nvPicPr>
+          <p:cNvPr id="1603048916" name=""/>
+          <p:cNvPicPr>
+            <a:picLocks noChangeAspect="1"/>
+          </p:cNvPicPr>
+          <p:nvPr/>
+        </p:nvPicPr>
+        <p:blipFill rotWithShape="1">
+          <a:blip r:embed="rId3"/>
+          <a:stretch/>
+        </p:blipFill>
+        <p:spPr bwMode="auto">
+          <a:xfrm flipH="0" flipV="0">
+            <a:off x="40892" y="36553"/>
+            <a:ext cx="4149939" cy="2556362"/>
+          </a:xfrm>
+          <a:prstGeom prst="rect">
+            <a:avLst/>
+          </a:prstGeom>
+        </p:spPr>
+      </p:pic>
+      <p:pic>
+        <p:nvPicPr>
+          <p:cNvPr id="1127110535" name=""/>
+          <p:cNvPicPr>
+            <a:picLocks noChangeAspect="1"/>
+          </p:cNvPicPr>
+          <p:nvPr/>
+        </p:nvPicPr>
+        <p:blipFill rotWithShape="1">
+          <a:blip r:embed="rId4"/>
+          <a:stretch/>
+        </p:blipFill>
+        <p:spPr bwMode="auto">
+          <a:xfrm flipH="0" flipV="0">
+            <a:off x="-16021" y="2557605"/>
+            <a:ext cx="4656960" cy="871394"/>
+          </a:xfrm>
+          <a:prstGeom prst="rect">
+            <a:avLst/>
+          </a:prstGeom>
+        </p:spPr>
+      </p:pic>
+      <p:pic>
+        <p:nvPicPr>
+          <p:cNvPr id="535630274" name=""/>
+          <p:cNvPicPr>
+            <a:picLocks noChangeAspect="1"/>
+          </p:cNvPicPr>
+          <p:nvPr/>
+        </p:nvPicPr>
+        <p:blipFill rotWithShape="1">
+          <a:blip r:embed="rId5"/>
+          <a:stretch/>
+        </p:blipFill>
+        <p:spPr bwMode="auto">
+          <a:xfrm flipH="0" flipV="0">
+            <a:off x="-13949" y="3429000"/>
+            <a:ext cx="4259624" cy="2623928"/>
+          </a:xfrm>
+          <a:prstGeom prst="rect">
+            <a:avLst/>
+          </a:prstGeom>
+        </p:spPr>
+      </p:pic>
+      <p:pic>
+        <p:nvPicPr>
+          <p:cNvPr id="1614589880" name=""/>
+          <p:cNvPicPr>
+            <a:picLocks noChangeAspect="1"/>
+          </p:cNvPicPr>
+          <p:nvPr/>
+        </p:nvPicPr>
+        <p:blipFill rotWithShape="1">
+          <a:blip r:embed="rId6"/>
+          <a:stretch/>
+        </p:blipFill>
+        <p:spPr bwMode="auto">
+          <a:xfrm flipH="0" flipV="0">
+            <a:off x="-13949" y="6052928"/>
+            <a:ext cx="4656960" cy="823923"/>
+          </a:xfrm>
+          <a:prstGeom prst="rect">
+            <a:avLst/>
+          </a:prstGeom>
+        </p:spPr>
+      </p:pic>
+      <p:sp>
+        <p:nvSpPr>
+          <p:cNvPr id="534517248" name=""/>
+          <p:cNvSpPr txBox="1"/>
+          <p:nvPr/>
+        </p:nvSpPr>
+        <p:spPr bwMode="auto">
+          <a:xfrm rot="0" flipH="0" flipV="0">
+            <a:off x="4843227" y="6236110"/>
+            <a:ext cx="5218595" cy="457560"/>
+          </a:xfrm>
+          <a:prstGeom prst="rect">
+            <a:avLst/>
+          </a:prstGeom>
+          <a:noFill/>
+        </p:spPr>
+        <p:txBody>
+          <a:bodyPr vertOverflow="overflow" horzOverflow="overflow" vert="horz" wrap="square" lIns="91440" tIns="45720" rIns="91440" bIns="45720" numCol="1" spcCol="0" rtlCol="0" fromWordArt="0" anchor="t" anchorCtr="0" forceAA="0" upright="0" compatLnSpc="0">
+            <a:spAutoFit/>
+          </a:bodyPr>
+          <a:p>
+            <a:pPr algn="just">
+              <a:defRPr/>
+            </a:pPr>
+            <a:r>
+              <a:rPr lang="pt-BR" sz="1200" b="0" i="0"/>
+              <a:t>No caso de </a:t>
+            </a:r>
+            <a:r>
+              <a:rPr lang="pt-BR" sz="1200" b="0" i="0" u="none" strike="noStrike" cap="none" spc="0">
+                <a:solidFill>
+                  <a:srgbClr val="000000"/>
+                </a:solidFill>
+                <a:latin typeface="Arial"/>
+                <a:ea typeface="Arial"/>
+                <a:cs typeface="Arial"/>
+              </a:rPr>
+              <a:t>430700502A</a:t>
+            </a:r>
+            <a:r>
+              <a:rPr lang="pt-BR" sz="1200" b="0" i="0"/>
+              <a:t>, não foi kappa que resultou na substituição dos parâmetros, mas o único destoante e com pico é kappa.</a:t>
+            </a:r>
+            <a:endParaRPr sz="1200" b="0" i="0"/>
+          </a:p>
+        </p:txBody>
+      </p:sp>
+      <p:sp>
+        <p:nvSpPr>
+          <p:cNvPr id="1182597794" name=""/>
+          <p:cNvSpPr txBox="1"/>
+          <p:nvPr/>
+        </p:nvSpPr>
+        <p:spPr bwMode="auto">
+          <a:xfrm rot="0" flipH="0" flipV="0">
+            <a:off x="4995626" y="223718"/>
+            <a:ext cx="5272234" cy="1006200"/>
+          </a:xfrm>
+          <a:prstGeom prst="rect">
+            <a:avLst/>
+          </a:prstGeom>
+          <a:noFill/>
+        </p:spPr>
+        <p:txBody>
+          <a:bodyPr vertOverflow="overflow" horzOverflow="overflow" vert="horz" wrap="square" lIns="91440" tIns="45720" rIns="91440" bIns="45720" numCol="1" spcCol="0" rtlCol="0" fromWordArt="0" anchor="t" anchorCtr="0" forceAA="0" upright="0" compatLnSpc="0">
+            <a:spAutoFit/>
+          </a:bodyPr>
+          <a:p>
+            <a:pPr algn="just">
+              <a:defRPr/>
+            </a:pPr>
+            <a:r>
+              <a:rPr lang="pt-BR" sz="1200" b="0" i="0"/>
+              <a:t>Valores de `slope` dos perfis das estações com k aprox 0:</a:t>
+            </a:r>
+            <a:endParaRPr lang="pt-BR" sz="1200" b="0" i="0"/>
+          </a:p>
+          <a:p>
+            <a:pPr marL="217793" indent="-217793" algn="just">
+              <a:buFont typeface="Arial"/>
+              <a:buChar char="–"/>
+              <a:defRPr/>
+            </a:pPr>
+            <a:r>
+              <a:rPr lang="pt-BR" sz="1200" b="0" i="0" u="none" strike="noStrike" cap="none" spc="0">
+                <a:solidFill>
+                  <a:srgbClr val="000000"/>
+                </a:solidFill>
+                <a:latin typeface="Arial"/>
+                <a:ea typeface="Arial"/>
+                <a:cs typeface="Arial"/>
+              </a:rPr>
+              <a:t>430060402A</a:t>
+            </a:r>
+            <a:r>
+              <a:rPr lang="pt-BR" sz="1200" b="0" i="0"/>
+              <a:t>: max(slope) = </a:t>
+            </a:r>
+            <a:r>
+              <a:rPr lang="pt-BR" sz="1200" b="0" i="0" u="none" strike="noStrike" cap="none" spc="0">
+                <a:solidFill>
+                  <a:srgbClr val="000000"/>
+                </a:solidFill>
+                <a:latin typeface="Arial"/>
+                <a:ea typeface="Arial"/>
+                <a:cs typeface="Arial"/>
+              </a:rPr>
+              <a:t>637361.2;</a:t>
+            </a:r>
+            <a:endParaRPr lang="pt-BR" sz="1200" b="0" i="0" u="none" strike="noStrike" cap="none" spc="0">
+              <a:solidFill>
+                <a:srgbClr val="000000"/>
+              </a:solidFill>
+              <a:latin typeface="Arial"/>
+              <a:ea typeface="Arial"/>
+              <a:cs typeface="Arial"/>
+            </a:endParaRPr>
+          </a:p>
+          <a:p>
+            <a:pPr marL="217793" indent="-217793" algn="just">
+              <a:buFont typeface="Arial"/>
+              <a:buChar char="–"/>
+              <a:defRPr/>
+            </a:pPr>
+            <a:r>
+              <a:rPr lang="pt-BR" sz="1200" b="0" i="0" u="none" strike="noStrike" cap="none" spc="0">
+                <a:solidFill>
+                  <a:srgbClr val="000000"/>
+                </a:solidFill>
+                <a:latin typeface="Arial"/>
+                <a:ea typeface="Arial"/>
+                <a:cs typeface="Arial"/>
+              </a:rPr>
+              <a:t>430350901A</a:t>
+            </a:r>
+            <a:r>
+              <a:rPr lang="pt-BR" sz="1200" b="0" i="0" u="none" strike="noStrike" cap="none" spc="0">
+                <a:solidFill>
+                  <a:srgbClr val="000000"/>
+                </a:solidFill>
+                <a:latin typeface="Arial"/>
+                <a:ea typeface="Arial"/>
+                <a:cs typeface="Arial"/>
+              </a:rPr>
+              <a:t>: max(slope) = </a:t>
+            </a:r>
+            <a:r>
+              <a:rPr lang="pt-BR" sz="1200" b="0" i="0" u="none" strike="noStrike" cap="none" spc="0">
+                <a:solidFill>
+                  <a:srgbClr val="000000"/>
+                </a:solidFill>
+                <a:latin typeface="Arial"/>
+                <a:ea typeface="Arial"/>
+                <a:cs typeface="Arial"/>
+              </a:rPr>
+              <a:t>5623123;</a:t>
+            </a:r>
+            <a:endParaRPr lang="pt-BR" sz="1200" b="0" i="0" u="none" strike="noStrike" cap="none" spc="0">
+              <a:solidFill>
+                <a:srgbClr val="000000"/>
+              </a:solidFill>
+              <a:latin typeface="Arial"/>
+              <a:ea typeface="Arial"/>
+              <a:cs typeface="Arial"/>
+            </a:endParaRPr>
+          </a:p>
+          <a:p>
+            <a:pPr marL="217793" indent="-217793" algn="just">
+              <a:buFont typeface="Arial"/>
+              <a:buChar char="–"/>
+              <a:defRPr/>
+            </a:pPr>
+            <a:r>
+              <a:rPr lang="pt-BR" sz="1200" b="0" i="0" u="none" strike="noStrike" cap="none" spc="0">
+                <a:solidFill>
+                  <a:srgbClr val="000000"/>
+                </a:solidFill>
+                <a:latin typeface="Arial"/>
+                <a:ea typeface="Arial"/>
+                <a:cs typeface="Arial"/>
+              </a:rPr>
+              <a:t>430700502A</a:t>
+            </a:r>
+            <a:r>
+              <a:rPr lang="pt-BR" sz="1200" b="0" i="0" u="none" strike="noStrike" cap="none" spc="0">
+                <a:solidFill>
+                  <a:srgbClr val="000000"/>
+                </a:solidFill>
+                <a:latin typeface="Arial"/>
+                <a:ea typeface="Arial"/>
+                <a:cs typeface="Arial"/>
+              </a:rPr>
+              <a:t>: max(slope) = </a:t>
+            </a:r>
+            <a:r>
+              <a:rPr lang="pt-BR" sz="1200" b="0" i="0" u="none" strike="noStrike" cap="none" spc="0">
+                <a:solidFill>
+                  <a:srgbClr val="000000"/>
+                </a:solidFill>
+                <a:latin typeface="Arial"/>
+                <a:ea typeface="Arial"/>
+                <a:cs typeface="Arial"/>
+              </a:rPr>
+              <a:t>121316.4</a:t>
+            </a:r>
+            <a:r>
+              <a:rPr lang="pt-BR" sz="1200" b="0" i="0" u="none" strike="noStrike" cap="none" spc="0">
+                <a:solidFill>
+                  <a:srgbClr val="000000"/>
+                </a:solidFill>
+                <a:latin typeface="Arial"/>
+                <a:ea typeface="Arial"/>
+                <a:cs typeface="Arial"/>
+              </a:rPr>
+              <a:t>;</a:t>
+            </a:r>
+            <a:endParaRPr lang="pt-BR" sz="1200" b="0" i="0" u="none" strike="noStrike" cap="none" spc="0">
+              <a:solidFill>
+                <a:srgbClr val="000000"/>
+              </a:solidFill>
+              <a:latin typeface="Arial"/>
+              <a:ea typeface="Arial"/>
+              <a:cs typeface="Arial"/>
+            </a:endParaRPr>
+          </a:p>
+          <a:p>
+            <a:pPr marL="217793" indent="-217793" algn="just">
+              <a:buFont typeface="Arial"/>
+              <a:buChar char="–"/>
+              <a:defRPr/>
+            </a:pPr>
+            <a:endParaRPr sz="1200" b="0" i="0"/>
+          </a:p>
+        </p:txBody>
+      </p:sp>
+      <p:pic>
+        <p:nvPicPr>
+          <p:cNvPr id="1148658914" name=""/>
+          <p:cNvPicPr>
+            <a:picLocks noChangeAspect="1"/>
+          </p:cNvPicPr>
+          <p:nvPr/>
+        </p:nvPicPr>
+        <p:blipFill rotWithShape="1">
+          <a:blip r:embed="rId7"/>
+          <a:stretch/>
+        </p:blipFill>
+        <p:spPr bwMode="auto">
+          <a:xfrm>
+            <a:off x="5438774" y="2793277"/>
+            <a:ext cx="3933824" cy="400050"/>
+          </a:xfrm>
+          <a:prstGeom prst="rect">
+            <a:avLst/>
+          </a:prstGeom>
+        </p:spPr>
+      </p:pic>
+    </p:spTree>
+  </p:cSld>
+  <p:clrMapOvr>
+    <a:masterClrMapping/>
+  </p:clrMapOvr>
+  <mc:AlternateContent xmlns:mc="http://schemas.openxmlformats.org/markup-compatibility/2006">
+    <mc:Choice xmlns:p159="http://schemas.microsoft.com/office/powerpoint/2015/09/main" xmlns:p14="http://schemas.microsoft.com/office/powerpoint/2010/main" Requires="p159">
+      <p:transition p14:dur="2000" advClick="1"/>
+    </mc:Choice>
+    <mc:Fallback>
+      <p:transition advClick="1"/>
+    </mc:Fallback>
+  </mc:AlternateContent>
+</p:sld>
+</file>
+
+<file path=ppt/slides/slide11.xml><?xml version="1.0" encoding="utf-8"?>
+<p:sld xmlns:a="http://schemas.openxmlformats.org/drawingml/2006/main" xmlns:r="http://schemas.openxmlformats.org/officeDocument/2006/relationships" xmlns:p="http://schemas.openxmlformats.org/presentationml/2006/main" xmlns:m="http://schemas.openxmlformats.org/officeDocument/2006/math" xmlns:w="http://schemas.openxmlformats.org/wordprocessingml/2006/main" xmlns:mc="http://schemas.openxmlformats.org/markup-compatibility/2006" showMasterPhAnim="0" showMasterSp="1" show="1">
+  <p:cSld name="">
+    <p:spTree>
+      <p:nvGrpSpPr>
+        <p:cNvPr id="1" name=""/>
+        <p:cNvGrpSpPr/>
+        <p:nvPr/>
+      </p:nvGrpSpPr>
+      <p:grpSpPr bwMode="auto">
+        <a:xfrm>
+          <a:off x="0" y="0"/>
+          <a:ext cx="0" cy="0"/>
+          <a:chOff x="0" y="0"/>
+          <a:chExt cx="0" cy="0"/>
+        </a:xfrm>
+      </p:grpSpPr>
+      <p:sp>
+        <p:nvSpPr>
+          <p:cNvPr id="1549262081" name=""/>
+          <p:cNvSpPr txBox="1"/>
+          <p:nvPr/>
+        </p:nvSpPr>
+        <p:spPr bwMode="auto">
+          <a:xfrm rot="0" flipH="0" flipV="0">
+            <a:off x="233127" y="223718"/>
+            <a:ext cx="5308234" cy="457560"/>
+          </a:xfrm>
+          <a:prstGeom prst="rect">
+            <a:avLst/>
+          </a:prstGeom>
+          <a:noFill/>
+        </p:spPr>
+        <p:txBody>
+          <a:bodyPr vertOverflow="overflow" horzOverflow="overflow" vert="horz" wrap="square" lIns="91440" tIns="45720" rIns="91440" bIns="45720" numCol="1" spcCol="0" rtlCol="0" fromWordArt="0" anchor="t" anchorCtr="0" forceAA="0" upright="0" compatLnSpc="0">
+            <a:spAutoFit/>
+          </a:bodyPr>
+          <a:p>
+            <a:pPr>
+              <a:defRPr/>
+            </a:pPr>
+            <a:r>
+              <a:rPr lang="pt-BR" sz="1200"/>
+              <a:t>Analisando a série da estação </a:t>
+            </a:r>
+            <a:r>
+              <a:rPr lang="pt-BR" sz="1200" b="0" i="0" u="none" strike="noStrike" cap="none" spc="0">
+                <a:solidFill>
+                  <a:srgbClr val="000000"/>
+                </a:solidFill>
+                <a:latin typeface="Arial"/>
+                <a:ea typeface="Arial"/>
+                <a:cs typeface="Arial"/>
+              </a:rPr>
+              <a:t>430060402A</a:t>
+            </a:r>
+            <a:r>
+              <a:rPr lang="pt-BR" sz="1200"/>
+              <a:t>, a estimativa original com a função `fdgev()` retorna estimativas aparentemente razoáveis:</a:t>
+            </a:r>
+            <a:endParaRPr sz="1200"/>
+          </a:p>
+        </p:txBody>
+      </p:sp>
+      <p:pic>
+        <p:nvPicPr>
+          <p:cNvPr id="1967516777" name=""/>
+          <p:cNvPicPr>
+            <a:picLocks noChangeAspect="1"/>
+          </p:cNvPicPr>
+          <p:nvPr/>
+        </p:nvPicPr>
+        <p:blipFill rotWithShape="1">
+          <a:blip r:embed="rId3"/>
+          <a:stretch/>
+        </p:blipFill>
+        <p:spPr bwMode="auto">
+          <a:xfrm>
+            <a:off x="327024" y="681278"/>
+            <a:ext cx="5267324" cy="5924549"/>
+          </a:xfrm>
+          <a:prstGeom prst="rect">
+            <a:avLst/>
+          </a:prstGeom>
+        </p:spPr>
+      </p:pic>
+      <p:sp>
+        <p:nvSpPr>
+          <p:cNvPr id="731842754" name=""/>
+          <p:cNvSpPr txBox="1"/>
+          <p:nvPr/>
+        </p:nvSpPr>
+        <p:spPr bwMode="auto">
+          <a:xfrm rot="0" flipH="0" flipV="0">
+            <a:off x="5888860" y="223718"/>
+            <a:ext cx="5525313" cy="2438759"/>
+          </a:xfrm>
+          <a:prstGeom prst="rect">
+            <a:avLst/>
+          </a:prstGeom>
+          <a:noFill/>
+        </p:spPr>
+        <p:txBody>
+          <a:bodyPr vertOverflow="overflow" horzOverflow="overflow" vert="horz" wrap="square" lIns="91440" tIns="45720" rIns="91440" bIns="45720" numCol="1" spcCol="0" rtlCol="0" fromWordArt="0" anchor="t" anchorCtr="0" forceAA="0" upright="0" compatLnSpc="0">
+            <a:spAutoFit/>
+          </a:bodyPr>
+          <a:p>
+            <a:pPr>
+              <a:defRPr/>
+            </a:pPr>
+            <a:r>
+              <a:rPr lang="pt-BR" sz="1200"/>
+              <a:t>O problema aparentemente ocorre em razão do próprio `while` em combinação com o step ajustado.</a:t>
+            </a:r>
+            <a:endParaRPr lang="pt-BR" sz="1200"/>
+          </a:p>
+          <a:p>
+            <a:pPr>
+              <a:defRPr/>
+            </a:pPr>
+            <a:r>
+              <a:rPr lang="pt-BR" sz="1200"/>
+              <a:t>Atualmente, o quando val.i != 0, step é recalculado como step*abs(val.i).</a:t>
+            </a:r>
+            <a:endParaRPr lang="pt-BR" sz="1200"/>
+          </a:p>
+          <a:p>
+            <a:pPr>
+              <a:defRPr/>
+            </a:pPr>
+            <a:r>
+              <a:rPr lang="pt-BR" sz="1200"/>
+              <a:t>Para esse caso em que kappa = 0.082 e step = </a:t>
+            </a:r>
+            <a:r>
+              <a:rPr lang="pt-BR" sz="1200"/>
+              <a:t>0.005, o step resultante é igual a </a:t>
+            </a:r>
+            <a:r>
+              <a:rPr lang="pt-BR" sz="1200" b="0" i="0" u="none" strike="noStrike" cap="none" spc="0">
+                <a:solidFill>
+                  <a:srgbClr val="000000"/>
+                </a:solidFill>
+                <a:latin typeface="Arial"/>
+                <a:ea typeface="Arial"/>
+                <a:cs typeface="Arial"/>
+              </a:rPr>
+              <a:t>0.0004125329</a:t>
+            </a:r>
+            <a:r>
+              <a:rPr lang="pt-BR" sz="1200"/>
+              <a:t>.</a:t>
+            </a:r>
+            <a:br>
+              <a:rPr lang="pt-BR" sz="1200"/>
+            </a:br>
+            <a:r>
+              <a:rPr lang="pt-BR" sz="1200"/>
+              <a:t>Avaliando uma sequencia que o while avaliaria:</a:t>
+            </a:r>
+            <a:endParaRPr lang="pt-BR" sz="1200"/>
+          </a:p>
+          <a:p>
+            <a:pPr>
+              <a:defRPr/>
+            </a:pPr>
+            <a:r>
+              <a:rPr lang="pt-BR" sz="1200"/>
+              <a:t>val.i &lt;- </a:t>
+            </a:r>
+            <a:r>
+              <a:rPr lang="pt-BR" sz="1200" b="0" i="0" u="none" strike="noStrike" cap="none" spc="0">
+                <a:solidFill>
+                  <a:srgbClr val="000000"/>
+                </a:solidFill>
+                <a:latin typeface="Arial"/>
+                <a:ea typeface="Arial"/>
+                <a:cs typeface="Arial"/>
+              </a:rPr>
+              <a:t>seq(fit$par[[3]], -1, -step.adjusted)</a:t>
+            </a:r>
+            <a:br>
+              <a:rPr lang="pt-BR" sz="1200"/>
+            </a:br>
+            <a:r>
+              <a:rPr lang="pt-BR" sz="1200"/>
+              <a:t>Em determinado momento, a seguinte sequência ocorre:</a:t>
+            </a:r>
+            <a:endParaRPr lang="pt-BR" sz="1200"/>
+          </a:p>
+          <a:p>
+            <a:pPr>
+              <a:defRPr/>
+            </a:pPr>
+            <a:endParaRPr sz="1200"/>
+          </a:p>
+          <a:p>
+            <a:pPr>
+              <a:defRPr/>
+            </a:pPr>
+            <a:endParaRPr lang="pt-BR" sz="1200"/>
+          </a:p>
+          <a:p>
+            <a:pPr>
+              <a:defRPr/>
+            </a:pPr>
+            <a:r>
+              <a:rPr lang="pt-BR" sz="1200"/>
+              <a:t>Nesse momento, ocorre o kappa = 10^-17 que retorna o erro.</a:t>
+            </a:r>
+            <a:endParaRPr lang="pt-BR" sz="1200"/>
+          </a:p>
+          <a:p>
+            <a:pPr>
+              <a:defRPr/>
+            </a:pPr>
+            <a:endParaRPr/>
+          </a:p>
+          <a:p>
+            <a:pPr>
+              <a:defRPr/>
+            </a:pPr>
+            <a:r>
+              <a:rPr lang="pt-BR" sz="1200"/>
+              <a:t>Isso também foi conferido com a estação </a:t>
+            </a:r>
+            <a:r>
+              <a:rPr lang="pt-BR" sz="1200" b="0" i="0" u="none" strike="noStrike" cap="none" spc="0">
+                <a:solidFill>
+                  <a:srgbClr val="000000"/>
+                </a:solidFill>
+                <a:latin typeface="Arial"/>
+                <a:ea typeface="Arial"/>
+                <a:cs typeface="Arial"/>
+              </a:rPr>
+              <a:t>430920901A</a:t>
+            </a:r>
+            <a:r>
+              <a:rPr lang="pt-BR" sz="1200"/>
+              <a:t>:</a:t>
+            </a:r>
+            <a:endParaRPr/>
+          </a:p>
+        </p:txBody>
+      </p:sp>
+      <p:pic>
+        <p:nvPicPr>
+          <p:cNvPr id="1464398072" name=""/>
+          <p:cNvPicPr>
+            <a:picLocks noChangeAspect="1"/>
+          </p:cNvPicPr>
+          <p:nvPr/>
+        </p:nvPicPr>
+        <p:blipFill rotWithShape="1">
+          <a:blip r:embed="rId4"/>
+          <a:stretch/>
+        </p:blipFill>
+        <p:spPr bwMode="auto">
+          <a:xfrm>
+            <a:off x="5888860" y="1714423"/>
+            <a:ext cx="3971925" cy="352424"/>
+          </a:xfrm>
+          <a:prstGeom prst="rect">
+            <a:avLst/>
+          </a:prstGeom>
+        </p:spPr>
+      </p:pic>
+      <p:pic>
+        <p:nvPicPr>
+          <p:cNvPr id="2093182053" name=""/>
+          <p:cNvPicPr>
+            <a:picLocks noChangeAspect="1"/>
+          </p:cNvPicPr>
+          <p:nvPr/>
+        </p:nvPicPr>
+        <p:blipFill rotWithShape="1">
+          <a:blip r:embed="rId5"/>
+          <a:stretch/>
+        </p:blipFill>
+        <p:spPr bwMode="auto">
+          <a:xfrm flipH="0" flipV="0">
+            <a:off x="5888860" y="2662478"/>
+            <a:ext cx="3800819" cy="3943350"/>
+          </a:xfrm>
+          <a:prstGeom prst="rect">
+            <a:avLst/>
+          </a:prstGeom>
+        </p:spPr>
+      </p:pic>
+    </p:spTree>
+  </p:cSld>
+  <p:clrMapOvr>
+    <a:masterClrMapping/>
+  </p:clrMapOvr>
+  <mc:AlternateContent xmlns:mc="http://schemas.openxmlformats.org/markup-compatibility/2006">
+    <mc:Choice xmlns:p159="http://schemas.microsoft.com/office/powerpoint/2015/09/main" xmlns:p14="http://schemas.microsoft.com/office/powerpoint/2010/main" Requires="p159">
+      <p:transition p14:dur="2000" advClick="1"/>
+    </mc:Choice>
+    <mc:Fallback>
+      <p:transition advClick="1"/>
+    </mc:Fallback>
+  </mc:AlternateContent>
+</p:sld>
+</file>
+
+<file path=ppt/slides/slide12.xml><?xml version="1.0" encoding="utf-8"?>
+<p:sld xmlns:a="http://schemas.openxmlformats.org/drawingml/2006/main" xmlns:r="http://schemas.openxmlformats.org/officeDocument/2006/relationships" xmlns:p="http://schemas.openxmlformats.org/presentationml/2006/main" xmlns:m="http://schemas.openxmlformats.org/officeDocument/2006/math" xmlns:w="http://schemas.openxmlformats.org/wordprocessingml/2006/main" xmlns:mc="http://schemas.openxmlformats.org/markup-compatibility/2006" showMasterPhAnim="0" showMasterSp="1" show="1">
+  <p:cSld name="">
+    <p:spTree>
+      <p:nvGrpSpPr>
+        <p:cNvPr id="1" name=""/>
+        <p:cNvGrpSpPr/>
+        <p:nvPr/>
+      </p:nvGrpSpPr>
+      <p:grpSpPr bwMode="auto">
+        <a:xfrm>
+          <a:off x="0" y="0"/>
+          <a:ext cx="0" cy="0"/>
+          <a:chOff x="0" y="0"/>
+          <a:chExt cx="0" cy="0"/>
+        </a:xfrm>
+      </p:grpSpPr>
+      <p:sp>
+        <p:nvSpPr>
+          <p:cNvPr id="372629008" name=""/>
+          <p:cNvSpPr/>
+          <p:nvPr/>
+        </p:nvSpPr>
+        <p:spPr bwMode="auto">
+          <a:xfrm flipH="0" flipV="0">
+            <a:off x="258913" y="251565"/>
+            <a:ext cx="4932687" cy="1036679"/>
+          </a:xfrm>
+        </p:spPr>
+        <p:txBody>
+          <a:bodyPr rot="0" spcFirstLastPara="0" vertOverflow="overflow" horzOverflow="overflow" vert="horz" wrap="square" lIns="91440" tIns="45720" rIns="91440" bIns="45720" numCol="1" spcCol="0" rtlCol="0" fromWordArt="0" anchor="t" anchorCtr="0" forceAA="0" upright="0" compatLnSpc="1">
+            <a:prstTxWarp prst="textNoShape"/>
+            <a:spAutoFit/>
+          </a:bodyPr>
+          <a:p>
+            <a:pPr>
+              <a:defRPr/>
+            </a:pPr>
+            <a:r>
+              <a:rPr lang="pt-BR" sz="1200"/>
+              <a:t>A solução que está sendo testada é simplesmente adaptar o passo de busca, adicionando um `jitter` de 1e-7 no passo, para que ele nunca teste um valor múltiplo do proprio parâmetro.</a:t>
+            </a:r>
+            <a:br>
+              <a:rPr lang="pt-BR" sz="1200"/>
+            </a:br>
+            <a:br>
+              <a:rPr sz="1400"/>
+            </a:br>
+            <a:r>
+              <a:rPr sz="1200" b="0" i="0" u="none">
+                <a:solidFill>
+                  <a:srgbClr val="C0CAF5"/>
+                </a:solidFill>
+                <a:latin typeface="RobotoMono Nerd Font"/>
+                <a:ea typeface="RobotoMono Nerd Font"/>
+                <a:cs typeface="RobotoMono Nerd Font"/>
+              </a:rPr>
+              <a:t>step.i</a:t>
+            </a:r>
+            <a:r>
+              <a:rPr sz="1200" b="0" i="0" u="none">
+                <a:solidFill>
+                  <a:srgbClr val="A9B1D6"/>
+                </a:solidFill>
+                <a:latin typeface="RobotoMono Nerd Font"/>
+                <a:ea typeface="RobotoMono Nerd Font"/>
+                <a:cs typeface="RobotoMono Nerd Font"/>
+              </a:rPr>
+              <a:t> </a:t>
+            </a:r>
+            <a:r>
+              <a:rPr sz="1200" b="0" i="0" u="none">
+                <a:solidFill>
+                  <a:srgbClr val="89DDFF"/>
+                </a:solidFill>
+                <a:latin typeface="RobotoMono Nerd Font"/>
+                <a:ea typeface="RobotoMono Nerd Font"/>
+                <a:cs typeface="RobotoMono Nerd Font"/>
+              </a:rPr>
+              <a:t>&lt;-</a:t>
+            </a:r>
+            <a:r>
+              <a:rPr sz="1200" b="0" i="0" u="none">
+                <a:solidFill>
+                  <a:srgbClr val="A9B1D6"/>
+                </a:solidFill>
+                <a:latin typeface="RobotoMono Nerd Font"/>
+                <a:ea typeface="RobotoMono Nerd Font"/>
+                <a:cs typeface="RobotoMono Nerd Font"/>
+              </a:rPr>
+              <a:t> </a:t>
+            </a:r>
+            <a:r>
+              <a:rPr sz="1200" b="0" i="0" u="none">
+                <a:solidFill>
+                  <a:srgbClr val="7AA2F7"/>
+                </a:solidFill>
+                <a:latin typeface="RobotoMono Nerd Font"/>
+                <a:ea typeface="RobotoMono Nerd Font"/>
+                <a:cs typeface="RobotoMono Nerd Font"/>
+              </a:rPr>
+              <a:t>max</a:t>
+            </a:r>
+            <a:r>
+              <a:rPr sz="1200" b="0" i="0" u="none">
+                <a:solidFill>
+                  <a:srgbClr val="A9B1D6"/>
+                </a:solidFill>
+                <a:latin typeface="RobotoMono Nerd Font"/>
+                <a:ea typeface="RobotoMono Nerd Font"/>
+                <a:cs typeface="RobotoMono Nerd Font"/>
+              </a:rPr>
+              <a:t>(</a:t>
+            </a:r>
+            <a:r>
+              <a:rPr sz="1200" b="0" i="0" u="none">
+                <a:solidFill>
+                  <a:srgbClr val="7AA2F7"/>
+                </a:solidFill>
+                <a:latin typeface="RobotoMono Nerd Font"/>
+                <a:ea typeface="RobotoMono Nerd Font"/>
+                <a:cs typeface="RobotoMono Nerd Font"/>
+              </a:rPr>
+              <a:t>abs</a:t>
+            </a:r>
+            <a:r>
+              <a:rPr sz="1200" b="0" i="0" u="none">
+                <a:solidFill>
+                  <a:srgbClr val="A9B1D6"/>
+                </a:solidFill>
+                <a:latin typeface="RobotoMono Nerd Font"/>
+                <a:ea typeface="RobotoMono Nerd Font"/>
+                <a:cs typeface="RobotoMono Nerd Font"/>
+              </a:rPr>
+              <a:t>(</a:t>
+            </a:r>
+            <a:r>
+              <a:rPr sz="1200" b="0" i="0" u="none">
+                <a:solidFill>
+                  <a:srgbClr val="C0CAF5"/>
+                </a:solidFill>
+                <a:latin typeface="RobotoMono Nerd Font"/>
+                <a:ea typeface="RobotoMono Nerd Font"/>
+                <a:cs typeface="RobotoMono Nerd Font"/>
+              </a:rPr>
+              <a:t>step</a:t>
+            </a:r>
+            <a:r>
+              <a:rPr sz="1200" b="0" i="0" u="none">
+                <a:solidFill>
+                  <a:srgbClr val="A9B1D6"/>
+                </a:solidFill>
+                <a:latin typeface="RobotoMono Nerd Font"/>
+                <a:ea typeface="RobotoMono Nerd Font"/>
+                <a:cs typeface="RobotoMono Nerd Font"/>
+              </a:rPr>
+              <a:t> </a:t>
+            </a:r>
+            <a:r>
+              <a:rPr sz="1200" b="0" i="0" u="none">
+                <a:solidFill>
+                  <a:srgbClr val="89DDFF"/>
+                </a:solidFill>
+                <a:latin typeface="RobotoMono Nerd Font"/>
+                <a:ea typeface="RobotoMono Nerd Font"/>
+                <a:cs typeface="RobotoMono Nerd Font"/>
+              </a:rPr>
+              <a:t>*</a:t>
+            </a:r>
+            <a:r>
+              <a:rPr sz="1200" b="0" i="0" u="none">
+                <a:solidFill>
+                  <a:srgbClr val="A9B1D6"/>
+                </a:solidFill>
+                <a:latin typeface="RobotoMono Nerd Font"/>
+                <a:ea typeface="RobotoMono Nerd Font"/>
+                <a:cs typeface="RobotoMono Nerd Font"/>
+              </a:rPr>
+              <a:t> </a:t>
+            </a:r>
+            <a:r>
+              <a:rPr sz="1200" b="0" i="0" u="none">
+                <a:solidFill>
+                  <a:srgbClr val="C0CAF5"/>
+                </a:solidFill>
+                <a:latin typeface="RobotoMono Nerd Font"/>
+                <a:ea typeface="RobotoMono Nerd Font"/>
+                <a:cs typeface="RobotoMono Nerd Font"/>
+              </a:rPr>
+              <a:t>par</a:t>
+            </a:r>
+            <a:r>
+              <a:rPr sz="1200" b="0" i="0" u="none">
+                <a:solidFill>
+                  <a:srgbClr val="A9B1D6"/>
+                </a:solidFill>
+                <a:latin typeface="RobotoMono Nerd Font"/>
+                <a:ea typeface="RobotoMono Nerd Font"/>
+                <a:cs typeface="RobotoMono Nerd Font"/>
+              </a:rPr>
+              <a:t>[[</a:t>
+            </a:r>
+            <a:r>
+              <a:rPr sz="1200" b="0" i="0" u="none">
+                <a:solidFill>
+                  <a:srgbClr val="C0CAF5"/>
+                </a:solidFill>
+                <a:latin typeface="RobotoMono Nerd Font"/>
+                <a:ea typeface="RobotoMono Nerd Font"/>
+                <a:cs typeface="RobotoMono Nerd Font"/>
+              </a:rPr>
+              <a:t>i</a:t>
+            </a:r>
+            <a:r>
+              <a:rPr sz="1200" b="0" i="0" u="none">
+                <a:solidFill>
+                  <a:srgbClr val="A9B1D6"/>
+                </a:solidFill>
+                <a:latin typeface="RobotoMono Nerd Font"/>
+                <a:ea typeface="RobotoMono Nerd Font"/>
+                <a:cs typeface="RobotoMono Nerd Font"/>
+              </a:rPr>
+              <a:t>]])</a:t>
+            </a:r>
+            <a:r>
+              <a:rPr sz="1200" b="0" i="0" u="none">
+                <a:solidFill>
+                  <a:srgbClr val="89DDFF"/>
+                </a:solidFill>
+                <a:latin typeface="RobotoMono Nerd Font"/>
+                <a:ea typeface="RobotoMono Nerd Font"/>
+                <a:cs typeface="RobotoMono Nerd Font"/>
+              </a:rPr>
+              <a:t>,</a:t>
+            </a:r>
+            <a:r>
+              <a:rPr sz="1200" b="0" i="0" u="none">
+                <a:solidFill>
+                  <a:srgbClr val="A9B1D6"/>
+                </a:solidFill>
+                <a:latin typeface="RobotoMono Nerd Font"/>
+                <a:ea typeface="RobotoMono Nerd Font"/>
+                <a:cs typeface="RobotoMono Nerd Font"/>
+              </a:rPr>
+              <a:t> </a:t>
+            </a:r>
+            <a:r>
+              <a:rPr sz="1200" b="0" i="0" u="none">
+                <a:solidFill>
+                  <a:srgbClr val="C0CAF5"/>
+                </a:solidFill>
+                <a:latin typeface="RobotoMono Nerd Font"/>
+                <a:ea typeface="RobotoMono Nerd Font"/>
+                <a:cs typeface="RobotoMono Nerd Font"/>
+              </a:rPr>
+              <a:t>step</a:t>
+            </a:r>
+            <a:r>
+              <a:rPr sz="1200" b="0" i="0" u="none">
+                <a:solidFill>
+                  <a:srgbClr val="A9B1D6"/>
+                </a:solidFill>
+                <a:latin typeface="RobotoMono Nerd Font"/>
+                <a:ea typeface="RobotoMono Nerd Font"/>
+                <a:cs typeface="RobotoMono Nerd Font"/>
+              </a:rPr>
+              <a:t>) </a:t>
+            </a:r>
+            <a:r>
+              <a:rPr sz="1200" b="0" i="0" u="none">
+                <a:solidFill>
+                  <a:srgbClr val="89DDFF"/>
+                </a:solidFill>
+                <a:latin typeface="RobotoMono Nerd Font"/>
+                <a:ea typeface="RobotoMono Nerd Font"/>
+                <a:cs typeface="RobotoMono Nerd Font"/>
+              </a:rPr>
+              <a:t>+</a:t>
+            </a:r>
+            <a:r>
+              <a:rPr sz="1200" b="0" i="0" u="none">
+                <a:solidFill>
+                  <a:srgbClr val="A9B1D6"/>
+                </a:solidFill>
+                <a:latin typeface="RobotoMono Nerd Font"/>
+                <a:ea typeface="RobotoMono Nerd Font"/>
+                <a:cs typeface="RobotoMono Nerd Font"/>
+              </a:rPr>
+              <a:t> </a:t>
+            </a:r>
+            <a:r>
+              <a:rPr sz="1200" b="0" i="0" u="none">
+                <a:solidFill>
+                  <a:srgbClr val="FF9E64"/>
+                </a:solidFill>
+                <a:latin typeface="RobotoMono Nerd Font"/>
+                <a:ea typeface="RobotoMono Nerd Font"/>
+                <a:cs typeface="RobotoMono Nerd Font"/>
+              </a:rPr>
+              <a:t>1e-7</a:t>
+            </a:r>
+            <a:endParaRPr sz="1400"/>
+          </a:p>
+        </p:txBody>
+      </p:sp>
+      <p:pic>
+        <p:nvPicPr>
+          <p:cNvPr id="491586169" name=""/>
+          <p:cNvPicPr>
+            <a:picLocks noChangeAspect="1"/>
+          </p:cNvPicPr>
+          <p:nvPr/>
+        </p:nvPicPr>
+        <p:blipFill rotWithShape="1">
+          <a:blip r:embed="rId3"/>
+          <a:stretch/>
+        </p:blipFill>
+        <p:spPr bwMode="auto">
+          <a:xfrm>
+            <a:off x="429099" y="1419753"/>
+            <a:ext cx="4762499" cy="2933699"/>
+          </a:xfrm>
+          <a:prstGeom prst="rect">
+            <a:avLst/>
+          </a:prstGeom>
+        </p:spPr>
+      </p:pic>
+      <p:pic>
+        <p:nvPicPr>
+          <p:cNvPr id="1868966917" name=""/>
+          <p:cNvPicPr>
+            <a:picLocks noChangeAspect="1"/>
+          </p:cNvPicPr>
+          <p:nvPr/>
+        </p:nvPicPr>
+        <p:blipFill rotWithShape="1">
+          <a:blip r:embed="rId4"/>
+          <a:stretch/>
+        </p:blipFill>
+        <p:spPr bwMode="auto">
+          <a:xfrm>
+            <a:off x="5540374" y="1419753"/>
+            <a:ext cx="4762499" cy="2933699"/>
+          </a:xfrm>
+          <a:prstGeom prst="rect">
+            <a:avLst/>
+          </a:prstGeom>
+        </p:spPr>
+      </p:pic>
+      <p:sp>
+        <p:nvSpPr>
+          <p:cNvPr id="1437246668" name=""/>
+          <p:cNvSpPr txBox="1"/>
+          <p:nvPr/>
+        </p:nvSpPr>
+        <p:spPr bwMode="auto">
+          <a:xfrm rot="0" flipH="0" flipV="0">
+            <a:off x="5818187" y="495224"/>
+            <a:ext cx="5032435" cy="1006200"/>
+          </a:xfrm>
+          <a:prstGeom prst="rect">
+            <a:avLst/>
+          </a:prstGeom>
+          <a:noFill/>
+        </p:spPr>
+        <p:txBody>
+          <a:bodyPr vertOverflow="overflow" horzOverflow="overflow" vert="horz" wrap="square" lIns="91440" tIns="45720" rIns="91440" bIns="45720" numCol="1" spcCol="0" rtlCol="0" fromWordArt="0" anchor="t" anchorCtr="0" forceAA="0" upright="0" compatLnSpc="0">
+            <a:spAutoFit/>
+          </a:bodyPr>
+          <a:p>
+            <a:pPr algn="l">
+              <a:defRPr/>
+            </a:pPr>
+            <a:r>
+              <a:rPr lang="pt-BR" sz="1200"/>
+              <a:t>Porra é essa vei</a:t>
+            </a:r>
+            <a:br>
+              <a:rPr lang="pt-BR" sz="1200"/>
+            </a:br>
+            <a:br>
+              <a:rPr lang="pt-BR" sz="1200"/>
+            </a:br>
+            <a:r>
+              <a:rPr lang="pt-BR" sz="1200"/>
+              <a:t>O step definido nunca vai escolher um valor negativo, ele precisa ser definido fora da função `roots.proflik()` senão, se for negativo, vai sempre virar positivo por isso não tem perfil a esquerda. </a:t>
+            </a:r>
+            <a:endParaRPr sz="1800"/>
+          </a:p>
+        </p:txBody>
+      </p:sp>
+    </p:spTree>
+  </p:cSld>
+  <p:clrMapOvr>
+    <a:masterClrMapping/>
+  </p:clrMapOvr>
+  <mc:AlternateContent xmlns:mc="http://schemas.openxmlformats.org/markup-compatibility/2006">
+    <mc:Choice xmlns:p159="http://schemas.microsoft.com/office/powerpoint/2015/09/main" xmlns:p14="http://schemas.microsoft.com/office/powerpoint/2010/main" Requires="p159">
+      <p:transition p14:dur="500" advClick="1"/>
+    </mc:Choice>
+    <mc:Fallback>
+      <p:transition advClick="1"/>
+    </mc:Fallback>
+  </mc:AlternateContent>
+</p:sld>
+</file>
+
+<file path=ppt/slides/slide13.xml><?xml version="1.0" encoding="utf-8"?>
+<p:sld xmlns:a="http://schemas.openxmlformats.org/drawingml/2006/main" xmlns:r="http://schemas.openxmlformats.org/officeDocument/2006/relationships" xmlns:p="http://schemas.openxmlformats.org/presentationml/2006/main" xmlns:m="http://schemas.openxmlformats.org/officeDocument/2006/math" xmlns:w="http://schemas.openxmlformats.org/wordprocessingml/2006/main" xmlns:mc="http://schemas.openxmlformats.org/markup-compatibility/2006" showMasterPhAnim="0" showMasterSp="1" show="1">
+  <p:cSld name="">
+    <p:spTree>
+      <p:nvGrpSpPr>
+        <p:cNvPr id="1" name=""/>
+        <p:cNvGrpSpPr/>
+        <p:nvPr/>
+      </p:nvGrpSpPr>
+      <p:grpSpPr bwMode="auto">
+        <a:xfrm>
+          <a:off x="0" y="0"/>
+          <a:ext cx="0" cy="0"/>
+          <a:chOff x="0" y="0"/>
+          <a:chExt cx="0" cy="0"/>
+        </a:xfrm>
+      </p:grpSpPr>
+      <p:sp>
+        <p:nvSpPr>
+          <p:cNvPr id="1398150097" name=""/>
+          <p:cNvSpPr/>
+          <p:nvPr/>
+        </p:nvSpPr>
+        <p:spPr bwMode="auto">
+          <a:xfrm flipH="0" flipV="0">
+            <a:off x="258912" y="251564"/>
+            <a:ext cx="4932686" cy="1036678"/>
+          </a:xfrm>
+        </p:spPr>
+        <p:txBody>
+          <a:bodyPr rot="0" spcFirstLastPara="0" vertOverflow="overflow" horzOverflow="overflow" vert="horz" wrap="square" lIns="91440" tIns="45720" rIns="91440" bIns="45720" numCol="1" spcCol="0" rtlCol="0" fromWordArt="0" anchor="t" anchorCtr="0" forceAA="0" upright="0" compatLnSpc="1">
+            <a:prstTxWarp prst="textNoShape"/>
+            <a:spAutoFit/>
+          </a:bodyPr>
+          <a:p>
+            <a:pPr>
+              <a:defRPr/>
+            </a:pPr>
+            <a:r>
+              <a:rPr lang="pt-BR" sz="1200"/>
+              <a:t>A solução que está sendo testada é simplesmente adaptar o passo de busca, adicionando um `jitter` de 1e-7 no passo, para que ele nunca teste um valor múltiplo do proprio parâmetro.</a:t>
+            </a:r>
+            <a:br>
+              <a:rPr lang="pt-BR" sz="1200"/>
+            </a:br>
+            <a:br>
+              <a:rPr sz="1400"/>
+            </a:br>
+            <a:r>
+              <a:rPr sz="1200" b="0" i="0" u="none">
+                <a:solidFill>
+                  <a:srgbClr val="C0CAF5"/>
+                </a:solidFill>
+                <a:latin typeface="RobotoMono Nerd Font"/>
+                <a:ea typeface="RobotoMono Nerd Font"/>
+                <a:cs typeface="RobotoMono Nerd Font"/>
+              </a:rPr>
+              <a:t>step.i</a:t>
+            </a:r>
+            <a:r>
+              <a:rPr sz="1200" b="0" i="0" u="none">
+                <a:solidFill>
+                  <a:srgbClr val="A9B1D6"/>
+                </a:solidFill>
+                <a:latin typeface="RobotoMono Nerd Font"/>
+                <a:ea typeface="RobotoMono Nerd Font"/>
+                <a:cs typeface="RobotoMono Nerd Font"/>
+              </a:rPr>
+              <a:t> </a:t>
+            </a:r>
+            <a:r>
+              <a:rPr sz="1200" b="0" i="0" u="none">
+                <a:solidFill>
+                  <a:srgbClr val="89DDFF"/>
+                </a:solidFill>
+                <a:latin typeface="RobotoMono Nerd Font"/>
+                <a:ea typeface="RobotoMono Nerd Font"/>
+                <a:cs typeface="RobotoMono Nerd Font"/>
+              </a:rPr>
+              <a:t>&lt;-</a:t>
+            </a:r>
+            <a:r>
+              <a:rPr sz="1200" b="0" i="0" u="none">
+                <a:solidFill>
+                  <a:srgbClr val="A9B1D6"/>
+                </a:solidFill>
+                <a:latin typeface="RobotoMono Nerd Font"/>
+                <a:ea typeface="RobotoMono Nerd Font"/>
+                <a:cs typeface="RobotoMono Nerd Font"/>
+              </a:rPr>
+              <a:t> </a:t>
+            </a:r>
+            <a:r>
+              <a:rPr sz="1200" b="0" i="0" u="none">
+                <a:solidFill>
+                  <a:srgbClr val="7AA2F7"/>
+                </a:solidFill>
+                <a:latin typeface="RobotoMono Nerd Font"/>
+                <a:ea typeface="RobotoMono Nerd Font"/>
+                <a:cs typeface="RobotoMono Nerd Font"/>
+              </a:rPr>
+              <a:t>max</a:t>
+            </a:r>
+            <a:r>
+              <a:rPr sz="1200" b="0" i="0" u="none">
+                <a:solidFill>
+                  <a:srgbClr val="A9B1D6"/>
+                </a:solidFill>
+                <a:latin typeface="RobotoMono Nerd Font"/>
+                <a:ea typeface="RobotoMono Nerd Font"/>
+                <a:cs typeface="RobotoMono Nerd Font"/>
+              </a:rPr>
+              <a:t>(</a:t>
+            </a:r>
+            <a:r>
+              <a:rPr sz="1200" b="0" i="0" u="none">
+                <a:solidFill>
+                  <a:srgbClr val="7AA2F7"/>
+                </a:solidFill>
+                <a:latin typeface="RobotoMono Nerd Font"/>
+                <a:ea typeface="RobotoMono Nerd Font"/>
+                <a:cs typeface="RobotoMono Nerd Font"/>
+              </a:rPr>
+              <a:t>abs</a:t>
+            </a:r>
+            <a:r>
+              <a:rPr sz="1200" b="0" i="0" u="none">
+                <a:solidFill>
+                  <a:srgbClr val="A9B1D6"/>
+                </a:solidFill>
+                <a:latin typeface="RobotoMono Nerd Font"/>
+                <a:ea typeface="RobotoMono Nerd Font"/>
+                <a:cs typeface="RobotoMono Nerd Font"/>
+              </a:rPr>
+              <a:t>(</a:t>
+            </a:r>
+            <a:r>
+              <a:rPr sz="1200" b="0" i="0" u="none">
+                <a:solidFill>
+                  <a:srgbClr val="C0CAF5"/>
+                </a:solidFill>
+                <a:latin typeface="RobotoMono Nerd Font"/>
+                <a:ea typeface="RobotoMono Nerd Font"/>
+                <a:cs typeface="RobotoMono Nerd Font"/>
+              </a:rPr>
+              <a:t>step</a:t>
+            </a:r>
+            <a:r>
+              <a:rPr sz="1200" b="0" i="0" u="none">
+                <a:solidFill>
+                  <a:srgbClr val="A9B1D6"/>
+                </a:solidFill>
+                <a:latin typeface="RobotoMono Nerd Font"/>
+                <a:ea typeface="RobotoMono Nerd Font"/>
+                <a:cs typeface="RobotoMono Nerd Font"/>
+              </a:rPr>
+              <a:t> </a:t>
+            </a:r>
+            <a:r>
+              <a:rPr sz="1200" b="0" i="0" u="none">
+                <a:solidFill>
+                  <a:srgbClr val="89DDFF"/>
+                </a:solidFill>
+                <a:latin typeface="RobotoMono Nerd Font"/>
+                <a:ea typeface="RobotoMono Nerd Font"/>
+                <a:cs typeface="RobotoMono Nerd Font"/>
+              </a:rPr>
+              <a:t>*</a:t>
+            </a:r>
+            <a:r>
+              <a:rPr sz="1200" b="0" i="0" u="none">
+                <a:solidFill>
+                  <a:srgbClr val="A9B1D6"/>
+                </a:solidFill>
+                <a:latin typeface="RobotoMono Nerd Font"/>
+                <a:ea typeface="RobotoMono Nerd Font"/>
+                <a:cs typeface="RobotoMono Nerd Font"/>
+              </a:rPr>
+              <a:t> </a:t>
+            </a:r>
+            <a:r>
+              <a:rPr sz="1200" b="0" i="0" u="none">
+                <a:solidFill>
+                  <a:srgbClr val="C0CAF5"/>
+                </a:solidFill>
+                <a:latin typeface="RobotoMono Nerd Font"/>
+                <a:ea typeface="RobotoMono Nerd Font"/>
+                <a:cs typeface="RobotoMono Nerd Font"/>
+              </a:rPr>
+              <a:t>par</a:t>
+            </a:r>
+            <a:r>
+              <a:rPr sz="1200" b="0" i="0" u="none">
+                <a:solidFill>
+                  <a:srgbClr val="A9B1D6"/>
+                </a:solidFill>
+                <a:latin typeface="RobotoMono Nerd Font"/>
+                <a:ea typeface="RobotoMono Nerd Font"/>
+                <a:cs typeface="RobotoMono Nerd Font"/>
+              </a:rPr>
+              <a:t>[[</a:t>
+            </a:r>
+            <a:r>
+              <a:rPr sz="1200" b="0" i="0" u="none">
+                <a:solidFill>
+                  <a:srgbClr val="C0CAF5"/>
+                </a:solidFill>
+                <a:latin typeface="RobotoMono Nerd Font"/>
+                <a:ea typeface="RobotoMono Nerd Font"/>
+                <a:cs typeface="RobotoMono Nerd Font"/>
+              </a:rPr>
+              <a:t>i</a:t>
+            </a:r>
+            <a:r>
+              <a:rPr sz="1200" b="0" i="0" u="none">
+                <a:solidFill>
+                  <a:srgbClr val="A9B1D6"/>
+                </a:solidFill>
+                <a:latin typeface="RobotoMono Nerd Font"/>
+                <a:ea typeface="RobotoMono Nerd Font"/>
+                <a:cs typeface="RobotoMono Nerd Font"/>
+              </a:rPr>
+              <a:t>]])</a:t>
+            </a:r>
+            <a:r>
+              <a:rPr sz="1200" b="0" i="0" u="none">
+                <a:solidFill>
+                  <a:srgbClr val="89DDFF"/>
+                </a:solidFill>
+                <a:latin typeface="RobotoMono Nerd Font"/>
+                <a:ea typeface="RobotoMono Nerd Font"/>
+                <a:cs typeface="RobotoMono Nerd Font"/>
+              </a:rPr>
+              <a:t>,</a:t>
+            </a:r>
+            <a:r>
+              <a:rPr sz="1200" b="0" i="0" u="none">
+                <a:solidFill>
+                  <a:srgbClr val="A9B1D6"/>
+                </a:solidFill>
+                <a:latin typeface="RobotoMono Nerd Font"/>
+                <a:ea typeface="RobotoMono Nerd Font"/>
+                <a:cs typeface="RobotoMono Nerd Font"/>
+              </a:rPr>
+              <a:t> </a:t>
+            </a:r>
+            <a:r>
+              <a:rPr sz="1200" b="0" i="0" u="none">
+                <a:solidFill>
+                  <a:srgbClr val="C0CAF5"/>
+                </a:solidFill>
+                <a:latin typeface="RobotoMono Nerd Font"/>
+                <a:ea typeface="RobotoMono Nerd Font"/>
+                <a:cs typeface="RobotoMono Nerd Font"/>
+              </a:rPr>
+              <a:t>step</a:t>
+            </a:r>
+            <a:r>
+              <a:rPr sz="1200" b="0" i="0" u="none">
+                <a:solidFill>
+                  <a:srgbClr val="A9B1D6"/>
+                </a:solidFill>
+                <a:latin typeface="RobotoMono Nerd Font"/>
+                <a:ea typeface="RobotoMono Nerd Font"/>
+                <a:cs typeface="RobotoMono Nerd Font"/>
+              </a:rPr>
+              <a:t>) </a:t>
+            </a:r>
+            <a:r>
+              <a:rPr sz="1200" b="0" i="0" u="none">
+                <a:solidFill>
+                  <a:srgbClr val="89DDFF"/>
+                </a:solidFill>
+                <a:latin typeface="RobotoMono Nerd Font"/>
+                <a:ea typeface="RobotoMono Nerd Font"/>
+                <a:cs typeface="RobotoMono Nerd Font"/>
+              </a:rPr>
+              <a:t>+</a:t>
+            </a:r>
+            <a:r>
+              <a:rPr sz="1200" b="0" i="0" u="none">
+                <a:solidFill>
+                  <a:srgbClr val="A9B1D6"/>
+                </a:solidFill>
+                <a:latin typeface="RobotoMono Nerd Font"/>
+                <a:ea typeface="RobotoMono Nerd Font"/>
+                <a:cs typeface="RobotoMono Nerd Font"/>
+              </a:rPr>
+              <a:t> </a:t>
+            </a:r>
+            <a:r>
+              <a:rPr sz="1200" b="0" i="0" u="none">
+                <a:solidFill>
+                  <a:srgbClr val="FF9E64"/>
+                </a:solidFill>
+                <a:latin typeface="RobotoMono Nerd Font"/>
+                <a:ea typeface="RobotoMono Nerd Font"/>
+                <a:cs typeface="RobotoMono Nerd Font"/>
+              </a:rPr>
+              <a:t>1e-7</a:t>
+            </a:r>
+            <a:endParaRPr sz="1400"/>
+          </a:p>
+        </p:txBody>
+      </p:sp>
+      <p:pic>
+        <p:nvPicPr>
+          <p:cNvPr id="1868051164" name=""/>
+          <p:cNvPicPr>
+            <a:picLocks noChangeAspect="1"/>
+          </p:cNvPicPr>
+          <p:nvPr/>
+        </p:nvPicPr>
+        <p:blipFill rotWithShape="1">
+          <a:blip r:embed="rId3"/>
+          <a:stretch/>
+        </p:blipFill>
+        <p:spPr bwMode="auto">
+          <a:xfrm>
+            <a:off x="429098" y="1419752"/>
+            <a:ext cx="4762498" cy="2933698"/>
+          </a:xfrm>
+          <a:prstGeom prst="rect">
+            <a:avLst/>
+          </a:prstGeom>
+        </p:spPr>
+      </p:pic>
+      <p:pic>
+        <p:nvPicPr>
+          <p:cNvPr id="2001166158" name=""/>
+          <p:cNvPicPr>
+            <a:picLocks noChangeAspect="1"/>
+          </p:cNvPicPr>
+          <p:nvPr/>
+        </p:nvPicPr>
+        <p:blipFill rotWithShape="1">
+          <a:blip r:embed="rId4"/>
+          <a:stretch/>
+        </p:blipFill>
+        <p:spPr bwMode="auto">
+          <a:xfrm>
+            <a:off x="5540373" y="611857"/>
+            <a:ext cx="4762498" cy="2933698"/>
+          </a:xfrm>
+          <a:prstGeom prst="rect">
+            <a:avLst/>
+          </a:prstGeom>
+        </p:spPr>
+      </p:pic>
+      <p:sp>
+        <p:nvSpPr>
+          <p:cNvPr id="249826768" name=""/>
+          <p:cNvSpPr txBox="1"/>
+          <p:nvPr/>
+        </p:nvSpPr>
+        <p:spPr bwMode="auto">
+          <a:xfrm rot="0" flipH="0" flipV="0">
+            <a:off x="5864878" y="251564"/>
+            <a:ext cx="5034954" cy="640440"/>
+          </a:xfrm>
+          <a:prstGeom prst="rect">
+            <a:avLst/>
+          </a:prstGeom>
+          <a:noFill/>
+        </p:spPr>
+        <p:txBody>
+          <a:bodyPr vertOverflow="overflow" horzOverflow="overflow" vert="horz" wrap="square" lIns="91440" tIns="45720" rIns="91440" bIns="45720" numCol="1" spcCol="0" rtlCol="0" fromWordArt="0" anchor="t" anchorCtr="0" forceAA="0" upright="0" compatLnSpc="0">
+            <a:spAutoFit/>
+          </a:bodyPr>
+          <a:p>
+            <a:pPr algn="l">
+              <a:defRPr/>
+            </a:pPr>
+            <a:r>
+              <a:rPr lang="pt-BR" sz="1200"/>
+              <a:t>O step definido nunca vai escolher um valor negativo, ele precisa ser definido fora da função `roots.proflik()` senão, se for negativo, vai sempre virar positivo por isso não tem perfil a esquerda. </a:t>
+            </a:r>
+            <a:endParaRPr sz="1800"/>
+          </a:p>
+        </p:txBody>
+      </p:sp>
+      <p:sp>
+        <p:nvSpPr>
+          <p:cNvPr id="979031476" name=""/>
+          <p:cNvSpPr txBox="1"/>
+          <p:nvPr/>
+        </p:nvSpPr>
+        <p:spPr bwMode="auto">
+          <a:xfrm rot="0" flipH="0" flipV="0">
+            <a:off x="5864878" y="4033231"/>
+            <a:ext cx="5035673" cy="366119"/>
+          </a:xfrm>
+          <a:prstGeom prst="rect">
+            <a:avLst/>
+          </a:prstGeom>
+          <a:noFill/>
+        </p:spPr>
+        <p:txBody>
+          <a:bodyPr vertOverflow="overflow" horzOverflow="overflow" vert="horz" wrap="square" lIns="91440" tIns="45720" rIns="91440" bIns="45720" numCol="1" spcCol="0" rtlCol="0" fromWordArt="0" anchor="t" anchorCtr="0" forceAA="0" upright="0" compatLnSpc="0">
+            <a:spAutoFit/>
+          </a:bodyPr>
+          <a:p>
+            <a:pPr algn="l">
+              <a:defRPr/>
+            </a:pPr>
+            <a:endParaRPr sz="1800"/>
+          </a:p>
+        </p:txBody>
+      </p:sp>
+      <p:sp>
+        <p:nvSpPr>
+          <p:cNvPr id="745247658" name=""/>
+          <p:cNvSpPr/>
+          <p:nvPr/>
+        </p:nvSpPr>
+        <p:spPr bwMode="auto">
+          <a:xfrm flipH="0" flipV="0">
+            <a:off x="5864878" y="3567111"/>
+            <a:ext cx="5126394" cy="808079"/>
+          </a:xfrm>
+        </p:spPr>
+        <p:txBody>
+          <a:bodyPr rot="0" spcFirstLastPara="0" vertOverflow="overflow" horzOverflow="overflow" vert="horz" wrap="square" lIns="91440" tIns="45720" rIns="91440" bIns="45720" numCol="1" spcCol="0" rtlCol="0" fromWordArt="0" anchor="t" anchorCtr="0" forceAA="0" upright="0" compatLnSpc="1">
+            <a:prstTxWarp prst="textNoShape"/>
+            <a:spAutoFit/>
+          </a:bodyPr>
+          <a:p>
+            <a:pPr>
+              <a:defRPr/>
+            </a:pPr>
+            <a:r>
+              <a:rPr lang="pt-BR" sz="1200" b="0" i="0" u="none">
+                <a:solidFill>
+                  <a:schemeClr val="tx1"/>
+                </a:solidFill>
+                <a:latin typeface="Arial"/>
+                <a:ea typeface="Arial"/>
+                <a:cs typeface="Arial"/>
+              </a:rPr>
+              <a:t>A solução foi mover o mesmo ajuste do passo pra fora da função ciprof.par() e passar -step.par ou +step.par na função roots.proflik() a depender de qual lado se deseja procurar a raiz (esquerda ou direita)</a:t>
+            </a:r>
+            <a:endParaRPr sz="1200">
+              <a:solidFill>
+                <a:schemeClr val="tx1"/>
+              </a:solidFill>
+              <a:latin typeface="Arial"/>
+              <a:cs typeface="Arial"/>
+            </a:endParaRPr>
+          </a:p>
+          <a:p>
+            <a:pPr>
+              <a:defRPr/>
+            </a:pPr>
+            <a:r>
+              <a:rPr sz="1100" b="0" i="0" u="none">
+                <a:solidFill>
+                  <a:srgbClr val="C0CAF5"/>
+                </a:solidFill>
+                <a:latin typeface="RobotoMono Nerd Font"/>
+                <a:ea typeface="RobotoMono Nerd Font"/>
+                <a:cs typeface="RobotoMono Nerd Font"/>
+              </a:rPr>
+              <a:t>step.par</a:t>
+            </a:r>
+            <a:r>
+              <a:rPr sz="1100" b="0" i="0" u="none">
+                <a:solidFill>
+                  <a:srgbClr val="A9B1D6"/>
+                </a:solidFill>
+                <a:latin typeface="RobotoMono Nerd Font"/>
+                <a:ea typeface="RobotoMono Nerd Font"/>
+                <a:cs typeface="RobotoMono Nerd Font"/>
+              </a:rPr>
+              <a:t> </a:t>
+            </a:r>
+            <a:r>
+              <a:rPr sz="1100" b="0" i="0" u="none">
+                <a:solidFill>
+                  <a:srgbClr val="89DDFF"/>
+                </a:solidFill>
+                <a:latin typeface="RobotoMono Nerd Font"/>
+                <a:ea typeface="RobotoMono Nerd Font"/>
+                <a:cs typeface="RobotoMono Nerd Font"/>
+              </a:rPr>
+              <a:t>&lt;-</a:t>
+            </a:r>
+            <a:r>
+              <a:rPr sz="1100" b="0" i="0" u="none">
+                <a:solidFill>
+                  <a:srgbClr val="A9B1D6"/>
+                </a:solidFill>
+                <a:latin typeface="RobotoMono Nerd Font"/>
+                <a:ea typeface="RobotoMono Nerd Font"/>
+                <a:cs typeface="RobotoMono Nerd Font"/>
+              </a:rPr>
+              <a:t> </a:t>
+            </a:r>
+            <a:r>
+              <a:rPr sz="1100" b="0" i="0" u="none">
+                <a:solidFill>
+                  <a:srgbClr val="7AA2F7"/>
+                </a:solidFill>
+                <a:latin typeface="RobotoMono Nerd Font"/>
+                <a:ea typeface="RobotoMono Nerd Font"/>
+                <a:cs typeface="RobotoMono Nerd Font"/>
+              </a:rPr>
+              <a:t>max</a:t>
+            </a:r>
+            <a:r>
+              <a:rPr sz="1100" b="0" i="0" u="none">
+                <a:solidFill>
+                  <a:srgbClr val="A9B1D6"/>
+                </a:solidFill>
+                <a:latin typeface="RobotoMono Nerd Font"/>
+                <a:ea typeface="RobotoMono Nerd Font"/>
+                <a:cs typeface="RobotoMono Nerd Font"/>
+              </a:rPr>
+              <a:t>(</a:t>
+            </a:r>
+            <a:r>
+              <a:rPr sz="1100" b="0" i="0" u="none">
+                <a:solidFill>
+                  <a:srgbClr val="7AA2F7"/>
+                </a:solidFill>
+                <a:latin typeface="RobotoMono Nerd Font"/>
+                <a:ea typeface="RobotoMono Nerd Font"/>
+                <a:cs typeface="RobotoMono Nerd Font"/>
+              </a:rPr>
+              <a:t>abs</a:t>
+            </a:r>
+            <a:r>
+              <a:rPr sz="1100" b="0" i="0" u="none">
+                <a:solidFill>
+                  <a:srgbClr val="A9B1D6"/>
+                </a:solidFill>
+                <a:latin typeface="RobotoMono Nerd Font"/>
+                <a:ea typeface="RobotoMono Nerd Font"/>
+                <a:cs typeface="RobotoMono Nerd Font"/>
+              </a:rPr>
+              <a:t>(</a:t>
+            </a:r>
+            <a:r>
+              <a:rPr sz="1100" b="0" i="0" u="none">
+                <a:solidFill>
+                  <a:srgbClr val="C0CAF5"/>
+                </a:solidFill>
+                <a:latin typeface="RobotoMono Nerd Font"/>
+                <a:ea typeface="RobotoMono Nerd Font"/>
+                <a:cs typeface="RobotoMono Nerd Font"/>
+              </a:rPr>
+              <a:t>step</a:t>
+            </a:r>
+            <a:r>
+              <a:rPr sz="1100" b="0" i="0" u="none">
+                <a:solidFill>
+                  <a:srgbClr val="89DDFF"/>
+                </a:solidFill>
+                <a:latin typeface="RobotoMono Nerd Font"/>
+                <a:ea typeface="RobotoMono Nerd Font"/>
+                <a:cs typeface="RobotoMono Nerd Font"/>
+              </a:rPr>
+              <a:t>*</a:t>
+            </a:r>
+            <a:r>
+              <a:rPr sz="1100" b="0" i="0" u="none">
+                <a:solidFill>
+                  <a:srgbClr val="C0CAF5"/>
+                </a:solidFill>
+                <a:latin typeface="RobotoMono Nerd Font"/>
+                <a:ea typeface="RobotoMono Nerd Font"/>
+                <a:cs typeface="RobotoMono Nerd Font"/>
+              </a:rPr>
+              <a:t>par</a:t>
+            </a:r>
+            <a:r>
+              <a:rPr sz="1100" b="0" i="0" u="none">
+                <a:solidFill>
+                  <a:srgbClr val="A9B1D6"/>
+                </a:solidFill>
+                <a:latin typeface="RobotoMono Nerd Font"/>
+                <a:ea typeface="RobotoMono Nerd Font"/>
+                <a:cs typeface="RobotoMono Nerd Font"/>
+              </a:rPr>
+              <a:t>[[</a:t>
+            </a:r>
+            <a:r>
+              <a:rPr sz="1100" b="0" i="0" u="none">
+                <a:solidFill>
+                  <a:srgbClr val="C0CAF5"/>
+                </a:solidFill>
+                <a:latin typeface="RobotoMono Nerd Font"/>
+                <a:ea typeface="RobotoMono Nerd Font"/>
+                <a:cs typeface="RobotoMono Nerd Font"/>
+              </a:rPr>
+              <a:t>i</a:t>
+            </a:r>
+            <a:r>
+              <a:rPr sz="1100" b="0" i="0" u="none">
+                <a:solidFill>
+                  <a:srgbClr val="A9B1D6"/>
+                </a:solidFill>
+                <a:latin typeface="RobotoMono Nerd Font"/>
+                <a:ea typeface="RobotoMono Nerd Font"/>
+                <a:cs typeface="RobotoMono Nerd Font"/>
+              </a:rPr>
+              <a:t>]])</a:t>
+            </a:r>
+            <a:r>
+              <a:rPr sz="1100" b="0" i="0" u="none">
+                <a:solidFill>
+                  <a:srgbClr val="89DDFF"/>
+                </a:solidFill>
+                <a:latin typeface="RobotoMono Nerd Font"/>
+                <a:ea typeface="RobotoMono Nerd Font"/>
+                <a:cs typeface="RobotoMono Nerd Font"/>
+              </a:rPr>
+              <a:t>,</a:t>
+            </a:r>
+            <a:r>
+              <a:rPr sz="1100" b="0" i="0" u="none">
+                <a:solidFill>
+                  <a:srgbClr val="A9B1D6"/>
+                </a:solidFill>
+                <a:latin typeface="RobotoMono Nerd Font"/>
+                <a:ea typeface="RobotoMono Nerd Font"/>
+                <a:cs typeface="RobotoMono Nerd Font"/>
+              </a:rPr>
+              <a:t> </a:t>
+            </a:r>
+            <a:r>
+              <a:rPr sz="1100" b="0" i="0" u="none">
+                <a:solidFill>
+                  <a:srgbClr val="C0CAF5"/>
+                </a:solidFill>
+                <a:latin typeface="RobotoMono Nerd Font"/>
+                <a:ea typeface="RobotoMono Nerd Font"/>
+                <a:cs typeface="RobotoMono Nerd Font"/>
+              </a:rPr>
+              <a:t>step</a:t>
+            </a:r>
+            <a:r>
+              <a:rPr sz="1100" b="0" i="0" u="none">
+                <a:solidFill>
+                  <a:srgbClr val="A9B1D6"/>
+                </a:solidFill>
+                <a:latin typeface="RobotoMono Nerd Font"/>
+                <a:ea typeface="RobotoMono Nerd Font"/>
+                <a:cs typeface="RobotoMono Nerd Font"/>
+              </a:rPr>
+              <a:t>) </a:t>
+            </a:r>
+            <a:r>
+              <a:rPr sz="1100" b="0" i="0" u="none">
+                <a:solidFill>
+                  <a:srgbClr val="89DDFF"/>
+                </a:solidFill>
+                <a:latin typeface="RobotoMono Nerd Font"/>
+                <a:ea typeface="RobotoMono Nerd Font"/>
+                <a:cs typeface="RobotoMono Nerd Font"/>
+              </a:rPr>
+              <a:t>+</a:t>
+            </a:r>
+            <a:r>
+              <a:rPr sz="1100" b="0" i="0" u="none">
+                <a:solidFill>
+                  <a:srgbClr val="A9B1D6"/>
+                </a:solidFill>
+                <a:latin typeface="RobotoMono Nerd Font"/>
+                <a:ea typeface="RobotoMono Nerd Font"/>
+                <a:cs typeface="RobotoMono Nerd Font"/>
+              </a:rPr>
+              <a:t> </a:t>
+            </a:r>
+            <a:r>
+              <a:rPr sz="1100" b="0" i="0" u="none">
+                <a:solidFill>
+                  <a:srgbClr val="FF9E64"/>
+                </a:solidFill>
+                <a:latin typeface="RobotoMono Nerd Font"/>
+                <a:ea typeface="RobotoMono Nerd Font"/>
+                <a:cs typeface="RobotoMono Nerd Font"/>
+              </a:rPr>
+              <a:t>1e-7</a:t>
+            </a:r>
+            <a:endParaRPr sz="1100" b="0" i="0" u="none">
+              <a:solidFill>
+                <a:srgbClr val="FF9E64"/>
+              </a:solidFill>
+              <a:latin typeface="RobotoMono Nerd Font"/>
+              <a:ea typeface="RobotoMono Nerd Font"/>
+              <a:cs typeface="RobotoMono Nerd Font"/>
+            </a:endParaRPr>
+          </a:p>
+        </p:txBody>
+      </p:sp>
+      <p:pic>
+        <p:nvPicPr>
+          <p:cNvPr id="1232400524" name=""/>
+          <p:cNvPicPr>
+            <a:picLocks noChangeAspect="1"/>
+          </p:cNvPicPr>
+          <p:nvPr/>
+        </p:nvPicPr>
+        <p:blipFill rotWithShape="1">
+          <a:blip r:embed="rId5"/>
+          <a:stretch/>
+        </p:blipFill>
+        <p:spPr bwMode="auto">
+          <a:xfrm flipH="0" flipV="0">
+            <a:off x="2555232" y="4543279"/>
+            <a:ext cx="3159476" cy="1954244"/>
+          </a:xfrm>
+          <a:prstGeom prst="rect">
+            <a:avLst/>
+          </a:prstGeom>
+        </p:spPr>
+      </p:pic>
+      <p:pic>
+        <p:nvPicPr>
+          <p:cNvPr id="271096974" name=""/>
+          <p:cNvPicPr>
+            <a:picLocks noChangeAspect="1"/>
+          </p:cNvPicPr>
+          <p:nvPr/>
+        </p:nvPicPr>
+        <p:blipFill rotWithShape="1">
+          <a:blip r:embed="rId6"/>
+          <a:stretch/>
+        </p:blipFill>
+        <p:spPr bwMode="auto">
+          <a:xfrm flipH="0" flipV="0">
+            <a:off x="6633558" y="4399351"/>
+            <a:ext cx="3589035" cy="2219941"/>
+          </a:xfrm>
+          <a:prstGeom prst="rect">
+            <a:avLst/>
+          </a:prstGeom>
+        </p:spPr>
+      </p:pic>
+    </p:spTree>
+  </p:cSld>
+  <p:clrMapOvr>
+    <a:masterClrMapping/>
+  </p:clrMapOvr>
+  <mc:AlternateContent xmlns:mc="http://schemas.openxmlformats.org/markup-compatibility/2006">
+    <mc:Choice xmlns:p159="http://schemas.microsoft.com/office/powerpoint/2015/09/main" xmlns:p14="http://schemas.microsoft.com/office/powerpoint/2010/main" Requires="p159">
+      <p:transition p14:dur="500" advClick="1"/>
+    </mc:Choice>
+    <mc:Fallback>
+      <p:transition advClick="1"/>
+    </mc:Fallback>
+  </mc:AlternateContent>
+</p:sld>
+</file>
+
+<file path=ppt/slides/slide14.xml><?xml version="1.0" encoding="utf-8"?>
+<p:sld xmlns:a="http://schemas.openxmlformats.org/drawingml/2006/main" xmlns:r="http://schemas.openxmlformats.org/officeDocument/2006/relationships" xmlns:p="http://schemas.openxmlformats.org/presentationml/2006/main" xmlns:m="http://schemas.openxmlformats.org/officeDocument/2006/math" xmlns:w="http://schemas.openxmlformats.org/wordprocessingml/2006/main" xmlns:mc="http://schemas.openxmlformats.org/markup-compatibility/2006" showMasterPhAnim="0" showMasterSp="1" show="1">
+  <p:cSld name="">
+    <p:spTree>
+      <p:nvGrpSpPr>
+        <p:cNvPr id="1" name=""/>
+        <p:cNvGrpSpPr/>
+        <p:nvPr/>
+      </p:nvGrpSpPr>
+      <p:grpSpPr bwMode="auto">
+        <a:xfrm>
+          <a:off x="0" y="0"/>
+          <a:ext cx="0" cy="0"/>
+          <a:chOff x="0" y="0"/>
+          <a:chExt cx="0" cy="0"/>
+        </a:xfrm>
+      </p:grpSpPr>
+      <p:sp>
+        <p:nvSpPr>
+          <p:cNvPr id="1403756199" name=""/>
+          <p:cNvSpPr/>
+          <p:nvPr/>
+        </p:nvSpPr>
+        <p:spPr bwMode="auto">
+          <a:xfrm flipH="0" flipV="0">
+            <a:off x="258912" y="251564"/>
+            <a:ext cx="5038166" cy="259439"/>
+          </a:xfrm>
+        </p:spPr>
+        <p:txBody>
+          <a:bodyPr rot="0" spcFirstLastPara="0" vertOverflow="overflow" horzOverflow="overflow" vert="horz" wrap="square" lIns="91440" tIns="45720" rIns="91440" bIns="45720" numCol="1" spcCol="0" rtlCol="0" fromWordArt="0" anchor="t" anchorCtr="0" forceAA="0" upright="0" compatLnSpc="1">
+            <a:prstTxWarp prst="textNoShape"/>
+            <a:spAutoFit/>
+          </a:bodyPr>
+          <a:p>
+            <a:pPr>
+              <a:defRPr/>
+            </a:pPr>
+            <a:r>
+              <a:rPr lang="pt-BR" sz="1100"/>
+              <a:t>Avaliar perfis `A801` com e sem priori:</a:t>
+            </a:r>
+            <a:endParaRPr sz="1100"/>
+          </a:p>
+        </p:txBody>
+      </p:sp>
+      <p:pic>
+        <p:nvPicPr>
+          <p:cNvPr id="242286363" name=""/>
+          <p:cNvPicPr>
+            <a:picLocks noChangeAspect="1"/>
+          </p:cNvPicPr>
+          <p:nvPr/>
+        </p:nvPicPr>
+        <p:blipFill rotWithShape="1">
+          <a:blip r:embed="rId3"/>
+          <a:stretch/>
+        </p:blipFill>
+        <p:spPr bwMode="auto">
+          <a:xfrm flipH="0" flipV="0">
+            <a:off x="258912" y="820176"/>
+            <a:ext cx="4707685" cy="2905777"/>
+          </a:xfrm>
+          <a:prstGeom prst="rect">
+            <a:avLst/>
+          </a:prstGeom>
+        </p:spPr>
+      </p:pic>
+      <p:sp>
+        <p:nvSpPr>
+          <p:cNvPr id="2071657138" name=""/>
+          <p:cNvSpPr/>
+          <p:nvPr/>
+        </p:nvSpPr>
+        <p:spPr bwMode="auto">
+          <a:xfrm flipH="0" flipV="0">
+            <a:off x="258912" y="511003"/>
+            <a:ext cx="5042485" cy="259439"/>
+          </a:xfrm>
+        </p:spPr>
+        <p:txBody>
+          <a:bodyPr rot="0" spcFirstLastPara="0" vertOverflow="overflow" horzOverflow="overflow" vert="horz" wrap="square" lIns="91440" tIns="45720" rIns="91440" bIns="45720" numCol="1" spcCol="0" rtlCol="0" fromWordArt="0" anchor="t" anchorCtr="0" forceAA="0" upright="0" compatLnSpc="1">
+            <a:prstTxWarp prst="textNoShape"/>
+            <a:spAutoFit/>
+          </a:bodyPr>
+          <a:p>
+            <a:pPr>
+              <a:defRPr/>
+            </a:pPr>
+            <a:r>
+              <a:rPr lang="pt-BR" sz="1100"/>
+              <a:t>Sem priori:</a:t>
+            </a:r>
+            <a:endParaRPr sz="1100"/>
+          </a:p>
+        </p:txBody>
+      </p:sp>
+      <p:pic>
+        <p:nvPicPr>
+          <p:cNvPr id="1981714565" name=""/>
+          <p:cNvPicPr>
+            <a:picLocks noChangeAspect="1"/>
+          </p:cNvPicPr>
+          <p:nvPr/>
+        </p:nvPicPr>
+        <p:blipFill rotWithShape="1">
+          <a:blip r:embed="rId4"/>
+          <a:stretch/>
+        </p:blipFill>
+        <p:spPr bwMode="auto">
+          <a:xfrm flipH="0" flipV="0">
+            <a:off x="258912" y="3909078"/>
+            <a:ext cx="4707685" cy="2905778"/>
+          </a:xfrm>
+          <a:prstGeom prst="rect">
+            <a:avLst/>
+          </a:prstGeom>
+        </p:spPr>
+      </p:pic>
+      <p:sp>
+        <p:nvSpPr>
+          <p:cNvPr id="2005406258" name=""/>
+          <p:cNvSpPr/>
+          <p:nvPr/>
+        </p:nvSpPr>
+        <p:spPr bwMode="auto">
+          <a:xfrm flipH="0" flipV="0">
+            <a:off x="258912" y="3649638"/>
+            <a:ext cx="5044284" cy="259439"/>
+          </a:xfrm>
+        </p:spPr>
+        <p:txBody>
+          <a:bodyPr rot="0" spcFirstLastPara="0" vertOverflow="overflow" horzOverflow="overflow" vert="horz" wrap="square" lIns="91440" tIns="45720" rIns="91440" bIns="45720" numCol="1" spcCol="0" rtlCol="0" fromWordArt="0" anchor="t" anchorCtr="0" forceAA="0" upright="0" compatLnSpc="1">
+            <a:prstTxWarp prst="textNoShape"/>
+            <a:spAutoFit/>
+          </a:bodyPr>
+          <a:p>
+            <a:pPr>
+              <a:defRPr/>
+            </a:pPr>
+            <a:r>
+              <a:rPr lang="pt-BR" sz="1100"/>
+              <a:t>Com priori:</a:t>
+            </a:r>
+            <a:endParaRPr sz="1100"/>
+          </a:p>
+        </p:txBody>
+      </p:sp>
+      <p:pic>
+        <p:nvPicPr>
+          <p:cNvPr id="1253496054" name=""/>
+          <p:cNvPicPr>
+            <a:picLocks noChangeAspect="1"/>
+          </p:cNvPicPr>
+          <p:nvPr/>
+        </p:nvPicPr>
+        <p:blipFill rotWithShape="1">
+          <a:blip r:embed="rId5"/>
+          <a:stretch/>
+        </p:blipFill>
+        <p:spPr bwMode="auto">
+          <a:xfrm flipH="0" flipV="0">
+            <a:off x="5929779" y="796429"/>
+            <a:ext cx="4664615" cy="2879193"/>
+          </a:xfrm>
+          <a:prstGeom prst="rect">
+            <a:avLst/>
+          </a:prstGeom>
+        </p:spPr>
+      </p:pic>
+      <p:pic>
+        <p:nvPicPr>
+          <p:cNvPr id="1882333262" name=""/>
+          <p:cNvPicPr>
+            <a:picLocks noChangeAspect="1"/>
+          </p:cNvPicPr>
+          <p:nvPr/>
+        </p:nvPicPr>
+        <p:blipFill rotWithShape="1">
+          <a:blip r:embed="rId6"/>
+          <a:stretch/>
+        </p:blipFill>
+        <p:spPr bwMode="auto">
+          <a:xfrm flipH="0" flipV="0">
+            <a:off x="5929779" y="3683531"/>
+            <a:ext cx="4664615" cy="2879193"/>
+          </a:xfrm>
+          <a:prstGeom prst="rect">
+            <a:avLst/>
+          </a:prstGeom>
+        </p:spPr>
+      </p:pic>
+    </p:spTree>
+  </p:cSld>
+  <p:clrMapOvr>
+    <a:masterClrMapping/>
+  </p:clrMapOvr>
+  <mc:AlternateContent xmlns:mc="http://schemas.openxmlformats.org/markup-compatibility/2006">
+    <mc:Choice xmlns:p159="http://schemas.microsoft.com/office/powerpoint/2015/09/main" xmlns:p14="http://schemas.microsoft.com/office/powerpoint/2010/main" Requires="p159">
+      <p:transition p14:dur="500" advClick="1"/>
+    </mc:Choice>
+    <mc:Fallback>
+      <p:transition advClick="1"/>
+    </mc:Fallback>
+  </mc:AlternateContent>
+</p:sld>
+</file>
+
+<file path=ppt/slides/slide15.xml><?xml version="1.0" encoding="utf-8"?>
+<p:sld xmlns:a="http://schemas.openxmlformats.org/drawingml/2006/main" xmlns:r="http://schemas.openxmlformats.org/officeDocument/2006/relationships" xmlns:p="http://schemas.openxmlformats.org/presentationml/2006/main" xmlns:m="http://schemas.openxmlformats.org/officeDocument/2006/math" xmlns:w="http://schemas.openxmlformats.org/wordprocessingml/2006/main" xmlns:mc="http://schemas.openxmlformats.org/markup-compatibility/2006" showMasterPhAnim="0" showMasterSp="1" show="1">
+  <p:cSld name="">
+    <p:spTree>
+      <p:nvGrpSpPr>
+        <p:cNvPr id="1" name=""/>
+        <p:cNvGrpSpPr/>
+        <p:nvPr/>
+      </p:nvGrpSpPr>
+      <p:grpSpPr bwMode="auto">
+        <a:xfrm>
+          <a:off x="0" y="0"/>
+          <a:ext cx="0" cy="0"/>
+          <a:chOff x="0" y="0"/>
+          <a:chExt cx="0" cy="0"/>
+        </a:xfrm>
+      </p:grpSpPr>
+      <p:sp>
+        <p:nvSpPr>
+          <p:cNvPr id="101664103" name="PlaceHolder 1"/>
+          <p:cNvSpPr>
+            <a:spLocks noGrp="1"/>
+          </p:cNvSpPr>
+          <p:nvPr>
+            <p:ph type="title"/>
+          </p:nvPr>
+        </p:nvSpPr>
+        <p:spPr bwMode="auto">
+          <a:xfrm flipH="0" flipV="0">
+            <a:off x="119035" y="122245"/>
+            <a:ext cx="4429640" cy="307312"/>
+          </a:xfrm>
+          <a:prstGeom prst="rect">
+            <a:avLst/>
+          </a:prstGeom>
+          <a:noFill/>
+          <a:ln w="0">
+            <a:noFill/>
+          </a:ln>
+        </p:spPr>
+        <p:txBody>
+          <a:bodyPr/>
+          <a:lstStyle/>
+          <a:p>
+            <a:pPr>
+              <a:defRPr/>
+            </a:pPr>
+            <a:r>
+              <a:rPr sz="1200" b="1">
+                <a:latin typeface="Arial"/>
+                <a:ea typeface="Arial"/>
+                <a:cs typeface="Arial"/>
+              </a:rPr>
+              <a:t>Resultados com as funções finalizadas</a:t>
+            </a:r>
+            <a:endParaRPr sz="1200" b="1">
+              <a:latin typeface="Arial"/>
+              <a:cs typeface="Arial"/>
+            </a:endParaRPr>
+          </a:p>
+        </p:txBody>
+      </p:sp>
+      <p:sp>
+        <p:nvSpPr>
+          <p:cNvPr id="1525801545" name="PlaceHolder 1"/>
+          <p:cNvSpPr>
+            <a:spLocks noGrp="1"/>
+          </p:cNvSpPr>
+          <p:nvPr/>
+        </p:nvSpPr>
+        <p:spPr bwMode="auto">
+          <a:xfrm flipH="0" flipV="0">
+            <a:off x="119035" y="581956"/>
+            <a:ext cx="5232728" cy="307311"/>
+          </a:xfrm>
+          <a:prstGeom prst="rect">
+            <a:avLst/>
+          </a:prstGeom>
+          <a:noFill/>
+          <a:ln w="0">
+            <a:noFill/>
+          </a:ln>
+        </p:spPr>
+        <p:txBody>
+          <a:bodyPr lIns="91440" tIns="45720" rIns="91440" bIns="45720" anchor="ctr">
+            <a:noAutofit/>
+          </a:bodyPr>
+          <a:lstStyle>
+            <a:lvl1pPr indent="0" algn="l" defTabSz="914400">
+              <a:lnSpc>
+                <a:spcPct val="90000"/>
+              </a:lnSpc>
+              <a:buNone/>
+              <a:defRPr lang="pt-BR" sz="100" b="1" u="none" strike="noStrike">
+                <a:solidFill>
+                  <a:schemeClr val="dk1"/>
+                </a:solidFill>
+                <a:latin typeface="Arial"/>
+                <a:ea typeface="Arial"/>
+                <a:cs typeface="Arial"/>
+              </a:defRPr>
+            </a:lvl1pPr>
+          </a:lstStyle>
+          <a:p>
+            <a:pPr>
+              <a:defRPr/>
+            </a:pPr>
+            <a:r>
+              <a:rPr sz="1200" b="0">
+                <a:latin typeface="Arial"/>
+                <a:ea typeface="Arial"/>
+                <a:cs typeface="Arial"/>
+              </a:rPr>
+              <a:t>Resultados de `parname == “kappa”` (posteriormente seria bom plotar a mesma figura pra todos os parâmetros)</a:t>
+            </a:r>
+            <a:endParaRPr sz="1200" b="0">
+              <a:latin typeface="Arial"/>
+              <a:cs typeface="Arial"/>
+            </a:endParaRPr>
+          </a:p>
+        </p:txBody>
+      </p:sp>
+      <p:pic>
+        <p:nvPicPr>
+          <p:cNvPr id="1783720791" name=""/>
+          <p:cNvPicPr>
+            <a:picLocks noChangeAspect="1"/>
+          </p:cNvPicPr>
+          <p:nvPr/>
+        </p:nvPicPr>
+        <p:blipFill rotWithShape="1">
+          <a:blip r:embed="rId3"/>
+          <a:stretch/>
+        </p:blipFill>
+        <p:spPr bwMode="auto">
+          <a:xfrm flipH="0" flipV="0">
+            <a:off x="119035" y="1165798"/>
+            <a:ext cx="4429640" cy="2529690"/>
+          </a:xfrm>
+          <a:prstGeom prst="rect">
+            <a:avLst/>
+          </a:prstGeom>
+        </p:spPr>
+      </p:pic>
+    </p:spTree>
+  </p:cSld>
+  <p:clrMapOvr>
+    <a:masterClrMapping/>
+  </p:clrMapOvr>
+  <mc:AlternateContent xmlns:mc="http://schemas.openxmlformats.org/markup-compatibility/2006">
+    <mc:Choice xmlns:p159="http://schemas.microsoft.com/office/powerpoint/2015/09/main" xmlns:p14="http://schemas.microsoft.com/office/powerpoint/2010/main" Requires="p159">
+      <p:transition p14:dur="500" advClick="1"/>
+    </mc:Choice>
+    <mc:Fallback>
+      <p:transition advClick="1"/>
+    </mc:Fallback>
+  </mc:AlternateContent>
+</p:sld>
+</file>
+
+<file path=ppt/slides/slide16.xml><?xml version="1.0" encoding="utf-8"?>
+<p:sld xmlns:a="http://schemas.openxmlformats.org/drawingml/2006/main" xmlns:r="http://schemas.openxmlformats.org/officeDocument/2006/relationships" xmlns:p="http://schemas.openxmlformats.org/presentationml/2006/main" xmlns:m="http://schemas.openxmlformats.org/officeDocument/2006/math" xmlns:w="http://schemas.openxmlformats.org/wordprocessingml/2006/main" xmlns:mc="http://schemas.openxmlformats.org/markup-compatibility/2006" showMasterPhAnim="0" showMasterSp="1" show="1">
+  <p:cSld name="">
+    <p:spTree>
+      <p:nvGrpSpPr>
+        <p:cNvPr id="1" name=""/>
+        <p:cNvGrpSpPr/>
+        <p:nvPr/>
+      </p:nvGrpSpPr>
+      <p:grpSpPr bwMode="auto">
+        <a:xfrm>
+          <a:off x="0" y="0"/>
+          <a:ext cx="0" cy="0"/>
+          <a:chOff x="0" y="0"/>
+          <a:chExt cx="0" cy="0"/>
+        </a:xfrm>
+      </p:grpSpPr>
+      <p:sp>
+        <p:nvSpPr>
+          <p:cNvPr id="693072479" name="PlaceHolder 1"/>
+          <p:cNvSpPr>
+            <a:spLocks noGrp="1"/>
+          </p:cNvSpPr>
+          <p:nvPr>
+            <p:ph type="title"/>
+          </p:nvPr>
+        </p:nvSpPr>
+        <p:spPr bwMode="auto">
+          <a:xfrm flipH="0" flipV="0">
+            <a:off x="119034" y="122244"/>
+            <a:ext cx="4429639" cy="307311"/>
+          </a:xfrm>
+          <a:prstGeom prst="rect">
+            <a:avLst/>
+          </a:prstGeom>
+          <a:noFill/>
+          <a:ln w="0">
+            <a:noFill/>
+          </a:ln>
+        </p:spPr>
+        <p:txBody>
+          <a:bodyPr/>
+          <a:lstStyle/>
+          <a:p>
+            <a:pPr>
+              <a:defRPr/>
+            </a:pPr>
+            <a:r>
+              <a:rPr sz="1200" b="1">
+                <a:latin typeface="Arial"/>
+                <a:ea typeface="Arial"/>
+                <a:cs typeface="Arial"/>
+              </a:rPr>
+              <a:t>Resultados com as funções finalizadas</a:t>
+            </a:r>
+            <a:endParaRPr sz="1200" b="1">
+              <a:latin typeface="Arial"/>
+              <a:cs typeface="Arial"/>
+            </a:endParaRPr>
+          </a:p>
+        </p:txBody>
+      </p:sp>
+      <p:sp>
+        <p:nvSpPr>
+          <p:cNvPr id="2022301747" name="PlaceHolder 1"/>
+          <p:cNvSpPr>
+            <a:spLocks noGrp="1"/>
+          </p:cNvSpPr>
+          <p:nvPr/>
+        </p:nvSpPr>
+        <p:spPr bwMode="auto">
+          <a:xfrm rot="0" flipH="0" flipV="0">
+            <a:off x="118800" y="374400"/>
+            <a:ext cx="5440428" cy="914760"/>
+          </a:xfrm>
+          <a:prstGeom prst="rect">
+            <a:avLst/>
+          </a:prstGeom>
+          <a:noFill/>
+          <a:ln w="0">
+            <a:noFill/>
+          </a:ln>
+        </p:spPr>
+        <p:txBody>
+          <a:bodyPr vertOverflow="overflow" horzOverflow="overflow" vert="horz" wrap="square" lIns="91440" tIns="45720" rIns="91440" bIns="45720" numCol="1" spcCol="0" rtlCol="0" fromWordArt="0" anchor="t" anchorCtr="0" forceAA="0" upright="0" compatLnSpc="0">
+            <a:spAutoFit/>
+          </a:bodyPr>
+          <a:lstStyle>
+            <a:lvl1pPr indent="0" algn="l" defTabSz="914400">
+              <a:lnSpc>
+                <a:spcPct val="90000"/>
+              </a:lnSpc>
+              <a:buNone/>
+              <a:defRPr lang="pt-BR" sz="100" b="1" u="none" strike="noStrike">
+                <a:solidFill>
+                  <a:schemeClr val="dk1"/>
+                </a:solidFill>
+                <a:latin typeface="Arial"/>
+                <a:ea typeface="Arial"/>
+                <a:cs typeface="Arial"/>
+              </a:defRPr>
+            </a:lvl1pPr>
+          </a:lstStyle>
+          <a:p>
+            <a:pPr>
+              <a:defRPr/>
+            </a:pPr>
+            <a:r>
+              <a:rPr sz="1200" b="0">
+                <a:latin typeface="Arial"/>
+                <a:ea typeface="Arial"/>
+                <a:cs typeface="Arial"/>
+              </a:rPr>
+              <a:t>Análises das curvas Y, ou a(T) e comparações com as observações de y. Y_p foi gerado multiplicando as estimativas dos quantis I_d,p*(d + theta)^H</a:t>
+            </a:r>
+            <a:r>
+              <a:rPr sz="1200" b="0">
+                <a:latin typeface="Arial"/>
+                <a:cs typeface="Arial"/>
+              </a:rPr>
+              <a:t>.</a:t>
+            </a:r>
+            <a:br>
+              <a:rPr sz="1200" b="0">
+                <a:latin typeface="Arial"/>
+                <a:cs typeface="Arial"/>
+              </a:rPr>
+            </a:br>
+            <a:r>
+              <a:rPr sz="1200" b="0">
+                <a:latin typeface="Arial"/>
+                <a:cs typeface="Arial"/>
+              </a:rPr>
+              <a:t>Os pontos y_p foram gerados fazendo o mesmo, mas utilizando as frequência observadas com posições de plotagem de Weibull, multiplicando-as por (d + theta)^H:</a:t>
+            </a:r>
+            <a:endParaRPr sz="1200" b="0">
+              <a:latin typeface="Arial"/>
+              <a:cs typeface="Arial"/>
+            </a:endParaRPr>
+          </a:p>
+        </p:txBody>
+      </p:sp>
+      <p:pic>
+        <p:nvPicPr>
+          <p:cNvPr id="208443713" name=""/>
+          <p:cNvPicPr>
+            <a:picLocks noChangeAspect="1"/>
+          </p:cNvPicPr>
+          <p:nvPr/>
+        </p:nvPicPr>
+        <p:blipFill rotWithShape="1">
+          <a:blip r:embed="rId3"/>
+          <a:stretch/>
+        </p:blipFill>
+        <p:spPr bwMode="auto">
+          <a:xfrm flipH="0" flipV="0">
+            <a:off x="118799" y="1600728"/>
+            <a:ext cx="5440428" cy="3624392"/>
+          </a:xfrm>
+          <a:prstGeom prst="rect">
+            <a:avLst/>
+          </a:prstGeom>
+        </p:spPr>
+      </p:pic>
+      <p:sp>
+        <p:nvSpPr>
+          <p:cNvPr id="1251429920" name="PlaceHolder 1"/>
+          <p:cNvSpPr>
+            <a:spLocks noGrp="1"/>
+          </p:cNvSpPr>
+          <p:nvPr/>
+        </p:nvSpPr>
+        <p:spPr bwMode="auto">
+          <a:xfrm rot="0" flipH="0" flipV="0">
+            <a:off x="271199" y="5289300"/>
+            <a:ext cx="5474268" cy="420984"/>
+          </a:xfrm>
+          <a:prstGeom prst="rect">
+            <a:avLst/>
+          </a:prstGeom>
+          <a:noFill/>
+          <a:ln w="0">
+            <a:noFill/>
+          </a:ln>
+        </p:spPr>
+        <p:txBody>
+          <a:bodyPr vertOverflow="overflow" horzOverflow="overflow" vert="horz" wrap="square" lIns="91440" tIns="45720" rIns="91440" bIns="45720" numCol="1" spcCol="0" rtlCol="0" fromWordArt="0" anchor="t" anchorCtr="0" forceAA="0" upright="0" compatLnSpc="0">
+            <a:spAutoFit/>
+          </a:bodyPr>
+          <a:lstStyle>
+            <a:lvl1pPr indent="0" algn="l" defTabSz="914400">
+              <a:lnSpc>
+                <a:spcPct val="90000"/>
+              </a:lnSpc>
+              <a:buNone/>
+              <a:defRPr lang="pt-BR" sz="100" b="1" u="none" strike="noStrike">
+                <a:solidFill>
+                  <a:schemeClr val="dk1"/>
+                </a:solidFill>
+                <a:latin typeface="Arial"/>
+                <a:ea typeface="Arial"/>
+                <a:cs typeface="Arial"/>
+              </a:defRPr>
+            </a:lvl1pPr>
+          </a:lstStyle>
+          <a:p>
+            <a:pPr>
+              <a:defRPr/>
+            </a:pPr>
+            <a:r>
+              <a:rPr sz="1200" b="0">
+                <a:latin typeface="Arial"/>
+                <a:ea typeface="Arial"/>
+                <a:cs typeface="Arial"/>
+              </a:rPr>
+              <a:t>A estação A805 possui maior valor de theta, isso significa a maior distância entre Y e I_d,p.</a:t>
+            </a:r>
+            <a:endParaRPr sz="1200" b="0">
+              <a:latin typeface="Arial"/>
+              <a:cs typeface="Arial"/>
+            </a:endParaRPr>
+          </a:p>
+        </p:txBody>
+      </p:sp>
+      <p:sp>
+        <p:nvSpPr>
+          <p:cNvPr id="347730803" name="PlaceHolder 1"/>
+          <p:cNvSpPr>
+            <a:spLocks noGrp="1"/>
+          </p:cNvSpPr>
+          <p:nvPr/>
+        </p:nvSpPr>
+        <p:spPr bwMode="auto">
+          <a:xfrm rot="0" flipH="0" flipV="0">
+            <a:off x="6095998" y="374400"/>
+            <a:ext cx="5556346" cy="750168"/>
+          </a:xfrm>
+          <a:prstGeom prst="rect">
+            <a:avLst/>
+          </a:prstGeom>
+          <a:noFill/>
+          <a:ln w="0">
+            <a:noFill/>
+          </a:ln>
+        </p:spPr>
+        <p:txBody>
+          <a:bodyPr vertOverflow="overflow" horzOverflow="overflow" vert="horz" wrap="square" lIns="91440" tIns="45720" rIns="91440" bIns="45720" numCol="1" spcCol="0" rtlCol="0" fromWordArt="0" anchor="t" anchorCtr="0" forceAA="0" upright="0" compatLnSpc="0">
+            <a:spAutoFit/>
+          </a:bodyPr>
+          <a:lstStyle>
+            <a:lvl1pPr indent="0" algn="l" defTabSz="914400">
+              <a:lnSpc>
+                <a:spcPct val="90000"/>
+              </a:lnSpc>
+              <a:buNone/>
+              <a:defRPr lang="pt-BR" sz="100" b="1" u="none" strike="noStrike">
+                <a:solidFill>
+                  <a:schemeClr val="dk1"/>
+                </a:solidFill>
+                <a:latin typeface="Arial"/>
+                <a:ea typeface="Arial"/>
+                <a:cs typeface="Arial"/>
+              </a:defRPr>
+            </a:lvl1pPr>
+          </a:lstStyle>
+          <a:p>
+            <a:pPr>
+              <a:defRPr/>
+            </a:pPr>
+            <a:r>
+              <a:rPr sz="1200" b="1">
+                <a:latin typeface="Arial"/>
+                <a:ea typeface="Arial"/>
+                <a:cs typeface="Arial"/>
+              </a:rPr>
+              <a:t>Interpretação</a:t>
+            </a:r>
+            <a:endParaRPr sz="1200" b="0">
+              <a:latin typeface="Arial"/>
+              <a:ea typeface="Arial"/>
+              <a:cs typeface="Arial"/>
+            </a:endParaRPr>
+          </a:p>
+          <a:p>
+            <a:pPr>
+              <a:defRPr/>
+            </a:pPr>
+            <a:r>
+              <a:rPr sz="1200" b="0">
+                <a:latin typeface="Arial"/>
+                <a:ea typeface="Arial"/>
+                <a:cs typeface="Arial"/>
+              </a:rPr>
+              <a:t>A avaliação destes postos pode indicar que, apesar da redução na incerteza observada com as curvas de frequência, tempos de retorno intermediários não são tão bem representados.</a:t>
+            </a:r>
+            <a:endParaRPr sz="1200" b="0">
+              <a:latin typeface="Arial"/>
+              <a:cs typeface="Arial"/>
+            </a:endParaRPr>
+          </a:p>
+        </p:txBody>
+      </p:sp>
+      <p:pic>
+        <p:nvPicPr>
+          <p:cNvPr id="1812481734" name=""/>
+          <p:cNvPicPr>
+            <a:picLocks noChangeAspect="1"/>
+          </p:cNvPicPr>
+          <p:nvPr/>
+        </p:nvPicPr>
+        <p:blipFill rotWithShape="1">
+          <a:blip r:embed="rId4"/>
+          <a:stretch/>
+        </p:blipFill>
+        <p:spPr bwMode="auto">
+          <a:xfrm flipH="0" flipV="0">
+            <a:off x="5745467" y="1600728"/>
+            <a:ext cx="5444398" cy="3627037"/>
+          </a:xfrm>
+          <a:prstGeom prst="rect">
+            <a:avLst/>
+          </a:prstGeom>
+        </p:spPr>
+      </p:pic>
+    </p:spTree>
+  </p:cSld>
+  <p:clrMapOvr>
+    <a:masterClrMapping/>
+  </p:clrMapOvr>
+  <mc:AlternateContent xmlns:mc="http://schemas.openxmlformats.org/markup-compatibility/2006">
+    <mc:Choice xmlns:p159="http://schemas.microsoft.com/office/powerpoint/2015/09/main" xmlns:p14="http://schemas.microsoft.com/office/powerpoint/2010/main" Requires="p159">
+      <p:transition p14:dur="500" advClick="1"/>
     </mc:Choice>
     <mc:Fallback>
       <p:transition advClick="1"/>
@@ -8396,7 +11810,7 @@
       </p:grpSpPr>
       <p:pic>
         <p:nvPicPr>
-          <p:cNvPr id="103635271" name=""/>
+          <p:cNvPr id="1957787656" name=""/>
           <p:cNvPicPr/>
           <p:nvPr/>
         </p:nvPicPr>
@@ -8453,7 +11867,7 @@
       </p:grpSpPr>
       <p:pic>
         <p:nvPicPr>
-          <p:cNvPr id="1851063980" name=""/>
+          <p:cNvPr id="408349387" name=""/>
           <p:cNvPicPr/>
           <p:nvPr/>
         </p:nvPicPr>
@@ -8477,7 +11891,7 @@
       </p:pic>
       <p:sp>
         <p:nvSpPr>
-          <p:cNvPr id="146339657" name=""/>
+          <p:cNvPr id="822956192" name=""/>
           <p:cNvSpPr/>
           <p:nvPr/>
         </p:nvSpPr>
@@ -8532,7 +11946,7 @@
       </p:sp>
       <p:pic>
         <p:nvPicPr>
-          <p:cNvPr id="956131005" name=""/>
+          <p:cNvPr id="136042114" name=""/>
           <p:cNvPicPr/>
           <p:nvPr/>
         </p:nvPicPr>
@@ -8556,7 +11970,7 @@
       </p:pic>
       <p:sp>
         <p:nvSpPr>
-          <p:cNvPr id="1414901341" name=""/>
+          <p:cNvPr id="1400540702" name=""/>
           <p:cNvSpPr/>
           <p:nvPr/>
         </p:nvSpPr>
@@ -8611,7 +12025,7 @@
       </p:sp>
       <p:sp>
         <p:nvSpPr>
-          <p:cNvPr id="218434656" name=""/>
+          <p:cNvPr id="170903602" name=""/>
           <p:cNvSpPr/>
           <p:nvPr/>
         </p:nvSpPr>
@@ -8699,7 +12113,7 @@
       </p:grpSpPr>
       <p:pic>
         <p:nvPicPr>
-          <p:cNvPr id="1501450082" name=""/>
+          <p:cNvPr id="1357419722" name=""/>
           <p:cNvPicPr/>
           <p:nvPr/>
         </p:nvPicPr>
@@ -8723,7 +12137,7 @@
       </p:pic>
       <p:pic>
         <p:nvPicPr>
-          <p:cNvPr id="1091085512" name=""/>
+          <p:cNvPr id="2100592790" name=""/>
           <p:cNvPicPr/>
           <p:nvPr/>
         </p:nvPicPr>
@@ -8780,7 +12194,7 @@
       </p:grpSpPr>
       <p:sp>
         <p:nvSpPr>
-          <p:cNvPr id="1009376142" name=""/>
+          <p:cNvPr id="1789116274" name=""/>
           <p:cNvSpPr txBox="1"/>
           <p:nvPr/>
         </p:nvSpPr>
@@ -8846,7 +12260,7 @@
       </p:sp>
       <p:pic>
         <p:nvPicPr>
-          <p:cNvPr id="1317488450" name=""/>
+          <p:cNvPr id="687689276" name=""/>
           <p:cNvPicPr/>
           <p:nvPr/>
         </p:nvPicPr>
@@ -8870,7 +12284,7 @@
       </p:pic>
       <p:pic>
         <p:nvPicPr>
-          <p:cNvPr id="1877867165" name=""/>
+          <p:cNvPr id="1431107398" name=""/>
           <p:cNvPicPr/>
           <p:nvPr/>
         </p:nvPicPr>
@@ -8894,7 +12308,7 @@
       </p:pic>
       <p:pic>
         <p:nvPicPr>
-          <p:cNvPr id="1974544190" name=""/>
+          <p:cNvPr id="1258418117" name=""/>
           <p:cNvPicPr/>
           <p:nvPr/>
         </p:nvPicPr>
@@ -8918,7 +12332,7 @@
       </p:pic>
       <p:pic>
         <p:nvPicPr>
-          <p:cNvPr id="1347206527" name=""/>
+          <p:cNvPr id="884151566" name=""/>
           <p:cNvPicPr/>
           <p:nvPr/>
         </p:nvPicPr>
@@ -8942,7 +12356,7 @@
       </p:pic>
       <p:pic>
         <p:nvPicPr>
-          <p:cNvPr id="1730059755" name=""/>
+          <p:cNvPr id="820995454" name=""/>
           <p:cNvPicPr/>
           <p:nvPr/>
         </p:nvPicPr>
@@ -8999,14 +12413,14 @@
       </p:grpSpPr>
       <p:sp>
         <p:nvSpPr>
-          <p:cNvPr id="1372751485" name=""/>
+          <p:cNvPr id="361155179" name=""/>
           <p:cNvSpPr txBox="1"/>
           <p:nvPr/>
         </p:nvSpPr>
         <p:spPr bwMode="auto">
           <a:xfrm rot="0" flipH="0" flipV="0">
-            <a:off x="451145" y="423333"/>
-            <a:ext cx="4105567" cy="2202074"/>
+            <a:off x="451144" y="423332"/>
+            <a:ext cx="4912596" cy="2103479"/>
           </a:xfrm>
           <a:prstGeom prst="rect">
             <a:avLst/>
@@ -9014,662 +12428,809 @@
           <a:noFill/>
         </p:spPr>
         <p:txBody>
-          <a:bodyPr vertOverflow="overflow" horzOverflow="overflow" vert="horz" wrap="none" lIns="91440" tIns="45720" rIns="91440" bIns="45720" numCol="1" spcCol="0" rtlCol="0" fromWordArt="0" anchor="t" anchorCtr="0" forceAA="0" upright="0" compatLnSpc="0">
+          <a:bodyPr vertOverflow="overflow" horzOverflow="overflow" vert="horz" wrap="square" lIns="91440" tIns="45720" rIns="91440" bIns="45720" numCol="1" spcCol="0" rtlCol="0" fromWordArt="0" anchor="t" anchorCtr="0" forceAA="0" upright="0" compatLnSpc="0">
             <a:spAutoFit/>
           </a:bodyPr>
           <a:p>
+            <a:pPr algn="just">
+              <a:defRPr/>
+            </a:pPr>
+            <a:r>
+              <a:rPr lang="pt-BR" sz="1200" i="0"/>
+              <a:t>Perfis de verossimilhança da d-GEV com e sem distribuição a priori estão com picos que ocorrem quando a maximização da função de log-verossimilhança encontra um máximo com k = 0</a:t>
+            </a:r>
+            <a:endParaRPr lang="pt-BR" sz="1200" i="0"/>
+          </a:p>
+          <a:p>
+            <a:pPr algn="just">
+              <a:defRPr/>
+            </a:pPr>
+            <a:endParaRPr sz="1200" i="0"/>
+          </a:p>
+          <a:p>
+            <a:pPr algn="just">
+              <a:defRPr/>
+            </a:pPr>
+            <a:r>
+              <a:rPr lang="pt-BR" sz="1200" i="0"/>
+              <a:t>Essas estimativas são entre 10^-16 e 10^-17. Valores com essa precisão o R (e o próprio computador) entendem como sendo iguais a zero. No momento da maximização de l_p para criação do perfil, o algoritmo cria um </a:t>
+            </a:r>
+            <a:r>
+              <a:rPr lang="pt-BR" sz="1200" b="1" i="0"/>
+              <a:t>pico</a:t>
+            </a:r>
+            <a:r>
+              <a:rPr lang="pt-BR" sz="1200" b="0" i="0"/>
+              <a:t> exatamente nesse ponto, que logo normaliza.</a:t>
+            </a:r>
+            <a:endParaRPr lang="pt-BR" sz="1200" b="0" i="0"/>
+          </a:p>
+          <a:p>
+            <a:pPr algn="just">
+              <a:defRPr/>
+            </a:pPr>
+            <a:endParaRPr sz="1200" b="0" i="0"/>
+          </a:p>
+          <a:p>
+            <a:pPr algn="just">
+              <a:defRPr/>
+            </a:pPr>
+            <a:r>
+              <a:rPr lang="pt-BR" sz="1200" b="0" i="0"/>
+              <a:t>Todas as estações abaixo com a estimativa original exatamente em 0 sofrem com esse problema:</a:t>
+            </a:r>
+            <a:endParaRPr sz="1200" b="0" i="0"/>
+          </a:p>
+        </p:txBody>
+      </p:sp>
+      <p:pic>
+        <p:nvPicPr>
+          <p:cNvPr id="398080035" name=""/>
+          <p:cNvPicPr>
+            <a:picLocks noChangeAspect="1"/>
+          </p:cNvPicPr>
+          <p:nvPr/>
+        </p:nvPicPr>
+        <p:blipFill rotWithShape="1">
+          <a:blip r:embed="rId3"/>
+          <a:stretch/>
+        </p:blipFill>
+        <p:spPr bwMode="auto">
+          <a:xfrm flipH="0" flipV="0">
+            <a:off x="315299" y="2706803"/>
+            <a:ext cx="5384282" cy="3074871"/>
+          </a:xfrm>
+          <a:prstGeom prst="rect">
+            <a:avLst/>
+          </a:prstGeom>
+        </p:spPr>
+      </p:pic>
+    </p:spTree>
+  </p:cSld>
+  <p:clrMapOvr>
+    <a:masterClrMapping/>
+  </p:clrMapOvr>
+  <mc:AlternateContent xmlns:mc="http://schemas.openxmlformats.org/markup-compatibility/2006">
+    <mc:Choice xmlns:p159="http://schemas.microsoft.com/office/powerpoint/2015/09/main" xmlns:p14="http://schemas.microsoft.com/office/powerpoint/2010/main" Requires="p159">
+      <p:transition p14:dur="2000" advClick="1"/>
+    </mc:Choice>
+    <mc:Fallback>
+      <p:transition advClick="1"/>
+    </mc:Fallback>
+  </mc:AlternateContent>
+</p:sld>
+</file>
+
+<file path=ppt/slides/slide7.xml><?xml version="1.0" encoding="utf-8"?>
+<p:sld xmlns:a="http://schemas.openxmlformats.org/drawingml/2006/main" xmlns:r="http://schemas.openxmlformats.org/officeDocument/2006/relationships" xmlns:p="http://schemas.openxmlformats.org/presentationml/2006/main" xmlns:m="http://schemas.openxmlformats.org/officeDocument/2006/math" xmlns:w="http://schemas.openxmlformats.org/wordprocessingml/2006/main" xmlns:mc="http://schemas.openxmlformats.org/markup-compatibility/2006" showMasterPhAnim="0" showMasterSp="1" show="1">
+  <p:cSld name="">
+    <p:spTree>
+      <p:nvGrpSpPr>
+        <p:cNvPr id="1" name=""/>
+        <p:cNvGrpSpPr/>
+        <p:nvPr/>
+      </p:nvGrpSpPr>
+      <p:grpSpPr bwMode="auto">
+        <a:xfrm>
+          <a:off x="0" y="0"/>
+          <a:ext cx="0" cy="0"/>
+          <a:chOff x="0" y="0"/>
+          <a:chExt cx="0" cy="0"/>
+        </a:xfrm>
+      </p:grpSpPr>
+      <p:sp>
+        <p:nvSpPr>
+          <p:cNvPr id="1188993946" name=""/>
+          <p:cNvSpPr txBox="1"/>
+          <p:nvPr/>
+        </p:nvSpPr>
+        <p:spPr bwMode="auto">
+          <a:xfrm rot="0" flipH="0" flipV="0">
+            <a:off x="451144" y="423332"/>
+            <a:ext cx="4912596" cy="2103479"/>
+          </a:xfrm>
+          <a:prstGeom prst="rect">
+            <a:avLst/>
+          </a:prstGeom>
+          <a:noFill/>
+        </p:spPr>
+        <p:txBody>
+          <a:bodyPr vertOverflow="overflow" horzOverflow="overflow" vert="horz" wrap="square" lIns="91440" tIns="45720" rIns="91440" bIns="45720" numCol="1" spcCol="0" rtlCol="0" fromWordArt="0" anchor="t" anchorCtr="0" forceAA="0" upright="0" compatLnSpc="0">
+            <a:spAutoFit/>
+          </a:bodyPr>
+          <a:p>
+            <a:pPr algn="just">
+              <a:defRPr/>
+            </a:pPr>
+            <a:r>
+              <a:rPr lang="pt-BR" sz="1200" i="0"/>
+              <a:t>Perfis de verossimilhança da d-GEV com e sem distribuição a priori estão com picos que ocorrem quando a maximização da função de log-verossimilhança encontra um máximo com k = 0</a:t>
+            </a:r>
+            <a:endParaRPr lang="pt-BR" sz="1200" i="0"/>
+          </a:p>
+          <a:p>
+            <a:pPr algn="just">
+              <a:defRPr/>
+            </a:pPr>
+            <a:endParaRPr sz="1200" i="0"/>
+          </a:p>
+          <a:p>
+            <a:pPr algn="just">
+              <a:defRPr/>
+            </a:pPr>
+            <a:r>
+              <a:rPr lang="pt-BR" sz="1200" i="0"/>
+              <a:t>Essas estimativas são entre 10^-16 e 10^-17. Valores com essa precisão o R (e o próprio computador) entendem como sendo iguais a zero. No momento da maximização de l_p para criação do perfil, o algoritmo cria um </a:t>
+            </a:r>
+            <a:r>
+              <a:rPr lang="pt-BR" sz="1200" b="1" i="0"/>
+              <a:t>pico</a:t>
+            </a:r>
+            <a:r>
+              <a:rPr lang="pt-BR" sz="1200" b="0" i="0"/>
+              <a:t> exatamente nesse ponto, que logo normaliza.</a:t>
+            </a:r>
+            <a:endParaRPr lang="pt-BR" sz="1200" b="0" i="0"/>
+          </a:p>
+          <a:p>
+            <a:pPr algn="just">
+              <a:defRPr/>
+            </a:pPr>
+            <a:endParaRPr sz="1200" b="0" i="0"/>
+          </a:p>
+          <a:p>
+            <a:pPr algn="just">
+              <a:defRPr/>
+            </a:pPr>
+            <a:r>
+              <a:rPr lang="pt-BR" sz="1200" b="0" i="0"/>
+              <a:t>Todas as estações abaixo com a estimativa original exatamente em 0 sofrem com esse problema:</a:t>
+            </a:r>
+            <a:endParaRPr sz="1200" b="0" i="0"/>
+          </a:p>
+        </p:txBody>
+      </p:sp>
+      <p:pic>
+        <p:nvPicPr>
+          <p:cNvPr id="886111212" name=""/>
+          <p:cNvPicPr>
+            <a:picLocks noChangeAspect="1"/>
+          </p:cNvPicPr>
+          <p:nvPr/>
+        </p:nvPicPr>
+        <p:blipFill rotWithShape="1">
+          <a:blip r:embed="rId3"/>
+          <a:stretch/>
+        </p:blipFill>
+        <p:spPr bwMode="auto">
+          <a:xfrm flipH="0" flipV="0">
+            <a:off x="315299" y="2706803"/>
+            <a:ext cx="5384282" cy="3074871"/>
+          </a:xfrm>
+          <a:prstGeom prst="rect">
+            <a:avLst/>
+          </a:prstGeom>
+        </p:spPr>
+      </p:pic>
+      <p:sp>
+        <p:nvSpPr>
+          <p:cNvPr id="100683157" name=""/>
+          <p:cNvSpPr txBox="1"/>
+          <p:nvPr/>
+        </p:nvSpPr>
+        <p:spPr bwMode="auto">
+          <a:xfrm rot="0" flipH="0" flipV="0">
+            <a:off x="6537618" y="423333"/>
+            <a:ext cx="4947514" cy="457560"/>
+          </a:xfrm>
+          <a:prstGeom prst="rect">
+            <a:avLst/>
+          </a:prstGeom>
+          <a:noFill/>
+        </p:spPr>
+        <p:txBody>
+          <a:bodyPr vertOverflow="overflow" horzOverflow="overflow" vert="horz" wrap="square" lIns="91440" tIns="45720" rIns="91440" bIns="45720" numCol="1" spcCol="0" rtlCol="0" fromWordArt="0" anchor="t" anchorCtr="0" forceAA="0" upright="0" compatLnSpc="0">
+            <a:spAutoFit/>
+          </a:bodyPr>
+          <a:p>
             <a:pPr>
               <a:defRPr/>
             </a:pPr>
             <a:r>
               <a:rPr lang="pt-BR" sz="1200"/>
-              <a:t>Perfil de verossimilhança p/ quantis i_d,p</a:t>
+              <a:t>A estação abaixo </a:t>
             </a:r>
             <a:r>
               <a:rPr lang="pt-BR" sz="1200"/>
-              <a:t>:</a:t>
+              <a:t>é um exemplo. O perfil de verossimilhança resultante é o seguinte:</a:t>
+            </a:r>
+            <a:endParaRPr sz="1200"/>
+          </a:p>
+        </p:txBody>
+      </p:sp>
+      <p:pic>
+        <p:nvPicPr>
+          <p:cNvPr id="888503524" name=""/>
+          <p:cNvPicPr>
+            <a:picLocks noChangeAspect="1"/>
+          </p:cNvPicPr>
+          <p:nvPr/>
+        </p:nvPicPr>
+        <p:blipFill rotWithShape="1">
+          <a:blip r:embed="rId4"/>
+          <a:stretch/>
+        </p:blipFill>
+        <p:spPr bwMode="auto">
+          <a:xfrm flipH="0" flipV="0">
+            <a:off x="7197646" y="880893"/>
+            <a:ext cx="3493180" cy="2161185"/>
+          </a:xfrm>
+          <a:prstGeom prst="rect">
+            <a:avLst/>
+          </a:prstGeom>
+        </p:spPr>
+      </p:pic>
+      <p:sp>
+        <p:nvSpPr>
+          <p:cNvPr id="1911083451" name=""/>
+          <p:cNvSpPr txBox="1"/>
+          <p:nvPr/>
+        </p:nvSpPr>
+        <p:spPr bwMode="auto">
+          <a:xfrm rot="0" flipH="0" flipV="0">
+            <a:off x="6403339" y="2925900"/>
+            <a:ext cx="5081794" cy="1006200"/>
+          </a:xfrm>
+          <a:prstGeom prst="rect">
+            <a:avLst/>
+          </a:prstGeom>
+          <a:noFill/>
+        </p:spPr>
+        <p:txBody>
+          <a:bodyPr vertOverflow="overflow" horzOverflow="overflow" vert="horz" wrap="square" lIns="91440" tIns="45720" rIns="91440" bIns="45720" numCol="1" spcCol="0" rtlCol="0" fromWordArt="0" anchor="t" anchorCtr="0" forceAA="0" upright="0" compatLnSpc="0">
+            <a:spAutoFit/>
+          </a:bodyPr>
+          <a:p>
+            <a:pPr>
+              <a:defRPr/>
+            </a:pPr>
+            <a:r>
+              <a:rPr lang="pt-BR" sz="1200"/>
+              <a:t>A estimativa original de k é da ordem de 10^-17 (0, para o computador), mas o valor `max_ll` encontrado pela função `nll.dgev()` é -430. Na otimização do perfil, porém, um novo máximo é encontrado (mostrado acima), igual a -172, muito acima dos demais. Se removermos este valor, o perfil aparenta ser “normalizado”:</a:t>
+            </a:r>
+            <a:endParaRPr sz="1200"/>
+          </a:p>
+        </p:txBody>
+      </p:sp>
+      <p:pic>
+        <p:nvPicPr>
+          <p:cNvPr id="100470452" name=""/>
+          <p:cNvPicPr>
+            <a:picLocks noChangeAspect="1"/>
+          </p:cNvPicPr>
+          <p:nvPr/>
+        </p:nvPicPr>
+        <p:blipFill rotWithShape="1">
+          <a:blip r:embed="rId5"/>
+          <a:stretch/>
+        </p:blipFill>
+        <p:spPr bwMode="auto">
+          <a:xfrm flipH="0" flipV="0">
+            <a:off x="7197646" y="4029075"/>
+            <a:ext cx="3493180" cy="2161185"/>
+          </a:xfrm>
+          <a:prstGeom prst="rect">
+            <a:avLst/>
+          </a:prstGeom>
+        </p:spPr>
+      </p:pic>
+    </p:spTree>
+  </p:cSld>
+  <p:clrMapOvr>
+    <a:masterClrMapping/>
+  </p:clrMapOvr>
+  <mc:AlternateContent xmlns:mc="http://schemas.openxmlformats.org/markup-compatibility/2006">
+    <mc:Choice xmlns:p159="http://schemas.microsoft.com/office/powerpoint/2015/09/main" xmlns:p14="http://schemas.microsoft.com/office/powerpoint/2010/main" Requires="p159">
+      <p:transition p14:dur="2000" advClick="1"/>
+    </mc:Choice>
+    <mc:Fallback>
+      <p:transition advClick="1"/>
+    </mc:Fallback>
+  </mc:AlternateContent>
+</p:sld>
+</file>
+
+<file path=ppt/slides/slide8.xml><?xml version="1.0" encoding="utf-8"?>
+<p:sld xmlns:a="http://schemas.openxmlformats.org/drawingml/2006/main" xmlns:r="http://schemas.openxmlformats.org/officeDocument/2006/relationships" xmlns:p="http://schemas.openxmlformats.org/presentationml/2006/main" xmlns:m="http://schemas.openxmlformats.org/officeDocument/2006/math" xmlns:w="http://schemas.openxmlformats.org/wordprocessingml/2006/main" xmlns:mc="http://schemas.openxmlformats.org/markup-compatibility/2006" showMasterPhAnim="0" showMasterSp="1" show="1">
+  <p:cSld name="">
+    <p:spTree>
+      <p:nvGrpSpPr>
+        <p:cNvPr id="1" name=""/>
+        <p:cNvGrpSpPr/>
+        <p:nvPr/>
+      </p:nvGrpSpPr>
+      <p:grpSpPr bwMode="auto">
+        <a:xfrm>
+          <a:off x="0" y="0"/>
+          <a:ext cx="0" cy="0"/>
+          <a:chOff x="0" y="0"/>
+          <a:chExt cx="0" cy="0"/>
+        </a:xfrm>
+      </p:grpSpPr>
+      <p:sp>
+        <p:nvSpPr>
+          <p:cNvPr id="1902234881" name=""/>
+          <p:cNvSpPr txBox="1"/>
+          <p:nvPr/>
+        </p:nvSpPr>
+        <p:spPr bwMode="auto">
+          <a:xfrm rot="0" flipH="0" flipV="0">
+            <a:off x="451144" y="423332"/>
+            <a:ext cx="5136876" cy="1554840"/>
+          </a:xfrm>
+          <a:prstGeom prst="rect">
+            <a:avLst/>
+          </a:prstGeom>
+          <a:noFill/>
+        </p:spPr>
+        <p:txBody>
+          <a:bodyPr vertOverflow="overflow" horzOverflow="overflow" vert="horz" wrap="square" lIns="91440" tIns="45720" rIns="91440" bIns="45720" numCol="1" spcCol="0" rtlCol="0" fromWordArt="0" anchor="t" anchorCtr="0" forceAA="0" upright="0" compatLnSpc="0">
+            <a:spAutoFit/>
+          </a:bodyPr>
+          <a:p>
+            <a:pPr algn="just">
+              <a:defRPr/>
+            </a:pPr>
+            <a:r>
+              <a:rPr lang="pt-BR" sz="1200" b="0" i="0"/>
+              <a:t>Precisamos analisar se no perfil dos demais parâmetros este pico também está presente e por que o otimizador encontra um máximo tão próximo a zero, sendo que o restante do perfil (olhando para o perfil de verossimilhança) não indica que seria Gumbel?</a:t>
+            </a:r>
+            <a:endParaRPr lang="pt-BR" sz="1200" b="0" i="0"/>
+          </a:p>
+          <a:p>
+            <a:pPr algn="just">
+              <a:defRPr/>
+            </a:pPr>
+            <a:endParaRPr sz="1200" b="0" i="0"/>
+          </a:p>
+          <a:p>
+            <a:pPr algn="just">
+              <a:defRPr/>
+            </a:pPr>
+            <a:r>
+              <a:rPr lang="pt-BR" sz="1200" b="0" i="0"/>
+              <a:t>Analisando o perfil dos outros parâmetros, este pico não está presente e todos os demais aparentam. Todos apresentam um pico em volta de -433, que seria o pico do perfil problem</a:t>
+            </a:r>
+            <a:r>
+              <a:rPr lang="pt-BR" sz="1200" b="0" i="0"/>
+              <a:t>a.</a:t>
+            </a:r>
+            <a:endParaRPr sz="1200" b="0" i="0"/>
+          </a:p>
+        </p:txBody>
+      </p:sp>
+      <p:pic>
+        <p:nvPicPr>
+          <p:cNvPr id="1610497007" name=""/>
+          <p:cNvPicPr>
+            <a:picLocks noChangeAspect="1"/>
+          </p:cNvPicPr>
+          <p:nvPr/>
+        </p:nvPicPr>
+        <p:blipFill rotWithShape="1">
+          <a:blip r:embed="rId3"/>
+          <a:stretch/>
+        </p:blipFill>
+        <p:spPr bwMode="auto">
+          <a:xfrm flipH="0" flipV="0">
+            <a:off x="553424" y="2041037"/>
+            <a:ext cx="3382667" cy="2092811"/>
+          </a:xfrm>
+          <a:prstGeom prst="rect">
+            <a:avLst/>
+          </a:prstGeom>
+        </p:spPr>
+      </p:pic>
+      <p:pic>
+        <p:nvPicPr>
+          <p:cNvPr id="1221142893" name=""/>
+          <p:cNvPicPr>
+            <a:picLocks noChangeAspect="1"/>
+          </p:cNvPicPr>
+          <p:nvPr/>
+        </p:nvPicPr>
+        <p:blipFill rotWithShape="1">
+          <a:blip r:embed="rId4"/>
+          <a:stretch/>
+        </p:blipFill>
+        <p:spPr bwMode="auto">
+          <a:xfrm flipH="0" flipV="0">
+            <a:off x="553424" y="4155427"/>
+            <a:ext cx="3382667" cy="2092811"/>
+          </a:xfrm>
+          <a:prstGeom prst="rect">
+            <a:avLst/>
+          </a:prstGeom>
+        </p:spPr>
+      </p:pic>
+      <p:pic>
+        <p:nvPicPr>
+          <p:cNvPr id="1053790387" name=""/>
+          <p:cNvPicPr>
+            <a:picLocks noChangeAspect="1"/>
+          </p:cNvPicPr>
+          <p:nvPr/>
+        </p:nvPicPr>
+        <p:blipFill rotWithShape="1">
+          <a:blip r:embed="rId5"/>
+          <a:stretch/>
+        </p:blipFill>
+        <p:spPr bwMode="auto">
+          <a:xfrm flipH="0" flipV="0">
+            <a:off x="6201749" y="88214"/>
+            <a:ext cx="3343275" cy="2068440"/>
+          </a:xfrm>
+          <a:prstGeom prst="rect">
+            <a:avLst/>
+          </a:prstGeom>
+        </p:spPr>
+      </p:pic>
+      <p:pic>
+        <p:nvPicPr>
+          <p:cNvPr id="294892996" name=""/>
+          <p:cNvPicPr>
+            <a:picLocks noChangeAspect="1"/>
+          </p:cNvPicPr>
+          <p:nvPr/>
+        </p:nvPicPr>
+        <p:blipFill rotWithShape="1">
+          <a:blip r:embed="rId6"/>
+          <a:stretch/>
+        </p:blipFill>
+        <p:spPr bwMode="auto">
+          <a:xfrm flipH="0" flipV="0">
+            <a:off x="6201749" y="2204279"/>
+            <a:ext cx="3343275" cy="2068440"/>
+          </a:xfrm>
+          <a:prstGeom prst="rect">
+            <a:avLst/>
+          </a:prstGeom>
+        </p:spPr>
+      </p:pic>
+      <p:pic>
+        <p:nvPicPr>
+          <p:cNvPr id="764612772" name=""/>
+          <p:cNvPicPr>
+            <a:picLocks noChangeAspect="1"/>
+          </p:cNvPicPr>
+          <p:nvPr/>
+        </p:nvPicPr>
+        <p:blipFill rotWithShape="1">
+          <a:blip r:embed="rId7"/>
+          <a:stretch/>
+        </p:blipFill>
+        <p:spPr bwMode="auto">
+          <a:xfrm flipH="0" flipV="0">
+            <a:off x="6201749" y="4552949"/>
+            <a:ext cx="3387012" cy="2095499"/>
+          </a:xfrm>
+          <a:prstGeom prst="rect">
+            <a:avLst/>
+          </a:prstGeom>
+        </p:spPr>
+      </p:pic>
+    </p:spTree>
+  </p:cSld>
+  <p:clrMapOvr>
+    <a:masterClrMapping/>
+  </p:clrMapOvr>
+  <mc:AlternateContent xmlns:mc="http://schemas.openxmlformats.org/markup-compatibility/2006">
+    <mc:Choice xmlns:p159="http://schemas.microsoft.com/office/powerpoint/2015/09/main" xmlns:p14="http://schemas.microsoft.com/office/powerpoint/2010/main" Requires="p159">
+      <p:transition p14:dur="2000" advClick="1"/>
+    </mc:Choice>
+    <mc:Fallback>
+      <p:transition advClick="1"/>
+    </mc:Fallback>
+  </mc:AlternateContent>
+</p:sld>
+</file>
+
+<file path=ppt/slides/slide9.xml><?xml version="1.0" encoding="utf-8"?>
+<p:sld xmlns:a="http://schemas.openxmlformats.org/drawingml/2006/main" xmlns:r="http://schemas.openxmlformats.org/officeDocument/2006/relationships" xmlns:p="http://schemas.openxmlformats.org/presentationml/2006/main" xmlns:m="http://schemas.openxmlformats.org/officeDocument/2006/math" xmlns:w="http://schemas.openxmlformats.org/wordprocessingml/2006/main" xmlns:mc="http://schemas.openxmlformats.org/markup-compatibility/2006" showMasterPhAnim="0" showMasterSp="1" show="1">
+  <p:cSld name="">
+    <p:spTree>
+      <p:nvGrpSpPr>
+        <p:cNvPr id="1" name=""/>
+        <p:cNvGrpSpPr/>
+        <p:nvPr/>
+      </p:nvGrpSpPr>
+      <p:grpSpPr bwMode="auto">
+        <a:xfrm>
+          <a:off x="0" y="0"/>
+          <a:ext cx="0" cy="0"/>
+          <a:chOff x="0" y="0"/>
+          <a:chExt cx="0" cy="0"/>
+        </a:xfrm>
+      </p:grpSpPr>
+      <p:sp>
+        <p:nvSpPr>
+          <p:cNvPr id="1678868221" name=""/>
+          <p:cNvSpPr txBox="1"/>
+          <p:nvPr/>
+        </p:nvSpPr>
+        <p:spPr bwMode="auto">
+          <a:xfrm rot="0" flipH="0" flipV="0">
+            <a:off x="451144" y="423332"/>
+            <a:ext cx="5168196" cy="457560"/>
+          </a:xfrm>
+          <a:prstGeom prst="rect">
+            <a:avLst/>
+          </a:prstGeom>
+          <a:noFill/>
+        </p:spPr>
+        <p:txBody>
+          <a:bodyPr vertOverflow="overflow" horzOverflow="overflow" vert="horz" wrap="square" lIns="91440" tIns="45720" rIns="91440" bIns="45720" numCol="1" spcCol="0" rtlCol="0" fromWordArt="0" anchor="t" anchorCtr="0" forceAA="0" upright="0" compatLnSpc="0">
+            <a:spAutoFit/>
+          </a:bodyPr>
+          <a:p>
+            <a:pPr algn="just">
+              <a:defRPr/>
+            </a:pPr>
+            <a:r>
+              <a:rPr lang="pt-BR" sz="1200" b="0" i="0"/>
+              <a:t>Olhando p/ data.frame resultante, percebe-se que `message == 1` p/ kappa:</a:t>
+            </a:r>
+            <a:endParaRPr sz="1200" b="0" i="0"/>
+          </a:p>
+        </p:txBody>
+      </p:sp>
+      <p:pic>
+        <p:nvPicPr>
+          <p:cNvPr id="1932962244" name=""/>
+          <p:cNvPicPr>
+            <a:picLocks noChangeAspect="1"/>
+          </p:cNvPicPr>
+          <p:nvPr/>
+        </p:nvPicPr>
+        <p:blipFill rotWithShape="1">
+          <a:blip r:embed="rId3"/>
+          <a:stretch/>
+        </p:blipFill>
+        <p:spPr bwMode="auto">
+          <a:xfrm flipH="0" flipV="0">
+            <a:off x="603543" y="930447"/>
+            <a:ext cx="5076574" cy="1055345"/>
+          </a:xfrm>
+          <a:prstGeom prst="rect">
+            <a:avLst/>
+          </a:prstGeom>
+        </p:spPr>
+      </p:pic>
+      <p:sp>
+        <p:nvSpPr>
+          <p:cNvPr id="4201576" name=""/>
+          <p:cNvSpPr txBox="1"/>
+          <p:nvPr/>
+        </p:nvSpPr>
+        <p:spPr bwMode="auto">
+          <a:xfrm rot="0" flipH="0" flipV="0">
+            <a:off x="451144" y="2118781"/>
+            <a:ext cx="5238395" cy="457560"/>
+          </a:xfrm>
+          <a:prstGeom prst="rect">
+            <a:avLst/>
+          </a:prstGeom>
+          <a:noFill/>
+        </p:spPr>
+        <p:txBody>
+          <a:bodyPr vertOverflow="overflow" horzOverflow="overflow" vert="horz" wrap="square" lIns="91440" tIns="45720" rIns="91440" bIns="45720" numCol="1" spcCol="0" rtlCol="0" fromWordArt="0" anchor="t" anchorCtr="0" forceAA="0" upright="0" compatLnSpc="0">
+            <a:spAutoFit/>
+          </a:bodyPr>
+          <a:p>
+            <a:pPr algn="just">
+              <a:defRPr/>
+            </a:pPr>
+            <a:r>
+              <a:rPr lang="pt-BR" sz="1200" b="0" i="0"/>
+              <a:t>Quando isso ocorre, é um indicativo de que a função `ciprof.par()` internamente caiu no seguinte if:</a:t>
+            </a:r>
+            <a:endParaRPr sz="1200" b="0" i="0"/>
+          </a:p>
+        </p:txBody>
+      </p:sp>
+      <p:pic>
+        <p:nvPicPr>
+          <p:cNvPr id="1154566197" name=""/>
+          <p:cNvPicPr>
+            <a:picLocks noChangeAspect="1"/>
+          </p:cNvPicPr>
+          <p:nvPr/>
+        </p:nvPicPr>
+        <p:blipFill rotWithShape="1">
+          <a:blip r:embed="rId4"/>
+          <a:stretch/>
+        </p:blipFill>
+        <p:spPr bwMode="auto">
+          <a:xfrm flipH="0" flipV="0">
+            <a:off x="451144" y="2632262"/>
+            <a:ext cx="5473087" cy="3225612"/>
+          </a:xfrm>
+          <a:prstGeom prst="rect">
+            <a:avLst/>
+          </a:prstGeom>
+        </p:spPr>
+      </p:pic>
+      <p:sp>
+        <p:nvSpPr>
+          <p:cNvPr id="2086783784" name=""/>
+          <p:cNvSpPr txBox="1"/>
+          <p:nvPr/>
+        </p:nvSpPr>
+        <p:spPr bwMode="auto">
+          <a:xfrm rot="0" flipH="0" flipV="0">
+            <a:off x="6095998" y="423331"/>
+            <a:ext cx="5727994" cy="4480919"/>
+          </a:xfrm>
+          <a:prstGeom prst="rect">
+            <a:avLst/>
+          </a:prstGeom>
+          <a:noFill/>
+        </p:spPr>
+        <p:txBody>
+          <a:bodyPr vertOverflow="overflow" horzOverflow="overflow" vert="horz" wrap="square" lIns="91440" tIns="45720" rIns="91440" bIns="45720" numCol="1" spcCol="0" rtlCol="0" fromWordArt="0" anchor="t" anchorCtr="0" forceAA="0" upright="0" compatLnSpc="0">
+            <a:spAutoFit/>
+          </a:bodyPr>
+          <a:p>
+            <a:pPr algn="just">
+              <a:defRPr/>
+            </a:pPr>
+            <a:r>
+              <a:rPr lang="pt-BR" sz="1200" b="0" i="0"/>
+              <a:t>Ou seja, a função `roots.proflik()`, durante a otimização de par[-kappa] parâmetros (ou seja, a criação do perfil p/ kappa) testou um step em que kappa = 10^-17 (???) que resultou no pico observado com `loglik` == -172.</a:t>
             </a:r>
             <a:br>
-              <a:rPr lang="pt-BR" sz="1200"/>
+              <a:rPr lang="pt-BR" sz="1200" b="0" i="0"/>
             </a:br>
             <a:br>
-              <a:rPr lang="pt-BR" sz="1200"/>
+              <a:rPr lang="pt-BR" sz="1200" b="0" i="0"/>
             </a:br>
             <a:r>
-              <a:rPr lang="pt-BR" sz="1200"/>
-              <a:t>1. Reescrever um dos parâmetros em função dos quantis:</a:t>
-            </a:r>
-            <a:endParaRPr lang="pt-BR" sz="1200"/>
-          </a:p>
-          <a:p>
-            <a:pPr>
-              <a:defRPr/>
-            </a:pPr>
-            <a:endParaRPr lang="pt-BR" sz="1200"/>
-          </a:p>
-          <a:p>
-            <a:pPr>
-              <a:defRPr/>
-            </a:pPr>
-            <mc:AlternateContent xmlns:mc="http://schemas.openxmlformats.org/markup-compatibility/2006" xmlns:m="http://schemas.openxmlformats.org/officeDocument/2006/math">
-              <mc:Choice xmlns:a14="http://schemas.microsoft.com/office/drawing/2010/main" Requires="a14">
-                <a14:m>
-                  <m:oMathPara>
-                    <m:oMathParaPr/>
-                    <m:oMath>
-                      <m:sSub>
-                        <m:sSubPr>
-                          <m:ctrlPr>
-                            <a:rPr lang="pt-BR" sz="1200" i="1" u="none" strike="noStrike" cap="none" spc="0">
-                              <a:solidFill>
-                                <a:srgbClr val="000000"/>
-                              </a:solidFill>
-                              <a:latin typeface="Cambria Math"/>
-                              <a:ea typeface="Cambria Math"/>
-                              <a:cs typeface="Cambria Math"/>
-                            </a:rPr>
-                          </m:ctrlPr>
-                        </m:sSubPr>
-                        <m:e>
-                          <m:r>
-                            <m:rPr>
-                              <m:sty m:val="i"/>
-                            </m:rPr>
-                            <a:rPr lang="pt-BR" sz="1200" u="none" strike="noStrike" cap="none" spc="0">
-                              <a:solidFill>
-                                <a:srgbClr val="000000"/>
-                              </a:solidFill>
-                              <a:latin typeface="Cambria Math"/>
-                              <a:ea typeface="Cambria Math"/>
-                              <a:cs typeface="Cambria Math"/>
-                            </a:rPr>
-                            <m:t>x</m:t>
-                          </m:r>
-                        </m:e>
-                        <m:sub>
-                          <m:r>
-                            <m:rPr>
-                              <m:sty m:val="i"/>
-                            </m:rPr>
-                            <a:rPr lang="pt-BR" sz="1200" u="none" strike="noStrike" cap="none" spc="0">
-                              <a:solidFill>
-                                <a:srgbClr val="000000"/>
-                              </a:solidFill>
-                              <a:latin typeface="Cambria Math"/>
-                              <a:ea typeface="Cambria Math"/>
-                              <a:cs typeface="Cambria Math"/>
-                            </a:rPr>
-                            <m:t>p</m:t>
-                          </m:r>
-                        </m:sub>
-                      </m:sSub>
-                      <m:r>
-                        <m:rPr>
-                          <m:sty m:val="i"/>
-                        </m:rPr>
-                        <a:rPr lang="pt-BR" sz="1200" u="none" strike="noStrike" cap="none" spc="0">
-                          <a:solidFill>
-                            <a:srgbClr val="000000"/>
-                          </a:solidFill>
-                          <a:latin typeface="Cambria Math"/>
-                          <a:ea typeface="Cambria Math"/>
-                          <a:cs typeface="Cambria Math"/>
-                        </a:rPr>
-                        <m:t>=μ+</m:t>
-                      </m:r>
-                      <m:f>
-                        <m:fPr>
-                          <m:ctrlPr>
-                            <a:rPr lang="pt-BR" sz="1200" i="1" u="none" strike="noStrike" cap="none" spc="0">
-                              <a:solidFill>
-                                <a:srgbClr val="000000"/>
-                              </a:solidFill>
-                              <a:latin typeface="Cambria Math"/>
-                              <a:ea typeface="Cambria Math"/>
-                              <a:cs typeface="Cambria Math"/>
-                            </a:rPr>
-                          </m:ctrlPr>
-                        </m:fPr>
-                        <m:num>
-                          <m:r>
-                            <m:rPr>
-                              <m:sty m:val="i"/>
-                            </m:rPr>
-                            <a:rPr lang="pt-BR" sz="1200" u="none" strike="noStrike" cap="none" spc="0">
-                              <a:solidFill>
-                                <a:srgbClr val="000000"/>
-                              </a:solidFill>
-                              <a:latin typeface="Cambria Math"/>
-                              <a:ea typeface="Cambria Math"/>
-                              <a:cs typeface="Cambria Math"/>
-                            </a:rPr>
-                            <m:t>σ</m:t>
-                          </m:r>
-                        </m:num>
-                        <m:den>
-                          <m:r>
-                            <m:rPr>
-                              <m:sty m:val="i"/>
-                            </m:rPr>
-                            <a:rPr lang="pt-BR" sz="1200" u="none" strike="noStrike" cap="none" spc="0">
-                              <a:solidFill>
-                                <a:srgbClr val="000000"/>
-                              </a:solidFill>
-                              <a:latin typeface="Cambria Math"/>
-                              <a:ea typeface="Cambria Math"/>
-                              <a:cs typeface="Cambria Math"/>
-                            </a:rPr>
-                            <m:t>ξ</m:t>
-                          </m:r>
-                        </m:den>
-                      </m:f>
-                      <m:d>
-                        <m:dPr>
-                          <m:begChr m:val="{"/>
-                          <m:endChr m:val="}"/>
-                          <m:ctrlPr>
-                            <a:rPr lang="pt-BR" sz="1200" i="1" u="none" strike="noStrike" cap="none" spc="0">
-                              <a:solidFill>
-                                <a:srgbClr val="000000"/>
-                              </a:solidFill>
-                              <a:latin typeface="Cambria Math"/>
-                              <a:ea typeface="Cambria Math"/>
-                              <a:cs typeface="Cambria Math"/>
-                            </a:rPr>
-                          </m:ctrlPr>
-                        </m:dPr>
-                        <m:e>
-                          <m:r>
-                            <m:rPr>
-                              <m:sty m:val="i"/>
-                            </m:rPr>
-                            <a:rPr lang="pt-BR" sz="1200" u="none" strike="noStrike" cap="none" spc="0">
-                              <a:solidFill>
-                                <a:srgbClr val="000000"/>
-                              </a:solidFill>
-                              <a:latin typeface="Cambria Math"/>
-                              <a:ea typeface="Cambria Math"/>
-                              <a:cs typeface="Cambria Math"/>
-                            </a:rPr>
-                            <m:t>1-</m:t>
-                          </m:r>
-                          <m:sSup>
-                            <m:sSupPr>
-                              <m:ctrlPr>
-                                <a:rPr lang="pt-BR" sz="1200" b="0" i="1" u="none" strike="noStrike" cap="none" spc="0">
-                                  <a:solidFill>
-                                    <a:srgbClr val="000000"/>
-                                  </a:solidFill>
-                                  <a:latin typeface="Cambria Math"/>
-                                  <a:ea typeface="Cambria Math"/>
-                                  <a:cs typeface="Cambria Math"/>
-                                </a:rPr>
-                              </m:ctrlPr>
-                            </m:sSupPr>
-                            <m:e>
-                              <m:d>
-                                <m:dPr>
-                                  <m:begChr m:val="["/>
-                                  <m:endChr m:val="]"/>
-                                  <m:ctrlPr>
-                                    <a:rPr lang="pt-BR" sz="1200" i="1" u="none" strike="noStrike" cap="none" spc="0">
-                                      <a:solidFill>
-                                        <a:srgbClr val="000000"/>
-                                      </a:solidFill>
-                                      <a:latin typeface="Cambria Math"/>
-                                      <a:ea typeface="Cambria Math"/>
-                                      <a:cs typeface="Cambria Math"/>
-                                    </a:rPr>
-                                  </m:ctrlPr>
-                                </m:dPr>
-                                <m:e>
-                                  <m:r>
-                                    <m:rPr>
-                                      <m:sty m:val="i"/>
-                                    </m:rPr>
-                                    <a:rPr lang="pt-BR" sz="1200" u="none" strike="noStrike" cap="none" spc="0">
-                                      <a:solidFill>
-                                        <a:srgbClr val="000000"/>
-                                      </a:solidFill>
-                                      <a:latin typeface="Cambria Math"/>
-                                      <a:ea typeface="Cambria Math"/>
-                                      <a:cs typeface="Cambria Math"/>
-                                    </a:rPr>
-                                    <m:t>-</m:t>
-                                  </m:r>
-                                  <m:func>
-                                    <m:funcPr>
-                                      <m:ctrlPr>
-                                        <a:rPr lang="pt-BR" sz="1200" i="1" u="none" strike="noStrike" cap="none" spc="0">
-                                          <a:solidFill>
-                                            <a:srgbClr val="000000"/>
-                                          </a:solidFill>
-                                          <a:latin typeface="Cambria Math"/>
-                                          <a:ea typeface="Cambria Math"/>
-                                          <a:cs typeface="Cambria Math"/>
-                                        </a:rPr>
-                                      </m:ctrlPr>
-                                    </m:funcPr>
-                                    <m:fName>
-                                      <m:r>
-                                        <m:rPr>
-                                          <m:sty m:val="i"/>
-                                        </m:rPr>
-                                        <a:rPr lang="pt-BR" sz="1200" u="none" strike="noStrike" cap="none" spc="0">
-                                          <a:solidFill>
-                                            <a:srgbClr val="000000"/>
-                                          </a:solidFill>
-                                          <a:latin typeface="Cambria Math"/>
-                                          <a:ea typeface="Cambria Math"/>
-                                          <a:cs typeface="Cambria Math"/>
-                                        </a:rPr>
-                                        <m:t>ln</m:t>
-                                      </m:r>
-                                    </m:fName>
-                                    <m:e>
-                                      <m:r>
-                                        <m:rPr>
-                                          <m:sty m:val="i"/>
-                                        </m:rPr>
-                                        <a:rPr lang="pt-BR" sz="1200" u="none" strike="noStrike" cap="none" spc="0">
-                                          <a:solidFill>
-                                            <a:srgbClr val="000000"/>
-                                          </a:solidFill>
-                                          <a:latin typeface="Cambria Math"/>
-                                          <a:ea typeface="Cambria Math"/>
-                                          <a:cs typeface="Cambria Math"/>
-                                        </a:rPr>
-                                        <m:t>(p)</m:t>
-                                      </m:r>
-                                    </m:e>
-                                  </m:func>
-                                </m:e>
-                              </m:d>
-                            </m:e>
-                            <m:sup>
-                              <m:r>
-                                <m:rPr>
-                                  <m:sty m:val="i"/>
-                                </m:rPr>
-                                <a:rPr lang="pt-BR" sz="1200" u="none" strike="noStrike" cap="none" spc="0">
-                                  <a:solidFill>
-                                    <a:srgbClr val="000000"/>
-                                  </a:solidFill>
-                                  <a:latin typeface="Cambria Math"/>
-                                  <a:ea typeface="Cambria Math"/>
-                                  <a:cs typeface="Cambria Math"/>
-                                </a:rPr>
-                                <m:t>ξ</m:t>
-                              </m:r>
-                            </m:sup>
-                          </m:sSup>
-                        </m:e>
-                      </m:d>
-                    </m:oMath>
-                  </m:oMathPara>
-                </a14:m>
-              </mc:Choice>
-              <mc:Fallback/>
-            </mc:AlternateContent>
-            <a:endParaRPr lang="pt-BR" sz="1200" i="1"/>
-          </a:p>
-          <a:p>
-            <a:pPr>
-              <a:defRPr/>
-            </a:pPr>
-            <a:endParaRPr lang="pt-BR" sz="1200" i="1"/>
-          </a:p>
-          <a:p>
-            <a:pPr>
-              <a:defRPr/>
-            </a:pPr>
-            <mc:AlternateContent xmlns:mc="http://schemas.openxmlformats.org/markup-compatibility/2006" xmlns:m="http://schemas.openxmlformats.org/officeDocument/2006/math">
-              <mc:Choice xmlns:a14="http://schemas.microsoft.com/office/drawing/2010/main" Requires="a14">
-                <a14:m>
-                  <m:oMathPara>
-                    <m:oMathParaPr/>
-                    <m:oMath>
-                      <m:sSub>
-                        <m:sSubPr>
-                          <m:ctrlPr>
-                            <a:rPr lang="pt-BR" sz="1200" u="none" strike="noStrike" cap="none" spc="0">
-                              <a:solidFill>
-                                <a:srgbClr val="000000"/>
-                              </a:solidFill>
-                              <a:latin typeface="Cambria Math"/>
-                              <a:ea typeface="Cambria Math"/>
-                              <a:cs typeface="Cambria Math"/>
-                            </a:rPr>
-                          </m:ctrlPr>
-                        </m:sSubPr>
-                        <m:e>
-                          <m:r>
-                            <m:rPr>
-                              <m:sty m:val="i"/>
-                            </m:rPr>
-                            <a:rPr lang="pt-BR" sz="1200" u="none" strike="noStrike" cap="none" spc="0">
-                              <a:solidFill>
-                                <a:srgbClr val="000000"/>
-                              </a:solidFill>
-                              <a:latin typeface="Cambria Math"/>
-                              <a:ea typeface="Cambria Math"/>
-                              <a:cs typeface="Cambria Math"/>
-                            </a:rPr>
-                            <m:t>μ</m:t>
-                          </m:r>
-                        </m:e>
-                        <m:sub>
-                          <m:r>
-                            <m:rPr>
-                              <m:sty m:val="i"/>
-                            </m:rPr>
-                            <a:rPr lang="pt-BR" sz="1200" u="none" strike="noStrike" cap="none" spc="0">
-                              <a:solidFill>
-                                <a:srgbClr val="000000"/>
-                              </a:solidFill>
-                              <a:latin typeface="Cambria Math"/>
-                              <a:ea typeface="Cambria Math"/>
-                              <a:cs typeface="Cambria Math"/>
-                            </a:rPr>
-                            <m:t>p</m:t>
-                          </m:r>
-                        </m:sub>
-                      </m:sSub>
-                      <m:r>
-                        <m:rPr/>
-                        <a:rPr lang="pt-BR" sz="1200" u="none" strike="noStrike" cap="none" spc="0">
-                          <a:solidFill>
-                            <a:srgbClr val="000000"/>
-                          </a:solidFill>
-                          <a:latin typeface="Cambria Math"/>
-                          <a:ea typeface="Cambria Math"/>
-                          <a:cs typeface="Cambria Math"/>
-                        </a:rPr>
-                        <m:t>=</m:t>
-                      </m:r>
-                      <m:sSubSup>
-                        <m:sSubSupPr>
-                          <m:alnScr m:val="off"/>
-                          <m:ctrlPr>
-                            <a:rPr lang="pt-BR" sz="1200" u="none" strike="noStrike" cap="none" spc="0">
-                              <a:solidFill>
-                                <a:srgbClr val="000000"/>
-                              </a:solidFill>
-                              <a:latin typeface="Cambria Math"/>
-                              <a:ea typeface="Cambria Math"/>
-                              <a:cs typeface="Cambria Math"/>
-                            </a:rPr>
-                          </m:ctrlPr>
-                        </m:sSubSupPr>
-                        <m:e>
-                          <m:r>
-                            <m:rPr/>
-                            <a:rPr lang="pt-BR" sz="1200" u="none" strike="noStrike" cap="none" spc="0">
-                              <a:solidFill>
-                                <a:srgbClr val="000000"/>
-                              </a:solidFill>
-                              <a:latin typeface="Cambria Math"/>
-                              <a:ea typeface="Cambria Math"/>
-                              <a:cs typeface="Cambria Math"/>
-                            </a:rPr>
-                            <m:t>x</m:t>
-                          </m:r>
-                        </m:e>
-                        <m:sub>
-                          <m:r>
-                            <m:rPr/>
-                            <a:rPr lang="pt-BR" sz="1200" u="none" strike="noStrike" cap="none" spc="0">
-                              <a:solidFill>
-                                <a:srgbClr val="000000"/>
-                              </a:solidFill>
-                              <a:latin typeface="Cambria Math"/>
-                              <a:ea typeface="Cambria Math"/>
-                              <a:cs typeface="Cambria Math"/>
-                            </a:rPr>
-                            <m:t>p</m:t>
-                          </m:r>
-                        </m:sub>
-                        <m:sup>
-                          <m:r>
-                            <m:rPr/>
-                            <a:rPr>
-                              <a:latin typeface="Cambria Math"/>
-                              <a:ea typeface="Cambria Math"/>
-                              <a:cs typeface="Cambria Math"/>
-                            </a:rPr>
-                            <m:t>'</m:t>
-                          </m:r>
-                        </m:sup>
-                      </m:sSubSup>
-                      <m:r>
-                        <m:rPr/>
-                        <a:rPr lang="pt-BR" sz="1200" u="none" strike="noStrike" cap="none" spc="0">
-                          <a:solidFill>
-                            <a:srgbClr val="000000"/>
-                          </a:solidFill>
-                          <a:latin typeface="Cambria Math"/>
-                          <a:ea typeface="Cambria Math"/>
-                          <a:cs typeface="Cambria Math"/>
-                        </a:rPr>
-                        <m:t>-</m:t>
-                      </m:r>
-                      <m:f>
-                        <m:fPr>
-                          <m:ctrlPr>
-                            <a:rPr lang="pt-BR" sz="1200" i="1" u="none" strike="noStrike" cap="none" spc="0">
-                              <a:solidFill>
-                                <a:srgbClr val="000000"/>
-                              </a:solidFill>
-                              <a:latin typeface="Cambria Math"/>
-                              <a:ea typeface="Cambria Math"/>
-                              <a:cs typeface="Cambria Math"/>
-                            </a:rPr>
-                          </m:ctrlPr>
-                        </m:fPr>
-                        <m:num>
-                          <m:r>
-                            <m:rPr>
-                              <m:sty m:val="i"/>
-                            </m:rPr>
-                            <a:rPr lang="pt-BR" sz="1200" u="none" strike="noStrike" cap="none" spc="0">
-                              <a:solidFill>
-                                <a:srgbClr val="000000"/>
-                              </a:solidFill>
-                              <a:latin typeface="Cambria Math"/>
-                              <a:ea typeface="Cambria Math"/>
-                              <a:cs typeface="Cambria Math"/>
-                            </a:rPr>
-                            <m:t>σ</m:t>
-                          </m:r>
-                        </m:num>
-                        <m:den>
-                          <m:r>
-                            <m:rPr>
-                              <m:sty m:val="i"/>
-                            </m:rPr>
-                            <a:rPr lang="pt-BR" sz="1200" u="none" strike="noStrike" cap="none" spc="0">
-                              <a:solidFill>
-                                <a:srgbClr val="000000"/>
-                              </a:solidFill>
-                              <a:latin typeface="Cambria Math"/>
-                              <a:ea typeface="Cambria Math"/>
-                              <a:cs typeface="Cambria Math"/>
-                            </a:rPr>
-                            <m:t>ξ</m:t>
-                          </m:r>
-                        </m:den>
-                      </m:f>
-                      <m:d>
-                        <m:dPr>
-                          <m:begChr m:val="{"/>
-                          <m:endChr m:val="}"/>
-                          <m:ctrlPr>
-                            <a:rPr lang="pt-BR" sz="1200" i="1" u="none" strike="noStrike" cap="none" spc="0">
-                              <a:solidFill>
-                                <a:srgbClr val="000000"/>
-                              </a:solidFill>
-                              <a:latin typeface="Cambria Math"/>
-                              <a:ea typeface="Cambria Math"/>
-                              <a:cs typeface="Cambria Math"/>
-                            </a:rPr>
-                          </m:ctrlPr>
-                        </m:dPr>
-                        <m:e>
-                          <m:r>
-                            <m:rPr>
-                              <m:sty m:val="i"/>
-                            </m:rPr>
-                            <a:rPr lang="pt-BR" sz="1200" u="none" strike="noStrike" cap="none" spc="0">
-                              <a:solidFill>
-                                <a:srgbClr val="000000"/>
-                              </a:solidFill>
-                              <a:latin typeface="Cambria Math"/>
-                              <a:ea typeface="Cambria Math"/>
-                              <a:cs typeface="Cambria Math"/>
-                            </a:rPr>
-                            <m:t>1-</m:t>
-                          </m:r>
-                          <m:sSup>
-                            <m:sSupPr>
-                              <m:ctrlPr>
-                                <a:rPr lang="pt-BR" sz="1200" b="0" i="1" u="none" strike="noStrike" cap="none" spc="0">
-                                  <a:solidFill>
-                                    <a:srgbClr val="000000"/>
-                                  </a:solidFill>
-                                  <a:latin typeface="Cambria Math"/>
-                                  <a:ea typeface="Cambria Math"/>
-                                  <a:cs typeface="Cambria Math"/>
-                                </a:rPr>
-                              </m:ctrlPr>
-                            </m:sSupPr>
-                            <m:e>
-                              <m:d>
-                                <m:dPr>
-                                  <m:begChr m:val="["/>
-                                  <m:endChr m:val="]"/>
-                                  <m:ctrlPr>
-                                    <a:rPr lang="pt-BR" sz="1200" i="1" u="none" strike="noStrike" cap="none" spc="0">
-                                      <a:solidFill>
-                                        <a:srgbClr val="000000"/>
-                                      </a:solidFill>
-                                      <a:latin typeface="Cambria Math"/>
-                                      <a:ea typeface="Cambria Math"/>
-                                      <a:cs typeface="Cambria Math"/>
-                                    </a:rPr>
-                                  </m:ctrlPr>
-                                </m:dPr>
-                                <m:e>
-                                  <m:r>
-                                    <m:rPr>
-                                      <m:sty m:val="i"/>
-                                    </m:rPr>
-                                    <a:rPr lang="pt-BR" sz="1200" u="none" strike="noStrike" cap="none" spc="0">
-                                      <a:solidFill>
-                                        <a:srgbClr val="000000"/>
-                                      </a:solidFill>
-                                      <a:latin typeface="Cambria Math"/>
-                                      <a:ea typeface="Cambria Math"/>
-                                      <a:cs typeface="Cambria Math"/>
-                                    </a:rPr>
-                                    <m:t>-</m:t>
-                                  </m:r>
-                                  <m:func>
-                                    <m:funcPr>
-                                      <m:ctrlPr>
-                                        <a:rPr lang="pt-BR" sz="1200" i="1" u="none" strike="noStrike" cap="none" spc="0">
-                                          <a:solidFill>
-                                            <a:srgbClr val="000000"/>
-                                          </a:solidFill>
-                                          <a:latin typeface="Cambria Math"/>
-                                          <a:ea typeface="Cambria Math"/>
-                                          <a:cs typeface="Cambria Math"/>
-                                        </a:rPr>
-                                      </m:ctrlPr>
-                                    </m:funcPr>
-                                    <m:fName>
-                                      <m:r>
-                                        <m:rPr>
-                                          <m:sty m:val="i"/>
-                                        </m:rPr>
-                                        <a:rPr lang="pt-BR" sz="1200" u="none" strike="noStrike" cap="none" spc="0">
-                                          <a:solidFill>
-                                            <a:srgbClr val="000000"/>
-                                          </a:solidFill>
-                                          <a:latin typeface="Cambria Math"/>
-                                          <a:ea typeface="Cambria Math"/>
-                                          <a:cs typeface="Cambria Math"/>
-                                        </a:rPr>
-                                        <m:t>ln</m:t>
-                                      </m:r>
-                                    </m:fName>
-                                    <m:e>
-                                      <m:r>
-                                        <m:rPr>
-                                          <m:sty m:val="i"/>
-                                        </m:rPr>
-                                        <a:rPr lang="pt-BR" sz="1200" u="none" strike="noStrike" cap="none" spc="0">
-                                          <a:solidFill>
-                                            <a:srgbClr val="000000"/>
-                                          </a:solidFill>
-                                          <a:latin typeface="Cambria Math"/>
-                                          <a:ea typeface="Cambria Math"/>
-                                          <a:cs typeface="Cambria Math"/>
-                                        </a:rPr>
-                                        <m:t>(p)</m:t>
-                                      </m:r>
-                                    </m:e>
-                                  </m:func>
-                                </m:e>
-                              </m:d>
-                            </m:e>
-                            <m:sup>
-                              <m:r>
-                                <m:rPr>
-                                  <m:sty m:val="i"/>
-                                </m:rPr>
-                                <a:rPr lang="pt-BR" sz="1200" u="none" strike="noStrike" cap="none" spc="0">
-                                  <a:solidFill>
-                                    <a:srgbClr val="000000"/>
-                                  </a:solidFill>
-                                  <a:latin typeface="Cambria Math"/>
-                                  <a:ea typeface="Cambria Math"/>
-                                  <a:cs typeface="Cambria Math"/>
-                                </a:rPr>
-                                <m:t>ξ</m:t>
-                              </m:r>
-                            </m:sup>
-                          </m:sSup>
-                        </m:e>
-                      </m:d>
-                    </m:oMath>
-                  </m:oMathPara>
-                </a14:m>
-              </mc:Choice>
-              <mc:Fallback/>
-            </mc:AlternateContent>
-            <a:endParaRPr lang="pt-BR" sz="1200" i="1"/>
-          </a:p>
-          <a:p>
-            <a:pPr>
-              <a:defRPr/>
-            </a:pPr>
-            <a:endParaRPr sz="1200" i="1"/>
-          </a:p>
-          <a:p>
-            <a:pPr>
-              <a:defRPr/>
-            </a:pPr>
-            <a:r>
-              <a:rPr lang="pt-BR" sz="1200" i="0"/>
-              <a:t>na d-GEV:</a:t>
-            </a:r>
-            <a:endParaRPr lang="pt-BR" sz="1200" i="0"/>
-          </a:p>
-          <a:p>
-            <a:pPr>
-              <a:defRPr/>
-            </a:pPr>
-            <a:endParaRPr sz="1200" i="0"/>
+              <a:rPr lang="pt-BR" sz="1200" b="0" i="0"/>
+              <a:t>Isso pode ser visto tanto com `message == 1` como `max` == -172 (indicando que o máximo utilizado foi -172 e que o parâmetro que causou o novo máximo foi kappa, pois é o único com `message` == 1).</a:t>
+            </a:r>
+            <a:endParaRPr lang="pt-BR" sz="1200" b="0" i="0"/>
+          </a:p>
+          <a:p>
+            <a:pPr algn="just">
+              <a:defRPr/>
+            </a:pPr>
+            <a:endParaRPr sz="1200" b="0" i="0"/>
+          </a:p>
+          <a:p>
+            <a:pPr algn="just">
+              <a:defRPr/>
+            </a:pPr>
+            <a:r>
+              <a:rPr lang="pt-BR" sz="1200" b="1" i="0"/>
+              <a:t>Possíveis aterações em fitprof.dgev()</a:t>
+            </a:r>
+            <a:endParaRPr lang="pt-BR" sz="1200" b="1" i="0"/>
+          </a:p>
+          <a:p>
+            <a:pPr marL="217793" indent="-217793" algn="just">
+              <a:buAutoNum type="arabicPeriod"/>
+              <a:defRPr/>
+            </a:pPr>
+            <a:r>
+              <a:rPr lang="pt-BR" sz="1200" b="0" i="0"/>
+              <a:t>Remover todas as observações associadas à `slopes` muito elevados dentro da função roots.proflik() após o `while` terminar de rodar;</a:t>
+            </a:r>
+            <a:endParaRPr lang="pt-BR" sz="1200" b="0" i="0"/>
+          </a:p>
+          <a:p>
+            <a:pPr marL="217793" indent="-217793" algn="just">
+              <a:buAutoNum type="arabicPeriod"/>
+              <a:defRPr/>
+            </a:pPr>
+            <a:r>
+              <a:rPr lang="pt-BR" sz="1200" b="0" i="0"/>
+              <a:t>Avaliar cada valor de `val.i`. Se `i == 3`, val.i &gt; step</a:t>
+            </a:r>
+            <a:endParaRPr lang="pt-BR" sz="1200" b="0" i="0"/>
+          </a:p>
+          <a:p>
+            <a:pPr marL="217793" indent="-217793" algn="just">
+              <a:buAutoNum type="arabicPeriod"/>
+              <a:defRPr/>
+            </a:pPr>
+            <a:endParaRPr sz="1200" b="0" i="0"/>
+          </a:p>
+          <a:p>
+            <a:pPr algn="just">
+              <a:defRPr/>
+            </a:pPr>
+            <a:r>
+              <a:rPr lang="pt-BR" sz="1200" b="1" i="0"/>
+              <a:t>Avaliar ainda se</a:t>
+            </a:r>
+            <a:endParaRPr lang="pt-BR" sz="1200" b="0" i="0"/>
+          </a:p>
+          <a:p>
+            <a:pPr marL="217793" indent="-217793" algn="just">
+              <a:buFont typeface="Arial"/>
+              <a:buChar char="•"/>
+              <a:defRPr/>
+            </a:pPr>
+            <a:r>
+              <a:rPr lang="pt-BR" sz="1200" b="0" i="0"/>
+              <a:t>Esse comportamento com o `message` se repete para todas as outras estações com este mesmo problema? </a:t>
+            </a:r>
+            <a:r>
+              <a:rPr lang="pt-BR" sz="1200" b="0" i="1"/>
+              <a:t>Algumas estações `message` em kappa é 0, mas found_max é diferente de max_ll, indicando que a avaliação de outro perfil que gerou o pico</a:t>
+            </a:r>
+            <a:r>
+              <a:rPr lang="pt-BR" sz="1200" b="0" i="0"/>
+              <a:t>.</a:t>
+            </a:r>
+            <a:endParaRPr sz="1200" b="0" i="0"/>
+          </a:p>
+          <a:p>
+            <a:pPr algn="just">
+              <a:defRPr/>
+            </a:pPr>
+            <a:endParaRPr lang="pt-BR" sz="1200" b="0" i="0"/>
+          </a:p>
+          <a:p>
+            <a:pPr algn="just">
+              <a:defRPr/>
+            </a:pPr>
+            <a:endParaRPr lang="pt-BR" sz="1200" b="0" i="0"/>
+          </a:p>
+          <a:p>
+            <a:pPr algn="just">
+              <a:defRPr/>
+            </a:pPr>
+            <a:endParaRPr lang="pt-BR" sz="1200" b="0" i="0"/>
+          </a:p>
+          <a:p>
+            <a:pPr marL="217792" indent="-217792" algn="just">
+              <a:buAutoNum type="arabicPeriod"/>
+              <a:defRPr/>
+            </a:pPr>
+            <a:endParaRPr lang="pt-BR" sz="1200" b="0" i="0"/>
+          </a:p>
+          <a:p>
+            <a:pPr marL="217793" indent="-217793" algn="just">
+              <a:buFont typeface="Arial"/>
+              <a:buChar char="•"/>
+              <a:defRPr/>
+            </a:pPr>
+            <a:r>
+              <a:rPr lang="pt-BR" sz="1200" b="0" i="0"/>
+              <a:t>Ao rodar a função fdgev() para a série, construir um vetor de `val.i` usando o step calculado na função roots.proflik(), o valor de val.i = 10^-17 aparece?</a:t>
+            </a:r>
+            <a:endParaRPr lang="pt-BR" sz="1200" b="0" i="0"/>
           </a:p>
         </p:txBody>
       </p:sp>
